--- a/Курс 3/УНС/ИД23-1_Маслов_АН_УНС.pptx
+++ b/Курс 3/УНС/ИД23-1_Маслов_АН_УНС.pptx
@@ -2,19 +2,25 @@
 <file path=ppt/presentation.xml><?xml version="1.0" encoding="utf-8"?>
 <p:presentation xmlns:a="http://schemas.openxmlformats.org/drawingml/2006/main" xmlns:r="http://schemas.openxmlformats.org/officeDocument/2006/relationships" xmlns:p="http://schemas.openxmlformats.org/presentationml/2006/main" saveSubsetFonts="1">
   <p:sldMasterIdLst>
-    <p:sldMasterId id="2147483648" r:id="rId1"/>
+    <p:sldMasterId id="2147483660" r:id="rId1"/>
   </p:sldMasterIdLst>
   <p:sldIdLst>
     <p:sldId id="257" r:id="rId2"/>
     <p:sldId id="256" r:id="rId3"/>
+    <p:sldId id="258" r:id="rId4"/>
+    <p:sldId id="259" r:id="rId5"/>
+    <p:sldId id="262" r:id="rId6"/>
+    <p:sldId id="263" r:id="rId7"/>
+    <p:sldId id="261" r:id="rId8"/>
+    <p:sldId id="260" r:id="rId9"/>
   </p:sldIdLst>
   <p:sldSz cx="12192000" cy="6858000"/>
   <p:notesSz cx="6858000" cy="9144000"/>
   <p:defaultTextStyle>
     <a:defPPr>
-      <a:defRPr lang="ru-RU"/>
+      <a:defRPr lang="en-US"/>
     </a:defPPr>
-    <a:lvl1pPr marL="0" algn="l" defTabSz="914400" rtl="0" eaLnBrk="1" latinLnBrk="0" hangingPunct="1">
+    <a:lvl1pPr marL="0" algn="l" defTabSz="457200" rtl="0" eaLnBrk="1" latinLnBrk="0" hangingPunct="1">
       <a:defRPr sz="1800" kern="1200">
         <a:solidFill>
           <a:schemeClr val="tx1"/>
@@ -24,7 +30,7 @@
         <a:cs typeface="+mn-cs"/>
       </a:defRPr>
     </a:lvl1pPr>
-    <a:lvl2pPr marL="457200" algn="l" defTabSz="914400" rtl="0" eaLnBrk="1" latinLnBrk="0" hangingPunct="1">
+    <a:lvl2pPr marL="457200" algn="l" defTabSz="457200" rtl="0" eaLnBrk="1" latinLnBrk="0" hangingPunct="1">
       <a:defRPr sz="1800" kern="1200">
         <a:solidFill>
           <a:schemeClr val="tx1"/>
@@ -34,7 +40,7 @@
         <a:cs typeface="+mn-cs"/>
       </a:defRPr>
     </a:lvl2pPr>
-    <a:lvl3pPr marL="914400" algn="l" defTabSz="914400" rtl="0" eaLnBrk="1" latinLnBrk="0" hangingPunct="1">
+    <a:lvl3pPr marL="914400" algn="l" defTabSz="457200" rtl="0" eaLnBrk="1" latinLnBrk="0" hangingPunct="1">
       <a:defRPr sz="1800" kern="1200">
         <a:solidFill>
           <a:schemeClr val="tx1"/>
@@ -44,7 +50,7 @@
         <a:cs typeface="+mn-cs"/>
       </a:defRPr>
     </a:lvl3pPr>
-    <a:lvl4pPr marL="1371600" algn="l" defTabSz="914400" rtl="0" eaLnBrk="1" latinLnBrk="0" hangingPunct="1">
+    <a:lvl4pPr marL="1371600" algn="l" defTabSz="457200" rtl="0" eaLnBrk="1" latinLnBrk="0" hangingPunct="1">
       <a:defRPr sz="1800" kern="1200">
         <a:solidFill>
           <a:schemeClr val="tx1"/>
@@ -54,7 +60,7 @@
         <a:cs typeface="+mn-cs"/>
       </a:defRPr>
     </a:lvl4pPr>
-    <a:lvl5pPr marL="1828800" algn="l" defTabSz="914400" rtl="0" eaLnBrk="1" latinLnBrk="0" hangingPunct="1">
+    <a:lvl5pPr marL="1828800" algn="l" defTabSz="457200" rtl="0" eaLnBrk="1" latinLnBrk="0" hangingPunct="1">
       <a:defRPr sz="1800" kern="1200">
         <a:solidFill>
           <a:schemeClr val="tx1"/>
@@ -64,7 +70,7 @@
         <a:cs typeface="+mn-cs"/>
       </a:defRPr>
     </a:lvl5pPr>
-    <a:lvl6pPr marL="2286000" algn="l" defTabSz="914400" rtl="0" eaLnBrk="1" latinLnBrk="0" hangingPunct="1">
+    <a:lvl6pPr marL="2286000" algn="l" defTabSz="457200" rtl="0" eaLnBrk="1" latinLnBrk="0" hangingPunct="1">
       <a:defRPr sz="1800" kern="1200">
         <a:solidFill>
           <a:schemeClr val="tx1"/>
@@ -74,7 +80,7 @@
         <a:cs typeface="+mn-cs"/>
       </a:defRPr>
     </a:lvl6pPr>
-    <a:lvl7pPr marL="2743200" algn="l" defTabSz="914400" rtl="0" eaLnBrk="1" latinLnBrk="0" hangingPunct="1">
+    <a:lvl7pPr marL="2743200" algn="l" defTabSz="457200" rtl="0" eaLnBrk="1" latinLnBrk="0" hangingPunct="1">
       <a:defRPr sz="1800" kern="1200">
         <a:solidFill>
           <a:schemeClr val="tx1"/>
@@ -84,7 +90,7 @@
         <a:cs typeface="+mn-cs"/>
       </a:defRPr>
     </a:lvl7pPr>
-    <a:lvl8pPr marL="3200400" algn="l" defTabSz="914400" rtl="0" eaLnBrk="1" latinLnBrk="0" hangingPunct="1">
+    <a:lvl8pPr marL="3200400" algn="l" defTabSz="457200" rtl="0" eaLnBrk="1" latinLnBrk="0" hangingPunct="1">
       <a:defRPr sz="1800" kern="1200">
         <a:solidFill>
           <a:schemeClr val="tx1"/>
@@ -94,7 +100,7 @@
         <a:cs typeface="+mn-cs"/>
       </a:defRPr>
     </a:lvl8pPr>
-    <a:lvl9pPr marL="3657600" algn="l" defTabSz="914400" rtl="0" eaLnBrk="1" latinLnBrk="0" hangingPunct="1">
+    <a:lvl9pPr marL="3657600" algn="l" defTabSz="457200" rtl="0" eaLnBrk="1" latinLnBrk="0" hangingPunct="1">
       <a:defRPr sz="1800" kern="1200">
         <a:solidFill>
           <a:schemeClr val="tx1"/>
@@ -114,8 +120,18 @@
 </file>
 
 <file path=ppt/slideLayouts/slideLayout1.xml><?xml version="1.0" encoding="utf-8"?>
-<p:sldLayout xmlns:a="http://schemas.openxmlformats.org/drawingml/2006/main" xmlns:r="http://schemas.openxmlformats.org/officeDocument/2006/relationships" xmlns:p="http://schemas.openxmlformats.org/presentationml/2006/main" type="title" preserve="1">
+<p:sldLayout xmlns:a="http://schemas.openxmlformats.org/drawingml/2006/main" xmlns:r="http://schemas.openxmlformats.org/officeDocument/2006/relationships" xmlns:p="http://schemas.openxmlformats.org/presentationml/2006/main" showMasterSp="0" type="title" preserve="1">
   <p:cSld name="Титульный слайд">
+    <p:bg>
+      <p:bgPr>
+        <a:solidFill>
+          <a:schemeClr val="bg2">
+            <a:lumMod val="75000"/>
+          </a:schemeClr>
+        </a:solidFill>
+        <a:effectLst/>
+      </p:bgPr>
+    </p:bg>
     <p:spTree>
       <p:nvGrpSpPr>
         <p:cNvPr id="1" name=""/>
@@ -132,13 +148,7 @@
       </p:grpSpPr>
       <p:sp>
         <p:nvSpPr>
-          <p:cNvPr id="2" name="Заголовок 1">
-            <a:extLst>
-              <a:ext uri="{FF2B5EF4-FFF2-40B4-BE49-F238E27FC236}">
-                <a16:creationId xmlns:a16="http://schemas.microsoft.com/office/drawing/2014/main" id="{926A9AFF-7674-5D1F-B824-E0298EC19E1D}"/>
-              </a:ext>
-            </a:extLst>
-          </p:cNvPr>
+          <p:cNvPr id="2" name="Title 1"/>
           <p:cNvSpPr>
             <a:spLocks noGrp="1"/>
           </p:cNvSpPr>
@@ -148,15 +158,24 @@
         </p:nvSpPr>
         <p:spPr>
           <a:xfrm>
-            <a:off x="1524000" y="1122363"/>
-            <a:ext cx="9144000" cy="2387600"/>
+            <a:off x="1261872" y="758952"/>
+            <a:ext cx="9418320" cy="4041648"/>
           </a:xfrm>
         </p:spPr>
         <p:txBody>
-          <a:bodyPr anchor="b"/>
+          <a:bodyPr anchor="b">
+            <a:normAutofit/>
+          </a:bodyPr>
           <a:lstStyle>
-            <a:lvl1pPr algn="ctr">
-              <a:defRPr sz="6000"/>
+            <a:lvl1pPr algn="l">
+              <a:lnSpc>
+                <a:spcPct val="85000"/>
+              </a:lnSpc>
+              <a:defRPr sz="7200" baseline="0">
+                <a:solidFill>
+                  <a:schemeClr val="tx1"/>
+                </a:solidFill>
+              </a:defRPr>
             </a:lvl1pPr>
           </a:lstStyle>
           <a:p>
@@ -164,18 +183,13 @@
               <a:rPr lang="ru-RU"/>
               <a:t>Образец заголовка</a:t>
             </a:r>
-          </a:p>
-        </p:txBody>
-      </p:sp>
-      <p:sp>
-        <p:nvSpPr>
-          <p:cNvPr id="3" name="Подзаголовок 2">
-            <a:extLst>
-              <a:ext uri="{FF2B5EF4-FFF2-40B4-BE49-F238E27FC236}">
-                <a16:creationId xmlns:a16="http://schemas.microsoft.com/office/drawing/2014/main" id="{2B63A996-9D51-6A0C-3634-C522B6FFB635}"/>
-              </a:ext>
-            </a:extLst>
-          </p:cNvPr>
+            <a:endParaRPr lang="en-US" dirty="0"/>
+          </a:p>
+        </p:txBody>
+      </p:sp>
+      <p:sp>
+        <p:nvSpPr>
+          <p:cNvPr id="3" name="Subtitle 2"/>
           <p:cNvSpPr>
             <a:spLocks noGrp="1"/>
           </p:cNvSpPr>
@@ -185,82 +199,95 @@
         </p:nvSpPr>
         <p:spPr>
           <a:xfrm>
-            <a:off x="1524000" y="3602038"/>
-            <a:ext cx="9144000" cy="1655762"/>
+            <a:off x="1261872" y="4800600"/>
+            <a:ext cx="9418320" cy="1691640"/>
           </a:xfrm>
         </p:spPr>
         <p:txBody>
+          <a:bodyPr>
+            <a:normAutofit/>
+          </a:bodyPr>
+          <a:lstStyle>
+            <a:lvl1pPr marL="0" indent="0" algn="l">
+              <a:buNone/>
+              <a:defRPr sz="2200" baseline="0">
+                <a:solidFill>
+                  <a:schemeClr val="tx1">
+                    <a:lumMod val="75000"/>
+                  </a:schemeClr>
+                </a:solidFill>
+              </a:defRPr>
+            </a:lvl1pPr>
+            <a:lvl2pPr marL="457200" indent="0" algn="ctr">
+              <a:buNone/>
+              <a:defRPr sz="2200"/>
+            </a:lvl2pPr>
+            <a:lvl3pPr marL="914400" indent="0" algn="ctr">
+              <a:buNone/>
+              <a:defRPr sz="2200"/>
+            </a:lvl3pPr>
+            <a:lvl4pPr marL="1371600" indent="0" algn="ctr">
+              <a:buNone/>
+              <a:defRPr sz="2000"/>
+            </a:lvl4pPr>
+            <a:lvl5pPr marL="1828800" indent="0" algn="ctr">
+              <a:buNone/>
+              <a:defRPr sz="2000"/>
+            </a:lvl5pPr>
+            <a:lvl6pPr marL="2286000" indent="0" algn="ctr">
+              <a:buNone/>
+              <a:defRPr sz="2000"/>
+            </a:lvl6pPr>
+            <a:lvl7pPr marL="2743200" indent="0" algn="ctr">
+              <a:buNone/>
+              <a:defRPr sz="2000"/>
+            </a:lvl7pPr>
+            <a:lvl8pPr marL="3200400" indent="0" algn="ctr">
+              <a:buNone/>
+              <a:defRPr sz="2000"/>
+            </a:lvl8pPr>
+            <a:lvl9pPr marL="3657600" indent="0" algn="ctr">
+              <a:buNone/>
+              <a:defRPr sz="2000"/>
+            </a:lvl9pPr>
+          </a:lstStyle>
+          <a:p>
+            <a:r>
+              <a:rPr lang="ru-RU"/>
+              <a:t>Образец подзаголовка</a:t>
+            </a:r>
+            <a:endParaRPr lang="en-US" dirty="0"/>
+          </a:p>
+        </p:txBody>
+      </p:sp>
+      <p:sp>
+        <p:nvSpPr>
+          <p:cNvPr id="4" name="Date Placeholder 3"/>
+          <p:cNvSpPr>
+            <a:spLocks noGrp="1"/>
+          </p:cNvSpPr>
+          <p:nvPr>
+            <p:ph type="dt" sz="half" idx="10"/>
+          </p:nvPr>
+        </p:nvSpPr>
+        <p:spPr/>
+        <p:txBody>
           <a:bodyPr/>
           <a:lstStyle>
-            <a:lvl1pPr marL="0" indent="0" algn="ctr">
-              <a:buNone/>
-              <a:defRPr sz="2400"/>
+            <a:lvl1pPr>
+              <a:defRPr>
+                <a:solidFill>
+                  <a:schemeClr val="tx1">
+                    <a:lumMod val="50000"/>
+                  </a:schemeClr>
+                </a:solidFill>
+              </a:defRPr>
             </a:lvl1pPr>
-            <a:lvl2pPr marL="457200" indent="0" algn="ctr">
-              <a:buNone/>
-              <a:defRPr sz="2000"/>
-            </a:lvl2pPr>
-            <a:lvl3pPr marL="914400" indent="0" algn="ctr">
-              <a:buNone/>
-              <a:defRPr sz="1800"/>
-            </a:lvl3pPr>
-            <a:lvl4pPr marL="1371600" indent="0" algn="ctr">
-              <a:buNone/>
-              <a:defRPr sz="1600"/>
-            </a:lvl4pPr>
-            <a:lvl5pPr marL="1828800" indent="0" algn="ctr">
-              <a:buNone/>
-              <a:defRPr sz="1600"/>
-            </a:lvl5pPr>
-            <a:lvl6pPr marL="2286000" indent="0" algn="ctr">
-              <a:buNone/>
-              <a:defRPr sz="1600"/>
-            </a:lvl6pPr>
-            <a:lvl7pPr marL="2743200" indent="0" algn="ctr">
-              <a:buNone/>
-              <a:defRPr sz="1600"/>
-            </a:lvl7pPr>
-            <a:lvl8pPr marL="3200400" indent="0" algn="ctr">
-              <a:buNone/>
-              <a:defRPr sz="1600"/>
-            </a:lvl8pPr>
-            <a:lvl9pPr marL="3657600" indent="0" algn="ctr">
-              <a:buNone/>
-              <a:defRPr sz="1600"/>
-            </a:lvl9pPr>
           </a:lstStyle>
-          <a:p>
-            <a:r>
-              <a:rPr lang="ru-RU"/>
-              <a:t>Образец подзаголовка</a:t>
-            </a:r>
-          </a:p>
-        </p:txBody>
-      </p:sp>
-      <p:sp>
-        <p:nvSpPr>
-          <p:cNvPr id="4" name="Дата 3">
-            <a:extLst>
-              <a:ext uri="{FF2B5EF4-FFF2-40B4-BE49-F238E27FC236}">
-                <a16:creationId xmlns:a16="http://schemas.microsoft.com/office/drawing/2014/main" id="{95BEE987-4C7D-8FB8-ABEB-DBD17A615D52}"/>
-              </a:ext>
-            </a:extLst>
-          </p:cNvPr>
-          <p:cNvSpPr>
-            <a:spLocks noGrp="1"/>
-          </p:cNvSpPr>
-          <p:nvPr>
-            <p:ph type="dt" sz="half" idx="10"/>
-          </p:nvPr>
-        </p:nvSpPr>
-        <p:spPr/>
-        <p:txBody>
-          <a:bodyPr/>
-          <a:lstStyle/>
           <a:p>
             <a:fld id="{6D5ECD92-1D4B-4C92-88C6-1BDE7FDE9838}" type="datetimeFigureOut">
               <a:rPr lang="ru-RU" smtClean="0"/>
-              <a:t>31.03.2026</a:t>
+              <a:t>01.04.2026</a:t>
             </a:fld>
             <a:endParaRPr lang="ru-RU"/>
           </a:p>
@@ -268,13 +295,7 @@
       </p:sp>
       <p:sp>
         <p:nvSpPr>
-          <p:cNvPr id="5" name="Нижний колонтитул 4">
-            <a:extLst>
-              <a:ext uri="{FF2B5EF4-FFF2-40B4-BE49-F238E27FC236}">
-                <a16:creationId xmlns:a16="http://schemas.microsoft.com/office/drawing/2014/main" id="{F2B69082-D9D5-F3D2-9578-B91007F34771}"/>
-              </a:ext>
-            </a:extLst>
-          </p:cNvPr>
+          <p:cNvPr id="5" name="Footer Placeholder 4"/>
           <p:cNvSpPr>
             <a:spLocks noGrp="1"/>
           </p:cNvSpPr>
@@ -285,7 +306,17 @@
         <p:spPr/>
         <p:txBody>
           <a:bodyPr/>
-          <a:lstStyle/>
+          <a:lstStyle>
+            <a:lvl1pPr>
+              <a:defRPr>
+                <a:solidFill>
+                  <a:schemeClr val="tx1">
+                    <a:lumMod val="65000"/>
+                  </a:schemeClr>
+                </a:solidFill>
+              </a:defRPr>
+            </a:lvl1pPr>
+          </a:lstStyle>
           <a:p>
             <a:endParaRPr lang="ru-RU"/>
           </a:p>
@@ -293,13 +324,7 @@
       </p:sp>
       <p:sp>
         <p:nvSpPr>
-          <p:cNvPr id="6" name="Номер слайда 5">
-            <a:extLst>
-              <a:ext uri="{FF2B5EF4-FFF2-40B4-BE49-F238E27FC236}">
-                <a16:creationId xmlns:a16="http://schemas.microsoft.com/office/drawing/2014/main" id="{D7DF08CB-5DBC-9925-2BB2-6A33F9EC2942}"/>
-              </a:ext>
-            </a:extLst>
-          </p:cNvPr>
+          <p:cNvPr id="6" name="Slide Number Placeholder 5"/>
           <p:cNvSpPr>
             <a:spLocks noGrp="1"/>
           </p:cNvSpPr>
@@ -310,7 +335,17 @@
         <p:spPr/>
         <p:txBody>
           <a:bodyPr/>
-          <a:lstStyle/>
+          <a:lstStyle>
+            <a:lvl1pPr>
+              <a:defRPr>
+                <a:solidFill>
+                  <a:schemeClr val="tx1">
+                    <a:lumMod val="65000"/>
+                  </a:schemeClr>
+                </a:solidFill>
+              </a:defRPr>
+            </a:lvl1pPr>
+          </a:lstStyle>
           <a:p>
             <a:fld id="{2A5CA61B-5FC0-4C33-84D1-56B4D7DA5AE9}" type="slidenum">
               <a:rPr lang="ru-RU" smtClean="0"/>
@@ -320,15 +355,60 @@
           </a:p>
         </p:txBody>
       </p:sp>
+      <p:sp>
+        <p:nvSpPr>
+          <p:cNvPr id="7" name="Rectangle 6"/>
+          <p:cNvSpPr/>
+          <p:nvPr/>
+        </p:nvSpPr>
+        <p:spPr>
+          <a:xfrm>
+            <a:off x="0" y="0"/>
+            <a:ext cx="457200" cy="6858000"/>
+          </a:xfrm>
+          <a:prstGeom prst="rect">
+            <a:avLst/>
+          </a:prstGeom>
+          <a:solidFill>
+            <a:schemeClr val="accent1"/>
+          </a:solidFill>
+          <a:ln>
+            <a:noFill/>
+          </a:ln>
+        </p:spPr>
+        <p:style>
+          <a:lnRef idx="2">
+            <a:schemeClr val="accent1">
+              <a:shade val="50000"/>
+            </a:schemeClr>
+          </a:lnRef>
+          <a:fillRef idx="1">
+            <a:schemeClr val="accent1"/>
+          </a:fillRef>
+          <a:effectRef idx="0">
+            <a:schemeClr val="accent1"/>
+          </a:effectRef>
+          <a:fontRef idx="minor">
+            <a:schemeClr val="lt1"/>
+          </a:fontRef>
+        </p:style>
+        <p:txBody>
+          <a:bodyPr/>
+          <a:lstStyle/>
+          <a:p>
+            <a:endParaRPr lang="ru-RU"/>
+          </a:p>
+        </p:txBody>
+      </p:sp>
     </p:spTree>
     <p:extLst>
       <p:ext uri="{BB962C8B-B14F-4D97-AF65-F5344CB8AC3E}">
-        <p14:creationId xmlns:p14="http://schemas.microsoft.com/office/powerpoint/2010/main" val="2180672832"/>
+        <p14:creationId xmlns:p14="http://schemas.microsoft.com/office/powerpoint/2010/main" val="3173577644"/>
       </p:ext>
     </p:extLst>
   </p:cSld>
   <p:clrMapOvr>
-    <a:masterClrMapping/>
+    <a:overrideClrMapping bg1="dk1" tx1="lt1" bg2="dk2" tx2="lt2" accent1="accent1" accent2="accent2" accent3="accent3" accent4="accent4" accent5="accent5" accent6="accent6" hlink="hlink" folHlink="folHlink"/>
   </p:clrMapOvr>
 </p:sldLayout>
 </file>
@@ -352,13 +432,7 @@
       </p:grpSpPr>
       <p:sp>
         <p:nvSpPr>
-          <p:cNvPr id="2" name="Заголовок 1">
-            <a:extLst>
-              <a:ext uri="{FF2B5EF4-FFF2-40B4-BE49-F238E27FC236}">
-                <a16:creationId xmlns:a16="http://schemas.microsoft.com/office/drawing/2014/main" id="{A371376C-18E5-7452-EA22-10A0385E2C42}"/>
-              </a:ext>
-            </a:extLst>
-          </p:cNvPr>
+          <p:cNvPr id="2" name="Title 1"/>
           <p:cNvSpPr>
             <a:spLocks noGrp="1"/>
           </p:cNvSpPr>
@@ -375,18 +449,13 @@
               <a:rPr lang="ru-RU"/>
               <a:t>Образец заголовка</a:t>
             </a:r>
-          </a:p>
-        </p:txBody>
-      </p:sp>
-      <p:sp>
-        <p:nvSpPr>
-          <p:cNvPr id="3" name="Вертикальный текст 2">
-            <a:extLst>
-              <a:ext uri="{FF2B5EF4-FFF2-40B4-BE49-F238E27FC236}">
-                <a16:creationId xmlns:a16="http://schemas.microsoft.com/office/drawing/2014/main" id="{E022D734-B63B-C917-5545-5FFA7311AB82}"/>
-              </a:ext>
-            </a:extLst>
-          </p:cNvPr>
+            <a:endParaRPr lang="en-US" dirty="0"/>
+          </a:p>
+        </p:txBody>
+      </p:sp>
+      <p:sp>
+        <p:nvSpPr>
+          <p:cNvPr id="3" name="Vertical Text Placeholder 2"/>
           <p:cNvSpPr>
             <a:spLocks noGrp="1"/>
           </p:cNvSpPr>
@@ -432,18 +501,13 @@
               <a:rPr lang="ru-RU"/>
               <a:t>Пятый уровень</a:t>
             </a:r>
-          </a:p>
-        </p:txBody>
-      </p:sp>
-      <p:sp>
-        <p:nvSpPr>
-          <p:cNvPr id="4" name="Дата 3">
-            <a:extLst>
-              <a:ext uri="{FF2B5EF4-FFF2-40B4-BE49-F238E27FC236}">
-                <a16:creationId xmlns:a16="http://schemas.microsoft.com/office/drawing/2014/main" id="{219C4892-A5FC-A183-62BE-5095EF2C1085}"/>
-              </a:ext>
-            </a:extLst>
-          </p:cNvPr>
+            <a:endParaRPr lang="en-US" dirty="0"/>
+          </a:p>
+        </p:txBody>
+      </p:sp>
+      <p:sp>
+        <p:nvSpPr>
+          <p:cNvPr id="4" name="Date Placeholder 3"/>
           <p:cNvSpPr>
             <a:spLocks noGrp="1"/>
           </p:cNvSpPr>
@@ -458,7 +522,7 @@
           <a:p>
             <a:fld id="{6D5ECD92-1D4B-4C92-88C6-1BDE7FDE9838}" type="datetimeFigureOut">
               <a:rPr lang="ru-RU" smtClean="0"/>
-              <a:t>31.03.2026</a:t>
+              <a:t>01.04.2026</a:t>
             </a:fld>
             <a:endParaRPr lang="ru-RU"/>
           </a:p>
@@ -466,13 +530,7 @@
       </p:sp>
       <p:sp>
         <p:nvSpPr>
-          <p:cNvPr id="5" name="Нижний колонтитул 4">
-            <a:extLst>
-              <a:ext uri="{FF2B5EF4-FFF2-40B4-BE49-F238E27FC236}">
-                <a16:creationId xmlns:a16="http://schemas.microsoft.com/office/drawing/2014/main" id="{C8570B88-68DC-06BC-63BE-80271E8530DA}"/>
-              </a:ext>
-            </a:extLst>
-          </p:cNvPr>
+          <p:cNvPr id="5" name="Footer Placeholder 4"/>
           <p:cNvSpPr>
             <a:spLocks noGrp="1"/>
           </p:cNvSpPr>
@@ -491,13 +549,7 @@
       </p:sp>
       <p:sp>
         <p:nvSpPr>
-          <p:cNvPr id="6" name="Номер слайда 5">
-            <a:extLst>
-              <a:ext uri="{FF2B5EF4-FFF2-40B4-BE49-F238E27FC236}">
-                <a16:creationId xmlns:a16="http://schemas.microsoft.com/office/drawing/2014/main" id="{3A1B18A4-5252-22E9-30D6-871488BE9F9F}"/>
-              </a:ext>
-            </a:extLst>
-          </p:cNvPr>
+          <p:cNvPr id="6" name="Slide Number Placeholder 5"/>
           <p:cNvSpPr>
             <a:spLocks noGrp="1"/>
           </p:cNvSpPr>
@@ -521,7 +573,7 @@
     </p:spTree>
     <p:extLst>
       <p:ext uri="{BB962C8B-B14F-4D97-AF65-F5344CB8AC3E}">
-        <p14:creationId xmlns:p14="http://schemas.microsoft.com/office/powerpoint/2010/main" val="2073670130"/>
+        <p14:creationId xmlns:p14="http://schemas.microsoft.com/office/powerpoint/2010/main" val="2878717505"/>
       </p:ext>
     </p:extLst>
   </p:cSld>
@@ -550,13 +602,7 @@
       </p:grpSpPr>
       <p:sp>
         <p:nvSpPr>
-          <p:cNvPr id="2" name="Вертикальный заголовок 1">
-            <a:extLst>
-              <a:ext uri="{FF2B5EF4-FFF2-40B4-BE49-F238E27FC236}">
-                <a16:creationId xmlns:a16="http://schemas.microsoft.com/office/drawing/2014/main" id="{149DC8D7-F9C0-3223-3E1F-BA123221EE23}"/>
-              </a:ext>
-            </a:extLst>
-          </p:cNvPr>
+          <p:cNvPr id="2" name="Vertical Title 1"/>
           <p:cNvSpPr>
             <a:spLocks noGrp="1"/>
           </p:cNvSpPr>
@@ -566,8 +612,8 @@
         </p:nvSpPr>
         <p:spPr>
           <a:xfrm>
-            <a:off x="8724900" y="365125"/>
-            <a:ext cx="2628900" cy="5811838"/>
+            <a:off x="8648700" y="381000"/>
+            <a:ext cx="2476500" cy="5897562"/>
           </a:xfrm>
         </p:spPr>
         <p:txBody>
@@ -578,18 +624,13 @@
               <a:rPr lang="ru-RU"/>
               <a:t>Образец заголовка</a:t>
             </a:r>
-          </a:p>
-        </p:txBody>
-      </p:sp>
-      <p:sp>
-        <p:nvSpPr>
-          <p:cNvPr id="3" name="Вертикальный текст 2">
-            <a:extLst>
-              <a:ext uri="{FF2B5EF4-FFF2-40B4-BE49-F238E27FC236}">
-                <a16:creationId xmlns:a16="http://schemas.microsoft.com/office/drawing/2014/main" id="{1EF6645A-E8C6-AA47-A633-2D91963D6F83}"/>
-              </a:ext>
-            </a:extLst>
-          </p:cNvPr>
+            <a:endParaRPr lang="en-US" dirty="0"/>
+          </a:p>
+        </p:txBody>
+      </p:sp>
+      <p:sp>
+        <p:nvSpPr>
+          <p:cNvPr id="3" name="Vertical Text Placeholder 2"/>
           <p:cNvSpPr>
             <a:spLocks noGrp="1"/>
           </p:cNvSpPr>
@@ -599,8 +640,8 @@
         </p:nvSpPr>
         <p:spPr>
           <a:xfrm>
-            <a:off x="838200" y="365125"/>
-            <a:ext cx="7734300" cy="5811838"/>
+            <a:off x="762000" y="381000"/>
+            <a:ext cx="7734300" cy="5897562"/>
           </a:xfrm>
         </p:spPr>
         <p:txBody>
@@ -640,18 +681,13 @@
               <a:rPr lang="ru-RU"/>
               <a:t>Пятый уровень</a:t>
             </a:r>
-          </a:p>
-        </p:txBody>
-      </p:sp>
-      <p:sp>
-        <p:nvSpPr>
-          <p:cNvPr id="4" name="Дата 3">
-            <a:extLst>
-              <a:ext uri="{FF2B5EF4-FFF2-40B4-BE49-F238E27FC236}">
-                <a16:creationId xmlns:a16="http://schemas.microsoft.com/office/drawing/2014/main" id="{1264C90C-5290-BCD4-62EB-9A1CD3FA0AA5}"/>
-              </a:ext>
-            </a:extLst>
-          </p:cNvPr>
+            <a:endParaRPr lang="en-US" dirty="0"/>
+          </a:p>
+        </p:txBody>
+      </p:sp>
+      <p:sp>
+        <p:nvSpPr>
+          <p:cNvPr id="4" name="Date Placeholder 3"/>
           <p:cNvSpPr>
             <a:spLocks noGrp="1"/>
           </p:cNvSpPr>
@@ -666,7 +702,7 @@
           <a:p>
             <a:fld id="{6D5ECD92-1D4B-4C92-88C6-1BDE7FDE9838}" type="datetimeFigureOut">
               <a:rPr lang="ru-RU" smtClean="0"/>
-              <a:t>31.03.2026</a:t>
+              <a:t>01.04.2026</a:t>
             </a:fld>
             <a:endParaRPr lang="ru-RU"/>
           </a:p>
@@ -674,13 +710,7 @@
       </p:sp>
       <p:sp>
         <p:nvSpPr>
-          <p:cNvPr id="5" name="Нижний колонтитул 4">
-            <a:extLst>
-              <a:ext uri="{FF2B5EF4-FFF2-40B4-BE49-F238E27FC236}">
-                <a16:creationId xmlns:a16="http://schemas.microsoft.com/office/drawing/2014/main" id="{8D4238E9-D8FC-421C-F230-3DA3903FB1A9}"/>
-              </a:ext>
-            </a:extLst>
-          </p:cNvPr>
+          <p:cNvPr id="5" name="Footer Placeholder 4"/>
           <p:cNvSpPr>
             <a:spLocks noGrp="1"/>
           </p:cNvSpPr>
@@ -699,13 +729,7 @@
       </p:sp>
       <p:sp>
         <p:nvSpPr>
-          <p:cNvPr id="6" name="Номер слайда 5">
-            <a:extLst>
-              <a:ext uri="{FF2B5EF4-FFF2-40B4-BE49-F238E27FC236}">
-                <a16:creationId xmlns:a16="http://schemas.microsoft.com/office/drawing/2014/main" id="{4110F6DC-7077-9F44-BD8C-25AF8D315E89}"/>
-              </a:ext>
-            </a:extLst>
-          </p:cNvPr>
+          <p:cNvPr id="6" name="Slide Number Placeholder 5"/>
           <p:cNvSpPr>
             <a:spLocks noGrp="1"/>
           </p:cNvSpPr>
@@ -729,7 +753,7 @@
     </p:spTree>
     <p:extLst>
       <p:ext uri="{BB962C8B-B14F-4D97-AF65-F5344CB8AC3E}">
-        <p14:creationId xmlns:p14="http://schemas.microsoft.com/office/powerpoint/2010/main" val="479314062"/>
+        <p14:creationId xmlns:p14="http://schemas.microsoft.com/office/powerpoint/2010/main" val="2899697283"/>
       </p:ext>
     </p:extLst>
   </p:cSld>
@@ -758,13 +782,7 @@
       </p:grpSpPr>
       <p:sp>
         <p:nvSpPr>
-          <p:cNvPr id="2" name="Заголовок 1">
-            <a:extLst>
-              <a:ext uri="{FF2B5EF4-FFF2-40B4-BE49-F238E27FC236}">
-                <a16:creationId xmlns:a16="http://schemas.microsoft.com/office/drawing/2014/main" id="{5830AD0F-EB12-FF6A-61EF-C88B87369C2B}"/>
-              </a:ext>
-            </a:extLst>
-          </p:cNvPr>
+          <p:cNvPr id="2" name="Title 1"/>
           <p:cNvSpPr>
             <a:spLocks noGrp="1"/>
           </p:cNvSpPr>
@@ -781,18 +799,13 @@
               <a:rPr lang="ru-RU"/>
               <a:t>Образец заголовка</a:t>
             </a:r>
-          </a:p>
-        </p:txBody>
-      </p:sp>
-      <p:sp>
-        <p:nvSpPr>
-          <p:cNvPr id="3" name="Объект 2">
-            <a:extLst>
-              <a:ext uri="{FF2B5EF4-FFF2-40B4-BE49-F238E27FC236}">
-                <a16:creationId xmlns:a16="http://schemas.microsoft.com/office/drawing/2014/main" id="{825D307F-8F40-FB6F-EE8E-2A5AF20890E6}"/>
-              </a:ext>
-            </a:extLst>
-          </p:cNvPr>
+            <a:endParaRPr lang="en-US" dirty="0"/>
+          </a:p>
+        </p:txBody>
+      </p:sp>
+      <p:sp>
+        <p:nvSpPr>
+          <p:cNvPr id="3" name="Content Placeholder 2"/>
           <p:cNvSpPr>
             <a:spLocks noGrp="1"/>
           </p:cNvSpPr>
@@ -838,18 +851,13 @@
               <a:rPr lang="ru-RU"/>
               <a:t>Пятый уровень</a:t>
             </a:r>
-          </a:p>
-        </p:txBody>
-      </p:sp>
-      <p:sp>
-        <p:nvSpPr>
-          <p:cNvPr id="4" name="Дата 3">
-            <a:extLst>
-              <a:ext uri="{FF2B5EF4-FFF2-40B4-BE49-F238E27FC236}">
-                <a16:creationId xmlns:a16="http://schemas.microsoft.com/office/drawing/2014/main" id="{B41C4DFA-2C43-052B-8CFC-3A477FB7A1FC}"/>
-              </a:ext>
-            </a:extLst>
-          </p:cNvPr>
+            <a:endParaRPr lang="en-US" dirty="0"/>
+          </a:p>
+        </p:txBody>
+      </p:sp>
+      <p:sp>
+        <p:nvSpPr>
+          <p:cNvPr id="4" name="Date Placeholder 3"/>
           <p:cNvSpPr>
             <a:spLocks noGrp="1"/>
           </p:cNvSpPr>
@@ -864,7 +872,7 @@
           <a:p>
             <a:fld id="{6D5ECD92-1D4B-4C92-88C6-1BDE7FDE9838}" type="datetimeFigureOut">
               <a:rPr lang="ru-RU" smtClean="0"/>
-              <a:t>31.03.2026</a:t>
+              <a:t>01.04.2026</a:t>
             </a:fld>
             <a:endParaRPr lang="ru-RU"/>
           </a:p>
@@ -872,13 +880,7 @@
       </p:sp>
       <p:sp>
         <p:nvSpPr>
-          <p:cNvPr id="5" name="Нижний колонтитул 4">
-            <a:extLst>
-              <a:ext uri="{FF2B5EF4-FFF2-40B4-BE49-F238E27FC236}">
-                <a16:creationId xmlns:a16="http://schemas.microsoft.com/office/drawing/2014/main" id="{512F9B68-A376-FBE0-5364-1AA98A0C0FBF}"/>
-              </a:ext>
-            </a:extLst>
-          </p:cNvPr>
+          <p:cNvPr id="5" name="Footer Placeholder 4"/>
           <p:cNvSpPr>
             <a:spLocks noGrp="1"/>
           </p:cNvSpPr>
@@ -897,13 +899,7 @@
       </p:sp>
       <p:sp>
         <p:nvSpPr>
-          <p:cNvPr id="6" name="Номер слайда 5">
-            <a:extLst>
-              <a:ext uri="{FF2B5EF4-FFF2-40B4-BE49-F238E27FC236}">
-                <a16:creationId xmlns:a16="http://schemas.microsoft.com/office/drawing/2014/main" id="{3B658300-7D2F-12D8-259D-4817CD5391EC}"/>
-              </a:ext>
-            </a:extLst>
-          </p:cNvPr>
+          <p:cNvPr id="6" name="Slide Number Placeholder 5"/>
           <p:cNvSpPr>
             <a:spLocks noGrp="1"/>
           </p:cNvSpPr>
@@ -927,7 +923,7 @@
     </p:spTree>
     <p:extLst>
       <p:ext uri="{BB962C8B-B14F-4D97-AF65-F5344CB8AC3E}">
-        <p14:creationId xmlns:p14="http://schemas.microsoft.com/office/powerpoint/2010/main" val="366378046"/>
+        <p14:creationId xmlns:p14="http://schemas.microsoft.com/office/powerpoint/2010/main" val="4100713439"/>
       </p:ext>
     </p:extLst>
   </p:cSld>
@@ -956,13 +952,7 @@
       </p:grpSpPr>
       <p:sp>
         <p:nvSpPr>
-          <p:cNvPr id="2" name="Заголовок 1">
-            <a:extLst>
-              <a:ext uri="{FF2B5EF4-FFF2-40B4-BE49-F238E27FC236}">
-                <a16:creationId xmlns:a16="http://schemas.microsoft.com/office/drawing/2014/main" id="{7558FB17-4572-5442-E1A3-EDC9EDD59BD5}"/>
-              </a:ext>
-            </a:extLst>
-          </p:cNvPr>
+          <p:cNvPr id="2" name="Title 1"/>
           <p:cNvSpPr>
             <a:spLocks noGrp="1"/>
           </p:cNvSpPr>
@@ -972,15 +962,20 @@
         </p:nvSpPr>
         <p:spPr>
           <a:xfrm>
-            <a:off x="831850" y="1709738"/>
-            <a:ext cx="10515600" cy="2852737"/>
+            <a:off x="1261872" y="758952"/>
+            <a:ext cx="9418320" cy="4041648"/>
           </a:xfrm>
         </p:spPr>
         <p:txBody>
-          <a:bodyPr anchor="b"/>
+          <a:bodyPr anchor="b">
+            <a:normAutofit/>
+          </a:bodyPr>
           <a:lstStyle>
             <a:lvl1pPr>
-              <a:defRPr sz="6000"/>
+              <a:lnSpc>
+                <a:spcPct val="85000"/>
+              </a:lnSpc>
+              <a:defRPr sz="7200" b="0"/>
             </a:lvl1pPr>
           </a:lstStyle>
           <a:p>
@@ -988,18 +983,13 @@
               <a:rPr lang="ru-RU"/>
               <a:t>Образец заголовка</a:t>
             </a:r>
-          </a:p>
-        </p:txBody>
-      </p:sp>
-      <p:sp>
-        <p:nvSpPr>
-          <p:cNvPr id="3" name="Текст 2">
-            <a:extLst>
-              <a:ext uri="{FF2B5EF4-FFF2-40B4-BE49-F238E27FC236}">
-                <a16:creationId xmlns:a16="http://schemas.microsoft.com/office/drawing/2014/main" id="{4B2337B6-D078-99CF-C9F0-DC59FBB4E408}"/>
-              </a:ext>
-            </a:extLst>
-          </p:cNvPr>
+            <a:endParaRPr lang="en-US" dirty="0"/>
+          </a:p>
+        </p:txBody>
+      </p:sp>
+      <p:sp>
+        <p:nvSpPr>
+          <p:cNvPr id="3" name="Text Placeholder 2"/>
           <p:cNvSpPr>
             <a:spLocks noGrp="1"/>
           </p:cNvSpPr>
@@ -1009,99 +999,102 @@
         </p:nvSpPr>
         <p:spPr>
           <a:xfrm>
-            <a:off x="831850" y="4589463"/>
-            <a:ext cx="10515600" cy="1500187"/>
+            <a:off x="1261872" y="4800600"/>
+            <a:ext cx="9418320" cy="1691640"/>
           </a:xfrm>
         </p:spPr>
         <p:txBody>
-          <a:bodyPr/>
+          <a:bodyPr anchor="t">
+            <a:normAutofit/>
+          </a:bodyPr>
           <a:lstStyle>
             <a:lvl1pPr marL="0" indent="0">
               <a:buNone/>
-              <a:defRPr sz="2400">
+              <a:defRPr sz="2200">
                 <a:solidFill>
                   <a:schemeClr val="tx1">
-                    <a:tint val="82000"/>
+                    <a:lumMod val="65000"/>
+                    <a:lumOff val="35000"/>
                   </a:schemeClr>
                 </a:solidFill>
               </a:defRPr>
             </a:lvl1pPr>
             <a:lvl2pPr marL="457200" indent="0">
               <a:buNone/>
-              <a:defRPr sz="2000">
+              <a:defRPr sz="1800">
                 <a:solidFill>
                   <a:schemeClr val="tx1">
-                    <a:tint val="82000"/>
+                    <a:tint val="75000"/>
                   </a:schemeClr>
                 </a:solidFill>
               </a:defRPr>
             </a:lvl2pPr>
             <a:lvl3pPr marL="914400" indent="0">
               <a:buNone/>
-              <a:defRPr sz="1800">
+              <a:defRPr sz="1600">
                 <a:solidFill>
                   <a:schemeClr val="tx1">
-                    <a:tint val="82000"/>
+                    <a:tint val="75000"/>
                   </a:schemeClr>
                 </a:solidFill>
               </a:defRPr>
             </a:lvl3pPr>
             <a:lvl4pPr marL="1371600" indent="0">
               <a:buNone/>
-              <a:defRPr sz="1600">
+              <a:defRPr sz="1400">
                 <a:solidFill>
                   <a:schemeClr val="tx1">
-                    <a:tint val="82000"/>
+                    <a:tint val="75000"/>
                   </a:schemeClr>
                 </a:solidFill>
               </a:defRPr>
             </a:lvl4pPr>
             <a:lvl5pPr marL="1828800" indent="0">
               <a:buNone/>
-              <a:defRPr sz="1600">
+              <a:defRPr sz="1400">
                 <a:solidFill>
                   <a:schemeClr val="tx1">
-                    <a:tint val="82000"/>
+                    <a:tint val="75000"/>
                   </a:schemeClr>
                 </a:solidFill>
               </a:defRPr>
             </a:lvl5pPr>
             <a:lvl6pPr marL="2286000" indent="0">
               <a:buNone/>
-              <a:defRPr sz="1600">
+              <a:defRPr sz="1400">
                 <a:solidFill>
                   <a:schemeClr val="tx1">
-                    <a:tint val="82000"/>
+                    <a:tint val="75000"/>
                   </a:schemeClr>
                 </a:solidFill>
               </a:defRPr>
             </a:lvl6pPr>
             <a:lvl7pPr marL="2743200" indent="0">
               <a:buNone/>
-              <a:defRPr sz="1600">
+              <a:defRPr sz="1400">
                 <a:solidFill>
                   <a:schemeClr val="tx1">
-                    <a:tint val="82000"/>
+                    <a:tint val="75000"/>
                   </a:schemeClr>
                 </a:solidFill>
               </a:defRPr>
             </a:lvl7pPr>
             <a:lvl8pPr marL="3200400" indent="0">
               <a:buNone/>
-              <a:defRPr sz="1600">
+              <a:defRPr sz="1400">
                 <a:solidFill>
                   <a:schemeClr val="tx1">
-                    <a:tint val="82000"/>
+                    <a:tint val="75000"/>
                   </a:schemeClr>
                 </a:solidFill>
               </a:defRPr>
             </a:lvl8pPr>
             <a:lvl9pPr marL="3657600" indent="0">
               <a:buNone/>
-              <a:defRPr sz="1600">
+              <a:defRPr sz="1400">
                 <a:solidFill>
                   <a:schemeClr val="tx1">
-                    <a:tint val="82000"/>
+                    <a:tint val="75000"/>
                   </a:schemeClr>
                 </a:solidFill>
               </a:defRPr>
@@ -1118,13 +1111,7 @@
       </p:sp>
       <p:sp>
         <p:nvSpPr>
-          <p:cNvPr id="4" name="Дата 3">
-            <a:extLst>
-              <a:ext uri="{FF2B5EF4-FFF2-40B4-BE49-F238E27FC236}">
-                <a16:creationId xmlns:a16="http://schemas.microsoft.com/office/drawing/2014/main" id="{5DE09751-105A-BE37-ACCD-2B6FB66A49AF}"/>
-              </a:ext>
-            </a:extLst>
-          </p:cNvPr>
+          <p:cNvPr id="4" name="Date Placeholder 3"/>
           <p:cNvSpPr>
             <a:spLocks noGrp="1"/>
           </p:cNvSpPr>
@@ -1139,7 +1126,7 @@
           <a:p>
             <a:fld id="{6D5ECD92-1D4B-4C92-88C6-1BDE7FDE9838}" type="datetimeFigureOut">
               <a:rPr lang="ru-RU" smtClean="0"/>
-              <a:t>31.03.2026</a:t>
+              <a:t>01.04.2026</a:t>
             </a:fld>
             <a:endParaRPr lang="ru-RU"/>
           </a:p>
@@ -1147,13 +1134,7 @@
       </p:sp>
       <p:sp>
         <p:nvSpPr>
-          <p:cNvPr id="5" name="Нижний колонтитул 4">
-            <a:extLst>
-              <a:ext uri="{FF2B5EF4-FFF2-40B4-BE49-F238E27FC236}">
-                <a16:creationId xmlns:a16="http://schemas.microsoft.com/office/drawing/2014/main" id="{CFB1DDF1-5711-73CE-04C7-335DB8153936}"/>
-              </a:ext>
-            </a:extLst>
-          </p:cNvPr>
+          <p:cNvPr id="5" name="Footer Placeholder 4"/>
           <p:cNvSpPr>
             <a:spLocks noGrp="1"/>
           </p:cNvSpPr>
@@ -1172,13 +1153,7 @@
       </p:sp>
       <p:sp>
         <p:nvSpPr>
-          <p:cNvPr id="6" name="Номер слайда 5">
-            <a:extLst>
-              <a:ext uri="{FF2B5EF4-FFF2-40B4-BE49-F238E27FC236}">
-                <a16:creationId xmlns:a16="http://schemas.microsoft.com/office/drawing/2014/main" id="{946FDA48-7847-E2E3-0184-23B7524BDD63}"/>
-              </a:ext>
-            </a:extLst>
-          </p:cNvPr>
+          <p:cNvPr id="6" name="Slide Number Placeholder 5"/>
           <p:cNvSpPr>
             <a:spLocks noGrp="1"/>
           </p:cNvSpPr>
@@ -1199,10 +1174,48 @@
           </a:p>
         </p:txBody>
       </p:sp>
+      <p:sp>
+        <p:nvSpPr>
+          <p:cNvPr id="7" name="Rectangle 6"/>
+          <p:cNvSpPr/>
+          <p:nvPr/>
+        </p:nvSpPr>
+        <p:spPr>
+          <a:xfrm>
+            <a:off x="0" y="0"/>
+            <a:ext cx="457200" cy="6858000"/>
+          </a:xfrm>
+          <a:prstGeom prst="rect">
+            <a:avLst/>
+          </a:prstGeom>
+          <a:solidFill>
+            <a:schemeClr val="accent1"/>
+          </a:solidFill>
+          <a:ln>
+            <a:noFill/>
+          </a:ln>
+        </p:spPr>
+        <p:style>
+          <a:lnRef idx="2">
+            <a:schemeClr val="accent1">
+              <a:shade val="50000"/>
+            </a:schemeClr>
+          </a:lnRef>
+          <a:fillRef idx="1">
+            <a:schemeClr val="accent1"/>
+          </a:fillRef>
+          <a:effectRef idx="0">
+            <a:schemeClr val="accent1"/>
+          </a:effectRef>
+          <a:fontRef idx="minor">
+            <a:schemeClr val="lt1"/>
+          </a:fontRef>
+        </p:style>
+      </p:sp>
     </p:spTree>
     <p:extLst>
       <p:ext uri="{BB962C8B-B14F-4D97-AF65-F5344CB8AC3E}">
-        <p14:creationId xmlns:p14="http://schemas.microsoft.com/office/powerpoint/2010/main" val="1272641392"/>
+        <p14:creationId xmlns:p14="http://schemas.microsoft.com/office/powerpoint/2010/main" val="2109074641"/>
       </p:ext>
     </p:extLst>
   </p:cSld>
@@ -1231,13 +1244,7 @@
       </p:grpSpPr>
       <p:sp>
         <p:nvSpPr>
-          <p:cNvPr id="2" name="Заголовок 1">
-            <a:extLst>
-              <a:ext uri="{FF2B5EF4-FFF2-40B4-BE49-F238E27FC236}">
-                <a16:creationId xmlns:a16="http://schemas.microsoft.com/office/drawing/2014/main" id="{D0E3D7CB-4F1F-7921-BBFE-E9353C483A0A}"/>
-              </a:ext>
-            </a:extLst>
-          </p:cNvPr>
+          <p:cNvPr id="2" name="Title 1"/>
           <p:cNvSpPr>
             <a:spLocks noGrp="1"/>
           </p:cNvSpPr>
@@ -1254,18 +1261,13 @@
               <a:rPr lang="ru-RU"/>
               <a:t>Образец заголовка</a:t>
             </a:r>
-          </a:p>
-        </p:txBody>
-      </p:sp>
-      <p:sp>
-        <p:nvSpPr>
-          <p:cNvPr id="3" name="Объект 2">
-            <a:extLst>
-              <a:ext uri="{FF2B5EF4-FFF2-40B4-BE49-F238E27FC236}">
-                <a16:creationId xmlns:a16="http://schemas.microsoft.com/office/drawing/2014/main" id="{89C58620-15F4-4D60-F708-4B7C71C3E772}"/>
-              </a:ext>
-            </a:extLst>
-          </p:cNvPr>
+            <a:endParaRPr lang="en-US" dirty="0"/>
+          </a:p>
+        </p:txBody>
+      </p:sp>
+      <p:sp>
+        <p:nvSpPr>
+          <p:cNvPr id="3" name="Content Placeholder 2"/>
           <p:cNvSpPr>
             <a:spLocks noGrp="1"/>
           </p:cNvSpPr>
@@ -1275,13 +1277,41 @@
         </p:nvSpPr>
         <p:spPr>
           <a:xfrm>
-            <a:off x="838200" y="1825625"/>
-            <a:ext cx="5181600" cy="4351338"/>
+            <a:off x="1261872" y="1828800"/>
+            <a:ext cx="4480560" cy="4351337"/>
           </a:xfrm>
         </p:spPr>
         <p:txBody>
           <a:bodyPr/>
-          <a:lstStyle/>
+          <a:lstStyle>
+            <a:lvl1pPr>
+              <a:defRPr sz="1800"/>
+            </a:lvl1pPr>
+            <a:lvl2pPr>
+              <a:defRPr sz="1600"/>
+            </a:lvl2pPr>
+            <a:lvl3pPr>
+              <a:defRPr sz="1400"/>
+            </a:lvl3pPr>
+            <a:lvl4pPr>
+              <a:defRPr sz="1400"/>
+            </a:lvl4pPr>
+            <a:lvl5pPr>
+              <a:defRPr sz="1400"/>
+            </a:lvl5pPr>
+            <a:lvl6pPr>
+              <a:defRPr sz="1400"/>
+            </a:lvl6pPr>
+            <a:lvl7pPr>
+              <a:defRPr sz="1400"/>
+            </a:lvl7pPr>
+            <a:lvl8pPr>
+              <a:defRPr sz="1400"/>
+            </a:lvl8pPr>
+            <a:lvl9pPr>
+              <a:defRPr sz="1400"/>
+            </a:lvl9pPr>
+          </a:lstStyle>
           <a:p>
             <a:pPr lvl="0"/>
             <a:r>
@@ -1316,18 +1346,13 @@
               <a:rPr lang="ru-RU"/>
               <a:t>Пятый уровень</a:t>
             </a:r>
-          </a:p>
-        </p:txBody>
-      </p:sp>
-      <p:sp>
-        <p:nvSpPr>
-          <p:cNvPr id="4" name="Объект 3">
-            <a:extLst>
-              <a:ext uri="{FF2B5EF4-FFF2-40B4-BE49-F238E27FC236}">
-                <a16:creationId xmlns:a16="http://schemas.microsoft.com/office/drawing/2014/main" id="{161DD8E9-E29C-79C1-890D-CF2259E58BAB}"/>
-              </a:ext>
-            </a:extLst>
-          </p:cNvPr>
+            <a:endParaRPr lang="en-US" dirty="0"/>
+          </a:p>
+        </p:txBody>
+      </p:sp>
+      <p:sp>
+        <p:nvSpPr>
+          <p:cNvPr id="4" name="Content Placeholder 3"/>
           <p:cNvSpPr>
             <a:spLocks noGrp="1"/>
           </p:cNvSpPr>
@@ -1337,13 +1362,41 @@
         </p:nvSpPr>
         <p:spPr>
           <a:xfrm>
-            <a:off x="6172200" y="1825625"/>
-            <a:ext cx="5181600" cy="4351338"/>
+            <a:off x="6126480" y="1828800"/>
+            <a:ext cx="4480560" cy="4351337"/>
           </a:xfrm>
         </p:spPr>
         <p:txBody>
           <a:bodyPr/>
-          <a:lstStyle/>
+          <a:lstStyle>
+            <a:lvl1pPr>
+              <a:defRPr sz="1800"/>
+            </a:lvl1pPr>
+            <a:lvl2pPr>
+              <a:defRPr sz="1600"/>
+            </a:lvl2pPr>
+            <a:lvl3pPr>
+              <a:defRPr sz="1400"/>
+            </a:lvl3pPr>
+            <a:lvl4pPr>
+              <a:defRPr sz="1400"/>
+            </a:lvl4pPr>
+            <a:lvl5pPr>
+              <a:defRPr sz="1400"/>
+            </a:lvl5pPr>
+            <a:lvl6pPr>
+              <a:defRPr sz="1400"/>
+            </a:lvl6pPr>
+            <a:lvl7pPr>
+              <a:defRPr sz="1400"/>
+            </a:lvl7pPr>
+            <a:lvl8pPr>
+              <a:defRPr sz="1400"/>
+            </a:lvl8pPr>
+            <a:lvl9pPr>
+              <a:defRPr sz="1400"/>
+            </a:lvl9pPr>
+          </a:lstStyle>
           <a:p>
             <a:pPr lvl="0"/>
             <a:r>
@@ -1378,18 +1431,13 @@
               <a:rPr lang="ru-RU"/>
               <a:t>Пятый уровень</a:t>
             </a:r>
-          </a:p>
-        </p:txBody>
-      </p:sp>
-      <p:sp>
-        <p:nvSpPr>
-          <p:cNvPr id="5" name="Дата 4">
-            <a:extLst>
-              <a:ext uri="{FF2B5EF4-FFF2-40B4-BE49-F238E27FC236}">
-                <a16:creationId xmlns:a16="http://schemas.microsoft.com/office/drawing/2014/main" id="{A3971BC9-91B6-95C6-F694-7746BE6A4A81}"/>
-              </a:ext>
-            </a:extLst>
-          </p:cNvPr>
+            <a:endParaRPr lang="en-US" dirty="0"/>
+          </a:p>
+        </p:txBody>
+      </p:sp>
+      <p:sp>
+        <p:nvSpPr>
+          <p:cNvPr id="5" name="Date Placeholder 4"/>
           <p:cNvSpPr>
             <a:spLocks noGrp="1"/>
           </p:cNvSpPr>
@@ -1404,7 +1452,7 @@
           <a:p>
             <a:fld id="{6D5ECD92-1D4B-4C92-88C6-1BDE7FDE9838}" type="datetimeFigureOut">
               <a:rPr lang="ru-RU" smtClean="0"/>
-              <a:t>31.03.2026</a:t>
+              <a:t>01.04.2026</a:t>
             </a:fld>
             <a:endParaRPr lang="ru-RU"/>
           </a:p>
@@ -1412,13 +1460,7 @@
       </p:sp>
       <p:sp>
         <p:nvSpPr>
-          <p:cNvPr id="6" name="Нижний колонтитул 5">
-            <a:extLst>
-              <a:ext uri="{FF2B5EF4-FFF2-40B4-BE49-F238E27FC236}">
-                <a16:creationId xmlns:a16="http://schemas.microsoft.com/office/drawing/2014/main" id="{1A0B6430-2167-DAD3-3169-0EB176397A29}"/>
-              </a:ext>
-            </a:extLst>
-          </p:cNvPr>
+          <p:cNvPr id="6" name="Footer Placeholder 5"/>
           <p:cNvSpPr>
             <a:spLocks noGrp="1"/>
           </p:cNvSpPr>
@@ -1437,13 +1479,7 @@
       </p:sp>
       <p:sp>
         <p:nvSpPr>
-          <p:cNvPr id="7" name="Номер слайда 6">
-            <a:extLst>
-              <a:ext uri="{FF2B5EF4-FFF2-40B4-BE49-F238E27FC236}">
-                <a16:creationId xmlns:a16="http://schemas.microsoft.com/office/drawing/2014/main" id="{E51661D4-3CF0-DE00-F78D-6CAC43A9D121}"/>
-              </a:ext>
-            </a:extLst>
-          </p:cNvPr>
+          <p:cNvPr id="7" name="Slide Number Placeholder 6"/>
           <p:cNvSpPr>
             <a:spLocks noGrp="1"/>
           </p:cNvSpPr>
@@ -1467,7 +1503,7 @@
     </p:spTree>
     <p:extLst>
       <p:ext uri="{BB962C8B-B14F-4D97-AF65-F5344CB8AC3E}">
-        <p14:creationId xmlns:p14="http://schemas.microsoft.com/office/powerpoint/2010/main" val="1165726135"/>
+        <p14:creationId xmlns:p14="http://schemas.microsoft.com/office/powerpoint/2010/main" val="688447698"/>
       </p:ext>
     </p:extLst>
   </p:cSld>
@@ -1496,65 +1532,58 @@
       </p:grpSpPr>
       <p:sp>
         <p:nvSpPr>
-          <p:cNvPr id="2" name="Заголовок 1">
-            <a:extLst>
-              <a:ext uri="{FF2B5EF4-FFF2-40B4-BE49-F238E27FC236}">
-                <a16:creationId xmlns:a16="http://schemas.microsoft.com/office/drawing/2014/main" id="{BB765482-2446-B8E1-F075-EF05741D308E}"/>
-              </a:ext>
-            </a:extLst>
-          </p:cNvPr>
+          <p:cNvPr id="10" name="Title 9"/>
           <p:cNvSpPr>
             <a:spLocks noGrp="1"/>
           </p:cNvSpPr>
           <p:nvPr>
             <p:ph type="title"/>
+          </p:nvPr>
+        </p:nvSpPr>
+        <p:spPr/>
+        <p:txBody>
+          <a:bodyPr/>
+          <a:lstStyle/>
+          <a:p>
+            <a:r>
+              <a:rPr lang="ru-RU"/>
+              <a:t>Образец заголовка</a:t>
+            </a:r>
+            <a:endParaRPr lang="en-US" dirty="0"/>
+          </a:p>
+        </p:txBody>
+      </p:sp>
+      <p:sp>
+        <p:nvSpPr>
+          <p:cNvPr id="3" name="Text Placeholder 2"/>
+          <p:cNvSpPr>
+            <a:spLocks noGrp="1"/>
+          </p:cNvSpPr>
+          <p:nvPr>
+            <p:ph type="body" idx="1"/>
           </p:nvPr>
         </p:nvSpPr>
         <p:spPr>
           <a:xfrm>
-            <a:off x="839788" y="365125"/>
-            <a:ext cx="10515600" cy="1325563"/>
+            <a:off x="1261872" y="1713655"/>
+            <a:ext cx="4480560" cy="731520"/>
           </a:xfrm>
         </p:spPr>
         <p:txBody>
-          <a:bodyPr/>
-          <a:lstStyle/>
-          <a:p>
-            <a:r>
-              <a:rPr lang="ru-RU"/>
-              <a:t>Образец заголовка</a:t>
-            </a:r>
-          </a:p>
-        </p:txBody>
-      </p:sp>
-      <p:sp>
-        <p:nvSpPr>
-          <p:cNvPr id="3" name="Текст 2">
-            <a:extLst>
-              <a:ext uri="{FF2B5EF4-FFF2-40B4-BE49-F238E27FC236}">
-                <a16:creationId xmlns:a16="http://schemas.microsoft.com/office/drawing/2014/main" id="{DA237D3C-5544-A6AA-FE48-DD5219C58568}"/>
-              </a:ext>
-            </a:extLst>
-          </p:cNvPr>
-          <p:cNvSpPr>
-            <a:spLocks noGrp="1"/>
-          </p:cNvSpPr>
-          <p:nvPr>
-            <p:ph type="body" idx="1"/>
-          </p:nvPr>
-        </p:nvSpPr>
-        <p:spPr>
-          <a:xfrm>
-            <a:off x="839788" y="1681163"/>
-            <a:ext cx="5157787" cy="823912"/>
-          </a:xfrm>
-        </p:spPr>
-        <p:txBody>
-          <a:bodyPr anchor="b"/>
+          <a:bodyPr anchor="b">
+            <a:normAutofit/>
+          </a:bodyPr>
           <a:lstStyle>
             <a:lvl1pPr marL="0" indent="0">
-              <a:buNone/>
-              <a:defRPr sz="2400" b="1"/>
+              <a:spcBef>
+                <a:spcPts val="0"/>
+              </a:spcBef>
+              <a:buNone/>
+              <a:defRPr sz="2000" b="0">
+                <a:solidFill>
+                  <a:schemeClr val="tx2"/>
+                </a:solidFill>
+              </a:defRPr>
             </a:lvl1pPr>
             <a:lvl2pPr marL="457200" indent="0">
               <a:buNone/>
@@ -1600,13 +1629,7 @@
       </p:sp>
       <p:sp>
         <p:nvSpPr>
-          <p:cNvPr id="4" name="Объект 3">
-            <a:extLst>
-              <a:ext uri="{FF2B5EF4-FFF2-40B4-BE49-F238E27FC236}">
-                <a16:creationId xmlns:a16="http://schemas.microsoft.com/office/drawing/2014/main" id="{6B5D0098-364C-3B58-6615-F8B79A525FDA}"/>
-              </a:ext>
-            </a:extLst>
-          </p:cNvPr>
+          <p:cNvPr id="4" name="Content Placeholder 3"/>
           <p:cNvSpPr>
             <a:spLocks noGrp="1"/>
           </p:cNvSpPr>
@@ -1616,13 +1639,41 @@
         </p:nvSpPr>
         <p:spPr>
           <a:xfrm>
-            <a:off x="839788" y="2505075"/>
-            <a:ext cx="5157787" cy="3684588"/>
+            <a:off x="1261872" y="2507550"/>
+            <a:ext cx="4480560" cy="3664650"/>
           </a:xfrm>
         </p:spPr>
         <p:txBody>
           <a:bodyPr/>
-          <a:lstStyle/>
+          <a:lstStyle>
+            <a:lvl1pPr>
+              <a:defRPr sz="1800"/>
+            </a:lvl1pPr>
+            <a:lvl2pPr>
+              <a:defRPr sz="1600"/>
+            </a:lvl2pPr>
+            <a:lvl3pPr>
+              <a:defRPr sz="1400"/>
+            </a:lvl3pPr>
+            <a:lvl4pPr>
+              <a:defRPr sz="1400"/>
+            </a:lvl4pPr>
+            <a:lvl5pPr>
+              <a:defRPr sz="1400"/>
+            </a:lvl5pPr>
+            <a:lvl6pPr>
+              <a:defRPr sz="1400"/>
+            </a:lvl6pPr>
+            <a:lvl7pPr>
+              <a:defRPr sz="1400"/>
+            </a:lvl7pPr>
+            <a:lvl8pPr>
+              <a:defRPr sz="1400"/>
+            </a:lvl8pPr>
+            <a:lvl9pPr>
+              <a:defRPr sz="1400"/>
+            </a:lvl9pPr>
+          </a:lstStyle>
           <a:p>
             <a:pPr lvl="0"/>
             <a:r>
@@ -1657,18 +1708,13 @@
               <a:rPr lang="ru-RU"/>
               <a:t>Пятый уровень</a:t>
             </a:r>
-          </a:p>
-        </p:txBody>
-      </p:sp>
-      <p:sp>
-        <p:nvSpPr>
-          <p:cNvPr id="5" name="Текст 4">
-            <a:extLst>
-              <a:ext uri="{FF2B5EF4-FFF2-40B4-BE49-F238E27FC236}">
-                <a16:creationId xmlns:a16="http://schemas.microsoft.com/office/drawing/2014/main" id="{6FE09A70-6AF6-4834-3DCC-C922B343A4C5}"/>
-              </a:ext>
-            </a:extLst>
-          </p:cNvPr>
+            <a:endParaRPr lang="en-US" dirty="0"/>
+          </a:p>
+        </p:txBody>
+      </p:sp>
+      <p:sp>
+        <p:nvSpPr>
+          <p:cNvPr id="5" name="Text Placeholder 4"/>
           <p:cNvSpPr>
             <a:spLocks noGrp="1"/>
           </p:cNvSpPr>
@@ -1678,16 +1724,31 @@
         </p:nvSpPr>
         <p:spPr>
           <a:xfrm>
-            <a:off x="6172200" y="1681163"/>
-            <a:ext cx="5183188" cy="823912"/>
+            <a:off x="6126480" y="1713655"/>
+            <a:ext cx="4480560" cy="731520"/>
           </a:xfrm>
         </p:spPr>
         <p:txBody>
-          <a:bodyPr anchor="b"/>
+          <a:bodyPr anchor="b">
+            <a:normAutofit/>
+          </a:bodyPr>
           <a:lstStyle>
             <a:lvl1pPr marL="0" indent="0">
-              <a:buNone/>
-              <a:defRPr sz="2400" b="1"/>
+              <a:lnSpc>
+                <a:spcPct val="95000"/>
+              </a:lnSpc>
+              <a:spcBef>
+                <a:spcPts val="0"/>
+              </a:spcBef>
+              <a:buNone/>
+              <a:defRPr lang="en-US" sz="2000" b="0" kern="1200" dirty="0">
+                <a:solidFill>
+                  <a:schemeClr val="tx2"/>
+                </a:solidFill>
+                <a:latin typeface="+mn-lt"/>
+                <a:ea typeface="+mn-ea"/>
+                <a:cs typeface="+mn-cs"/>
+              </a:defRPr>
             </a:lvl1pPr>
             <a:lvl2pPr marL="457200" indent="0">
               <a:buNone/>
@@ -1723,7 +1784,16 @@
             </a:lvl9pPr>
           </a:lstStyle>
           <a:p>
-            <a:pPr lvl="0"/>
+            <a:pPr marL="0" lvl="0" indent="0" algn="l" defTabSz="914400" rtl="0" eaLnBrk="1" latinLnBrk="0" hangingPunct="1">
+              <a:lnSpc>
+                <a:spcPct val="90000"/>
+              </a:lnSpc>
+              <a:spcBef>
+                <a:spcPts val="2000"/>
+              </a:spcBef>
+              <a:buFontTx/>
+              <a:buNone/>
+            </a:pPr>
             <a:r>
               <a:rPr lang="ru-RU"/>
               <a:t>Образец текста</a:t>
@@ -1733,13 +1803,7 @@
       </p:sp>
       <p:sp>
         <p:nvSpPr>
-          <p:cNvPr id="6" name="Объект 5">
-            <a:extLst>
-              <a:ext uri="{FF2B5EF4-FFF2-40B4-BE49-F238E27FC236}">
-                <a16:creationId xmlns:a16="http://schemas.microsoft.com/office/drawing/2014/main" id="{F8FAADB9-12E4-721E-0D57-D9E7C7B2DA59}"/>
-              </a:ext>
-            </a:extLst>
-          </p:cNvPr>
+          <p:cNvPr id="6" name="Content Placeholder 5"/>
           <p:cNvSpPr>
             <a:spLocks noGrp="1"/>
           </p:cNvSpPr>
@@ -1749,13 +1813,41 @@
         </p:nvSpPr>
         <p:spPr>
           <a:xfrm>
-            <a:off x="6172200" y="2505075"/>
-            <a:ext cx="5183188" cy="3684588"/>
+            <a:off x="6126480" y="2507550"/>
+            <a:ext cx="4480560" cy="3664650"/>
           </a:xfrm>
         </p:spPr>
         <p:txBody>
           <a:bodyPr/>
-          <a:lstStyle/>
+          <a:lstStyle>
+            <a:lvl1pPr>
+              <a:defRPr sz="1800"/>
+            </a:lvl1pPr>
+            <a:lvl2pPr>
+              <a:defRPr sz="1600"/>
+            </a:lvl2pPr>
+            <a:lvl3pPr>
+              <a:defRPr sz="1400"/>
+            </a:lvl3pPr>
+            <a:lvl4pPr>
+              <a:defRPr sz="1400"/>
+            </a:lvl4pPr>
+            <a:lvl5pPr>
+              <a:defRPr sz="1400"/>
+            </a:lvl5pPr>
+            <a:lvl6pPr>
+              <a:defRPr sz="1400"/>
+            </a:lvl6pPr>
+            <a:lvl7pPr>
+              <a:defRPr sz="1400"/>
+            </a:lvl7pPr>
+            <a:lvl8pPr>
+              <a:defRPr sz="1400"/>
+            </a:lvl8pPr>
+            <a:lvl9pPr>
+              <a:defRPr sz="1400"/>
+            </a:lvl9pPr>
+          </a:lstStyle>
           <a:p>
             <a:pPr lvl="0"/>
             <a:r>
@@ -1790,18 +1882,13 @@
               <a:rPr lang="ru-RU"/>
               <a:t>Пятый уровень</a:t>
             </a:r>
-          </a:p>
-        </p:txBody>
-      </p:sp>
-      <p:sp>
-        <p:nvSpPr>
-          <p:cNvPr id="7" name="Дата 6">
-            <a:extLst>
-              <a:ext uri="{FF2B5EF4-FFF2-40B4-BE49-F238E27FC236}">
-                <a16:creationId xmlns:a16="http://schemas.microsoft.com/office/drawing/2014/main" id="{A772052B-2F75-FC1B-76C9-41A74760ADD5}"/>
-              </a:ext>
-            </a:extLst>
-          </p:cNvPr>
+            <a:endParaRPr lang="en-US" dirty="0"/>
+          </a:p>
+        </p:txBody>
+      </p:sp>
+      <p:sp>
+        <p:nvSpPr>
+          <p:cNvPr id="7" name="Date Placeholder 6"/>
           <p:cNvSpPr>
             <a:spLocks noGrp="1"/>
           </p:cNvSpPr>
@@ -1816,7 +1903,7 @@
           <a:p>
             <a:fld id="{6D5ECD92-1D4B-4C92-88C6-1BDE7FDE9838}" type="datetimeFigureOut">
               <a:rPr lang="ru-RU" smtClean="0"/>
-              <a:t>31.03.2026</a:t>
+              <a:t>01.04.2026</a:t>
             </a:fld>
             <a:endParaRPr lang="ru-RU"/>
           </a:p>
@@ -1824,13 +1911,7 @@
       </p:sp>
       <p:sp>
         <p:nvSpPr>
-          <p:cNvPr id="8" name="Нижний колонтитул 7">
-            <a:extLst>
-              <a:ext uri="{FF2B5EF4-FFF2-40B4-BE49-F238E27FC236}">
-                <a16:creationId xmlns:a16="http://schemas.microsoft.com/office/drawing/2014/main" id="{457F110B-DA06-5664-FD58-2B5D0F39E7C5}"/>
-              </a:ext>
-            </a:extLst>
-          </p:cNvPr>
+          <p:cNvPr id="8" name="Footer Placeholder 7"/>
           <p:cNvSpPr>
             <a:spLocks noGrp="1"/>
           </p:cNvSpPr>
@@ -1849,13 +1930,7 @@
       </p:sp>
       <p:sp>
         <p:nvSpPr>
-          <p:cNvPr id="9" name="Номер слайда 8">
-            <a:extLst>
-              <a:ext uri="{FF2B5EF4-FFF2-40B4-BE49-F238E27FC236}">
-                <a16:creationId xmlns:a16="http://schemas.microsoft.com/office/drawing/2014/main" id="{0025F651-787C-357E-0407-66821A750B2E}"/>
-              </a:ext>
-            </a:extLst>
-          </p:cNvPr>
+          <p:cNvPr id="9" name="Slide Number Placeholder 8"/>
           <p:cNvSpPr>
             <a:spLocks noGrp="1"/>
           </p:cNvSpPr>
@@ -1879,7 +1954,7 @@
     </p:spTree>
     <p:extLst>
       <p:ext uri="{BB962C8B-B14F-4D97-AF65-F5344CB8AC3E}">
-        <p14:creationId xmlns:p14="http://schemas.microsoft.com/office/powerpoint/2010/main" val="3588537536"/>
+        <p14:creationId xmlns:p14="http://schemas.microsoft.com/office/powerpoint/2010/main" val="1906821378"/>
       </p:ext>
     </p:extLst>
   </p:cSld>
@@ -1908,13 +1983,7 @@
       </p:grpSpPr>
       <p:sp>
         <p:nvSpPr>
-          <p:cNvPr id="2" name="Заголовок 1">
-            <a:extLst>
-              <a:ext uri="{FF2B5EF4-FFF2-40B4-BE49-F238E27FC236}">
-                <a16:creationId xmlns:a16="http://schemas.microsoft.com/office/drawing/2014/main" id="{80782FFD-8DF7-1039-53FA-A57C159894C8}"/>
-              </a:ext>
-            </a:extLst>
-          </p:cNvPr>
+          <p:cNvPr id="6" name="Title 5"/>
           <p:cNvSpPr>
             <a:spLocks noGrp="1"/>
           </p:cNvSpPr>
@@ -1931,18 +2000,13 @@
               <a:rPr lang="ru-RU"/>
               <a:t>Образец заголовка</a:t>
             </a:r>
-          </a:p>
-        </p:txBody>
-      </p:sp>
-      <p:sp>
-        <p:nvSpPr>
-          <p:cNvPr id="3" name="Дата 2">
-            <a:extLst>
-              <a:ext uri="{FF2B5EF4-FFF2-40B4-BE49-F238E27FC236}">
-                <a16:creationId xmlns:a16="http://schemas.microsoft.com/office/drawing/2014/main" id="{05251A01-EEC1-CDF5-63AF-66E840E679A0}"/>
-              </a:ext>
-            </a:extLst>
-          </p:cNvPr>
+            <a:endParaRPr lang="en-US" dirty="0"/>
+          </a:p>
+        </p:txBody>
+      </p:sp>
+      <p:sp>
+        <p:nvSpPr>
+          <p:cNvPr id="3" name="Date Placeholder 2"/>
           <p:cNvSpPr>
             <a:spLocks noGrp="1"/>
           </p:cNvSpPr>
@@ -1957,7 +2021,7 @@
           <a:p>
             <a:fld id="{6D5ECD92-1D4B-4C92-88C6-1BDE7FDE9838}" type="datetimeFigureOut">
               <a:rPr lang="ru-RU" smtClean="0"/>
-              <a:t>31.03.2026</a:t>
+              <a:t>01.04.2026</a:t>
             </a:fld>
             <a:endParaRPr lang="ru-RU"/>
           </a:p>
@@ -1965,13 +2029,7 @@
       </p:sp>
       <p:sp>
         <p:nvSpPr>
-          <p:cNvPr id="4" name="Нижний колонтитул 3">
-            <a:extLst>
-              <a:ext uri="{FF2B5EF4-FFF2-40B4-BE49-F238E27FC236}">
-                <a16:creationId xmlns:a16="http://schemas.microsoft.com/office/drawing/2014/main" id="{246B2AC2-6C4C-D5E7-C7E2-F93470D4AC1C}"/>
-              </a:ext>
-            </a:extLst>
-          </p:cNvPr>
+          <p:cNvPr id="4" name="Footer Placeholder 3"/>
           <p:cNvSpPr>
             <a:spLocks noGrp="1"/>
           </p:cNvSpPr>
@@ -1990,13 +2048,7 @@
       </p:sp>
       <p:sp>
         <p:nvSpPr>
-          <p:cNvPr id="5" name="Номер слайда 4">
-            <a:extLst>
-              <a:ext uri="{FF2B5EF4-FFF2-40B4-BE49-F238E27FC236}">
-                <a16:creationId xmlns:a16="http://schemas.microsoft.com/office/drawing/2014/main" id="{06A9C7D4-A56A-65D3-C247-15B1A1287ECE}"/>
-              </a:ext>
-            </a:extLst>
-          </p:cNvPr>
+          <p:cNvPr id="5" name="Slide Number Placeholder 4"/>
           <p:cNvSpPr>
             <a:spLocks noGrp="1"/>
           </p:cNvSpPr>
@@ -2020,7 +2072,7 @@
     </p:spTree>
     <p:extLst>
       <p:ext uri="{BB962C8B-B14F-4D97-AF65-F5344CB8AC3E}">
-        <p14:creationId xmlns:p14="http://schemas.microsoft.com/office/powerpoint/2010/main" val="1355984424"/>
+        <p14:creationId xmlns:p14="http://schemas.microsoft.com/office/powerpoint/2010/main" val="2401042656"/>
       </p:ext>
     </p:extLst>
   </p:cSld>
@@ -2049,13 +2101,7 @@
       </p:grpSpPr>
       <p:sp>
         <p:nvSpPr>
-          <p:cNvPr id="2" name="Дата 1">
-            <a:extLst>
-              <a:ext uri="{FF2B5EF4-FFF2-40B4-BE49-F238E27FC236}">
-                <a16:creationId xmlns:a16="http://schemas.microsoft.com/office/drawing/2014/main" id="{EEB2DEAD-F673-D57A-F75F-A0A9922CB36E}"/>
-              </a:ext>
-            </a:extLst>
-          </p:cNvPr>
+          <p:cNvPr id="2" name="Date Placeholder 1"/>
           <p:cNvSpPr>
             <a:spLocks noGrp="1"/>
           </p:cNvSpPr>
@@ -2070,7 +2116,7 @@
           <a:p>
             <a:fld id="{6D5ECD92-1D4B-4C92-88C6-1BDE7FDE9838}" type="datetimeFigureOut">
               <a:rPr lang="ru-RU" smtClean="0"/>
-              <a:t>31.03.2026</a:t>
+              <a:t>01.04.2026</a:t>
             </a:fld>
             <a:endParaRPr lang="ru-RU"/>
           </a:p>
@@ -2078,13 +2124,7 @@
       </p:sp>
       <p:sp>
         <p:nvSpPr>
-          <p:cNvPr id="3" name="Нижний колонтитул 2">
-            <a:extLst>
-              <a:ext uri="{FF2B5EF4-FFF2-40B4-BE49-F238E27FC236}">
-                <a16:creationId xmlns:a16="http://schemas.microsoft.com/office/drawing/2014/main" id="{65724BE1-13A6-1CAD-7608-11D19B1E9E2B}"/>
-              </a:ext>
-            </a:extLst>
-          </p:cNvPr>
+          <p:cNvPr id="3" name="Footer Placeholder 2"/>
           <p:cNvSpPr>
             <a:spLocks noGrp="1"/>
           </p:cNvSpPr>
@@ -2103,13 +2143,7 @@
       </p:sp>
       <p:sp>
         <p:nvSpPr>
-          <p:cNvPr id="4" name="Номер слайда 3">
-            <a:extLst>
-              <a:ext uri="{FF2B5EF4-FFF2-40B4-BE49-F238E27FC236}">
-                <a16:creationId xmlns:a16="http://schemas.microsoft.com/office/drawing/2014/main" id="{B2A12E0B-CA61-7D08-254D-B4D09374F98B}"/>
-              </a:ext>
-            </a:extLst>
-          </p:cNvPr>
+          <p:cNvPr id="4" name="Slide Number Placeholder 3"/>
           <p:cNvSpPr>
             <a:spLocks noGrp="1"/>
           </p:cNvSpPr>
@@ -2133,7 +2167,7 @@
     </p:spTree>
     <p:extLst>
       <p:ext uri="{BB962C8B-B14F-4D97-AF65-F5344CB8AC3E}">
-        <p14:creationId xmlns:p14="http://schemas.microsoft.com/office/powerpoint/2010/main" val="3751633204"/>
+        <p14:creationId xmlns:p14="http://schemas.microsoft.com/office/powerpoint/2010/main" val="2100871784"/>
       </p:ext>
     </p:extLst>
   </p:cSld>
@@ -2162,13 +2196,7 @@
       </p:grpSpPr>
       <p:sp>
         <p:nvSpPr>
-          <p:cNvPr id="2" name="Заголовок 1">
-            <a:extLst>
-              <a:ext uri="{FF2B5EF4-FFF2-40B4-BE49-F238E27FC236}">
-                <a16:creationId xmlns:a16="http://schemas.microsoft.com/office/drawing/2014/main" id="{99102DA1-EF9C-2D3A-6FE1-0BF33B255545}"/>
-              </a:ext>
-            </a:extLst>
-          </p:cNvPr>
+          <p:cNvPr id="2" name="Title 1"/>
           <p:cNvSpPr>
             <a:spLocks noGrp="1"/>
           </p:cNvSpPr>
@@ -2178,15 +2206,17 @@
         </p:nvSpPr>
         <p:spPr>
           <a:xfrm>
-            <a:off x="839788" y="457200"/>
-            <a:ext cx="3932237" cy="1600200"/>
+            <a:off x="841248" y="457200"/>
+            <a:ext cx="3200400" cy="1600197"/>
           </a:xfrm>
         </p:spPr>
         <p:txBody>
-          <a:bodyPr anchor="b"/>
+          <a:bodyPr anchor="b">
+            <a:normAutofit/>
+          </a:bodyPr>
           <a:lstStyle>
             <a:lvl1pPr>
-              <a:defRPr sz="3200"/>
+              <a:defRPr sz="3200" b="0" baseline="0"/>
             </a:lvl1pPr>
           </a:lstStyle>
           <a:p>
@@ -2194,18 +2224,13 @@
               <a:rPr lang="ru-RU"/>
               <a:t>Образец заголовка</a:t>
             </a:r>
-          </a:p>
-        </p:txBody>
-      </p:sp>
-      <p:sp>
-        <p:nvSpPr>
-          <p:cNvPr id="3" name="Объект 2">
-            <a:extLst>
-              <a:ext uri="{FF2B5EF4-FFF2-40B4-BE49-F238E27FC236}">
-                <a16:creationId xmlns:a16="http://schemas.microsoft.com/office/drawing/2014/main" id="{0E50055D-D7BD-5C10-20BA-C3C2E8429D29}"/>
-              </a:ext>
-            </a:extLst>
-          </p:cNvPr>
+            <a:endParaRPr lang="en-US" dirty="0"/>
+          </a:p>
+        </p:txBody>
+      </p:sp>
+      <p:sp>
+        <p:nvSpPr>
+          <p:cNvPr id="3" name="Content Placeholder 2"/>
           <p:cNvSpPr>
             <a:spLocks noGrp="1"/>
           </p:cNvSpPr>
@@ -2215,39 +2240,39 @@
         </p:nvSpPr>
         <p:spPr>
           <a:xfrm>
-            <a:off x="5183188" y="987425"/>
-            <a:ext cx="6172200" cy="4873625"/>
+            <a:off x="4504267" y="685800"/>
+            <a:ext cx="6079066" cy="5486400"/>
           </a:xfrm>
         </p:spPr>
         <p:txBody>
           <a:bodyPr/>
           <a:lstStyle>
             <a:lvl1pPr>
-              <a:defRPr sz="3200"/>
+              <a:defRPr sz="2000"/>
             </a:lvl1pPr>
             <a:lvl2pPr>
-              <a:defRPr sz="2800"/>
+              <a:defRPr sz="1800"/>
             </a:lvl2pPr>
             <a:lvl3pPr>
-              <a:defRPr sz="2400"/>
+              <a:defRPr sz="1600"/>
             </a:lvl3pPr>
             <a:lvl4pPr>
-              <a:defRPr sz="2000"/>
+              <a:defRPr sz="1400"/>
             </a:lvl4pPr>
             <a:lvl5pPr>
-              <a:defRPr sz="2000"/>
+              <a:defRPr sz="1400"/>
             </a:lvl5pPr>
             <a:lvl6pPr>
-              <a:defRPr sz="2000"/>
+              <a:defRPr sz="1400"/>
             </a:lvl6pPr>
             <a:lvl7pPr>
-              <a:defRPr sz="2000"/>
+              <a:defRPr sz="1400"/>
             </a:lvl7pPr>
             <a:lvl8pPr>
-              <a:defRPr sz="2000"/>
+              <a:defRPr sz="1400"/>
             </a:lvl8pPr>
             <a:lvl9pPr>
-              <a:defRPr sz="2000"/>
+              <a:defRPr sz="1400"/>
             </a:lvl9pPr>
           </a:lstStyle>
           <a:p>
@@ -2284,18 +2309,13 @@
               <a:rPr lang="ru-RU"/>
               <a:t>Пятый уровень</a:t>
             </a:r>
-          </a:p>
-        </p:txBody>
-      </p:sp>
-      <p:sp>
-        <p:nvSpPr>
-          <p:cNvPr id="4" name="Текст 3">
-            <a:extLst>
-              <a:ext uri="{FF2B5EF4-FFF2-40B4-BE49-F238E27FC236}">
-                <a16:creationId xmlns:a16="http://schemas.microsoft.com/office/drawing/2014/main" id="{6F6BE2DD-8699-FD3E-7755-DE51283B52AD}"/>
-              </a:ext>
-            </a:extLst>
-          </p:cNvPr>
+            <a:endParaRPr lang="en-US" dirty="0"/>
+          </a:p>
+        </p:txBody>
+      </p:sp>
+      <p:sp>
+        <p:nvSpPr>
+          <p:cNvPr id="4" name="Text Placeholder 3"/>
           <p:cNvSpPr>
             <a:spLocks noGrp="1"/>
           </p:cNvSpPr>
@@ -2305,48 +2325,56 @@
         </p:nvSpPr>
         <p:spPr>
           <a:xfrm>
-            <a:off x="839788" y="2057400"/>
-            <a:ext cx="3932237" cy="3811588"/>
+            <a:off x="841248" y="2099734"/>
+            <a:ext cx="3200400" cy="3810001"/>
           </a:xfrm>
         </p:spPr>
         <p:txBody>
-          <a:bodyPr/>
+          <a:bodyPr>
+            <a:normAutofit/>
+          </a:bodyPr>
           <a:lstStyle>
             <a:lvl1pPr marL="0" indent="0">
-              <a:buNone/>
-              <a:defRPr sz="1600"/>
+              <a:lnSpc>
+                <a:spcPct val="114000"/>
+              </a:lnSpc>
+              <a:spcBef>
+                <a:spcPts val="800"/>
+              </a:spcBef>
+              <a:buNone/>
+              <a:defRPr sz="1300"/>
             </a:lvl1pPr>
             <a:lvl2pPr marL="457200" indent="0">
               <a:buNone/>
-              <a:defRPr sz="1400"/>
+              <a:defRPr sz="1200"/>
             </a:lvl2pPr>
             <a:lvl3pPr marL="914400" indent="0">
               <a:buNone/>
-              <a:defRPr sz="1200"/>
+              <a:defRPr sz="1000"/>
             </a:lvl3pPr>
             <a:lvl4pPr marL="1371600" indent="0">
               <a:buNone/>
-              <a:defRPr sz="1000"/>
+              <a:defRPr sz="900"/>
             </a:lvl4pPr>
             <a:lvl5pPr marL="1828800" indent="0">
               <a:buNone/>
-              <a:defRPr sz="1000"/>
+              <a:defRPr sz="900"/>
             </a:lvl5pPr>
             <a:lvl6pPr marL="2286000" indent="0">
               <a:buNone/>
-              <a:defRPr sz="1000"/>
+              <a:defRPr sz="900"/>
             </a:lvl6pPr>
             <a:lvl7pPr marL="2743200" indent="0">
               <a:buNone/>
-              <a:defRPr sz="1000"/>
+              <a:defRPr sz="900"/>
             </a:lvl7pPr>
             <a:lvl8pPr marL="3200400" indent="0">
               <a:buNone/>
-              <a:defRPr sz="1000"/>
+              <a:defRPr sz="900"/>
             </a:lvl8pPr>
             <a:lvl9pPr marL="3657600" indent="0">
               <a:buNone/>
-              <a:defRPr sz="1000"/>
+              <a:defRPr sz="900"/>
             </a:lvl9pPr>
           </a:lstStyle>
           <a:p>
@@ -2360,13 +2388,7 @@
       </p:sp>
       <p:sp>
         <p:nvSpPr>
-          <p:cNvPr id="5" name="Дата 4">
-            <a:extLst>
-              <a:ext uri="{FF2B5EF4-FFF2-40B4-BE49-F238E27FC236}">
-                <a16:creationId xmlns:a16="http://schemas.microsoft.com/office/drawing/2014/main" id="{CD2AF479-A258-6FE5-BF49-D1E0834530AB}"/>
-              </a:ext>
-            </a:extLst>
-          </p:cNvPr>
+          <p:cNvPr id="5" name="Date Placeholder 4"/>
           <p:cNvSpPr>
             <a:spLocks noGrp="1"/>
           </p:cNvSpPr>
@@ -2381,7 +2403,7 @@
           <a:p>
             <a:fld id="{6D5ECD92-1D4B-4C92-88C6-1BDE7FDE9838}" type="datetimeFigureOut">
               <a:rPr lang="ru-RU" smtClean="0"/>
-              <a:t>31.03.2026</a:t>
+              <a:t>01.04.2026</a:t>
             </a:fld>
             <a:endParaRPr lang="ru-RU"/>
           </a:p>
@@ -2389,13 +2411,7 @@
       </p:sp>
       <p:sp>
         <p:nvSpPr>
-          <p:cNvPr id="6" name="Нижний колонтитул 5">
-            <a:extLst>
-              <a:ext uri="{FF2B5EF4-FFF2-40B4-BE49-F238E27FC236}">
-                <a16:creationId xmlns:a16="http://schemas.microsoft.com/office/drawing/2014/main" id="{0BD52063-0CD7-6FDB-22E3-03CEE31527C1}"/>
-              </a:ext>
-            </a:extLst>
-          </p:cNvPr>
+          <p:cNvPr id="6" name="Footer Placeholder 5"/>
           <p:cNvSpPr>
             <a:spLocks noGrp="1"/>
           </p:cNvSpPr>
@@ -2414,13 +2430,7 @@
       </p:sp>
       <p:sp>
         <p:nvSpPr>
-          <p:cNvPr id="7" name="Номер слайда 6">
-            <a:extLst>
-              <a:ext uri="{FF2B5EF4-FFF2-40B4-BE49-F238E27FC236}">
-                <a16:creationId xmlns:a16="http://schemas.microsoft.com/office/drawing/2014/main" id="{FD6C0631-49A2-2646-6C8A-DFAF68D0BAA5}"/>
-              </a:ext>
-            </a:extLst>
-          </p:cNvPr>
+          <p:cNvPr id="7" name="Slide Number Placeholder 6"/>
           <p:cNvSpPr>
             <a:spLocks noGrp="1"/>
           </p:cNvSpPr>
@@ -2444,7 +2454,7 @@
     </p:spTree>
     <p:extLst>
       <p:ext uri="{BB962C8B-B14F-4D97-AF65-F5344CB8AC3E}">
-        <p14:creationId xmlns:p14="http://schemas.microsoft.com/office/powerpoint/2010/main" val="2915211625"/>
+        <p14:creationId xmlns:p14="http://schemas.microsoft.com/office/powerpoint/2010/main" val="3709365258"/>
       </p:ext>
     </p:extLst>
   </p:cSld>
@@ -2473,31 +2483,69 @@
       </p:grpSpPr>
       <p:sp>
         <p:nvSpPr>
-          <p:cNvPr id="2" name="Заголовок 1">
-            <a:extLst>
-              <a:ext uri="{FF2B5EF4-FFF2-40B4-BE49-F238E27FC236}">
-                <a16:creationId xmlns:a16="http://schemas.microsoft.com/office/drawing/2014/main" id="{58C79B54-E91F-BAB7-514C-37E9421F565A}"/>
-              </a:ext>
-            </a:extLst>
-          </p:cNvPr>
-          <p:cNvSpPr>
-            <a:spLocks noGrp="1"/>
-          </p:cNvSpPr>
-          <p:nvPr>
-            <p:ph type="title"/>
-          </p:nvPr>
+          <p:cNvPr id="8" name="Rectangle 7"/>
+          <p:cNvSpPr/>
+          <p:nvPr/>
         </p:nvSpPr>
         <p:spPr>
           <a:xfrm>
-            <a:off x="839788" y="457200"/>
-            <a:ext cx="3932237" cy="1600200"/>
+            <a:off x="0" y="5105400"/>
+            <a:ext cx="11292840" cy="1752600"/>
+          </a:xfrm>
+          <a:prstGeom prst="rect">
+            <a:avLst/>
+          </a:prstGeom>
+          <a:solidFill>
+            <a:srgbClr val="000000"/>
+          </a:solidFill>
+          <a:ln>
+            <a:noFill/>
+          </a:ln>
+        </p:spPr>
+        <p:style>
+          <a:lnRef idx="2">
+            <a:schemeClr val="accent1">
+              <a:shade val="50000"/>
+            </a:schemeClr>
+          </a:lnRef>
+          <a:fillRef idx="1">
+            <a:schemeClr val="accent1"/>
+          </a:fillRef>
+          <a:effectRef idx="0">
+            <a:schemeClr val="accent1"/>
+          </a:effectRef>
+          <a:fontRef idx="minor">
+            <a:schemeClr val="lt1"/>
+          </a:fontRef>
+        </p:style>
+      </p:sp>
+      <p:sp>
+        <p:nvSpPr>
+          <p:cNvPr id="2" name="Title 1"/>
+          <p:cNvSpPr>
+            <a:spLocks noGrp="1"/>
+          </p:cNvSpPr>
+          <p:nvPr>
+            <p:ph type="title"/>
+          </p:nvPr>
+        </p:nvSpPr>
+        <p:spPr>
+          <a:xfrm>
+            <a:off x="914400" y="5257800"/>
+            <a:ext cx="9982200" cy="914400"/>
           </a:xfrm>
         </p:spPr>
         <p:txBody>
-          <a:bodyPr anchor="b"/>
+          <a:bodyPr anchor="b">
+            <a:normAutofit/>
+          </a:bodyPr>
           <a:lstStyle>
             <a:lvl1pPr>
-              <a:defRPr sz="3200"/>
+              <a:defRPr sz="2800" b="0">
+                <a:solidFill>
+                  <a:schemeClr val="bg1"/>
+                </a:solidFill>
+              </a:defRPr>
             </a:lvl1pPr>
           </a:lstStyle>
           <a:p>
@@ -2505,20 +2553,15 @@
               <a:rPr lang="ru-RU"/>
               <a:t>Образец заголовка</a:t>
             </a:r>
-          </a:p>
-        </p:txBody>
-      </p:sp>
-      <p:sp>
-        <p:nvSpPr>
-          <p:cNvPr id="3" name="Рисунок 2">
-            <a:extLst>
-              <a:ext uri="{FF2B5EF4-FFF2-40B4-BE49-F238E27FC236}">
-                <a16:creationId xmlns:a16="http://schemas.microsoft.com/office/drawing/2014/main" id="{646F4A28-DFBD-23CD-CE88-C8CD2E264AC2}"/>
-              </a:ext>
-            </a:extLst>
-          </p:cNvPr>
-          <p:cNvSpPr>
-            <a:spLocks noGrp="1"/>
+            <a:endParaRPr lang="en-US" dirty="0"/>
+          </a:p>
+        </p:txBody>
+      </p:sp>
+      <p:sp>
+        <p:nvSpPr>
+          <p:cNvPr id="3" name="Picture Placeholder 2"/>
+          <p:cNvSpPr>
+            <a:spLocks noGrp="1" noChangeAspect="1"/>
           </p:cNvSpPr>
           <p:nvPr>
             <p:ph type="pic" idx="1"/>
@@ -2526,16 +2569,23 @@
         </p:nvSpPr>
         <p:spPr>
           <a:xfrm>
-            <a:off x="5183188" y="987425"/>
-            <a:ext cx="6172200" cy="4873625"/>
+            <a:off x="0" y="0"/>
+            <a:ext cx="11292840" cy="5128923"/>
           </a:xfrm>
+          <a:solidFill>
+            <a:schemeClr val="accent1"/>
+          </a:solidFill>
         </p:spPr>
         <p:txBody>
-          <a:bodyPr/>
+          <a:bodyPr anchor="t"/>
           <a:lstStyle>
             <a:lvl1pPr marL="0" indent="0">
               <a:buNone/>
-              <a:defRPr sz="3200"/>
+              <a:defRPr sz="3200">
+                <a:solidFill>
+                  <a:schemeClr val="bg1"/>
+                </a:solidFill>
+              </a:defRPr>
             </a:lvl1pPr>
             <a:lvl2pPr marL="457200" indent="0">
               <a:buNone/>
@@ -2571,19 +2621,17 @@
             </a:lvl9pPr>
           </a:lstStyle>
           <a:p>
-            <a:endParaRPr lang="ru-RU"/>
-          </a:p>
-        </p:txBody>
-      </p:sp>
-      <p:sp>
-        <p:nvSpPr>
-          <p:cNvPr id="4" name="Текст 3">
-            <a:extLst>
-              <a:ext uri="{FF2B5EF4-FFF2-40B4-BE49-F238E27FC236}">
-                <a16:creationId xmlns:a16="http://schemas.microsoft.com/office/drawing/2014/main" id="{B8CBA378-A9EE-B586-EDD8-221EB884E974}"/>
-              </a:ext>
-            </a:extLst>
-          </p:cNvPr>
+            <a:r>
+              <a:rPr lang="ru-RU"/>
+              <a:t>Вставка рисунка</a:t>
+            </a:r>
+            <a:endParaRPr lang="en-US" dirty="0"/>
+          </a:p>
+        </p:txBody>
+      </p:sp>
+      <p:sp>
+        <p:nvSpPr>
+          <p:cNvPr id="4" name="Text Placeholder 3"/>
           <p:cNvSpPr>
             <a:spLocks noGrp="1"/>
           </p:cNvSpPr>
@@ -2593,48 +2641,62 @@
         </p:nvSpPr>
         <p:spPr>
           <a:xfrm>
-            <a:off x="839788" y="2057400"/>
-            <a:ext cx="3932237" cy="3811588"/>
+            <a:off x="914400" y="6108589"/>
+            <a:ext cx="9982200" cy="597011"/>
           </a:xfrm>
         </p:spPr>
         <p:txBody>
-          <a:bodyPr/>
+          <a:bodyPr>
+            <a:normAutofit/>
+          </a:bodyPr>
           <a:lstStyle>
             <a:lvl1pPr marL="0" indent="0">
-              <a:buNone/>
-              <a:defRPr sz="1600"/>
+              <a:lnSpc>
+                <a:spcPct val="100000"/>
+              </a:lnSpc>
+              <a:spcBef>
+                <a:spcPts val="800"/>
+              </a:spcBef>
+              <a:buNone/>
+              <a:defRPr sz="1300">
+                <a:solidFill>
+                  <a:schemeClr val="bg1">
+                    <a:lumMod val="85000"/>
+                  </a:schemeClr>
+                </a:solidFill>
+              </a:defRPr>
             </a:lvl1pPr>
             <a:lvl2pPr marL="457200" indent="0">
               <a:buNone/>
-              <a:defRPr sz="1400"/>
+              <a:defRPr sz="1200"/>
             </a:lvl2pPr>
             <a:lvl3pPr marL="914400" indent="0">
               <a:buNone/>
-              <a:defRPr sz="1200"/>
+              <a:defRPr sz="1000"/>
             </a:lvl3pPr>
             <a:lvl4pPr marL="1371600" indent="0">
               <a:buNone/>
-              <a:defRPr sz="1000"/>
+              <a:defRPr sz="900"/>
             </a:lvl4pPr>
             <a:lvl5pPr marL="1828800" indent="0">
               <a:buNone/>
-              <a:defRPr sz="1000"/>
+              <a:defRPr sz="900"/>
             </a:lvl5pPr>
             <a:lvl6pPr marL="2286000" indent="0">
               <a:buNone/>
-              <a:defRPr sz="1000"/>
+              <a:defRPr sz="900"/>
             </a:lvl6pPr>
             <a:lvl7pPr marL="2743200" indent="0">
               <a:buNone/>
-              <a:defRPr sz="1000"/>
+              <a:defRPr sz="900"/>
             </a:lvl7pPr>
             <a:lvl8pPr marL="3200400" indent="0">
               <a:buNone/>
-              <a:defRPr sz="1000"/>
+              <a:defRPr sz="900"/>
             </a:lvl8pPr>
             <a:lvl9pPr marL="3657600" indent="0">
               <a:buNone/>
-              <a:defRPr sz="1000"/>
+              <a:defRPr sz="900"/>
             </a:lvl9pPr>
           </a:lstStyle>
           <a:p>
@@ -2648,13 +2710,7 @@
       </p:sp>
       <p:sp>
         <p:nvSpPr>
-          <p:cNvPr id="5" name="Дата 4">
-            <a:extLst>
-              <a:ext uri="{FF2B5EF4-FFF2-40B4-BE49-F238E27FC236}">
-                <a16:creationId xmlns:a16="http://schemas.microsoft.com/office/drawing/2014/main" id="{C2873EAD-461C-E268-16F1-4AF715D961E9}"/>
-              </a:ext>
-            </a:extLst>
-          </p:cNvPr>
+          <p:cNvPr id="5" name="Date Placeholder 4"/>
           <p:cNvSpPr>
             <a:spLocks noGrp="1"/>
           </p:cNvSpPr>
@@ -2669,7 +2725,7 @@
           <a:p>
             <a:fld id="{6D5ECD92-1D4B-4C92-88C6-1BDE7FDE9838}" type="datetimeFigureOut">
               <a:rPr lang="ru-RU" smtClean="0"/>
-              <a:t>31.03.2026</a:t>
+              <a:t>01.04.2026</a:t>
             </a:fld>
             <a:endParaRPr lang="ru-RU"/>
           </a:p>
@@ -2677,13 +2733,7 @@
       </p:sp>
       <p:sp>
         <p:nvSpPr>
-          <p:cNvPr id="6" name="Нижний колонтитул 5">
-            <a:extLst>
-              <a:ext uri="{FF2B5EF4-FFF2-40B4-BE49-F238E27FC236}">
-                <a16:creationId xmlns:a16="http://schemas.microsoft.com/office/drawing/2014/main" id="{1439867B-5A6E-1CF3-CA80-1FB1CBC24D57}"/>
-              </a:ext>
-            </a:extLst>
-          </p:cNvPr>
+          <p:cNvPr id="6" name="Footer Placeholder 5"/>
           <p:cNvSpPr>
             <a:spLocks noGrp="1"/>
           </p:cNvSpPr>
@@ -2702,13 +2752,7 @@
       </p:sp>
       <p:sp>
         <p:nvSpPr>
-          <p:cNvPr id="7" name="Номер слайда 6">
-            <a:extLst>
-              <a:ext uri="{FF2B5EF4-FFF2-40B4-BE49-F238E27FC236}">
-                <a16:creationId xmlns:a16="http://schemas.microsoft.com/office/drawing/2014/main" id="{75E09518-FCC1-A9FD-987C-79B44AF60812}"/>
-              </a:ext>
-            </a:extLst>
-          </p:cNvPr>
+          <p:cNvPr id="7" name="Slide Number Placeholder 6"/>
           <p:cNvSpPr>
             <a:spLocks noGrp="1"/>
           </p:cNvSpPr>
@@ -2732,7 +2776,7 @@
     </p:spTree>
     <p:extLst>
       <p:ext uri="{BB962C8B-B14F-4D97-AF65-F5344CB8AC3E}">
-        <p14:creationId xmlns:p14="http://schemas.microsoft.com/office/powerpoint/2010/main" val="2585714664"/>
+        <p14:creationId xmlns:p14="http://schemas.microsoft.com/office/powerpoint/2010/main" val="3029370487"/>
       </p:ext>
     </p:extLst>
   </p:cSld>
@@ -2766,31 +2810,72 @@
       </p:grpSpPr>
       <p:sp>
         <p:nvSpPr>
-          <p:cNvPr id="2" name="Заголовок 1">
-            <a:extLst>
-              <a:ext uri="{FF2B5EF4-FFF2-40B4-BE49-F238E27FC236}">
-                <a16:creationId xmlns:a16="http://schemas.microsoft.com/office/drawing/2014/main" id="{23475A35-C698-BD85-E953-620F8553AE08}"/>
-              </a:ext>
-            </a:extLst>
-          </p:cNvPr>
-          <p:cNvSpPr>
-            <a:spLocks noGrp="1"/>
-          </p:cNvSpPr>
-          <p:nvPr>
-            <p:ph type="title"/>
-          </p:nvPr>
+          <p:cNvPr id="7" name="Rectangle 6"/>
+          <p:cNvSpPr/>
+          <p:nvPr/>
         </p:nvSpPr>
         <p:spPr>
           <a:xfrm>
-            <a:off x="838200" y="365125"/>
-            <a:ext cx="10515600" cy="1325563"/>
+            <a:off x="11292840" y="0"/>
+            <a:ext cx="914400" cy="6858000"/>
+          </a:xfrm>
+          <a:prstGeom prst="rect">
+            <a:avLst/>
+          </a:prstGeom>
+          <a:solidFill>
+            <a:schemeClr val="tx2">
+              <a:lumMod val="75000"/>
+            </a:schemeClr>
+          </a:solidFill>
+          <a:ln>
+            <a:noFill/>
+          </a:ln>
+        </p:spPr>
+        <p:style>
+          <a:lnRef idx="2">
+            <a:schemeClr val="accent1">
+              <a:shade val="50000"/>
+            </a:schemeClr>
+          </a:lnRef>
+          <a:fillRef idx="1">
+            <a:schemeClr val="accent1"/>
+          </a:fillRef>
+          <a:effectRef idx="0">
+            <a:schemeClr val="accent1"/>
+          </a:effectRef>
+          <a:fontRef idx="minor">
+            <a:schemeClr val="lt1"/>
+          </a:fontRef>
+        </p:style>
+        <p:txBody>
+          <a:bodyPr/>
+          <a:lstStyle/>
+          <a:p>
+            <a:endParaRPr lang="ru-RU"/>
+          </a:p>
+        </p:txBody>
+      </p:sp>
+      <p:sp>
+        <p:nvSpPr>
+          <p:cNvPr id="2" name="Title Placeholder 1"/>
+          <p:cNvSpPr>
+            <a:spLocks noGrp="1"/>
+          </p:cNvSpPr>
+          <p:nvPr>
+            <p:ph type="title"/>
+          </p:nvPr>
+        </p:nvSpPr>
+        <p:spPr>
+          <a:xfrm>
+            <a:off x="1261872" y="365760"/>
+            <a:ext cx="9692640" cy="1325562"/>
           </a:xfrm>
           <a:prstGeom prst="rect">
             <a:avLst/>
           </a:prstGeom>
         </p:spPr>
         <p:txBody>
-          <a:bodyPr vert="horz" lIns="91440" tIns="45720" rIns="91440" bIns="45720" rtlCol="0" anchor="ctr">
+          <a:bodyPr vert="horz" lIns="91440" tIns="45720" rIns="91440" bIns="45720" rtlCol="0" anchor="b">
             <a:normAutofit/>
           </a:bodyPr>
           <a:lstStyle/>
@@ -2799,18 +2884,13 @@
               <a:rPr lang="ru-RU"/>
               <a:t>Образец заголовка</a:t>
             </a:r>
-          </a:p>
-        </p:txBody>
-      </p:sp>
-      <p:sp>
-        <p:nvSpPr>
-          <p:cNvPr id="3" name="Текст 2">
-            <a:extLst>
-              <a:ext uri="{FF2B5EF4-FFF2-40B4-BE49-F238E27FC236}">
-                <a16:creationId xmlns:a16="http://schemas.microsoft.com/office/drawing/2014/main" id="{D42F2740-9693-11FF-4D5A-26E1668AB06D}"/>
-              </a:ext>
-            </a:extLst>
-          </p:cNvPr>
+            <a:endParaRPr lang="en-US" dirty="0"/>
+          </a:p>
+        </p:txBody>
+      </p:sp>
+      <p:sp>
+        <p:nvSpPr>
+          <p:cNvPr id="3" name="Text Placeholder 2"/>
           <p:cNvSpPr>
             <a:spLocks noGrp="1"/>
           </p:cNvSpPr>
@@ -2820,8 +2900,8 @@
         </p:nvSpPr>
         <p:spPr>
           <a:xfrm>
-            <a:off x="838200" y="1825625"/>
-            <a:ext cx="10515600" cy="4351338"/>
+            <a:off x="1261872" y="1828800"/>
+            <a:ext cx="8595360" cy="4351337"/>
           </a:xfrm>
           <a:prstGeom prst="rect">
             <a:avLst/>
@@ -2866,18 +2946,13 @@
               <a:rPr lang="ru-RU"/>
               <a:t>Пятый уровень</a:t>
             </a:r>
-          </a:p>
-        </p:txBody>
-      </p:sp>
-      <p:sp>
-        <p:nvSpPr>
-          <p:cNvPr id="4" name="Дата 3">
-            <a:extLst>
-              <a:ext uri="{FF2B5EF4-FFF2-40B4-BE49-F238E27FC236}">
-                <a16:creationId xmlns:a16="http://schemas.microsoft.com/office/drawing/2014/main" id="{800E72E8-7A53-3517-8404-053093C3C14A}"/>
-              </a:ext>
-            </a:extLst>
-          </p:cNvPr>
+            <a:endParaRPr lang="en-US" dirty="0"/>
+          </a:p>
+        </p:txBody>
+      </p:sp>
+      <p:sp>
+        <p:nvSpPr>
+          <p:cNvPr id="4" name="Date Placeholder 3"/>
           <p:cNvSpPr>
             <a:spLocks noGrp="1"/>
           </p:cNvSpPr>
@@ -2886,9 +2961,9 @@
           </p:nvPr>
         </p:nvSpPr>
         <p:spPr>
-          <a:xfrm>
-            <a:off x="838200" y="6356350"/>
-            <a:ext cx="2743200" cy="365125"/>
+          <a:xfrm rot="16200000">
+            <a:off x="10797542" y="998537"/>
+            <a:ext cx="1904999" cy="365125"/>
           </a:xfrm>
           <a:prstGeom prst="rect">
             <a:avLst/>
@@ -2897,11 +2972,12 @@
         <p:txBody>
           <a:bodyPr vert="horz" lIns="91440" tIns="45720" rIns="91440" bIns="45720" rtlCol="0" anchor="ctr"/>
           <a:lstStyle>
-            <a:lvl1pPr algn="l">
-              <a:defRPr sz="1200">
+            <a:lvl1pPr algn="r">
+              <a:defRPr sz="1050" b="0">
                 <a:solidFill>
-                  <a:schemeClr val="tx1">
-                    <a:tint val="82000"/>
+                  <a:schemeClr val="tx2">
+                    <a:lumMod val="20000"/>
+                    <a:lumOff val="80000"/>
                   </a:schemeClr>
                 </a:solidFill>
               </a:defRPr>
@@ -2910,7 +2986,7 @@
           <a:p>
             <a:fld id="{6D5ECD92-1D4B-4C92-88C6-1BDE7FDE9838}" type="datetimeFigureOut">
               <a:rPr lang="ru-RU" smtClean="0"/>
-              <a:t>31.03.2026</a:t>
+              <a:t>01.04.2026</a:t>
             </a:fld>
             <a:endParaRPr lang="ru-RU"/>
           </a:p>
@@ -2918,13 +2994,7 @@
       </p:sp>
       <p:sp>
         <p:nvSpPr>
-          <p:cNvPr id="5" name="Нижний колонтитул 4">
-            <a:extLst>
-              <a:ext uri="{FF2B5EF4-FFF2-40B4-BE49-F238E27FC236}">
-                <a16:creationId xmlns:a16="http://schemas.microsoft.com/office/drawing/2014/main" id="{2F7BAE56-CB51-E850-249C-1267C772A9F6}"/>
-              </a:ext>
-            </a:extLst>
-          </p:cNvPr>
+          <p:cNvPr id="5" name="Footer Placeholder 4"/>
           <p:cNvSpPr>
             <a:spLocks noGrp="1"/>
           </p:cNvSpPr>
@@ -2933,9 +3003,9 @@
           </p:nvPr>
         </p:nvSpPr>
         <p:spPr>
-          <a:xfrm>
-            <a:off x="4038600" y="6356350"/>
-            <a:ext cx="4114800" cy="365125"/>
+          <a:xfrm rot="16200000">
+            <a:off x="9959341" y="4046537"/>
+            <a:ext cx="3581400" cy="365125"/>
           </a:xfrm>
           <a:prstGeom prst="rect">
             <a:avLst/>
@@ -2944,11 +3014,12 @@
         <p:txBody>
           <a:bodyPr vert="horz" lIns="91440" tIns="45720" rIns="91440" bIns="45720" rtlCol="0" anchor="ctr"/>
           <a:lstStyle>
-            <a:lvl1pPr algn="ctr">
-              <a:defRPr sz="1200">
+            <a:lvl1pPr algn="l">
+              <a:defRPr sz="1050">
                 <a:solidFill>
-                  <a:schemeClr val="tx1">
-                    <a:tint val="82000"/>
+                  <a:schemeClr val="tx2">
+                    <a:lumMod val="20000"/>
+                    <a:lumOff val="80000"/>
                   </a:schemeClr>
                 </a:solidFill>
               </a:defRPr>
@@ -2961,13 +3032,7 @@
       </p:sp>
       <p:sp>
         <p:nvSpPr>
-          <p:cNvPr id="6" name="Номер слайда 5">
-            <a:extLst>
-              <a:ext uri="{FF2B5EF4-FFF2-40B4-BE49-F238E27FC236}">
-                <a16:creationId xmlns:a16="http://schemas.microsoft.com/office/drawing/2014/main" id="{46701C06-B9D3-F700-D896-5020BF77BD31}"/>
-              </a:ext>
-            </a:extLst>
-          </p:cNvPr>
+          <p:cNvPr id="6" name="Slide Number Placeholder 5"/>
           <p:cNvSpPr>
             <a:spLocks noGrp="1"/>
           </p:cNvSpPr>
@@ -2977,21 +3042,24 @@
         </p:nvSpPr>
         <p:spPr>
           <a:xfrm>
-            <a:off x="8610600" y="6356350"/>
-            <a:ext cx="2743200" cy="365125"/>
+            <a:off x="11292840" y="6172200"/>
+            <a:ext cx="914400" cy="593725"/>
           </a:xfrm>
           <a:prstGeom prst="rect">
             <a:avLst/>
           </a:prstGeom>
         </p:spPr>
         <p:txBody>
-          <a:bodyPr vert="horz" lIns="91440" tIns="45720" rIns="91440" bIns="45720" rtlCol="0" anchor="ctr"/>
+          <a:bodyPr vert="horz" lIns="45720" tIns="45720" rIns="45720" bIns="45720" rtlCol="0" anchor="ctr">
+            <a:normAutofit/>
+          </a:bodyPr>
           <a:lstStyle>
-            <a:lvl1pPr algn="r">
-              <a:defRPr sz="1200">
+            <a:lvl1pPr algn="ctr">
+              <a:defRPr sz="3600">
                 <a:solidFill>
-                  <a:schemeClr val="tx1">
-                    <a:tint val="82000"/>
+                  <a:schemeClr val="tx2">
+                    <a:lumMod val="60000"/>
+                    <a:lumOff val="40000"/>
                   </a:schemeClr>
                 </a:solidFill>
               </a:defRPr>
@@ -3009,23 +3077,23 @@
     </p:spTree>
     <p:extLst>
       <p:ext uri="{BB962C8B-B14F-4D97-AF65-F5344CB8AC3E}">
-        <p14:creationId xmlns:p14="http://schemas.microsoft.com/office/powerpoint/2010/main" val="2612704911"/>
+        <p14:creationId xmlns:p14="http://schemas.microsoft.com/office/powerpoint/2010/main" val="3623467487"/>
       </p:ext>
     </p:extLst>
   </p:cSld>
   <p:clrMap bg1="lt1" tx1="dk1" bg2="lt2" tx2="dk2" accent1="accent1" accent2="accent2" accent3="accent3" accent4="accent4" accent5="accent5" accent6="accent6" hlink="hlink" folHlink="folHlink"/>
   <p:sldLayoutIdLst>
-    <p:sldLayoutId id="2147483649" r:id="rId1"/>
-    <p:sldLayoutId id="2147483650" r:id="rId2"/>
-    <p:sldLayoutId id="2147483651" r:id="rId3"/>
-    <p:sldLayoutId id="2147483652" r:id="rId4"/>
-    <p:sldLayoutId id="2147483653" r:id="rId5"/>
-    <p:sldLayoutId id="2147483654" r:id="rId6"/>
-    <p:sldLayoutId id="2147483655" r:id="rId7"/>
-    <p:sldLayoutId id="2147483656" r:id="rId8"/>
-    <p:sldLayoutId id="2147483657" r:id="rId9"/>
-    <p:sldLayoutId id="2147483658" r:id="rId10"/>
-    <p:sldLayoutId id="2147483659" r:id="rId11"/>
+    <p:sldLayoutId id="2147483661" r:id="rId1"/>
+    <p:sldLayoutId id="2147483662" r:id="rId2"/>
+    <p:sldLayoutId id="2147483663" r:id="rId3"/>
+    <p:sldLayoutId id="2147483664" r:id="rId4"/>
+    <p:sldLayoutId id="2147483665" r:id="rId5"/>
+    <p:sldLayoutId id="2147483666" r:id="rId6"/>
+    <p:sldLayoutId id="2147483667" r:id="rId7"/>
+    <p:sldLayoutId id="2147483668" r:id="rId8"/>
+    <p:sldLayoutId id="2147483669" r:id="rId9"/>
+    <p:sldLayoutId id="2147483670" r:id="rId10"/>
+    <p:sldLayoutId id="2147483671" r:id="rId11"/>
   </p:sldLayoutIdLst>
   <p:txStyles>
     <p:titleStyle>
@@ -3037,7 +3105,7 @@
           <a:spcPct val="0"/>
         </a:spcBef>
         <a:buNone/>
-        <a:defRPr sz="4400" kern="1200">
+        <a:defRPr sz="4400" kern="1200" spc="-50" baseline="0">
           <a:solidFill>
             <a:schemeClr val="tx1"/>
           </a:solidFill>
@@ -3048,16 +3116,23 @@
       </a:lvl1pPr>
     </p:titleStyle>
     <p:bodyStyle>
-      <a:lvl1pPr marL="228600" indent="-228600" algn="l" defTabSz="914400" rtl="0" eaLnBrk="1" latinLnBrk="0" hangingPunct="1">
+      <a:lvl1pPr marL="182880" indent="-182880" algn="l" defTabSz="914400" rtl="0" eaLnBrk="1" latinLnBrk="0" hangingPunct="1">
         <a:lnSpc>
-          <a:spcPct val="90000"/>
+          <a:spcPct val="95000"/>
         </a:lnSpc>
         <a:spcBef>
-          <a:spcPts val="1000"/>
+          <a:spcPts val="1400"/>
         </a:spcBef>
-        <a:buFont typeface="Arial" panose="020B0604020202020204" pitchFamily="34" charset="0"/>
+        <a:spcAft>
+          <a:spcPts val="200"/>
+        </a:spcAft>
+        <a:buClr>
+          <a:schemeClr val="accent1"/>
+        </a:buClr>
+        <a:buSzPct val="80000"/>
+        <a:buFont typeface="Arial" pitchFamily="34" charset="0"/>
         <a:buChar char="•"/>
-        <a:defRPr sz="2800" kern="1200">
+        <a:defRPr sz="1800" kern="1200" spc="10" baseline="0">
           <a:solidFill>
             <a:schemeClr val="tx1"/>
           </a:solidFill>
@@ -3066,144 +3141,216 @@
           <a:cs typeface="+mn-cs"/>
         </a:defRPr>
       </a:lvl1pPr>
-      <a:lvl2pPr marL="685800" indent="-228600" algn="l" defTabSz="914400" rtl="0" eaLnBrk="1" latinLnBrk="0" hangingPunct="1">
+      <a:lvl2pPr marL="457200" indent="-182880" algn="l" defTabSz="914400" rtl="0" eaLnBrk="1" latinLnBrk="0" hangingPunct="1">
         <a:lnSpc>
           <a:spcPct val="90000"/>
         </a:lnSpc>
         <a:spcBef>
-          <a:spcPts val="500"/>
+          <a:spcPts val="300"/>
         </a:spcBef>
-        <a:buFont typeface="Arial" panose="020B0604020202020204" pitchFamily="34" charset="0"/>
-        <a:buChar char="•"/>
-        <a:defRPr sz="2400" kern="1200">
+        <a:spcAft>
+          <a:spcPts val="300"/>
+        </a:spcAft>
+        <a:buClr>
+          <a:schemeClr val="accent1"/>
+        </a:buClr>
+        <a:buFont typeface="Wingdings 2" pitchFamily="18" charset="2"/>
+        <a:buChar char=""/>
+        <a:defRPr sz="1600" kern="1200">
           <a:solidFill>
-            <a:schemeClr val="tx1"/>
+            <a:schemeClr val="tx1">
+              <a:lumMod val="85000"/>
+              <a:lumOff val="15000"/>
+            </a:schemeClr>
           </a:solidFill>
           <a:latin typeface="+mn-lt"/>
           <a:ea typeface="+mn-ea"/>
           <a:cs typeface="+mn-cs"/>
         </a:defRPr>
       </a:lvl2pPr>
-      <a:lvl3pPr marL="1143000" indent="-228600" algn="l" defTabSz="914400" rtl="0" eaLnBrk="1" latinLnBrk="0" hangingPunct="1">
+      <a:lvl3pPr marL="731520" indent="-182880" algn="l" defTabSz="914400" rtl="0" eaLnBrk="1" latinLnBrk="0" hangingPunct="1">
         <a:lnSpc>
           <a:spcPct val="90000"/>
         </a:lnSpc>
         <a:spcBef>
-          <a:spcPts val="500"/>
+          <a:spcPts val="300"/>
         </a:spcBef>
-        <a:buFont typeface="Arial" panose="020B0604020202020204" pitchFamily="34" charset="0"/>
-        <a:buChar char="•"/>
-        <a:defRPr sz="2000" kern="1200">
+        <a:spcAft>
+          <a:spcPts val="300"/>
+        </a:spcAft>
+        <a:buClr>
+          <a:schemeClr val="accent1"/>
+        </a:buClr>
+        <a:buFont typeface="Wingdings 2" pitchFamily="18" charset="2"/>
+        <a:buChar char=""/>
+        <a:defRPr sz="1400" kern="1200">
           <a:solidFill>
-            <a:schemeClr val="tx1"/>
+            <a:schemeClr val="tx1">
+              <a:lumMod val="85000"/>
+              <a:lumOff val="15000"/>
+            </a:schemeClr>
           </a:solidFill>
           <a:latin typeface="+mn-lt"/>
           <a:ea typeface="+mn-ea"/>
           <a:cs typeface="+mn-cs"/>
         </a:defRPr>
       </a:lvl3pPr>
-      <a:lvl4pPr marL="1600200" indent="-228600" algn="l" defTabSz="914400" rtl="0" eaLnBrk="1" latinLnBrk="0" hangingPunct="1">
+      <a:lvl4pPr marL="1005840" indent="-182880" algn="l" defTabSz="914400" rtl="0" eaLnBrk="1" latinLnBrk="0" hangingPunct="1">
         <a:lnSpc>
           <a:spcPct val="90000"/>
         </a:lnSpc>
         <a:spcBef>
-          <a:spcPts val="500"/>
+          <a:spcPts val="300"/>
         </a:spcBef>
-        <a:buFont typeface="Arial" panose="020B0604020202020204" pitchFamily="34" charset="0"/>
-        <a:buChar char="•"/>
-        <a:defRPr sz="1800" kern="1200">
+        <a:spcAft>
+          <a:spcPts val="300"/>
+        </a:spcAft>
+        <a:buClr>
+          <a:schemeClr val="accent1"/>
+        </a:buClr>
+        <a:buFont typeface="Wingdings 2" pitchFamily="18" charset="2"/>
+        <a:buChar char=""/>
+        <a:defRPr sz="1400" kern="1200">
           <a:solidFill>
-            <a:schemeClr val="tx1"/>
+            <a:schemeClr val="tx1">
+              <a:lumMod val="85000"/>
+              <a:lumOff val="15000"/>
+            </a:schemeClr>
           </a:solidFill>
           <a:latin typeface="+mn-lt"/>
           <a:ea typeface="+mn-ea"/>
           <a:cs typeface="+mn-cs"/>
         </a:defRPr>
       </a:lvl4pPr>
-      <a:lvl5pPr marL="2057400" indent="-228600" algn="l" defTabSz="914400" rtl="0" eaLnBrk="1" latinLnBrk="0" hangingPunct="1">
+      <a:lvl5pPr marL="1280160" indent="-182880" algn="l" defTabSz="914400" rtl="0" eaLnBrk="1" latinLnBrk="0" hangingPunct="1">
         <a:lnSpc>
           <a:spcPct val="90000"/>
         </a:lnSpc>
         <a:spcBef>
-          <a:spcPts val="500"/>
+          <a:spcPts val="300"/>
         </a:spcBef>
-        <a:buFont typeface="Arial" panose="020B0604020202020204" pitchFamily="34" charset="0"/>
-        <a:buChar char="•"/>
-        <a:defRPr sz="1800" kern="1200">
+        <a:spcAft>
+          <a:spcPts val="300"/>
+        </a:spcAft>
+        <a:buClr>
+          <a:schemeClr val="accent1"/>
+        </a:buClr>
+        <a:buFont typeface="Wingdings 2" pitchFamily="18" charset="2"/>
+        <a:buChar char=""/>
+        <a:defRPr sz="1400" kern="1200">
           <a:solidFill>
-            <a:schemeClr val="tx1"/>
+            <a:schemeClr val="tx1">
+              <a:lumMod val="85000"/>
+              <a:lumOff val="15000"/>
+            </a:schemeClr>
           </a:solidFill>
           <a:latin typeface="+mn-lt"/>
           <a:ea typeface="+mn-ea"/>
           <a:cs typeface="+mn-cs"/>
         </a:defRPr>
       </a:lvl5pPr>
-      <a:lvl6pPr marL="2514600" indent="-228600" algn="l" defTabSz="914400" rtl="0" eaLnBrk="1" latinLnBrk="0" hangingPunct="1">
+      <a:lvl6pPr marL="1600000" indent="-228600" algn="l" defTabSz="914400" rtl="0" eaLnBrk="1" latinLnBrk="0" hangingPunct="1">
         <a:lnSpc>
           <a:spcPct val="90000"/>
         </a:lnSpc>
         <a:spcBef>
-          <a:spcPts val="500"/>
+          <a:spcPts val="300"/>
         </a:spcBef>
-        <a:buFont typeface="Arial" panose="020B0604020202020204" pitchFamily="34" charset="0"/>
-        <a:buChar char="•"/>
-        <a:defRPr sz="1800" kern="1200">
+        <a:spcAft>
+          <a:spcPts val="300"/>
+        </a:spcAft>
+        <a:buClr>
+          <a:schemeClr val="accent1"/>
+        </a:buClr>
+        <a:buFont typeface="Wingdings 2" pitchFamily="18" charset="2"/>
+        <a:buChar char=""/>
+        <a:defRPr sz="1400" kern="1200">
           <a:solidFill>
-            <a:schemeClr val="tx1"/>
+            <a:schemeClr val="tx1">
+              <a:lumMod val="85000"/>
+              <a:lumOff val="15000"/>
+            </a:schemeClr>
           </a:solidFill>
           <a:latin typeface="+mn-lt"/>
           <a:ea typeface="+mn-ea"/>
           <a:cs typeface="+mn-cs"/>
         </a:defRPr>
       </a:lvl6pPr>
-      <a:lvl7pPr marL="2971800" indent="-228600" algn="l" defTabSz="914400" rtl="0" eaLnBrk="1" latinLnBrk="0" hangingPunct="1">
+      <a:lvl7pPr marL="1900000" indent="-228600" algn="l" defTabSz="914400" rtl="0" eaLnBrk="1" latinLnBrk="0" hangingPunct="1">
         <a:lnSpc>
           <a:spcPct val="90000"/>
         </a:lnSpc>
         <a:spcBef>
-          <a:spcPts val="500"/>
+          <a:spcPts val="300"/>
         </a:spcBef>
-        <a:buFont typeface="Arial" panose="020B0604020202020204" pitchFamily="34" charset="0"/>
-        <a:buChar char="•"/>
-        <a:defRPr sz="1800" kern="1200">
+        <a:spcAft>
+          <a:spcPts val="300"/>
+        </a:spcAft>
+        <a:buClr>
+          <a:schemeClr val="accent1"/>
+        </a:buClr>
+        <a:buFont typeface="Wingdings 2" pitchFamily="18" charset="2"/>
+        <a:buChar char=""/>
+        <a:defRPr sz="1400" kern="1200">
           <a:solidFill>
-            <a:schemeClr val="tx1"/>
+            <a:schemeClr val="tx1">
+              <a:lumMod val="85000"/>
+              <a:lumOff val="15000"/>
+            </a:schemeClr>
           </a:solidFill>
           <a:latin typeface="+mn-lt"/>
           <a:ea typeface="+mn-ea"/>
           <a:cs typeface="+mn-cs"/>
         </a:defRPr>
       </a:lvl7pPr>
-      <a:lvl8pPr marL="3429000" indent="-228600" algn="l" defTabSz="914400" rtl="0" eaLnBrk="1" latinLnBrk="0" hangingPunct="1">
+      <a:lvl8pPr marL="2200000" indent="-228600" algn="l" defTabSz="914400" rtl="0" eaLnBrk="1" latinLnBrk="0" hangingPunct="1">
         <a:lnSpc>
           <a:spcPct val="90000"/>
         </a:lnSpc>
         <a:spcBef>
-          <a:spcPts val="500"/>
+          <a:spcPts val="300"/>
         </a:spcBef>
-        <a:buFont typeface="Arial" panose="020B0604020202020204" pitchFamily="34" charset="0"/>
-        <a:buChar char="•"/>
-        <a:defRPr sz="1800" kern="1200">
+        <a:spcAft>
+          <a:spcPts val="300"/>
+        </a:spcAft>
+        <a:buClr>
+          <a:schemeClr val="accent1"/>
+        </a:buClr>
+        <a:buFont typeface="Wingdings 2" pitchFamily="18" charset="2"/>
+        <a:buChar char=""/>
+        <a:defRPr sz="1400" kern="1200">
           <a:solidFill>
-            <a:schemeClr val="tx1"/>
+            <a:schemeClr val="tx1">
+              <a:lumMod val="85000"/>
+              <a:lumOff val="15000"/>
+            </a:schemeClr>
           </a:solidFill>
           <a:latin typeface="+mn-lt"/>
           <a:ea typeface="+mn-ea"/>
           <a:cs typeface="+mn-cs"/>
         </a:defRPr>
       </a:lvl8pPr>
-      <a:lvl9pPr marL="3886200" indent="-228600" algn="l" defTabSz="914400" rtl="0" eaLnBrk="1" latinLnBrk="0" hangingPunct="1">
+      <a:lvl9pPr marL="2500000" indent="-228600" algn="l" defTabSz="914400" rtl="0" eaLnBrk="1" latinLnBrk="0" hangingPunct="1">
         <a:lnSpc>
           <a:spcPct val="90000"/>
         </a:lnSpc>
         <a:spcBef>
-          <a:spcPts val="500"/>
+          <a:spcPts val="300"/>
         </a:spcBef>
-        <a:buFont typeface="Arial" panose="020B0604020202020204" pitchFamily="34" charset="0"/>
-        <a:buChar char="•"/>
-        <a:defRPr sz="1800" kern="1200">
+        <a:spcAft>
+          <a:spcPts val="300"/>
+        </a:spcAft>
+        <a:buClr>
+          <a:schemeClr val="accent1"/>
+        </a:buClr>
+        <a:buFont typeface="Wingdings 2" pitchFamily="18" charset="2"/>
+        <a:buChar char=""/>
+        <a:defRPr sz="1400" kern="1200">
           <a:solidFill>
-            <a:schemeClr val="tx1"/>
+            <a:schemeClr val="tx1">
+              <a:lumMod val="85000"/>
+              <a:lumOff val="15000"/>
+            </a:schemeClr>
           </a:solidFill>
           <a:latin typeface="+mn-lt"/>
           <a:ea typeface="+mn-ea"/>
@@ -3213,7 +3360,7 @@
     </p:bodyStyle>
     <p:otherStyle>
       <a:defPPr>
-        <a:defRPr lang="ru-RU"/>
+        <a:defRPr lang="en-US"/>
       </a:defPPr>
       <a:lvl1pPr marL="0" algn="l" defTabSz="914400" rtl="0" eaLnBrk="1" latinLnBrk="0" hangingPunct="1">
         <a:defRPr sz="1800" kern="1200">
@@ -3970,10 +4117,10 @@
       </p:grpSpPr>
       <p:sp>
         <p:nvSpPr>
-          <p:cNvPr id="2" name="Заголовок 1">
+          <p:cNvPr id="4" name="Заголовок 3">
             <a:extLst>
               <a:ext uri="{FF2B5EF4-FFF2-40B4-BE49-F238E27FC236}">
-                <a16:creationId xmlns:a16="http://schemas.microsoft.com/office/drawing/2014/main" id="{6986569E-538A-A157-46E5-E1368B699E92}"/>
+                <a16:creationId xmlns:a16="http://schemas.microsoft.com/office/drawing/2014/main" id="{19DC2FFD-23E5-E118-987A-0A9DB12A0AAD}"/>
               </a:ext>
             </a:extLst>
           </p:cNvPr>
@@ -3981,7 +4128,7 @@
             <a:spLocks noGrp="1"/>
           </p:cNvSpPr>
           <p:nvPr>
-            <p:ph type="ctrTitle"/>
+            <p:ph type="title"/>
           </p:nvPr>
         </p:nvSpPr>
         <p:spPr/>
@@ -3989,16 +4136,19 @@
           <a:bodyPr/>
           <a:lstStyle/>
           <a:p>
-            <a:endParaRPr lang="ru-RU"/>
-          </a:p>
-        </p:txBody>
-      </p:sp>
-      <p:sp>
-        <p:nvSpPr>
-          <p:cNvPr id="3" name="Подзаголовок 2">
+            <a:r>
+              <a:rPr lang="ru-RU" dirty="0"/>
+              <a:t>Введение</a:t>
+            </a:r>
+          </a:p>
+        </p:txBody>
+      </p:sp>
+      <p:sp>
+        <p:nvSpPr>
+          <p:cNvPr id="5" name="Объект 4">
             <a:extLst>
               <a:ext uri="{FF2B5EF4-FFF2-40B4-BE49-F238E27FC236}">
-                <a16:creationId xmlns:a16="http://schemas.microsoft.com/office/drawing/2014/main" id="{AA59A811-8C1F-0E52-F6E1-58C7B33800AF}"/>
+                <a16:creationId xmlns:a16="http://schemas.microsoft.com/office/drawing/2014/main" id="{F1C79661-1BB9-C32B-41FA-CDC61FBB27BC}"/>
               </a:ext>
             </a:extLst>
           </p:cNvPr>
@@ -4006,15 +4156,20 @@
             <a:spLocks noGrp="1"/>
           </p:cNvSpPr>
           <p:nvPr>
-            <p:ph type="subTitle" idx="1"/>
+            <p:ph idx="1"/>
           </p:nvPr>
         </p:nvSpPr>
         <p:spPr/>
         <p:txBody>
-          <a:bodyPr/>
+          <a:bodyPr>
+            <a:normAutofit/>
+          </a:bodyPr>
           <a:lstStyle/>
           <a:p>
-            <a:endParaRPr lang="ru-RU"/>
+            <a:r>
+              <a:rPr lang="ru-RU" sz="2400" dirty="0"/>
+              <a:t>Активное развитие технологий искусственного интеллекта в последние годы привело к появлению больших языковых моделей, способных генерировать связный текст, отвечать на вопросы, анализировать и обобщать информацию. Эти возможности обусловили повышенный интерес к применению LLM в образовательной сфере. В российской научной литературе данная проблематика стала активно обсуждаться с 2023 года, что связано с распространением моделей типа ChatGPT и аналогичных систем</a:t>
+            </a:r>
           </a:p>
         </p:txBody>
       </p:sp>
@@ -4031,111 +4186,1747 @@
 </p:sld>
 </file>
 
+<file path=ppt/slides/slide3.xml><?xml version="1.0" encoding="utf-8"?>
+<p:sld xmlns:a="http://schemas.openxmlformats.org/drawingml/2006/main" xmlns:r="http://schemas.openxmlformats.org/officeDocument/2006/relationships" xmlns:p="http://schemas.openxmlformats.org/presentationml/2006/main">
+  <p:cSld>
+    <p:spTree>
+      <p:nvGrpSpPr>
+        <p:cNvPr id="1" name=""/>
+        <p:cNvGrpSpPr/>
+        <p:nvPr/>
+      </p:nvGrpSpPr>
+      <p:grpSpPr>
+        <a:xfrm>
+          <a:off x="0" y="0"/>
+          <a:ext cx="0" cy="0"/>
+          <a:chOff x="0" y="0"/>
+          <a:chExt cx="0" cy="0"/>
+        </a:xfrm>
+      </p:grpSpPr>
+      <p:sp>
+        <p:nvSpPr>
+          <p:cNvPr id="2" name="Заголовок 1">
+            <a:extLst>
+              <a:ext uri="{FF2B5EF4-FFF2-40B4-BE49-F238E27FC236}">
+                <a16:creationId xmlns:a16="http://schemas.microsoft.com/office/drawing/2014/main" id="{3A4E28EA-0FE0-7806-72E9-E92E14848161}"/>
+              </a:ext>
+            </a:extLst>
+          </p:cNvPr>
+          <p:cNvSpPr>
+            <a:spLocks noGrp="1"/>
+          </p:cNvSpPr>
+          <p:nvPr>
+            <p:ph type="title"/>
+          </p:nvPr>
+        </p:nvSpPr>
+        <p:spPr/>
+        <p:txBody>
+          <a:bodyPr/>
+          <a:lstStyle/>
+          <a:p>
+            <a:r>
+              <a:rPr lang="ru-RU" dirty="0"/>
+              <a:t>Цель</a:t>
+            </a:r>
+          </a:p>
+        </p:txBody>
+      </p:sp>
+      <p:sp>
+        <p:nvSpPr>
+          <p:cNvPr id="3" name="Объект 2">
+            <a:extLst>
+              <a:ext uri="{FF2B5EF4-FFF2-40B4-BE49-F238E27FC236}">
+                <a16:creationId xmlns:a16="http://schemas.microsoft.com/office/drawing/2014/main" id="{D2D55563-220C-C6DB-CB19-FEF5D0191FFF}"/>
+              </a:ext>
+            </a:extLst>
+          </p:cNvPr>
+          <p:cNvSpPr>
+            <a:spLocks noGrp="1"/>
+          </p:cNvSpPr>
+          <p:nvPr>
+            <p:ph idx="1"/>
+          </p:nvPr>
+        </p:nvSpPr>
+        <p:spPr/>
+        <p:txBody>
+          <a:bodyPr>
+            <a:normAutofit/>
+          </a:bodyPr>
+          <a:lstStyle/>
+          <a:p>
+            <a:r>
+              <a:rPr lang="ru-RU" sz="3600" dirty="0"/>
+              <a:t>Обзор и анализ российских научных публикаций, посвящённых использованию больших языковых моделей в образовании, а также выявление основных тенденций и проблем, отражённых в отечественных исследованиях.</a:t>
+            </a:r>
+          </a:p>
+          <a:p>
+            <a:endParaRPr lang="ru-RU" sz="3600" dirty="0"/>
+          </a:p>
+        </p:txBody>
+      </p:sp>
+    </p:spTree>
+    <p:extLst>
+      <p:ext uri="{BB962C8B-B14F-4D97-AF65-F5344CB8AC3E}">
+        <p14:creationId xmlns:p14="http://schemas.microsoft.com/office/powerpoint/2010/main" val="3855581369"/>
+      </p:ext>
+    </p:extLst>
+  </p:cSld>
+  <p:clrMapOvr>
+    <a:masterClrMapping/>
+  </p:clrMapOvr>
+</p:sld>
+</file>
+
+<file path=ppt/slides/slide4.xml><?xml version="1.0" encoding="utf-8"?>
+<p:sld xmlns:a="http://schemas.openxmlformats.org/drawingml/2006/main" xmlns:r="http://schemas.openxmlformats.org/officeDocument/2006/relationships" xmlns:p="http://schemas.openxmlformats.org/presentationml/2006/main">
+  <p:cSld>
+    <p:spTree>
+      <p:nvGrpSpPr>
+        <p:cNvPr id="1" name=""/>
+        <p:cNvGrpSpPr/>
+        <p:nvPr/>
+      </p:nvGrpSpPr>
+      <p:grpSpPr>
+        <a:xfrm>
+          <a:off x="0" y="0"/>
+          <a:ext cx="0" cy="0"/>
+          <a:chOff x="0" y="0"/>
+          <a:chExt cx="0" cy="0"/>
+        </a:xfrm>
+      </p:grpSpPr>
+      <p:sp>
+        <p:nvSpPr>
+          <p:cNvPr id="2" name="Заголовок 1">
+            <a:extLst>
+              <a:ext uri="{FF2B5EF4-FFF2-40B4-BE49-F238E27FC236}">
+                <a16:creationId xmlns:a16="http://schemas.microsoft.com/office/drawing/2014/main" id="{81D08F2B-35D4-75F4-05A6-B1D035250A92}"/>
+              </a:ext>
+            </a:extLst>
+          </p:cNvPr>
+          <p:cNvSpPr>
+            <a:spLocks noGrp="1"/>
+          </p:cNvSpPr>
+          <p:nvPr>
+            <p:ph type="title"/>
+          </p:nvPr>
+        </p:nvSpPr>
+        <p:spPr/>
+        <p:txBody>
+          <a:bodyPr/>
+          <a:lstStyle/>
+          <a:p>
+            <a:r>
+              <a:rPr lang="ru-RU" dirty="0"/>
+              <a:t>Влияние</a:t>
+            </a:r>
+          </a:p>
+        </p:txBody>
+      </p:sp>
+      <p:sp>
+        <p:nvSpPr>
+          <p:cNvPr id="3" name="Объект 2">
+            <a:extLst>
+              <a:ext uri="{FF2B5EF4-FFF2-40B4-BE49-F238E27FC236}">
+                <a16:creationId xmlns:a16="http://schemas.microsoft.com/office/drawing/2014/main" id="{3CA7B7C6-C1CE-1949-5ED0-7EB7FBA2C061}"/>
+              </a:ext>
+            </a:extLst>
+          </p:cNvPr>
+          <p:cNvSpPr>
+            <a:spLocks noGrp="1"/>
+          </p:cNvSpPr>
+          <p:nvPr>
+            <p:ph idx="1"/>
+          </p:nvPr>
+        </p:nvSpPr>
+        <p:spPr/>
+        <p:txBody>
+          <a:bodyPr>
+            <a:normAutofit/>
+          </a:bodyPr>
+          <a:lstStyle/>
+          <a:p>
+            <a:r>
+              <a:rPr lang="ru-RU" sz="2000" dirty="0"/>
+              <a:t>Российские исследователи сходятся во мнении, что внедрение больших языковых моделей приводит к изменению роли преподавателя. Он всё в большей степени выступает не источником информации, а модератором и наставником, формирующим у студентов навыки критического мышления, анализа и осознанного использования цифровых инструментов.</a:t>
+            </a:r>
+          </a:p>
+          <a:p>
+            <a:r>
+              <a:rPr lang="ru-RU" sz="2000" dirty="0"/>
+              <a:t>Авторы сходятся во мнении, что LLM не являются самостоятельной педагогической технологией, а выступают инструментом, эффективность которого определяется методикой применения и уровнем цифровой компетентности пользователей </a:t>
+            </a:r>
+          </a:p>
+        </p:txBody>
+      </p:sp>
+    </p:spTree>
+    <p:extLst>
+      <p:ext uri="{BB962C8B-B14F-4D97-AF65-F5344CB8AC3E}">
+        <p14:creationId xmlns:p14="http://schemas.microsoft.com/office/powerpoint/2010/main" val="1656736961"/>
+      </p:ext>
+    </p:extLst>
+  </p:cSld>
+  <p:clrMapOvr>
+    <a:masterClrMapping/>
+  </p:clrMapOvr>
+</p:sld>
+</file>
+
+<file path=ppt/slides/slide5.xml><?xml version="1.0" encoding="utf-8"?>
+<p:sld xmlns:a="http://schemas.openxmlformats.org/drawingml/2006/main" xmlns:r="http://schemas.openxmlformats.org/officeDocument/2006/relationships" xmlns:p="http://schemas.openxmlformats.org/presentationml/2006/main">
+  <p:cSld>
+    <p:spTree>
+      <p:nvGrpSpPr>
+        <p:cNvPr id="1" name=""/>
+        <p:cNvGrpSpPr/>
+        <p:nvPr/>
+      </p:nvGrpSpPr>
+      <p:grpSpPr>
+        <a:xfrm>
+          <a:off x="0" y="0"/>
+          <a:ext cx="0" cy="0"/>
+          <a:chOff x="0" y="0"/>
+          <a:chExt cx="0" cy="0"/>
+        </a:xfrm>
+      </p:grpSpPr>
+      <p:sp>
+        <p:nvSpPr>
+          <p:cNvPr id="2" name="Заголовок 1">
+            <a:extLst>
+              <a:ext uri="{FF2B5EF4-FFF2-40B4-BE49-F238E27FC236}">
+                <a16:creationId xmlns:a16="http://schemas.microsoft.com/office/drawing/2014/main" id="{A5B16721-06DC-59DE-04FD-05FA8E4DFB20}"/>
+              </a:ext>
+            </a:extLst>
+          </p:cNvPr>
+          <p:cNvSpPr>
+            <a:spLocks noGrp="1"/>
+          </p:cNvSpPr>
+          <p:nvPr>
+            <p:ph type="title"/>
+          </p:nvPr>
+        </p:nvSpPr>
+        <p:spPr/>
+        <p:txBody>
+          <a:bodyPr/>
+          <a:lstStyle/>
+          <a:p>
+            <a:r>
+              <a:rPr lang="ru-RU" dirty="0"/>
+              <a:t>Риски</a:t>
+            </a:r>
+          </a:p>
+        </p:txBody>
+      </p:sp>
+      <p:sp>
+        <p:nvSpPr>
+          <p:cNvPr id="3" name="Объект 2">
+            <a:extLst>
+              <a:ext uri="{FF2B5EF4-FFF2-40B4-BE49-F238E27FC236}">
+                <a16:creationId xmlns:a16="http://schemas.microsoft.com/office/drawing/2014/main" id="{22F0E43F-7A82-0F2D-C122-A94DAA48E3D3}"/>
+              </a:ext>
+            </a:extLst>
+          </p:cNvPr>
+          <p:cNvSpPr>
+            <a:spLocks noGrp="1"/>
+          </p:cNvSpPr>
+          <p:nvPr>
+            <p:ph idx="1"/>
+          </p:nvPr>
+        </p:nvSpPr>
+        <p:spPr/>
+        <p:txBody>
+          <a:bodyPr>
+            <a:normAutofit/>
+          </a:bodyPr>
+          <a:lstStyle/>
+          <a:p>
+            <a:pPr marL="0" indent="0">
+              <a:buNone/>
+            </a:pPr>
+            <a:r>
+              <a:rPr lang="ru-RU" sz="3600" dirty="0"/>
+              <a:t>Наиболее часто обсуждаемым риском в российских публикациях являются угрозы</a:t>
+            </a:r>
+            <a:r>
+              <a:rPr lang="en-US" sz="3600" dirty="0"/>
+              <a:t>:</a:t>
+            </a:r>
+          </a:p>
+          <a:p>
+            <a:r>
+              <a:rPr lang="ru-RU" sz="3600" dirty="0"/>
+              <a:t> академической нечестности</a:t>
+            </a:r>
+            <a:endParaRPr lang="en-US" sz="3600" dirty="0"/>
+          </a:p>
+          <a:p>
+            <a:r>
+              <a:rPr lang="ru-RU" sz="3600" dirty="0"/>
+              <a:t>«галлюцинации» языковых моделей</a:t>
+            </a:r>
+          </a:p>
+          <a:p>
+            <a:r>
+              <a:rPr lang="ru-RU" sz="3600" dirty="0"/>
+              <a:t>нормативное регулирование</a:t>
+            </a:r>
+          </a:p>
+        </p:txBody>
+      </p:sp>
+    </p:spTree>
+    <p:extLst>
+      <p:ext uri="{BB962C8B-B14F-4D97-AF65-F5344CB8AC3E}">
+        <p14:creationId xmlns:p14="http://schemas.microsoft.com/office/powerpoint/2010/main" val="3741870529"/>
+      </p:ext>
+    </p:extLst>
+  </p:cSld>
+  <p:clrMapOvr>
+    <a:masterClrMapping/>
+  </p:clrMapOvr>
+</p:sld>
+</file>
+
+<file path=ppt/slides/slide6.xml><?xml version="1.0" encoding="utf-8"?>
+<p:sld xmlns:a="http://schemas.openxmlformats.org/drawingml/2006/main" xmlns:r="http://schemas.openxmlformats.org/officeDocument/2006/relationships" xmlns:p="http://schemas.openxmlformats.org/presentationml/2006/main">
+  <p:cSld>
+    <p:spTree>
+      <p:nvGrpSpPr>
+        <p:cNvPr id="1" name=""/>
+        <p:cNvGrpSpPr/>
+        <p:nvPr/>
+      </p:nvGrpSpPr>
+      <p:grpSpPr>
+        <a:xfrm>
+          <a:off x="0" y="0"/>
+          <a:ext cx="0" cy="0"/>
+          <a:chOff x="0" y="0"/>
+          <a:chExt cx="0" cy="0"/>
+        </a:xfrm>
+      </p:grpSpPr>
+      <p:sp>
+        <p:nvSpPr>
+          <p:cNvPr id="2" name="Заголовок 1">
+            <a:extLst>
+              <a:ext uri="{FF2B5EF4-FFF2-40B4-BE49-F238E27FC236}">
+                <a16:creationId xmlns:a16="http://schemas.microsoft.com/office/drawing/2014/main" id="{13849DEB-4552-3387-65A1-8A572F974FF7}"/>
+              </a:ext>
+            </a:extLst>
+          </p:cNvPr>
+          <p:cNvSpPr>
+            <a:spLocks noGrp="1"/>
+          </p:cNvSpPr>
+          <p:nvPr>
+            <p:ph type="title"/>
+          </p:nvPr>
+        </p:nvSpPr>
+        <p:spPr/>
+        <p:txBody>
+          <a:bodyPr/>
+          <a:lstStyle/>
+          <a:p>
+            <a:r>
+              <a:rPr lang="ru-RU" dirty="0"/>
+              <a:t>Перспективные направления</a:t>
+            </a:r>
+          </a:p>
+        </p:txBody>
+      </p:sp>
+      <p:sp>
+        <p:nvSpPr>
+          <p:cNvPr id="3" name="Объект 2">
+            <a:extLst>
+              <a:ext uri="{FF2B5EF4-FFF2-40B4-BE49-F238E27FC236}">
+                <a16:creationId xmlns:a16="http://schemas.microsoft.com/office/drawing/2014/main" id="{9B048353-957A-47BD-1D31-85C1AA7B28AB}"/>
+              </a:ext>
+            </a:extLst>
+          </p:cNvPr>
+          <p:cNvSpPr>
+            <a:spLocks noGrp="1"/>
+          </p:cNvSpPr>
+          <p:nvPr>
+            <p:ph idx="1"/>
+          </p:nvPr>
+        </p:nvSpPr>
+        <p:spPr/>
+        <p:txBody>
+          <a:bodyPr>
+            <a:normAutofit/>
+          </a:bodyPr>
+          <a:lstStyle/>
+          <a:p>
+            <a:r>
+              <a:rPr lang="ru-RU" sz="2400" dirty="0"/>
+              <a:t>Среди перспективных направлений внедрения больших языковых моделей в образовательную практику в России выделяются: разработка отечественных языковых моделей, учитывающих специфику русского языка и образовательных стандартов; создание локальных корпоративных решений для вузов; интеграция LLM в электронные образовательные среды и системы дистанционного обучения. Отдельно подчёркивается важность методического сопровождения и подготовки преподавателей к использованию данных технологий.</a:t>
+            </a:r>
+          </a:p>
+          <a:p>
+            <a:endParaRPr lang="ru-RU" sz="2400" dirty="0"/>
+          </a:p>
+        </p:txBody>
+      </p:sp>
+    </p:spTree>
+    <p:extLst>
+      <p:ext uri="{BB962C8B-B14F-4D97-AF65-F5344CB8AC3E}">
+        <p14:creationId xmlns:p14="http://schemas.microsoft.com/office/powerpoint/2010/main" val="661153118"/>
+      </p:ext>
+    </p:extLst>
+  </p:cSld>
+  <p:clrMapOvr>
+    <a:masterClrMapping/>
+  </p:clrMapOvr>
+</p:sld>
+</file>
+
+<file path=ppt/slides/slide7.xml><?xml version="1.0" encoding="utf-8"?>
+<p:sld xmlns:a="http://schemas.openxmlformats.org/drawingml/2006/main" xmlns:r="http://schemas.openxmlformats.org/officeDocument/2006/relationships" xmlns:p="http://schemas.openxmlformats.org/presentationml/2006/main">
+  <p:cSld>
+    <p:spTree>
+      <p:nvGrpSpPr>
+        <p:cNvPr id="1" name=""/>
+        <p:cNvGrpSpPr/>
+        <p:nvPr/>
+      </p:nvGrpSpPr>
+      <p:grpSpPr>
+        <a:xfrm>
+          <a:off x="0" y="0"/>
+          <a:ext cx="0" cy="0"/>
+          <a:chOff x="0" y="0"/>
+          <a:chExt cx="0" cy="0"/>
+        </a:xfrm>
+      </p:grpSpPr>
+      <p:sp>
+        <p:nvSpPr>
+          <p:cNvPr id="2" name="Заголовок 1">
+            <a:extLst>
+              <a:ext uri="{FF2B5EF4-FFF2-40B4-BE49-F238E27FC236}">
+                <a16:creationId xmlns:a16="http://schemas.microsoft.com/office/drawing/2014/main" id="{1B7AAB3C-9318-C79A-E6A6-E8FBDB692CB5}"/>
+              </a:ext>
+            </a:extLst>
+          </p:cNvPr>
+          <p:cNvSpPr>
+            <a:spLocks noGrp="1"/>
+          </p:cNvSpPr>
+          <p:nvPr>
+            <p:ph type="title"/>
+          </p:nvPr>
+        </p:nvSpPr>
+        <p:spPr/>
+        <p:txBody>
+          <a:bodyPr>
+            <a:normAutofit fontScale="90000"/>
+          </a:bodyPr>
+          <a:lstStyle/>
+          <a:p>
+            <a:r>
+              <a:rPr lang="ru-RU" dirty="0"/>
+              <a:t>Сравнение преимуществ и недостатков разных больших языковых моделей</a:t>
+            </a:r>
+            <a:br>
+              <a:rPr lang="ru-RU" dirty="0"/>
+            </a:br>
+            <a:endParaRPr lang="ru-RU" dirty="0"/>
+          </a:p>
+        </p:txBody>
+      </p:sp>
+      <p:graphicFrame>
+        <p:nvGraphicFramePr>
+          <p:cNvPr id="4" name="Объект 3">
+            <a:extLst>
+              <a:ext uri="{FF2B5EF4-FFF2-40B4-BE49-F238E27FC236}">
+                <a16:creationId xmlns:a16="http://schemas.microsoft.com/office/drawing/2014/main" id="{D3A3DAF9-40C5-B4D4-827C-F1D6ED65BCAC}"/>
+              </a:ext>
+            </a:extLst>
+          </p:cNvPr>
+          <p:cNvGraphicFramePr>
+            <a:graphicFrameLocks noGrp="1"/>
+          </p:cNvGraphicFramePr>
+          <p:nvPr>
+            <p:ph idx="1"/>
+            <p:extLst>
+              <p:ext uri="{D42A27DB-BD31-4B8C-83A1-F6EECF244321}">
+                <p14:modId xmlns:p14="http://schemas.microsoft.com/office/powerpoint/2010/main" val="1139658620"/>
+              </p:ext>
+            </p:extLst>
+          </p:nvPr>
+        </p:nvGraphicFramePr>
+        <p:xfrm>
+          <a:off x="883920" y="1320800"/>
+          <a:ext cx="9946639" cy="4859336"/>
+        </p:xfrm>
+        <a:graphic>
+          <a:graphicData uri="http://schemas.openxmlformats.org/drawingml/2006/table">
+            <a:tbl>
+              <a:tblPr firstRow="1" firstCol="1" bandRow="1">
+                <a:tableStyleId>{5C22544A-7EE6-4342-B048-85BDC9FD1C3A}</a:tableStyleId>
+              </a:tblPr>
+              <a:tblGrid>
+                <a:gridCol w="1669475">
+                  <a:extLst>
+                    <a:ext uri="{9D8B030D-6E8A-4147-A177-3AD203B41FA5}">
+                      <a16:colId xmlns:a16="http://schemas.microsoft.com/office/drawing/2014/main" val="1756864948"/>
+                    </a:ext>
+                  </a:extLst>
+                </a:gridCol>
+                <a:gridCol w="1750004">
+                  <a:extLst>
+                    <a:ext uri="{9D8B030D-6E8A-4147-A177-3AD203B41FA5}">
+                      <a16:colId xmlns:a16="http://schemas.microsoft.com/office/drawing/2014/main" val="2888553393"/>
+                    </a:ext>
+                  </a:extLst>
+                </a:gridCol>
+                <a:gridCol w="2372574">
+                  <a:extLst>
+                    <a:ext uri="{9D8B030D-6E8A-4147-A177-3AD203B41FA5}">
+                      <a16:colId xmlns:a16="http://schemas.microsoft.com/office/drawing/2014/main" val="2670324195"/>
+                    </a:ext>
+                  </a:extLst>
+                </a:gridCol>
+                <a:gridCol w="2144401">
+                  <a:extLst>
+                    <a:ext uri="{9D8B030D-6E8A-4147-A177-3AD203B41FA5}">
+                      <a16:colId xmlns:a16="http://schemas.microsoft.com/office/drawing/2014/main" val="2312963906"/>
+                    </a:ext>
+                  </a:extLst>
+                </a:gridCol>
+                <a:gridCol w="2010185">
+                  <a:extLst>
+                    <a:ext uri="{9D8B030D-6E8A-4147-A177-3AD203B41FA5}">
+                      <a16:colId xmlns:a16="http://schemas.microsoft.com/office/drawing/2014/main" val="1339342657"/>
+                    </a:ext>
+                  </a:extLst>
+                </a:gridCol>
+              </a:tblGrid>
+              <a:tr h="409383">
+                <a:tc>
+                  <a:txBody>
+                    <a:bodyPr/>
+                    <a:lstStyle/>
+                    <a:p>
+                      <a:pPr algn="just">
+                        <a:lnSpc>
+                          <a:spcPct val="150000"/>
+                        </a:lnSpc>
+                        <a:spcAft>
+                          <a:spcPts val="800"/>
+                        </a:spcAft>
+                        <a:buNone/>
+                      </a:pPr>
+                      <a:r>
+                        <a:rPr lang="ru-RU" sz="1100" kern="100">
+                          <a:effectLst/>
+                        </a:rPr>
+                        <a:t>Название</a:t>
+                      </a:r>
+                      <a:endParaRPr lang="ru-RU" sz="1100" kern="100">
+                        <a:effectLst/>
+                        <a:latin typeface="Aptos" panose="020B0004020202020204" pitchFamily="34" charset="0"/>
+                        <a:ea typeface="Aptos" panose="020B0004020202020204" pitchFamily="34" charset="0"/>
+                        <a:cs typeface="Arial" panose="020B0604020202020204" pitchFamily="34" charset="0"/>
+                      </a:endParaRPr>
+                    </a:p>
+                  </a:txBody>
+                  <a:tcPr marL="41375" marR="41375" marT="0" marB="0"/>
+                </a:tc>
+                <a:tc>
+                  <a:txBody>
+                    <a:bodyPr/>
+                    <a:lstStyle/>
+                    <a:p>
+                      <a:pPr algn="just">
+                        <a:lnSpc>
+                          <a:spcPct val="150000"/>
+                        </a:lnSpc>
+                        <a:spcAft>
+                          <a:spcPts val="800"/>
+                        </a:spcAft>
+                        <a:buNone/>
+                      </a:pPr>
+                      <a:r>
+                        <a:rPr lang="ru-RU" sz="1100" kern="100">
+                          <a:effectLst/>
+                        </a:rPr>
+                        <a:t>Разработчик</a:t>
+                      </a:r>
+                      <a:endParaRPr lang="ru-RU" sz="1100" kern="100">
+                        <a:effectLst/>
+                        <a:latin typeface="Aptos" panose="020B0004020202020204" pitchFamily="34" charset="0"/>
+                        <a:ea typeface="Aptos" panose="020B0004020202020204" pitchFamily="34" charset="0"/>
+                        <a:cs typeface="Arial" panose="020B0604020202020204" pitchFamily="34" charset="0"/>
+                      </a:endParaRPr>
+                    </a:p>
+                  </a:txBody>
+                  <a:tcPr marL="41375" marR="41375" marT="0" marB="0"/>
+                </a:tc>
+                <a:tc>
+                  <a:txBody>
+                    <a:bodyPr/>
+                    <a:lstStyle/>
+                    <a:p>
+                      <a:pPr algn="just">
+                        <a:lnSpc>
+                          <a:spcPct val="150000"/>
+                        </a:lnSpc>
+                        <a:spcAft>
+                          <a:spcPts val="800"/>
+                        </a:spcAft>
+                        <a:buNone/>
+                      </a:pPr>
+                      <a:r>
+                        <a:rPr lang="ru-RU" sz="1100" kern="100">
+                          <a:effectLst/>
+                        </a:rPr>
+                        <a:t>Плюсы</a:t>
+                      </a:r>
+                      <a:endParaRPr lang="ru-RU" sz="1100" kern="100">
+                        <a:effectLst/>
+                        <a:latin typeface="Aptos" panose="020B0004020202020204" pitchFamily="34" charset="0"/>
+                        <a:ea typeface="Aptos" panose="020B0004020202020204" pitchFamily="34" charset="0"/>
+                        <a:cs typeface="Arial" panose="020B0604020202020204" pitchFamily="34" charset="0"/>
+                      </a:endParaRPr>
+                    </a:p>
+                  </a:txBody>
+                  <a:tcPr marL="41375" marR="41375" marT="0" marB="0"/>
+                </a:tc>
+                <a:tc>
+                  <a:txBody>
+                    <a:bodyPr/>
+                    <a:lstStyle/>
+                    <a:p>
+                      <a:pPr algn="just">
+                        <a:lnSpc>
+                          <a:spcPct val="150000"/>
+                        </a:lnSpc>
+                        <a:spcAft>
+                          <a:spcPts val="800"/>
+                        </a:spcAft>
+                        <a:buNone/>
+                      </a:pPr>
+                      <a:r>
+                        <a:rPr lang="ru-RU" sz="1100" kern="100">
+                          <a:effectLst/>
+                        </a:rPr>
+                        <a:t>Минусы</a:t>
+                      </a:r>
+                      <a:endParaRPr lang="ru-RU" sz="1100" kern="100">
+                        <a:effectLst/>
+                        <a:latin typeface="Aptos" panose="020B0004020202020204" pitchFamily="34" charset="0"/>
+                        <a:ea typeface="Aptos" panose="020B0004020202020204" pitchFamily="34" charset="0"/>
+                        <a:cs typeface="Arial" panose="020B0604020202020204" pitchFamily="34" charset="0"/>
+                      </a:endParaRPr>
+                    </a:p>
+                  </a:txBody>
+                  <a:tcPr marL="41375" marR="41375" marT="0" marB="0"/>
+                </a:tc>
+                <a:tc>
+                  <a:txBody>
+                    <a:bodyPr/>
+                    <a:lstStyle/>
+                    <a:p>
+                      <a:pPr algn="just">
+                        <a:lnSpc>
+                          <a:spcPct val="150000"/>
+                        </a:lnSpc>
+                        <a:spcAft>
+                          <a:spcPts val="800"/>
+                        </a:spcAft>
+                        <a:buNone/>
+                      </a:pPr>
+                      <a:r>
+                        <a:rPr lang="ru-RU" sz="1100" kern="100">
+                          <a:effectLst/>
+                        </a:rPr>
+                        <a:t>Особенности в обучении</a:t>
+                      </a:r>
+                      <a:endParaRPr lang="ru-RU" sz="1100" kern="100">
+                        <a:effectLst/>
+                        <a:latin typeface="Aptos" panose="020B0004020202020204" pitchFamily="34" charset="0"/>
+                        <a:ea typeface="Aptos" panose="020B0004020202020204" pitchFamily="34" charset="0"/>
+                        <a:cs typeface="Arial" panose="020B0604020202020204" pitchFamily="34" charset="0"/>
+                      </a:endParaRPr>
+                    </a:p>
+                  </a:txBody>
+                  <a:tcPr marL="41375" marR="41375" marT="0" marB="0"/>
+                </a:tc>
+                <a:extLst>
+                  <a:ext uri="{0D108BD9-81ED-4DB2-BD59-A6C34878D82A}">
+                    <a16:rowId xmlns:a16="http://schemas.microsoft.com/office/drawing/2014/main" val="3209960084"/>
+                  </a:ext>
+                </a:extLst>
+              </a:tr>
+              <a:tr h="917466">
+                <a:tc>
+                  <a:txBody>
+                    <a:bodyPr/>
+                    <a:lstStyle/>
+                    <a:p>
+                      <a:pPr algn="just">
+                        <a:lnSpc>
+                          <a:spcPct val="107000"/>
+                        </a:lnSpc>
+                        <a:spcAft>
+                          <a:spcPts val="800"/>
+                        </a:spcAft>
+                        <a:buNone/>
+                      </a:pPr>
+                      <a:r>
+                        <a:rPr lang="en-US" sz="1100" kern="100">
+                          <a:effectLst/>
+                        </a:rPr>
+                        <a:t>ChatGPT</a:t>
+                      </a:r>
+                      <a:endParaRPr lang="ru-RU" sz="1100" kern="100">
+                        <a:effectLst/>
+                        <a:latin typeface="Aptos" panose="020B0004020202020204" pitchFamily="34" charset="0"/>
+                        <a:ea typeface="Aptos" panose="020B0004020202020204" pitchFamily="34" charset="0"/>
+                        <a:cs typeface="Arial" panose="020B0604020202020204" pitchFamily="34" charset="0"/>
+                      </a:endParaRPr>
+                    </a:p>
+                  </a:txBody>
+                  <a:tcPr marL="41375" marR="41375" marT="0" marB="0"/>
+                </a:tc>
+                <a:tc>
+                  <a:txBody>
+                    <a:bodyPr/>
+                    <a:lstStyle/>
+                    <a:p>
+                      <a:pPr algn="just">
+                        <a:lnSpc>
+                          <a:spcPct val="107000"/>
+                        </a:lnSpc>
+                        <a:spcAft>
+                          <a:spcPts val="800"/>
+                        </a:spcAft>
+                        <a:buNone/>
+                      </a:pPr>
+                      <a:r>
+                        <a:rPr lang="en-US" sz="1100" kern="100">
+                          <a:effectLst/>
+                        </a:rPr>
+                        <a:t>OpenAI</a:t>
+                      </a:r>
+                      <a:endParaRPr lang="ru-RU" sz="1100" kern="100">
+                        <a:effectLst/>
+                        <a:latin typeface="Aptos" panose="020B0004020202020204" pitchFamily="34" charset="0"/>
+                        <a:ea typeface="Aptos" panose="020B0004020202020204" pitchFamily="34" charset="0"/>
+                        <a:cs typeface="Arial" panose="020B0604020202020204" pitchFamily="34" charset="0"/>
+                      </a:endParaRPr>
+                    </a:p>
+                  </a:txBody>
+                  <a:tcPr marL="41375" marR="41375" marT="0" marB="0"/>
+                </a:tc>
+                <a:tc>
+                  <a:txBody>
+                    <a:bodyPr/>
+                    <a:lstStyle/>
+                    <a:p>
+                      <a:pPr algn="just">
+                        <a:lnSpc>
+                          <a:spcPct val="107000"/>
+                        </a:lnSpc>
+                        <a:spcAft>
+                          <a:spcPts val="800"/>
+                        </a:spcAft>
+                        <a:buNone/>
+                      </a:pPr>
+                      <a:r>
+                        <a:rPr lang="ru-RU" sz="1100" kern="100">
+                          <a:effectLst/>
+                        </a:rPr>
+                        <a:t>Высокое качество ответов, универсальность, поддержка диалога, генерация учебных материалов</a:t>
+                      </a:r>
+                      <a:endParaRPr lang="ru-RU" sz="1100" kern="100">
+                        <a:effectLst/>
+                        <a:latin typeface="Aptos" panose="020B0004020202020204" pitchFamily="34" charset="0"/>
+                        <a:ea typeface="Aptos" panose="020B0004020202020204" pitchFamily="34" charset="0"/>
+                        <a:cs typeface="Arial" panose="020B0604020202020204" pitchFamily="34" charset="0"/>
+                      </a:endParaRPr>
+                    </a:p>
+                  </a:txBody>
+                  <a:tcPr marL="41375" marR="41375" marT="0" marB="0"/>
+                </a:tc>
+                <a:tc>
+                  <a:txBody>
+                    <a:bodyPr/>
+                    <a:lstStyle/>
+                    <a:p>
+                      <a:pPr algn="just">
+                        <a:lnSpc>
+                          <a:spcPct val="107000"/>
+                        </a:lnSpc>
+                        <a:spcAft>
+                          <a:spcPts val="800"/>
+                        </a:spcAft>
+                        <a:buNone/>
+                      </a:pPr>
+                      <a:r>
+                        <a:rPr lang="ru-RU" sz="1100" kern="100">
+                          <a:effectLst/>
+                        </a:rPr>
+                        <a:t>Возможны «галлюцинации», риск списывания, платные функции</a:t>
+                      </a:r>
+                      <a:endParaRPr lang="ru-RU" sz="1100" kern="100">
+                        <a:effectLst/>
+                        <a:latin typeface="Aptos" panose="020B0004020202020204" pitchFamily="34" charset="0"/>
+                        <a:ea typeface="Aptos" panose="020B0004020202020204" pitchFamily="34" charset="0"/>
+                        <a:cs typeface="Arial" panose="020B0604020202020204" pitchFamily="34" charset="0"/>
+                      </a:endParaRPr>
+                    </a:p>
+                  </a:txBody>
+                  <a:tcPr marL="41375" marR="41375" marT="0" marB="0"/>
+                </a:tc>
+                <a:tc>
+                  <a:txBody>
+                    <a:bodyPr/>
+                    <a:lstStyle/>
+                    <a:p>
+                      <a:pPr algn="just">
+                        <a:lnSpc>
+                          <a:spcPct val="107000"/>
+                        </a:lnSpc>
+                        <a:spcAft>
+                          <a:spcPts val="800"/>
+                        </a:spcAft>
+                        <a:buNone/>
+                      </a:pPr>
+                      <a:r>
+                        <a:rPr lang="ru-RU" sz="1100" kern="100">
+                          <a:effectLst/>
+                        </a:rPr>
+                        <a:t>Персонализация обучения, помощь в написании работ, объяснение сложных тем</a:t>
+                      </a:r>
+                      <a:endParaRPr lang="ru-RU" sz="1100" kern="100">
+                        <a:effectLst/>
+                        <a:latin typeface="Aptos" panose="020B0004020202020204" pitchFamily="34" charset="0"/>
+                        <a:ea typeface="Aptos" panose="020B0004020202020204" pitchFamily="34" charset="0"/>
+                        <a:cs typeface="Arial" panose="020B0604020202020204" pitchFamily="34" charset="0"/>
+                      </a:endParaRPr>
+                    </a:p>
+                  </a:txBody>
+                  <a:tcPr marL="41375" marR="41375" marT="0" marB="0"/>
+                </a:tc>
+                <a:extLst>
+                  <a:ext uri="{0D108BD9-81ED-4DB2-BD59-A6C34878D82A}">
+                    <a16:rowId xmlns:a16="http://schemas.microsoft.com/office/drawing/2014/main" val="2344786376"/>
+                  </a:ext>
+                </a:extLst>
+              </a:tr>
+              <a:tr h="785611">
+                <a:tc>
+                  <a:txBody>
+                    <a:bodyPr/>
+                    <a:lstStyle/>
+                    <a:p>
+                      <a:pPr algn="just">
+                        <a:lnSpc>
+                          <a:spcPct val="107000"/>
+                        </a:lnSpc>
+                        <a:spcAft>
+                          <a:spcPts val="800"/>
+                        </a:spcAft>
+                        <a:buNone/>
+                      </a:pPr>
+                      <a:r>
+                        <a:rPr lang="en-US" sz="1100" kern="100">
+                          <a:effectLst/>
+                        </a:rPr>
+                        <a:t>DeepSeek</a:t>
+                      </a:r>
+                      <a:endParaRPr lang="ru-RU" sz="1100" kern="100">
+                        <a:effectLst/>
+                        <a:latin typeface="Aptos" panose="020B0004020202020204" pitchFamily="34" charset="0"/>
+                        <a:ea typeface="Aptos" panose="020B0004020202020204" pitchFamily="34" charset="0"/>
+                        <a:cs typeface="Arial" panose="020B0604020202020204" pitchFamily="34" charset="0"/>
+                      </a:endParaRPr>
+                    </a:p>
+                  </a:txBody>
+                  <a:tcPr marL="41375" marR="41375" marT="0" marB="0"/>
+                </a:tc>
+                <a:tc>
+                  <a:txBody>
+                    <a:bodyPr/>
+                    <a:lstStyle/>
+                    <a:p>
+                      <a:pPr algn="just">
+                        <a:lnSpc>
+                          <a:spcPct val="107000"/>
+                        </a:lnSpc>
+                        <a:spcAft>
+                          <a:spcPts val="800"/>
+                        </a:spcAft>
+                        <a:buNone/>
+                      </a:pPr>
+                      <a:r>
+                        <a:rPr lang="en-US" sz="1100" kern="100">
+                          <a:effectLst/>
+                        </a:rPr>
+                        <a:t>DeepSeek AI</a:t>
+                      </a:r>
+                      <a:endParaRPr lang="ru-RU" sz="1100" kern="100">
+                        <a:effectLst/>
+                        <a:latin typeface="Aptos" panose="020B0004020202020204" pitchFamily="34" charset="0"/>
+                        <a:ea typeface="Aptos" panose="020B0004020202020204" pitchFamily="34" charset="0"/>
+                        <a:cs typeface="Arial" panose="020B0604020202020204" pitchFamily="34" charset="0"/>
+                      </a:endParaRPr>
+                    </a:p>
+                  </a:txBody>
+                  <a:tcPr marL="41375" marR="41375" marT="0" marB="0"/>
+                </a:tc>
+                <a:tc>
+                  <a:txBody>
+                    <a:bodyPr/>
+                    <a:lstStyle/>
+                    <a:p>
+                      <a:pPr algn="just">
+                        <a:lnSpc>
+                          <a:spcPct val="107000"/>
+                        </a:lnSpc>
+                        <a:spcAft>
+                          <a:spcPts val="800"/>
+                        </a:spcAft>
+                        <a:buNone/>
+                      </a:pPr>
+                      <a:r>
+                        <a:rPr lang="ru-RU" sz="1100" kern="100">
+                          <a:effectLst/>
+                        </a:rPr>
+                        <a:t>Сильные математические и логические способности, хорош в программировании</a:t>
+                      </a:r>
+                      <a:endParaRPr lang="ru-RU" sz="1100" kern="100">
+                        <a:effectLst/>
+                        <a:latin typeface="Aptos" panose="020B0004020202020204" pitchFamily="34" charset="0"/>
+                        <a:ea typeface="Aptos" panose="020B0004020202020204" pitchFamily="34" charset="0"/>
+                        <a:cs typeface="Arial" panose="020B0604020202020204" pitchFamily="34" charset="0"/>
+                      </a:endParaRPr>
+                    </a:p>
+                  </a:txBody>
+                  <a:tcPr marL="41375" marR="41375" marT="0" marB="0"/>
+                </a:tc>
+                <a:tc>
+                  <a:txBody>
+                    <a:bodyPr/>
+                    <a:lstStyle/>
+                    <a:p>
+                      <a:pPr algn="just">
+                        <a:lnSpc>
+                          <a:spcPct val="107000"/>
+                        </a:lnSpc>
+                        <a:spcAft>
+                          <a:spcPts val="800"/>
+                        </a:spcAft>
+                        <a:buNone/>
+                      </a:pPr>
+                      <a:r>
+                        <a:rPr lang="ru-RU" sz="1100" kern="100">
+                          <a:effectLst/>
+                        </a:rPr>
+                        <a:t>Менее развитый диалог, ограниченная адаптация под образование</a:t>
+                      </a:r>
+                      <a:endParaRPr lang="ru-RU" sz="1100" kern="100">
+                        <a:effectLst/>
+                        <a:latin typeface="Aptos" panose="020B0004020202020204" pitchFamily="34" charset="0"/>
+                        <a:ea typeface="Aptos" panose="020B0004020202020204" pitchFamily="34" charset="0"/>
+                        <a:cs typeface="Arial" panose="020B0604020202020204" pitchFamily="34" charset="0"/>
+                      </a:endParaRPr>
+                    </a:p>
+                  </a:txBody>
+                  <a:tcPr marL="41375" marR="41375" marT="0" marB="0"/>
+                </a:tc>
+                <a:tc>
+                  <a:txBody>
+                    <a:bodyPr/>
+                    <a:lstStyle/>
+                    <a:p>
+                      <a:pPr algn="just">
+                        <a:lnSpc>
+                          <a:spcPct val="107000"/>
+                        </a:lnSpc>
+                        <a:spcAft>
+                          <a:spcPts val="800"/>
+                        </a:spcAft>
+                        <a:buNone/>
+                      </a:pPr>
+                      <a:r>
+                        <a:rPr lang="ru-RU" sz="1100" kern="100">
+                          <a:effectLst/>
+                        </a:rPr>
+                        <a:t>Полезен для технических дисциплин и решения задач</a:t>
+                      </a:r>
+                      <a:endParaRPr lang="ru-RU" sz="1100" kern="100">
+                        <a:effectLst/>
+                        <a:latin typeface="Aptos" panose="020B0004020202020204" pitchFamily="34" charset="0"/>
+                        <a:ea typeface="Aptos" panose="020B0004020202020204" pitchFamily="34" charset="0"/>
+                        <a:cs typeface="Arial" panose="020B0604020202020204" pitchFamily="34" charset="0"/>
+                      </a:endParaRPr>
+                    </a:p>
+                  </a:txBody>
+                  <a:tcPr marL="41375" marR="41375" marT="0" marB="0"/>
+                </a:tc>
+                <a:extLst>
+                  <a:ext uri="{0D108BD9-81ED-4DB2-BD59-A6C34878D82A}">
+                    <a16:rowId xmlns:a16="http://schemas.microsoft.com/office/drawing/2014/main" val="693744201"/>
+                  </a:ext>
+                </a:extLst>
+              </a:tr>
+              <a:tr h="653755">
+                <a:tc>
+                  <a:txBody>
+                    <a:bodyPr/>
+                    <a:lstStyle/>
+                    <a:p>
+                      <a:pPr algn="just">
+                        <a:lnSpc>
+                          <a:spcPct val="107000"/>
+                        </a:lnSpc>
+                        <a:spcAft>
+                          <a:spcPts val="800"/>
+                        </a:spcAft>
+                        <a:buNone/>
+                      </a:pPr>
+                      <a:r>
+                        <a:rPr lang="en-US" sz="1100" kern="100">
+                          <a:effectLst/>
+                        </a:rPr>
+                        <a:t>Qwen</a:t>
+                      </a:r>
+                      <a:endParaRPr lang="ru-RU" sz="1100" kern="100">
+                        <a:effectLst/>
+                        <a:latin typeface="Aptos" panose="020B0004020202020204" pitchFamily="34" charset="0"/>
+                        <a:ea typeface="Aptos" panose="020B0004020202020204" pitchFamily="34" charset="0"/>
+                        <a:cs typeface="Arial" panose="020B0604020202020204" pitchFamily="34" charset="0"/>
+                      </a:endParaRPr>
+                    </a:p>
+                  </a:txBody>
+                  <a:tcPr marL="41375" marR="41375" marT="0" marB="0"/>
+                </a:tc>
+                <a:tc>
+                  <a:txBody>
+                    <a:bodyPr/>
+                    <a:lstStyle/>
+                    <a:p>
+                      <a:pPr algn="just">
+                        <a:lnSpc>
+                          <a:spcPct val="107000"/>
+                        </a:lnSpc>
+                        <a:spcAft>
+                          <a:spcPts val="800"/>
+                        </a:spcAft>
+                        <a:buNone/>
+                      </a:pPr>
+                      <a:r>
+                        <a:rPr lang="en-US" sz="1100" kern="100">
+                          <a:effectLst/>
+                        </a:rPr>
+                        <a:t>Alibaba</a:t>
+                      </a:r>
+                      <a:endParaRPr lang="ru-RU" sz="1100" kern="100">
+                        <a:effectLst/>
+                        <a:latin typeface="Aptos" panose="020B0004020202020204" pitchFamily="34" charset="0"/>
+                        <a:ea typeface="Aptos" panose="020B0004020202020204" pitchFamily="34" charset="0"/>
+                        <a:cs typeface="Arial" panose="020B0604020202020204" pitchFamily="34" charset="0"/>
+                      </a:endParaRPr>
+                    </a:p>
+                  </a:txBody>
+                  <a:tcPr marL="41375" marR="41375" marT="0" marB="0"/>
+                </a:tc>
+                <a:tc>
+                  <a:txBody>
+                    <a:bodyPr/>
+                    <a:lstStyle/>
+                    <a:p>
+                      <a:pPr algn="just">
+                        <a:lnSpc>
+                          <a:spcPct val="107000"/>
+                        </a:lnSpc>
+                        <a:spcAft>
+                          <a:spcPts val="800"/>
+                        </a:spcAft>
+                        <a:buNone/>
+                      </a:pPr>
+                      <a:r>
+                        <a:rPr lang="ru-RU" sz="1100" kern="100">
+                          <a:effectLst/>
+                        </a:rPr>
+                        <a:t>Хорошая мультимодальность, поддержка разных языков</a:t>
+                      </a:r>
+                      <a:endParaRPr lang="ru-RU" sz="1100" kern="100">
+                        <a:effectLst/>
+                        <a:latin typeface="Aptos" panose="020B0004020202020204" pitchFamily="34" charset="0"/>
+                        <a:ea typeface="Aptos" panose="020B0004020202020204" pitchFamily="34" charset="0"/>
+                        <a:cs typeface="Arial" panose="020B0604020202020204" pitchFamily="34" charset="0"/>
+                      </a:endParaRPr>
+                    </a:p>
+                  </a:txBody>
+                  <a:tcPr marL="41375" marR="41375" marT="0" marB="0"/>
+                </a:tc>
+                <a:tc>
+                  <a:txBody>
+                    <a:bodyPr/>
+                    <a:lstStyle/>
+                    <a:p>
+                      <a:pPr algn="just">
+                        <a:lnSpc>
+                          <a:spcPct val="107000"/>
+                        </a:lnSpc>
+                        <a:spcAft>
+                          <a:spcPts val="800"/>
+                        </a:spcAft>
+                        <a:buNone/>
+                      </a:pPr>
+                      <a:r>
+                        <a:rPr lang="ru-RU" sz="1100" kern="100">
+                          <a:effectLst/>
+                        </a:rPr>
+                        <a:t>Меньше распространён в образовании, чем ChatGPT</a:t>
+                      </a:r>
+                      <a:endParaRPr lang="ru-RU" sz="1100" kern="100">
+                        <a:effectLst/>
+                        <a:latin typeface="Aptos" panose="020B0004020202020204" pitchFamily="34" charset="0"/>
+                        <a:ea typeface="Aptos" panose="020B0004020202020204" pitchFamily="34" charset="0"/>
+                        <a:cs typeface="Arial" panose="020B0604020202020204" pitchFamily="34" charset="0"/>
+                      </a:endParaRPr>
+                    </a:p>
+                  </a:txBody>
+                  <a:tcPr marL="41375" marR="41375" marT="0" marB="0"/>
+                </a:tc>
+                <a:tc>
+                  <a:txBody>
+                    <a:bodyPr/>
+                    <a:lstStyle/>
+                    <a:p>
+                      <a:pPr algn="just">
+                        <a:lnSpc>
+                          <a:spcPct val="107000"/>
+                        </a:lnSpc>
+                        <a:spcAft>
+                          <a:spcPts val="800"/>
+                        </a:spcAft>
+                        <a:buNone/>
+                      </a:pPr>
+                      <a:r>
+                        <a:rPr lang="ru-RU" sz="1100" kern="100">
+                          <a:effectLst/>
+                        </a:rPr>
+                        <a:t>Подходит для работы с текстами и мультимедиа в обучении</a:t>
+                      </a:r>
+                      <a:endParaRPr lang="ru-RU" sz="1100" kern="100">
+                        <a:effectLst/>
+                        <a:latin typeface="Aptos" panose="020B0004020202020204" pitchFamily="34" charset="0"/>
+                        <a:ea typeface="Aptos" panose="020B0004020202020204" pitchFamily="34" charset="0"/>
+                        <a:cs typeface="Arial" panose="020B0604020202020204" pitchFamily="34" charset="0"/>
+                      </a:endParaRPr>
+                    </a:p>
+                  </a:txBody>
+                  <a:tcPr marL="41375" marR="41375" marT="0" marB="0"/>
+                </a:tc>
+                <a:extLst>
+                  <a:ext uri="{0D108BD9-81ED-4DB2-BD59-A6C34878D82A}">
+                    <a16:rowId xmlns:a16="http://schemas.microsoft.com/office/drawing/2014/main" val="3407876208"/>
+                  </a:ext>
+                </a:extLst>
+              </a:tr>
+              <a:tr h="785611">
+                <a:tc>
+                  <a:txBody>
+                    <a:bodyPr/>
+                    <a:lstStyle/>
+                    <a:p>
+                      <a:pPr algn="just">
+                        <a:lnSpc>
+                          <a:spcPct val="107000"/>
+                        </a:lnSpc>
+                        <a:spcAft>
+                          <a:spcPts val="800"/>
+                        </a:spcAft>
+                        <a:buNone/>
+                      </a:pPr>
+                      <a:r>
+                        <a:rPr lang="en-US" sz="1100" kern="100">
+                          <a:effectLst/>
+                        </a:rPr>
+                        <a:t>Gemini</a:t>
+                      </a:r>
+                      <a:endParaRPr lang="ru-RU" sz="1100" kern="100">
+                        <a:effectLst/>
+                        <a:latin typeface="Aptos" panose="020B0004020202020204" pitchFamily="34" charset="0"/>
+                        <a:ea typeface="Aptos" panose="020B0004020202020204" pitchFamily="34" charset="0"/>
+                        <a:cs typeface="Arial" panose="020B0604020202020204" pitchFamily="34" charset="0"/>
+                      </a:endParaRPr>
+                    </a:p>
+                  </a:txBody>
+                  <a:tcPr marL="41375" marR="41375" marT="0" marB="0"/>
+                </a:tc>
+                <a:tc>
+                  <a:txBody>
+                    <a:bodyPr/>
+                    <a:lstStyle/>
+                    <a:p>
+                      <a:pPr algn="just">
+                        <a:lnSpc>
+                          <a:spcPct val="107000"/>
+                        </a:lnSpc>
+                        <a:spcAft>
+                          <a:spcPts val="800"/>
+                        </a:spcAft>
+                        <a:buNone/>
+                      </a:pPr>
+                      <a:r>
+                        <a:rPr lang="en-US" sz="1100" kern="100">
+                          <a:effectLst/>
+                        </a:rPr>
+                        <a:t>Google</a:t>
+                      </a:r>
+                      <a:endParaRPr lang="ru-RU" sz="1100" kern="100">
+                        <a:effectLst/>
+                        <a:latin typeface="Aptos" panose="020B0004020202020204" pitchFamily="34" charset="0"/>
+                        <a:ea typeface="Aptos" panose="020B0004020202020204" pitchFamily="34" charset="0"/>
+                        <a:cs typeface="Arial" panose="020B0604020202020204" pitchFamily="34" charset="0"/>
+                      </a:endParaRPr>
+                    </a:p>
+                  </a:txBody>
+                  <a:tcPr marL="41375" marR="41375" marT="0" marB="0"/>
+                </a:tc>
+                <a:tc>
+                  <a:txBody>
+                    <a:bodyPr/>
+                    <a:lstStyle/>
+                    <a:p>
+                      <a:pPr algn="just">
+                        <a:lnSpc>
+                          <a:spcPct val="107000"/>
+                        </a:lnSpc>
+                        <a:spcAft>
+                          <a:spcPts val="800"/>
+                        </a:spcAft>
+                        <a:buNone/>
+                      </a:pPr>
+                      <a:r>
+                        <a:rPr lang="ru-RU" sz="1100" kern="100">
+                          <a:effectLst/>
+                        </a:rPr>
+                        <a:t>Доступ к актуальной информации, мультимодальность</a:t>
+                      </a:r>
+                      <a:endParaRPr lang="ru-RU" sz="1100" kern="100">
+                        <a:effectLst/>
+                        <a:latin typeface="Aptos" panose="020B0004020202020204" pitchFamily="34" charset="0"/>
+                        <a:ea typeface="Aptos" panose="020B0004020202020204" pitchFamily="34" charset="0"/>
+                        <a:cs typeface="Arial" panose="020B0604020202020204" pitchFamily="34" charset="0"/>
+                      </a:endParaRPr>
+                    </a:p>
+                  </a:txBody>
+                  <a:tcPr marL="41375" marR="41375" marT="0" marB="0"/>
+                </a:tc>
+                <a:tc>
+                  <a:txBody>
+                    <a:bodyPr/>
+                    <a:lstStyle/>
+                    <a:p>
+                      <a:pPr algn="just">
+                        <a:lnSpc>
+                          <a:spcPct val="107000"/>
+                        </a:lnSpc>
+                        <a:spcAft>
+                          <a:spcPts val="800"/>
+                        </a:spcAft>
+                        <a:buNone/>
+                      </a:pPr>
+                      <a:r>
+                        <a:rPr lang="ru-RU" sz="1100" kern="100">
+                          <a:effectLst/>
+                        </a:rPr>
+                        <a:t>Иногда поверхностные ответы, зависит от экосистемы Google</a:t>
+                      </a:r>
+                      <a:endParaRPr lang="ru-RU" sz="1100" kern="100">
+                        <a:effectLst/>
+                        <a:latin typeface="Aptos" panose="020B0004020202020204" pitchFamily="34" charset="0"/>
+                        <a:ea typeface="Aptos" panose="020B0004020202020204" pitchFamily="34" charset="0"/>
+                        <a:cs typeface="Arial" panose="020B0604020202020204" pitchFamily="34" charset="0"/>
+                      </a:endParaRPr>
+                    </a:p>
+                  </a:txBody>
+                  <a:tcPr marL="41375" marR="41375" marT="0" marB="0"/>
+                </a:tc>
+                <a:tc>
+                  <a:txBody>
+                    <a:bodyPr/>
+                    <a:lstStyle/>
+                    <a:p>
+                      <a:pPr algn="just">
+                        <a:lnSpc>
+                          <a:spcPct val="107000"/>
+                        </a:lnSpc>
+                        <a:spcAft>
+                          <a:spcPts val="800"/>
+                        </a:spcAft>
+                        <a:buNone/>
+                      </a:pPr>
+                      <a:r>
+                        <a:rPr lang="ru-RU" sz="1100" kern="100">
+                          <a:effectLst/>
+                        </a:rPr>
+                        <a:t>Полезен для поиска и анализа информации, обучения через примеры</a:t>
+                      </a:r>
+                      <a:endParaRPr lang="ru-RU" sz="1100" kern="100">
+                        <a:effectLst/>
+                        <a:latin typeface="Aptos" panose="020B0004020202020204" pitchFamily="34" charset="0"/>
+                        <a:ea typeface="Aptos" panose="020B0004020202020204" pitchFamily="34" charset="0"/>
+                        <a:cs typeface="Arial" panose="020B0604020202020204" pitchFamily="34" charset="0"/>
+                      </a:endParaRPr>
+                    </a:p>
+                  </a:txBody>
+                  <a:tcPr marL="41375" marR="41375" marT="0" marB="0"/>
+                </a:tc>
+                <a:extLst>
+                  <a:ext uri="{0D108BD9-81ED-4DB2-BD59-A6C34878D82A}">
+                    <a16:rowId xmlns:a16="http://schemas.microsoft.com/office/drawing/2014/main" val="3005292699"/>
+                  </a:ext>
+                </a:extLst>
+              </a:tr>
+              <a:tr h="653755">
+                <a:tc>
+                  <a:txBody>
+                    <a:bodyPr/>
+                    <a:lstStyle/>
+                    <a:p>
+                      <a:pPr algn="just">
+                        <a:lnSpc>
+                          <a:spcPct val="107000"/>
+                        </a:lnSpc>
+                        <a:spcAft>
+                          <a:spcPts val="800"/>
+                        </a:spcAft>
+                        <a:buNone/>
+                      </a:pPr>
+                      <a:r>
+                        <a:rPr lang="ru-RU" sz="1100" kern="100">
+                          <a:effectLst/>
+                        </a:rPr>
+                        <a:t>Алиса</a:t>
+                      </a:r>
+                      <a:endParaRPr lang="ru-RU" sz="1100" kern="100">
+                        <a:effectLst/>
+                        <a:latin typeface="Aptos" panose="020B0004020202020204" pitchFamily="34" charset="0"/>
+                        <a:ea typeface="Aptos" panose="020B0004020202020204" pitchFamily="34" charset="0"/>
+                        <a:cs typeface="Arial" panose="020B0604020202020204" pitchFamily="34" charset="0"/>
+                      </a:endParaRPr>
+                    </a:p>
+                  </a:txBody>
+                  <a:tcPr marL="41375" marR="41375" marT="0" marB="0"/>
+                </a:tc>
+                <a:tc>
+                  <a:txBody>
+                    <a:bodyPr/>
+                    <a:lstStyle/>
+                    <a:p>
+                      <a:pPr algn="just">
+                        <a:lnSpc>
+                          <a:spcPct val="107000"/>
+                        </a:lnSpc>
+                        <a:spcAft>
+                          <a:spcPts val="800"/>
+                        </a:spcAft>
+                        <a:buNone/>
+                      </a:pPr>
+                      <a:r>
+                        <a:rPr lang="en-US" sz="1100" kern="100">
+                          <a:effectLst/>
+                        </a:rPr>
+                        <a:t>Яндекс</a:t>
+                      </a:r>
+                      <a:endParaRPr lang="ru-RU" sz="1100" kern="100">
+                        <a:effectLst/>
+                        <a:latin typeface="Aptos" panose="020B0004020202020204" pitchFamily="34" charset="0"/>
+                        <a:ea typeface="Aptos" panose="020B0004020202020204" pitchFamily="34" charset="0"/>
+                        <a:cs typeface="Arial" panose="020B0604020202020204" pitchFamily="34" charset="0"/>
+                      </a:endParaRPr>
+                    </a:p>
+                  </a:txBody>
+                  <a:tcPr marL="41375" marR="41375" marT="0" marB="0"/>
+                </a:tc>
+                <a:tc>
+                  <a:txBody>
+                    <a:bodyPr/>
+                    <a:lstStyle/>
+                    <a:p>
+                      <a:pPr algn="just">
+                        <a:lnSpc>
+                          <a:spcPct val="107000"/>
+                        </a:lnSpc>
+                        <a:spcAft>
+                          <a:spcPts val="800"/>
+                        </a:spcAft>
+                        <a:buNone/>
+                      </a:pPr>
+                      <a:r>
+                        <a:rPr lang="ru-RU" sz="1100" kern="100">
+                          <a:effectLst/>
+                        </a:rPr>
+                        <a:t>Хорошо понимает русский язык, доступность</a:t>
+                      </a:r>
+                      <a:endParaRPr lang="ru-RU" sz="1100" kern="100">
+                        <a:effectLst/>
+                        <a:latin typeface="Aptos" panose="020B0004020202020204" pitchFamily="34" charset="0"/>
+                        <a:ea typeface="Aptos" panose="020B0004020202020204" pitchFamily="34" charset="0"/>
+                        <a:cs typeface="Arial" panose="020B0604020202020204" pitchFamily="34" charset="0"/>
+                      </a:endParaRPr>
+                    </a:p>
+                  </a:txBody>
+                  <a:tcPr marL="41375" marR="41375" marT="0" marB="0"/>
+                </a:tc>
+                <a:tc>
+                  <a:txBody>
+                    <a:bodyPr/>
+                    <a:lstStyle/>
+                    <a:p>
+                      <a:pPr algn="just">
+                        <a:lnSpc>
+                          <a:spcPct val="107000"/>
+                        </a:lnSpc>
+                        <a:spcAft>
+                          <a:spcPts val="800"/>
+                        </a:spcAft>
+                        <a:buNone/>
+                      </a:pPr>
+                      <a:r>
+                        <a:rPr lang="ru-RU" sz="1100" kern="100">
+                          <a:effectLst/>
+                        </a:rPr>
+                        <a:t>Ограниченная глубина ответов, не специализирована как LLM</a:t>
+                      </a:r>
+                      <a:endParaRPr lang="ru-RU" sz="1100" kern="100">
+                        <a:effectLst/>
+                        <a:latin typeface="Aptos" panose="020B0004020202020204" pitchFamily="34" charset="0"/>
+                        <a:ea typeface="Aptos" panose="020B0004020202020204" pitchFamily="34" charset="0"/>
+                        <a:cs typeface="Arial" panose="020B0604020202020204" pitchFamily="34" charset="0"/>
+                      </a:endParaRPr>
+                    </a:p>
+                  </a:txBody>
+                  <a:tcPr marL="41375" marR="41375" marT="0" marB="0"/>
+                </a:tc>
+                <a:tc>
+                  <a:txBody>
+                    <a:bodyPr/>
+                    <a:lstStyle/>
+                    <a:p>
+                      <a:pPr algn="just">
+                        <a:lnSpc>
+                          <a:spcPct val="107000"/>
+                        </a:lnSpc>
+                        <a:spcAft>
+                          <a:spcPts val="800"/>
+                        </a:spcAft>
+                        <a:buNone/>
+                      </a:pPr>
+                      <a:r>
+                        <a:rPr lang="ru-RU" sz="1100" kern="100">
+                          <a:effectLst/>
+                        </a:rPr>
+                        <a:t>Подходит для школьного уровня, быстрые ответы и помощь</a:t>
+                      </a:r>
+                      <a:endParaRPr lang="ru-RU" sz="1100" kern="100">
+                        <a:effectLst/>
+                        <a:latin typeface="Aptos" panose="020B0004020202020204" pitchFamily="34" charset="0"/>
+                        <a:ea typeface="Aptos" panose="020B0004020202020204" pitchFamily="34" charset="0"/>
+                        <a:cs typeface="Arial" panose="020B0604020202020204" pitchFamily="34" charset="0"/>
+                      </a:endParaRPr>
+                    </a:p>
+                  </a:txBody>
+                  <a:tcPr marL="41375" marR="41375" marT="0" marB="0"/>
+                </a:tc>
+                <a:extLst>
+                  <a:ext uri="{0D108BD9-81ED-4DB2-BD59-A6C34878D82A}">
+                    <a16:rowId xmlns:a16="http://schemas.microsoft.com/office/drawing/2014/main" val="275627292"/>
+                  </a:ext>
+                </a:extLst>
+              </a:tr>
+              <a:tr h="653755">
+                <a:tc>
+                  <a:txBody>
+                    <a:bodyPr/>
+                    <a:lstStyle/>
+                    <a:p>
+                      <a:pPr algn="just">
+                        <a:lnSpc>
+                          <a:spcPct val="107000"/>
+                        </a:lnSpc>
+                        <a:spcAft>
+                          <a:spcPts val="800"/>
+                        </a:spcAft>
+                        <a:buNone/>
+                      </a:pPr>
+                      <a:r>
+                        <a:rPr lang="ru-RU" sz="1100" kern="100">
+                          <a:effectLst/>
+                        </a:rPr>
+                        <a:t>Гигачат</a:t>
+                      </a:r>
+                      <a:endParaRPr lang="ru-RU" sz="1100" kern="100">
+                        <a:effectLst/>
+                        <a:latin typeface="Aptos" panose="020B0004020202020204" pitchFamily="34" charset="0"/>
+                        <a:ea typeface="Aptos" panose="020B0004020202020204" pitchFamily="34" charset="0"/>
+                        <a:cs typeface="Arial" panose="020B0604020202020204" pitchFamily="34" charset="0"/>
+                      </a:endParaRPr>
+                    </a:p>
+                  </a:txBody>
+                  <a:tcPr marL="41375" marR="41375" marT="0" marB="0"/>
+                </a:tc>
+                <a:tc>
+                  <a:txBody>
+                    <a:bodyPr/>
+                    <a:lstStyle/>
+                    <a:p>
+                      <a:pPr algn="just">
+                        <a:lnSpc>
+                          <a:spcPct val="107000"/>
+                        </a:lnSpc>
+                        <a:spcAft>
+                          <a:spcPts val="800"/>
+                        </a:spcAft>
+                        <a:buNone/>
+                      </a:pPr>
+                      <a:r>
+                        <a:rPr lang="en-US" sz="1100" kern="100">
+                          <a:effectLst/>
+                        </a:rPr>
+                        <a:t>Сбер</a:t>
+                      </a:r>
+                      <a:endParaRPr lang="ru-RU" sz="1100" kern="100">
+                        <a:effectLst/>
+                        <a:latin typeface="Aptos" panose="020B0004020202020204" pitchFamily="34" charset="0"/>
+                        <a:ea typeface="Aptos" panose="020B0004020202020204" pitchFamily="34" charset="0"/>
+                        <a:cs typeface="Arial" panose="020B0604020202020204" pitchFamily="34" charset="0"/>
+                      </a:endParaRPr>
+                    </a:p>
+                  </a:txBody>
+                  <a:tcPr marL="41375" marR="41375" marT="0" marB="0"/>
+                </a:tc>
+                <a:tc>
+                  <a:txBody>
+                    <a:bodyPr/>
+                    <a:lstStyle/>
+                    <a:p>
+                      <a:pPr algn="just">
+                        <a:lnSpc>
+                          <a:spcPct val="107000"/>
+                        </a:lnSpc>
+                        <a:spcAft>
+                          <a:spcPts val="800"/>
+                        </a:spcAft>
+                        <a:buNone/>
+                      </a:pPr>
+                      <a:r>
+                        <a:rPr lang="ru-RU" sz="1100" kern="100">
+                          <a:effectLst/>
+                        </a:rPr>
+                        <a:t>Адаптация под русский язык и контекст, локальные решения</a:t>
+                      </a:r>
+                      <a:endParaRPr lang="ru-RU" sz="1100" kern="100">
+                        <a:effectLst/>
+                        <a:latin typeface="Aptos" panose="020B0004020202020204" pitchFamily="34" charset="0"/>
+                        <a:ea typeface="Aptos" panose="020B0004020202020204" pitchFamily="34" charset="0"/>
+                        <a:cs typeface="Arial" panose="020B0604020202020204" pitchFamily="34" charset="0"/>
+                      </a:endParaRPr>
+                    </a:p>
+                  </a:txBody>
+                  <a:tcPr marL="41375" marR="41375" marT="0" marB="0"/>
+                </a:tc>
+                <a:tc>
+                  <a:txBody>
+                    <a:bodyPr/>
+                    <a:lstStyle/>
+                    <a:p>
+                      <a:pPr algn="just">
+                        <a:lnSpc>
+                          <a:spcPct val="107000"/>
+                        </a:lnSpc>
+                        <a:spcAft>
+                          <a:spcPts val="800"/>
+                        </a:spcAft>
+                        <a:buNone/>
+                      </a:pPr>
+                      <a:r>
+                        <a:rPr lang="ru-RU" sz="1100" kern="100">
+                          <a:effectLst/>
+                        </a:rPr>
+                        <a:t>Ограниченность по сравнению с западными моделями</a:t>
+                      </a:r>
+                      <a:endParaRPr lang="ru-RU" sz="1100" kern="100">
+                        <a:effectLst/>
+                        <a:latin typeface="Aptos" panose="020B0004020202020204" pitchFamily="34" charset="0"/>
+                        <a:ea typeface="Aptos" panose="020B0004020202020204" pitchFamily="34" charset="0"/>
+                        <a:cs typeface="Arial" panose="020B0604020202020204" pitchFamily="34" charset="0"/>
+                      </a:endParaRPr>
+                    </a:p>
+                  </a:txBody>
+                  <a:tcPr marL="41375" marR="41375" marT="0" marB="0"/>
+                </a:tc>
+                <a:tc>
+                  <a:txBody>
+                    <a:bodyPr/>
+                    <a:lstStyle/>
+                    <a:p>
+                      <a:pPr algn="just">
+                        <a:lnSpc>
+                          <a:spcPct val="107000"/>
+                        </a:lnSpc>
+                        <a:spcAft>
+                          <a:spcPts val="800"/>
+                        </a:spcAft>
+                        <a:buNone/>
+                      </a:pPr>
+                      <a:r>
+                        <a:rPr lang="ru-RU" sz="1100" kern="100" dirty="0">
+                          <a:effectLst/>
+                        </a:rPr>
+                        <a:t>Перспективен для внедрения в российские образовательные системы</a:t>
+                      </a:r>
+                      <a:endParaRPr lang="ru-RU" sz="1100" kern="100" dirty="0">
+                        <a:effectLst/>
+                        <a:latin typeface="Aptos" panose="020B0004020202020204" pitchFamily="34" charset="0"/>
+                        <a:ea typeface="Aptos" panose="020B0004020202020204" pitchFamily="34" charset="0"/>
+                        <a:cs typeface="Arial" panose="020B0604020202020204" pitchFamily="34" charset="0"/>
+                      </a:endParaRPr>
+                    </a:p>
+                  </a:txBody>
+                  <a:tcPr marL="41375" marR="41375" marT="0" marB="0"/>
+                </a:tc>
+                <a:extLst>
+                  <a:ext uri="{0D108BD9-81ED-4DB2-BD59-A6C34878D82A}">
+                    <a16:rowId xmlns:a16="http://schemas.microsoft.com/office/drawing/2014/main" val="3954165451"/>
+                  </a:ext>
+                </a:extLst>
+              </a:tr>
+            </a:tbl>
+          </a:graphicData>
+        </a:graphic>
+      </p:graphicFrame>
+    </p:spTree>
+    <p:extLst>
+      <p:ext uri="{BB962C8B-B14F-4D97-AF65-F5344CB8AC3E}">
+        <p14:creationId xmlns:p14="http://schemas.microsoft.com/office/powerpoint/2010/main" val="1803503472"/>
+      </p:ext>
+    </p:extLst>
+  </p:cSld>
+  <p:clrMapOvr>
+    <a:masterClrMapping/>
+  </p:clrMapOvr>
+</p:sld>
+</file>
+
+<file path=ppt/slides/slide8.xml><?xml version="1.0" encoding="utf-8"?>
+<p:sld xmlns:a="http://schemas.openxmlformats.org/drawingml/2006/main" xmlns:r="http://schemas.openxmlformats.org/officeDocument/2006/relationships" xmlns:p="http://schemas.openxmlformats.org/presentationml/2006/main">
+  <p:cSld>
+    <p:spTree>
+      <p:nvGrpSpPr>
+        <p:cNvPr id="1" name=""/>
+        <p:cNvGrpSpPr/>
+        <p:nvPr/>
+      </p:nvGrpSpPr>
+      <p:grpSpPr>
+        <a:xfrm>
+          <a:off x="0" y="0"/>
+          <a:ext cx="0" cy="0"/>
+          <a:chOff x="0" y="0"/>
+          <a:chExt cx="0" cy="0"/>
+        </a:xfrm>
+      </p:grpSpPr>
+      <p:sp>
+        <p:nvSpPr>
+          <p:cNvPr id="4" name="Заголовок 3">
+            <a:extLst>
+              <a:ext uri="{FF2B5EF4-FFF2-40B4-BE49-F238E27FC236}">
+                <a16:creationId xmlns:a16="http://schemas.microsoft.com/office/drawing/2014/main" id="{CAA4AF3A-8A25-D1D0-70CE-1DA6C8C02E2A}"/>
+              </a:ext>
+            </a:extLst>
+          </p:cNvPr>
+          <p:cNvSpPr>
+            <a:spLocks noGrp="1"/>
+          </p:cNvSpPr>
+          <p:nvPr>
+            <p:ph type="title"/>
+          </p:nvPr>
+        </p:nvSpPr>
+        <p:spPr>
+          <a:xfrm>
+            <a:off x="2499360" y="2301240"/>
+            <a:ext cx="9692640" cy="1325562"/>
+          </a:xfrm>
+        </p:spPr>
+        <p:txBody>
+          <a:bodyPr/>
+          <a:lstStyle/>
+          <a:p>
+            <a:r>
+              <a:rPr lang="ru-RU" dirty="0"/>
+              <a:t>Спасибо за внимание</a:t>
+            </a:r>
+          </a:p>
+        </p:txBody>
+      </p:sp>
+    </p:spTree>
+    <p:extLst>
+      <p:ext uri="{BB962C8B-B14F-4D97-AF65-F5344CB8AC3E}">
+        <p14:creationId xmlns:p14="http://schemas.microsoft.com/office/powerpoint/2010/main" val="1048406369"/>
+      </p:ext>
+    </p:extLst>
+  </p:cSld>
+  <p:clrMapOvr>
+    <a:masterClrMapping/>
+  </p:clrMapOvr>
+</p:sld>
+</file>
+
 <file path=ppt/theme/theme1.xml><?xml version="1.0" encoding="utf-8"?>
-<a:theme xmlns:a="http://schemas.openxmlformats.org/drawingml/2006/main" name="Тема Office">
+<a:theme xmlns:a="http://schemas.openxmlformats.org/drawingml/2006/main" name="Вид">
   <a:themeElements>
-    <a:clrScheme name="Стандартная">
+    <a:clrScheme name="Вид">
       <a:dk1>
-        <a:sysClr val="windowText" lastClr="000000"/>
+        <a:srgbClr val="000000"/>
       </a:dk1>
       <a:lt1>
-        <a:sysClr val="window" lastClr="FFFFFF"/>
+        <a:srgbClr val="FFFFFF"/>
       </a:lt1>
       <a:dk2>
-        <a:srgbClr val="0E2841"/>
+        <a:srgbClr val="46464A"/>
       </a:dk2>
       <a:lt2>
-        <a:srgbClr val="E8E8E8"/>
+        <a:srgbClr val="D6D3CC"/>
       </a:lt2>
       <a:accent1>
-        <a:srgbClr val="156082"/>
+        <a:srgbClr val="6F6F74"/>
       </a:accent1>
       <a:accent2>
-        <a:srgbClr val="E97132"/>
+        <a:srgbClr val="92A9B9"/>
       </a:accent2>
       <a:accent3>
-        <a:srgbClr val="196B24"/>
+        <a:srgbClr val="A7B789"/>
       </a:accent3>
       <a:accent4>
-        <a:srgbClr val="0F9ED5"/>
+        <a:srgbClr val="B9A489"/>
       </a:accent4>
       <a:accent5>
-        <a:srgbClr val="A02B93"/>
+        <a:srgbClr val="8D6374"/>
       </a:accent5>
       <a:accent6>
-        <a:srgbClr val="4EA72E"/>
+        <a:srgbClr val="9B7362"/>
       </a:accent6>
       <a:hlink>
-        <a:srgbClr val="467886"/>
+        <a:srgbClr val="67AABF"/>
       </a:hlink>
       <a:folHlink>
-        <a:srgbClr val="96607D"/>
+        <a:srgbClr val="ABAFA5"/>
       </a:folHlink>
     </a:clrScheme>
-    <a:fontScheme name="Стандартная">
+    <a:fontScheme name="Вид">
       <a:majorFont>
-        <a:latin typeface="Aptos Display" panose="02110004020202020204"/>
+        <a:latin typeface="Century Schoolbook" panose="02040604050505020304"/>
         <a:ea typeface=""/>
         <a:cs typeface=""/>
-        <a:font script="Jpan" typeface="游ゴシック Light"/>
+        <a:font script="Jpan" typeface="ＭＳ ゴシック"/>
         <a:font script="Hang" typeface="맑은 고딕"/>
-        <a:font script="Hans" typeface="等线 Light"/>
+        <a:font script="Hans" typeface="宋体"/>
         <a:font script="Hant" typeface="新細明體"/>
-        <a:font script="Arab" typeface="Times New Roman"/>
-        <a:font script="Hebr" typeface="Times New Roman"/>
-        <a:font script="Thai" typeface="Angsana New"/>
-        <a:font script="Ethi" typeface="Nyala"/>
-        <a:font script="Beng" typeface="Vrinda"/>
-        <a:font script="Gujr" typeface="Shruti"/>
-        <a:font script="Khmr" typeface="MoolBoran"/>
-        <a:font script="Knda" typeface="Tunga"/>
-        <a:font script="Guru" typeface="Raavi"/>
-        <a:font script="Cans" typeface="Euphemia"/>
-        <a:font script="Cher" typeface="Plantagenet Cherokee"/>
-        <a:font script="Yiii" typeface="Microsoft Yi Baiti"/>
-        <a:font script="Tibt" typeface="Microsoft Himalaya"/>
-        <a:font script="Thaa" typeface="MV Boli"/>
-        <a:font script="Deva" typeface="Mangal"/>
-        <a:font script="Telu" typeface="Gautami"/>
-        <a:font script="Taml" typeface="Latha"/>
-        <a:font script="Syrc" typeface="Estrangelo Edessa"/>
-        <a:font script="Orya" typeface="Kalinga"/>
-        <a:font script="Mlym" typeface="Kartika"/>
-        <a:font script="Laoo" typeface="DokChampa"/>
-        <a:font script="Sinh" typeface="Iskoola Pota"/>
-        <a:font script="Mong" typeface="Mongolian Baiti"/>
-        <a:font script="Viet" typeface="Times New Roman"/>
-        <a:font script="Uigh" typeface="Microsoft Uighur"/>
-        <a:font script="Geor" typeface="Sylfaen"/>
-        <a:font script="Armn" typeface="Arial"/>
-        <a:font script="Bugi" typeface="Leelawadee UI"/>
-        <a:font script="Bopo" typeface="Microsoft JhengHei"/>
-        <a:font script="Java" typeface="Javanese Text"/>
-        <a:font script="Lisu" typeface="Segoe UI"/>
-        <a:font script="Mymr" typeface="Myanmar Text"/>
-        <a:font script="Nkoo" typeface="Ebrima"/>
-        <a:font script="Olck" typeface="Nirmala UI"/>
-        <a:font script="Osma" typeface="Ebrima"/>
-        <a:font script="Phag" typeface="Phagspa"/>
-        <a:font script="Syrn" typeface="Estrangelo Edessa"/>
-        <a:font script="Syrj" typeface="Estrangelo Edessa"/>
-        <a:font script="Syre" typeface="Estrangelo Edessa"/>
-        <a:font script="Sora" typeface="Nirmala UI"/>
-        <a:font script="Tale" typeface="Microsoft Tai Le"/>
-        <a:font script="Talu" typeface="Microsoft New Tai Lue"/>
-        <a:font script="Tfng" typeface="Ebrima"/>
-      </a:majorFont>
-      <a:minorFont>
-        <a:latin typeface="Aptos" panose="02110004020202020204"/>
-        <a:ea typeface=""/>
-        <a:cs typeface=""/>
-        <a:font script="Jpan" typeface="游ゴシック"/>
-        <a:font script="Hang" typeface="맑은 고딕"/>
-        <a:font script="Hans" typeface="等线"/>
-        <a:font script="Hant" typeface="新細明體"/>
-        <a:font script="Arab" typeface="Arial"/>
-        <a:font script="Hebr" typeface="Arial"/>
-        <a:font script="Thai" typeface="Cordia New"/>
+        <a:font script="Arab" typeface="Tahoma"/>
+        <a:font script="Hebr" typeface="Gisha"/>
+        <a:font script="Thai" typeface="DilleniaUPC"/>
         <a:font script="Ethi" typeface="Nyala"/>
         <a:font script="Beng" typeface="Vrinda"/>
         <a:font script="Gujr" typeface="Shruti"/>
@@ -4156,107 +5947,86 @@
         <a:font script="Laoo" typeface="DokChampa"/>
         <a:font script="Sinh" typeface="Iskoola Pota"/>
         <a:font script="Mong" typeface="Mongolian Baiti"/>
-        <a:font script="Viet" typeface="Arial"/>
+        <a:font script="Viet" typeface="Tahoma"/>
         <a:font script="Uigh" typeface="Microsoft Uighur"/>
         <a:font script="Geor" typeface="Sylfaen"/>
-        <a:font script="Armn" typeface="Arial"/>
-        <a:font script="Bugi" typeface="Leelawadee UI"/>
-        <a:font script="Bopo" typeface="Microsoft JhengHei"/>
-        <a:font script="Java" typeface="Javanese Text"/>
-        <a:font script="Lisu" typeface="Segoe UI"/>
-        <a:font script="Mymr" typeface="Myanmar Text"/>
-        <a:font script="Nkoo" typeface="Ebrima"/>
-        <a:font script="Olck" typeface="Nirmala UI"/>
-        <a:font script="Osma" typeface="Ebrima"/>
-        <a:font script="Phag" typeface="Phagspa"/>
-        <a:font script="Syrn" typeface="Estrangelo Edessa"/>
-        <a:font script="Syrj" typeface="Estrangelo Edessa"/>
-        <a:font script="Syre" typeface="Estrangelo Edessa"/>
-        <a:font script="Sora" typeface="Nirmala UI"/>
-        <a:font script="Tale" typeface="Microsoft Tai Le"/>
-        <a:font script="Talu" typeface="Microsoft New Tai Lue"/>
-        <a:font script="Tfng" typeface="Ebrima"/>
+      </a:majorFont>
+      <a:minorFont>
+        <a:latin typeface="Century Schoolbook" panose="02040604050505020304"/>
+        <a:ea typeface=""/>
+        <a:cs typeface=""/>
+        <a:font script="Jpan" typeface="ＭＳ ゴシック"/>
+        <a:font script="Hang" typeface="맑은 고딕"/>
+        <a:font script="Hans" typeface="宋体"/>
+        <a:font script="Hant" typeface="新細明體"/>
+        <a:font script="Arab" typeface="Tahoma"/>
+        <a:font script="Hebr" typeface="Gisha"/>
+        <a:font script="Thai" typeface="DilleniaUPC"/>
+        <a:font script="Ethi" typeface="Nyala"/>
+        <a:font script="Beng" typeface="Vrinda"/>
+        <a:font script="Gujr" typeface="Shruti"/>
+        <a:font script="Khmr" typeface="DaunPenh"/>
+        <a:font script="Knda" typeface="Tunga"/>
+        <a:font script="Guru" typeface="Raavi"/>
+        <a:font script="Cans" typeface="Euphemia"/>
+        <a:font script="Cher" typeface="Plantagenet Cherokee"/>
+        <a:font script="Yiii" typeface="Microsoft Yi Baiti"/>
+        <a:font script="Tibt" typeface="Microsoft Himalaya"/>
+        <a:font script="Thaa" typeface="MV Boli"/>
+        <a:font script="Deva" typeface="Mangal"/>
+        <a:font script="Telu" typeface="Gautami"/>
+        <a:font script="Taml" typeface="Latha"/>
+        <a:font script="Syrc" typeface="Estrangelo Edessa"/>
+        <a:font script="Orya" typeface="Kalinga"/>
+        <a:font script="Mlym" typeface="Kartika"/>
+        <a:font script="Laoo" typeface="DokChampa"/>
+        <a:font script="Sinh" typeface="Iskoola Pota"/>
+        <a:font script="Mong" typeface="Mongolian Baiti"/>
+        <a:font script="Viet" typeface="Verdana"/>
+        <a:font script="Uigh" typeface="Microsoft Uighur"/>
+        <a:font script="Geor" typeface="Sylfaen"/>
       </a:minorFont>
     </a:fontScheme>
-    <a:fmtScheme name="Стандартная">
+    <a:fmtScheme name="Вид">
       <a:fillStyleLst>
         <a:solidFill>
           <a:schemeClr val="phClr"/>
         </a:solidFill>
-        <a:gradFill rotWithShape="1">
-          <a:gsLst>
-            <a:gs pos="0">
-              <a:schemeClr val="phClr">
-                <a:lumMod val="110000"/>
-                <a:satMod val="105000"/>
-                <a:tint val="67000"/>
-              </a:schemeClr>
-            </a:gs>
-            <a:gs pos="50000">
-              <a:schemeClr val="phClr">
-                <a:lumMod val="105000"/>
-                <a:satMod val="103000"/>
-                <a:tint val="73000"/>
-              </a:schemeClr>
-            </a:gs>
-            <a:gs pos="100000">
-              <a:schemeClr val="phClr">
-                <a:lumMod val="105000"/>
-                <a:satMod val="109000"/>
-                <a:tint val="81000"/>
-              </a:schemeClr>
-            </a:gs>
-          </a:gsLst>
-          <a:lin ang="5400000" scaled="0"/>
-        </a:gradFill>
-        <a:gradFill rotWithShape="1">
-          <a:gsLst>
-            <a:gs pos="0">
-              <a:schemeClr val="phClr">
-                <a:satMod val="103000"/>
-                <a:lumMod val="102000"/>
-                <a:tint val="94000"/>
-              </a:schemeClr>
-            </a:gs>
-            <a:gs pos="50000">
-              <a:schemeClr val="phClr">
-                <a:satMod val="110000"/>
-                <a:lumMod val="100000"/>
-                <a:shade val="100000"/>
-              </a:schemeClr>
-            </a:gs>
-            <a:gs pos="100000">
-              <a:schemeClr val="phClr">
-                <a:lumMod val="99000"/>
-                <a:satMod val="120000"/>
-                <a:shade val="78000"/>
-              </a:schemeClr>
-            </a:gs>
-          </a:gsLst>
-          <a:lin ang="5400000" scaled="0"/>
-        </a:gradFill>
+        <a:solidFill>
+          <a:schemeClr val="phClr">
+            <a:tint val="60000"/>
+            <a:satMod val="120000"/>
+          </a:schemeClr>
+        </a:solidFill>
+        <a:solidFill>
+          <a:schemeClr val="phClr">
+            <a:shade val="75000"/>
+            <a:satMod val="160000"/>
+          </a:schemeClr>
+        </a:solidFill>
       </a:fillStyleLst>
       <a:lnStyleLst>
-        <a:ln w="12700" cap="flat" cmpd="sng" algn="ctr">
+        <a:ln w="9525" cap="flat" cmpd="sng" algn="ctr">
           <a:solidFill>
             <a:schemeClr val="phClr"/>
           </a:solidFill>
           <a:prstDash val="solid"/>
-          <a:miter lim="800000"/>
         </a:ln>
-        <a:ln w="19050" cap="flat" cmpd="sng" algn="ctr">
+        <a:ln w="13970" cap="flat" cmpd="sng" algn="ctr">
           <a:solidFill>
             <a:schemeClr val="phClr"/>
           </a:solidFill>
           <a:prstDash val="solid"/>
-          <a:miter lim="800000"/>
         </a:ln>
-        <a:ln w="25400" cap="flat" cmpd="sng" algn="ctr">
+        <a:ln w="17145" cap="flat" cmpd="sng" algn="ctr">
           <a:solidFill>
-            <a:schemeClr val="phClr"/>
+            <a:schemeClr val="phClr">
+              <a:shade val="95000"/>
+              <a:alpha val="95000"/>
+              <a:satMod val="150000"/>
+            </a:schemeClr>
           </a:solidFill>
           <a:prstDash val="solid"/>
-          <a:miter lim="800000"/>
         </a:ln>
       </a:lnStyleLst>
       <a:effectStyleLst>
@@ -4264,16 +6034,52 @@
           <a:effectLst/>
         </a:effectStyle>
         <a:effectStyle>
-          <a:effectLst/>
+          <a:effectLst>
+            <a:outerShdw blurRad="50800" dist="15240" dir="5400000" algn="tl" rotWithShape="0">
+              <a:srgbClr val="000000">
+                <a:alpha val="75000"/>
+              </a:srgbClr>
+            </a:outerShdw>
+          </a:effectLst>
+          <a:scene3d>
+            <a:camera prst="orthographicFront">
+              <a:rot lat="0" lon="0" rev="0"/>
+            </a:camera>
+            <a:lightRig rig="brightRoom" dir="tl"/>
+          </a:scene3d>
+          <a:sp3d contourW="9525" prstMaterial="flat">
+            <a:bevelT w="0" h="0" prst="coolSlant"/>
+            <a:contourClr>
+              <a:schemeClr val="phClr">
+                <a:shade val="35000"/>
+                <a:satMod val="130000"/>
+              </a:schemeClr>
+            </a:contourClr>
+          </a:sp3d>
         </a:effectStyle>
         <a:effectStyle>
           <a:effectLst>
-            <a:outerShdw blurRad="57150" dist="19050" dir="5400000" algn="ctr" rotWithShape="0">
+            <a:outerShdw blurRad="76200" dist="25400" dir="5400000" algn="tl" rotWithShape="0">
               <a:srgbClr val="000000">
-                <a:alpha val="63000"/>
+                <a:alpha val="55000"/>
               </a:srgbClr>
             </a:outerShdw>
           </a:effectLst>
+          <a:scene3d>
+            <a:camera prst="orthographicFront">
+              <a:rot lat="0" lon="0" rev="0"/>
+            </a:camera>
+            <a:lightRig rig="brightRoom" dir="tl"/>
+          </a:scene3d>
+          <a:sp3d contourW="19050" prstMaterial="flat">
+            <a:bevelT w="0" h="0" prst="coolSlant"/>
+            <a:contourClr>
+              <a:schemeClr val="phClr">
+                <a:shade val="25000"/>
+                <a:satMod val="140000"/>
+              </a:schemeClr>
+            </a:contourClr>
+          </a:sp3d>
         </a:effectStyle>
       </a:effectStyleLst>
       <a:bgFillStyleLst>
@@ -4290,57 +6096,32 @@
           <a:gsLst>
             <a:gs pos="0">
               <a:schemeClr val="phClr">
-                <a:tint val="93000"/>
-                <a:satMod val="150000"/>
+                <a:tint val="94000"/>
                 <a:shade val="98000"/>
+                <a:satMod val="130000"/>
                 <a:lumMod val="102000"/>
-              </a:schemeClr>
-            </a:gs>
-            <a:gs pos="50000">
-              <a:schemeClr val="phClr">
-                <a:tint val="98000"/>
-                <a:satMod val="130000"/>
-                <a:shade val="90000"/>
-                <a:lumMod val="103000"/>
               </a:schemeClr>
             </a:gs>
             <a:gs pos="100000">
               <a:schemeClr val="phClr">
-                <a:shade val="63000"/>
-                <a:satMod val="120000"/>
+                <a:tint val="98000"/>
+                <a:shade val="78000"/>
+                <a:satMod val="140000"/>
               </a:schemeClr>
             </a:gs>
           </a:gsLst>
-          <a:lin ang="5400000" scaled="0"/>
+          <a:path path="circle">
+            <a:fillToRect l="100000" t="100000" r="100000" b="100000"/>
+          </a:path>
         </a:gradFill>
       </a:bgFillStyleLst>
     </a:fmtScheme>
   </a:themeElements>
-  <a:objectDefaults>
-    <a:lnDef>
-      <a:spPr/>
-      <a:bodyPr/>
-      <a:lstStyle/>
-      <a:style>
-        <a:lnRef idx="2">
-          <a:schemeClr val="accent1"/>
-        </a:lnRef>
-        <a:fillRef idx="0">
-          <a:schemeClr val="accent1"/>
-        </a:fillRef>
-        <a:effectRef idx="1">
-          <a:schemeClr val="accent1"/>
-        </a:effectRef>
-        <a:fontRef idx="minor">
-          <a:schemeClr val="tx1"/>
-        </a:fontRef>
-      </a:style>
-    </a:lnDef>
-  </a:objectDefaults>
+  <a:objectDefaults/>
   <a:extraClrSchemeLst/>
   <a:extLst>
     <a:ext uri="{05A4C25C-085E-4340-85A3-A5531E510DB2}">
-      <thm15:themeFamily xmlns:thm15="http://schemas.microsoft.com/office/thememl/2012/main" name="Office Theme" id="{2E142A2C-CD16-42D6-873A-C26D2A0506FA}" vid="{1BDDFF52-6CD6-40A5-AB3C-68EB2F1E4D0A}"/>
+      <thm15:themeFamily xmlns:thm15="http://schemas.microsoft.com/office/thememl/2012/main" name="View" id="{BA0EB5A6-F2D4-4F82-977B-64ADEE4A2A69}" vid="{3969A8A2-35DB-4E3B-8885-16FD20568674}"/>
     </a:ext>
   </a:extLst>
 </a:theme>

--- a/Курс 3/УНС/ИД23-1_Маслов_АН_УНС.pptx
+++ b/Курс 3/УНС/ИД23-1_Маслов_АН_УНС.pptx
@@ -119,6 +119,6212 @@
 </p:presentation>
 </file>
 
+<file path=ppt/diagrams/colors1.xml><?xml version="1.0" encoding="utf-8"?>
+<dgm:colorsDef xmlns:dgm="http://schemas.openxmlformats.org/drawingml/2006/diagram" xmlns:a="http://schemas.openxmlformats.org/drawingml/2006/main" uniqueId="urn:microsoft.com/office/officeart/2018/5/colors/Iconchunking_neutralicontext_colorful1">
+  <dgm:title val=""/>
+  <dgm:desc val=""/>
+  <dgm:catLst>
+    <dgm:cat type="colorful" pri="10100"/>
+  </dgm:catLst>
+  <dgm:styleLbl name="node0">
+    <dgm:fillClrLst meth="repeat">
+      <a:schemeClr val="accent1"/>
+    </dgm:fillClrLst>
+    <dgm:linClrLst meth="repeat">
+      <a:schemeClr val="lt1"/>
+    </dgm:linClrLst>
+    <dgm:effectClrLst/>
+    <dgm:txLinClrLst/>
+    <dgm:txFillClrLst/>
+    <dgm:txEffectClrLst/>
+  </dgm:styleLbl>
+  <dgm:styleLbl name="node1">
+    <dgm:fillClrLst meth="repeat">
+      <a:schemeClr val="bg1"/>
+    </dgm:fillClrLst>
+    <dgm:linClrLst meth="repeat">
+      <a:schemeClr val="lt1">
+        <a:alpha val="0"/>
+      </a:schemeClr>
+    </dgm:linClrLst>
+    <dgm:effectClrLst/>
+    <dgm:txLinClrLst/>
+    <dgm:txFillClrLst meth="repeat">
+      <a:schemeClr val="dk1"/>
+    </dgm:txFillClrLst>
+    <dgm:txEffectClrLst/>
+  </dgm:styleLbl>
+  <dgm:styleLbl name="alignNode1">
+    <dgm:fillClrLst meth="repeat">
+      <a:schemeClr val="accent2"/>
+      <a:schemeClr val="accent3"/>
+      <a:schemeClr val="accent4"/>
+      <a:schemeClr val="accent5"/>
+      <a:schemeClr val="accent6"/>
+    </dgm:fillClrLst>
+    <dgm:linClrLst meth="repeat">
+      <a:schemeClr val="accent2"/>
+      <a:schemeClr val="accent3"/>
+      <a:schemeClr val="accent4"/>
+      <a:schemeClr val="accent5"/>
+      <a:schemeClr val="accent6"/>
+    </dgm:linClrLst>
+    <dgm:effectClrLst/>
+    <dgm:txLinClrLst/>
+    <dgm:txFillClrLst/>
+    <dgm:txEffectClrLst/>
+  </dgm:styleLbl>
+  <dgm:styleLbl name="lnNode1">
+    <dgm:fillClrLst meth="repeat">
+      <a:schemeClr val="accent2"/>
+      <a:schemeClr val="accent3"/>
+      <a:schemeClr val="accent4"/>
+      <a:schemeClr val="accent5"/>
+      <a:schemeClr val="accent6"/>
+    </dgm:fillClrLst>
+    <dgm:linClrLst meth="repeat">
+      <a:schemeClr val="lt1"/>
+    </dgm:linClrLst>
+    <dgm:effectClrLst/>
+    <dgm:txLinClrLst/>
+    <dgm:txFillClrLst/>
+    <dgm:txEffectClrLst/>
+  </dgm:styleLbl>
+  <dgm:styleLbl name="vennNode1">
+    <dgm:fillClrLst meth="repeat">
+      <a:schemeClr val="accent2">
+        <a:alpha val="50000"/>
+      </a:schemeClr>
+      <a:schemeClr val="accent3">
+        <a:alpha val="50000"/>
+      </a:schemeClr>
+      <a:schemeClr val="accent4">
+        <a:alpha val="50000"/>
+      </a:schemeClr>
+      <a:schemeClr val="accent5">
+        <a:alpha val="50000"/>
+      </a:schemeClr>
+      <a:schemeClr val="accent6">
+        <a:alpha val="50000"/>
+      </a:schemeClr>
+    </dgm:fillClrLst>
+    <dgm:linClrLst meth="repeat">
+      <a:schemeClr val="lt1"/>
+    </dgm:linClrLst>
+    <dgm:effectClrLst/>
+    <dgm:txLinClrLst/>
+    <dgm:txFillClrLst/>
+    <dgm:txEffectClrLst/>
+  </dgm:styleLbl>
+  <dgm:styleLbl name="node2">
+    <dgm:fillClrLst>
+      <a:schemeClr val="accent2"/>
+    </dgm:fillClrLst>
+    <dgm:linClrLst meth="repeat">
+      <a:schemeClr val="lt1"/>
+    </dgm:linClrLst>
+    <dgm:effectClrLst/>
+    <dgm:txLinClrLst/>
+    <dgm:txFillClrLst/>
+    <dgm:txEffectClrLst/>
+  </dgm:styleLbl>
+  <dgm:styleLbl name="node3">
+    <dgm:fillClrLst>
+      <a:schemeClr val="accent3"/>
+    </dgm:fillClrLst>
+    <dgm:linClrLst meth="repeat">
+      <a:schemeClr val="lt1"/>
+    </dgm:linClrLst>
+    <dgm:effectClrLst/>
+    <dgm:txLinClrLst/>
+    <dgm:txFillClrLst/>
+    <dgm:txEffectClrLst/>
+  </dgm:styleLbl>
+  <dgm:styleLbl name="node4">
+    <dgm:fillClrLst>
+      <a:schemeClr val="accent4"/>
+    </dgm:fillClrLst>
+    <dgm:linClrLst meth="repeat">
+      <a:schemeClr val="lt1"/>
+    </dgm:linClrLst>
+    <dgm:effectClrLst/>
+    <dgm:txLinClrLst/>
+    <dgm:txFillClrLst/>
+    <dgm:txEffectClrLst/>
+  </dgm:styleLbl>
+  <dgm:styleLbl name="fgImgPlace1">
+    <dgm:fillClrLst meth="repeat">
+      <a:schemeClr val="accent2">
+        <a:tint val="50000"/>
+      </a:schemeClr>
+      <a:schemeClr val="accent3">
+        <a:tint val="50000"/>
+      </a:schemeClr>
+      <a:schemeClr val="accent4">
+        <a:tint val="50000"/>
+      </a:schemeClr>
+      <a:schemeClr val="accent5">
+        <a:tint val="50000"/>
+      </a:schemeClr>
+      <a:schemeClr val="accent6">
+        <a:tint val="50000"/>
+      </a:schemeClr>
+    </dgm:fillClrLst>
+    <dgm:linClrLst meth="repeat">
+      <a:schemeClr val="lt1"/>
+    </dgm:linClrLst>
+    <dgm:effectClrLst/>
+    <dgm:txLinClrLst/>
+    <dgm:txFillClrLst meth="repeat">
+      <a:schemeClr val="lt1"/>
+    </dgm:txFillClrLst>
+    <dgm:txEffectClrLst/>
+  </dgm:styleLbl>
+  <dgm:styleLbl name="alignImgPlace1">
+    <dgm:fillClrLst>
+      <a:schemeClr val="accent1">
+        <a:tint val="50000"/>
+      </a:schemeClr>
+      <a:schemeClr val="accent2">
+        <a:tint val="20000"/>
+      </a:schemeClr>
+    </dgm:fillClrLst>
+    <dgm:linClrLst meth="repeat">
+      <a:schemeClr val="lt1"/>
+    </dgm:linClrLst>
+    <dgm:effectClrLst/>
+    <dgm:txLinClrLst/>
+    <dgm:txFillClrLst meth="repeat">
+      <a:schemeClr val="lt1"/>
+    </dgm:txFillClrLst>
+    <dgm:txEffectClrLst/>
+  </dgm:styleLbl>
+  <dgm:styleLbl name="bgImgPlace1">
+    <dgm:fillClrLst>
+      <a:schemeClr val="accent1">
+        <a:tint val="50000"/>
+      </a:schemeClr>
+      <a:schemeClr val="accent2">
+        <a:tint val="20000"/>
+      </a:schemeClr>
+    </dgm:fillClrLst>
+    <dgm:linClrLst meth="repeat">
+      <a:schemeClr val="lt1"/>
+    </dgm:linClrLst>
+    <dgm:effectClrLst/>
+    <dgm:txLinClrLst/>
+    <dgm:txFillClrLst meth="repeat">
+      <a:schemeClr val="lt1"/>
+    </dgm:txFillClrLst>
+    <dgm:txEffectClrLst/>
+  </dgm:styleLbl>
+  <dgm:styleLbl name="sibTrans2D1">
+    <dgm:fillClrLst meth="repeat">
+      <a:schemeClr val="accent2"/>
+      <a:schemeClr val="accent3"/>
+      <a:schemeClr val="accent4"/>
+      <a:schemeClr val="accent5"/>
+      <a:schemeClr val="accent6"/>
+    </dgm:fillClrLst>
+    <dgm:linClrLst meth="cycle">
+      <a:schemeClr val="lt1"/>
+    </dgm:linClrLst>
+    <dgm:effectClrLst/>
+    <dgm:txLinClrLst/>
+    <dgm:txFillClrLst/>
+    <dgm:txEffectClrLst/>
+  </dgm:styleLbl>
+  <dgm:styleLbl name="fgSibTrans2D1">
+    <dgm:fillClrLst meth="repeat">
+      <a:schemeClr val="accent2"/>
+      <a:schemeClr val="accent3"/>
+      <a:schemeClr val="accent4"/>
+      <a:schemeClr val="accent5"/>
+      <a:schemeClr val="accent6"/>
+    </dgm:fillClrLst>
+    <dgm:linClrLst meth="cycle">
+      <a:schemeClr val="lt1"/>
+    </dgm:linClrLst>
+    <dgm:effectClrLst/>
+    <dgm:txLinClrLst/>
+    <dgm:txFillClrLst meth="repeat">
+      <a:schemeClr val="lt1"/>
+    </dgm:txFillClrLst>
+    <dgm:txEffectClrLst/>
+  </dgm:styleLbl>
+  <dgm:styleLbl name="bgSibTrans2D1">
+    <dgm:fillClrLst meth="repeat">
+      <a:schemeClr val="accent2"/>
+      <a:schemeClr val="accent3"/>
+      <a:schemeClr val="accent4"/>
+      <a:schemeClr val="accent5"/>
+      <a:schemeClr val="accent6"/>
+    </dgm:fillClrLst>
+    <dgm:linClrLst meth="cycle">
+      <a:schemeClr val="lt1"/>
+    </dgm:linClrLst>
+    <dgm:effectClrLst/>
+    <dgm:txLinClrLst/>
+    <dgm:txFillClrLst meth="repeat">
+      <a:schemeClr val="lt1"/>
+    </dgm:txFillClrLst>
+    <dgm:txEffectClrLst/>
+  </dgm:styleLbl>
+  <dgm:styleLbl name="sibTrans1D1">
+    <dgm:fillClrLst meth="repeat">
+      <a:schemeClr val="accent2"/>
+      <a:schemeClr val="accent3"/>
+      <a:schemeClr val="accent4"/>
+      <a:schemeClr val="accent5"/>
+      <a:schemeClr val="accent6"/>
+    </dgm:fillClrLst>
+    <dgm:linClrLst meth="repeat">
+      <a:schemeClr val="accent2"/>
+      <a:schemeClr val="accent3"/>
+      <a:schemeClr val="accent4"/>
+      <a:schemeClr val="accent5"/>
+      <a:schemeClr val="accent6"/>
+    </dgm:linClrLst>
+    <dgm:effectClrLst/>
+    <dgm:txLinClrLst/>
+    <dgm:txFillClrLst meth="repeat">
+      <a:schemeClr val="tx1"/>
+    </dgm:txFillClrLst>
+    <dgm:txEffectClrLst/>
+  </dgm:styleLbl>
+  <dgm:styleLbl name="callout">
+    <dgm:fillClrLst meth="repeat">
+      <a:schemeClr val="accent2"/>
+    </dgm:fillClrLst>
+    <dgm:linClrLst meth="repeat">
+      <a:schemeClr val="accent2">
+        <a:tint val="50000"/>
+      </a:schemeClr>
+    </dgm:linClrLst>
+    <dgm:effectClrLst/>
+    <dgm:txLinClrLst/>
+    <dgm:txFillClrLst meth="repeat">
+      <a:schemeClr val="tx1"/>
+    </dgm:txFillClrLst>
+    <dgm:txEffectClrLst/>
+  </dgm:styleLbl>
+  <dgm:styleLbl name="asst0">
+    <dgm:fillClrLst meth="repeat">
+      <a:schemeClr val="accent1"/>
+    </dgm:fillClrLst>
+    <dgm:linClrLst meth="repeat">
+      <a:schemeClr val="lt1"/>
+    </dgm:linClrLst>
+    <dgm:effectClrLst/>
+    <dgm:txLinClrLst/>
+    <dgm:txFillClrLst/>
+    <dgm:txEffectClrLst/>
+  </dgm:styleLbl>
+  <dgm:styleLbl name="asst1">
+    <dgm:fillClrLst meth="repeat">
+      <a:schemeClr val="accent2"/>
+    </dgm:fillClrLst>
+    <dgm:linClrLst meth="repeat">
+      <a:schemeClr val="lt1"/>
+    </dgm:linClrLst>
+    <dgm:effectClrLst/>
+    <dgm:txLinClrLst/>
+    <dgm:txFillClrLst/>
+    <dgm:txEffectClrLst/>
+  </dgm:styleLbl>
+  <dgm:styleLbl name="asst2">
+    <dgm:fillClrLst>
+      <a:schemeClr val="accent3"/>
+    </dgm:fillClrLst>
+    <dgm:linClrLst meth="repeat">
+      <a:schemeClr val="lt1"/>
+    </dgm:linClrLst>
+    <dgm:effectClrLst/>
+    <dgm:txLinClrLst/>
+    <dgm:txFillClrLst/>
+    <dgm:txEffectClrLst/>
+  </dgm:styleLbl>
+  <dgm:styleLbl name="asst3">
+    <dgm:fillClrLst>
+      <a:schemeClr val="accent4"/>
+    </dgm:fillClrLst>
+    <dgm:linClrLst meth="repeat">
+      <a:schemeClr val="lt1"/>
+    </dgm:linClrLst>
+    <dgm:effectClrLst/>
+    <dgm:txLinClrLst/>
+    <dgm:txFillClrLst/>
+    <dgm:txEffectClrLst/>
+  </dgm:styleLbl>
+  <dgm:styleLbl name="asst4">
+    <dgm:fillClrLst>
+      <a:schemeClr val="accent5"/>
+    </dgm:fillClrLst>
+    <dgm:linClrLst meth="repeat">
+      <a:schemeClr val="lt1"/>
+    </dgm:linClrLst>
+    <dgm:effectClrLst/>
+    <dgm:txLinClrLst/>
+    <dgm:txFillClrLst/>
+    <dgm:txEffectClrLst/>
+  </dgm:styleLbl>
+  <dgm:styleLbl name="parChTrans2D1">
+    <dgm:fillClrLst meth="repeat">
+      <a:schemeClr val="accent2"/>
+    </dgm:fillClrLst>
+    <dgm:linClrLst meth="repeat">
+      <a:schemeClr val="lt1"/>
+    </dgm:linClrLst>
+    <dgm:effectClrLst/>
+    <dgm:txLinClrLst/>
+    <dgm:txFillClrLst meth="repeat">
+      <a:schemeClr val="lt1"/>
+    </dgm:txFillClrLst>
+    <dgm:txEffectClrLst/>
+  </dgm:styleLbl>
+  <dgm:styleLbl name="parChTrans2D2">
+    <dgm:fillClrLst meth="repeat">
+      <a:schemeClr val="accent3"/>
+    </dgm:fillClrLst>
+    <dgm:linClrLst meth="repeat">
+      <a:schemeClr val="lt1"/>
+    </dgm:linClrLst>
+    <dgm:effectClrLst/>
+    <dgm:txLinClrLst/>
+    <dgm:txFillClrLst/>
+    <dgm:txEffectClrLst/>
+  </dgm:styleLbl>
+  <dgm:styleLbl name="parChTrans2D3">
+    <dgm:fillClrLst meth="repeat">
+      <a:schemeClr val="accent4"/>
+    </dgm:fillClrLst>
+    <dgm:linClrLst meth="repeat">
+      <a:schemeClr val="lt1"/>
+    </dgm:linClrLst>
+    <dgm:effectClrLst/>
+    <dgm:txLinClrLst/>
+    <dgm:txFillClrLst/>
+    <dgm:txEffectClrLst/>
+  </dgm:styleLbl>
+  <dgm:styleLbl name="parChTrans2D4">
+    <dgm:fillClrLst meth="repeat">
+      <a:schemeClr val="accent5"/>
+    </dgm:fillClrLst>
+    <dgm:linClrLst meth="repeat">
+      <a:schemeClr val="lt1"/>
+    </dgm:linClrLst>
+    <dgm:effectClrLst/>
+    <dgm:txLinClrLst/>
+    <dgm:txFillClrLst meth="repeat">
+      <a:schemeClr val="lt1"/>
+    </dgm:txFillClrLst>
+    <dgm:txEffectClrLst/>
+  </dgm:styleLbl>
+  <dgm:styleLbl name="parChTrans1D1">
+    <dgm:fillClrLst meth="repeat">
+      <a:schemeClr val="accent2"/>
+    </dgm:fillClrLst>
+    <dgm:linClrLst meth="repeat">
+      <a:schemeClr val="accent1"/>
+    </dgm:linClrLst>
+    <dgm:effectClrLst/>
+    <dgm:txLinClrLst/>
+    <dgm:txFillClrLst meth="repeat">
+      <a:schemeClr val="tx1"/>
+    </dgm:txFillClrLst>
+    <dgm:txEffectClrLst/>
+  </dgm:styleLbl>
+  <dgm:styleLbl name="parChTrans1D2">
+    <dgm:fillClrLst meth="repeat">
+      <a:schemeClr val="accent3">
+        <a:tint val="90000"/>
+      </a:schemeClr>
+    </dgm:fillClrLst>
+    <dgm:linClrLst meth="repeat">
+      <a:schemeClr val="accent2"/>
+    </dgm:linClrLst>
+    <dgm:effectClrLst/>
+    <dgm:txLinClrLst/>
+    <dgm:txFillClrLst meth="repeat">
+      <a:schemeClr val="tx1"/>
+    </dgm:txFillClrLst>
+    <dgm:txEffectClrLst/>
+  </dgm:styleLbl>
+  <dgm:styleLbl name="parChTrans1D3">
+    <dgm:fillClrLst meth="repeat">
+      <a:schemeClr val="accent4">
+        <a:tint val="70000"/>
+      </a:schemeClr>
+    </dgm:fillClrLst>
+    <dgm:linClrLst meth="repeat">
+      <a:schemeClr val="accent3"/>
+    </dgm:linClrLst>
+    <dgm:effectClrLst/>
+    <dgm:txLinClrLst/>
+    <dgm:txFillClrLst meth="repeat">
+      <a:schemeClr val="tx1"/>
+    </dgm:txFillClrLst>
+    <dgm:txEffectClrLst/>
+  </dgm:styleLbl>
+  <dgm:styleLbl name="parChTrans1D4">
+    <dgm:fillClrLst meth="repeat">
+      <a:schemeClr val="accent5">
+        <a:tint val="50000"/>
+      </a:schemeClr>
+    </dgm:fillClrLst>
+    <dgm:linClrLst meth="repeat">
+      <a:schemeClr val="accent4"/>
+    </dgm:linClrLst>
+    <dgm:effectClrLst/>
+    <dgm:txLinClrLst/>
+    <dgm:txFillClrLst meth="repeat">
+      <a:schemeClr val="tx1"/>
+    </dgm:txFillClrLst>
+    <dgm:txEffectClrLst/>
+  </dgm:styleLbl>
+  <dgm:styleLbl name="fgAcc1">
+    <dgm:fillClrLst meth="repeat">
+      <a:schemeClr val="lt1">
+        <a:alpha val="90000"/>
+      </a:schemeClr>
+    </dgm:fillClrLst>
+    <dgm:linClrLst meth="repeat">
+      <a:schemeClr val="accent2"/>
+      <a:schemeClr val="accent3"/>
+      <a:schemeClr val="accent4"/>
+      <a:schemeClr val="accent5"/>
+      <a:schemeClr val="accent6"/>
+    </dgm:linClrLst>
+    <dgm:effectClrLst/>
+    <dgm:txLinClrLst/>
+    <dgm:txFillClrLst meth="repeat">
+      <a:schemeClr val="dk1"/>
+    </dgm:txFillClrLst>
+    <dgm:txEffectClrLst/>
+  </dgm:styleLbl>
+  <dgm:styleLbl name="conFgAcc1">
+    <dgm:fillClrLst meth="repeat">
+      <a:schemeClr val="lt1">
+        <a:alpha val="90000"/>
+      </a:schemeClr>
+    </dgm:fillClrLst>
+    <dgm:linClrLst meth="repeat">
+      <a:schemeClr val="accent2"/>
+      <a:schemeClr val="accent3"/>
+      <a:schemeClr val="accent4"/>
+      <a:schemeClr val="accent5"/>
+      <a:schemeClr val="accent6"/>
+    </dgm:linClrLst>
+    <dgm:effectClrLst/>
+    <dgm:txLinClrLst/>
+    <dgm:txFillClrLst meth="repeat">
+      <a:schemeClr val="dk1"/>
+    </dgm:txFillClrLst>
+    <dgm:txEffectClrLst/>
+  </dgm:styleLbl>
+  <dgm:styleLbl name="alignAcc1">
+    <dgm:fillClrLst meth="repeat">
+      <a:schemeClr val="lt1">
+        <a:alpha val="90000"/>
+      </a:schemeClr>
+    </dgm:fillClrLst>
+    <dgm:linClrLst meth="repeat">
+      <a:schemeClr val="accent2"/>
+      <a:schemeClr val="accent3"/>
+      <a:schemeClr val="accent4"/>
+      <a:schemeClr val="accent5"/>
+      <a:schemeClr val="accent6"/>
+    </dgm:linClrLst>
+    <dgm:effectClrLst/>
+    <dgm:txLinClrLst/>
+    <dgm:txFillClrLst meth="repeat">
+      <a:schemeClr val="dk1"/>
+    </dgm:txFillClrLst>
+    <dgm:txEffectClrLst/>
+  </dgm:styleLbl>
+  <dgm:styleLbl name="trAlignAcc1">
+    <dgm:fillClrLst meth="repeat">
+      <a:schemeClr val="lt1">
+        <a:alpha val="40000"/>
+      </a:schemeClr>
+    </dgm:fillClrLst>
+    <dgm:linClrLst meth="repeat">
+      <a:schemeClr val="accent1"/>
+    </dgm:linClrLst>
+    <dgm:effectClrLst/>
+    <dgm:txLinClrLst/>
+    <dgm:txFillClrLst meth="repeat">
+      <a:schemeClr val="dk1"/>
+    </dgm:txFillClrLst>
+    <dgm:txEffectClrLst/>
+  </dgm:styleLbl>
+  <dgm:styleLbl name="bgAcc1">
+    <dgm:fillClrLst meth="repeat">
+      <a:schemeClr val="lt1">
+        <a:alpha val="90000"/>
+      </a:schemeClr>
+    </dgm:fillClrLst>
+    <dgm:linClrLst meth="repeat">
+      <a:schemeClr val="accent2"/>
+      <a:schemeClr val="accent3"/>
+      <a:schemeClr val="accent4"/>
+      <a:schemeClr val="accent5"/>
+      <a:schemeClr val="accent6"/>
+    </dgm:linClrLst>
+    <dgm:effectClrLst/>
+    <dgm:txLinClrLst/>
+    <dgm:txFillClrLst meth="repeat">
+      <a:schemeClr val="dk1"/>
+    </dgm:txFillClrLst>
+    <dgm:txEffectClrLst/>
+  </dgm:styleLbl>
+  <dgm:styleLbl name="solidFgAcc1">
+    <dgm:fillClrLst meth="repeat">
+      <a:schemeClr val="lt1"/>
+    </dgm:fillClrLst>
+    <dgm:linClrLst meth="repeat">
+      <a:schemeClr val="accent2"/>
+      <a:schemeClr val="accent3"/>
+      <a:schemeClr val="accent4"/>
+      <a:schemeClr val="accent5"/>
+      <a:schemeClr val="accent6"/>
+    </dgm:linClrLst>
+    <dgm:effectClrLst/>
+    <dgm:txLinClrLst/>
+    <dgm:txFillClrLst meth="repeat">
+      <a:schemeClr val="dk1"/>
+    </dgm:txFillClrLst>
+    <dgm:txEffectClrLst/>
+  </dgm:styleLbl>
+  <dgm:styleLbl name="solidAlignAcc1">
+    <dgm:fillClrLst meth="repeat">
+      <a:schemeClr val="lt1"/>
+    </dgm:fillClrLst>
+    <dgm:linClrLst meth="repeat">
+      <a:schemeClr val="accent2"/>
+      <a:schemeClr val="accent3"/>
+      <a:schemeClr val="accent4"/>
+      <a:schemeClr val="accent5"/>
+      <a:schemeClr val="accent6"/>
+    </dgm:linClrLst>
+    <dgm:effectClrLst/>
+    <dgm:txLinClrLst/>
+    <dgm:txFillClrLst meth="repeat">
+      <a:schemeClr val="dk1"/>
+    </dgm:txFillClrLst>
+    <dgm:txEffectClrLst/>
+  </dgm:styleLbl>
+  <dgm:styleLbl name="solidBgAcc1">
+    <dgm:fillClrLst meth="repeat">
+      <a:schemeClr val="lt1"/>
+    </dgm:fillClrLst>
+    <dgm:linClrLst meth="repeat">
+      <a:schemeClr val="accent2"/>
+      <a:schemeClr val="accent3"/>
+      <a:schemeClr val="accent4"/>
+      <a:schemeClr val="accent5"/>
+      <a:schemeClr val="accent6"/>
+    </dgm:linClrLst>
+    <dgm:effectClrLst/>
+    <dgm:txLinClrLst/>
+    <dgm:txFillClrLst meth="repeat">
+      <a:schemeClr val="dk1"/>
+    </dgm:txFillClrLst>
+    <dgm:txEffectClrLst/>
+  </dgm:styleLbl>
+  <dgm:styleLbl name="fgAccFollowNode1">
+    <dgm:fillClrLst meth="repeat">
+      <a:schemeClr val="accent2">
+        <a:tint val="40000"/>
+        <a:alpha val="90000"/>
+      </a:schemeClr>
+      <a:schemeClr val="accent3">
+        <a:tint val="40000"/>
+        <a:alpha val="90000"/>
+      </a:schemeClr>
+      <a:schemeClr val="accent4">
+        <a:tint val="40000"/>
+        <a:alpha val="90000"/>
+      </a:schemeClr>
+      <a:schemeClr val="accent5">
+        <a:tint val="40000"/>
+        <a:alpha val="90000"/>
+      </a:schemeClr>
+      <a:schemeClr val="accent6">
+        <a:tint val="40000"/>
+        <a:alpha val="90000"/>
+      </a:schemeClr>
+    </dgm:fillClrLst>
+    <dgm:linClrLst meth="repeat">
+      <a:schemeClr val="accent2">
+        <a:tint val="40000"/>
+        <a:alpha val="90000"/>
+      </a:schemeClr>
+      <a:schemeClr val="accent3">
+        <a:tint val="40000"/>
+        <a:alpha val="90000"/>
+      </a:schemeClr>
+      <a:schemeClr val="accent4">
+        <a:tint val="40000"/>
+        <a:alpha val="90000"/>
+      </a:schemeClr>
+      <a:schemeClr val="accent5">
+        <a:tint val="40000"/>
+        <a:alpha val="90000"/>
+      </a:schemeClr>
+      <a:schemeClr val="accent6">
+        <a:tint val="40000"/>
+        <a:alpha val="90000"/>
+      </a:schemeClr>
+    </dgm:linClrLst>
+    <dgm:effectClrLst/>
+    <dgm:txLinClrLst/>
+    <dgm:txFillClrLst meth="repeat">
+      <a:schemeClr val="dk1"/>
+    </dgm:txFillClrLst>
+    <dgm:txEffectClrLst/>
+  </dgm:styleLbl>
+  <dgm:styleLbl name="alignAccFollowNode1">
+    <dgm:fillClrLst meth="repeat">
+      <a:schemeClr val="accent2">
+        <a:tint val="40000"/>
+        <a:alpha val="90000"/>
+      </a:schemeClr>
+      <a:schemeClr val="accent3">
+        <a:tint val="40000"/>
+        <a:alpha val="90000"/>
+      </a:schemeClr>
+      <a:schemeClr val="accent4">
+        <a:tint val="40000"/>
+        <a:alpha val="90000"/>
+      </a:schemeClr>
+      <a:schemeClr val="accent5">
+        <a:tint val="40000"/>
+        <a:alpha val="90000"/>
+      </a:schemeClr>
+      <a:schemeClr val="accent6">
+        <a:tint val="40000"/>
+        <a:alpha val="90000"/>
+      </a:schemeClr>
+    </dgm:fillClrLst>
+    <dgm:linClrLst meth="repeat">
+      <a:schemeClr val="accent2">
+        <a:tint val="40000"/>
+        <a:alpha val="90000"/>
+      </a:schemeClr>
+      <a:schemeClr val="accent3">
+        <a:tint val="40000"/>
+        <a:alpha val="90000"/>
+      </a:schemeClr>
+      <a:schemeClr val="accent4">
+        <a:tint val="40000"/>
+        <a:alpha val="90000"/>
+      </a:schemeClr>
+      <a:schemeClr val="accent5">
+        <a:tint val="40000"/>
+        <a:alpha val="90000"/>
+      </a:schemeClr>
+      <a:schemeClr val="accent6">
+        <a:tint val="40000"/>
+        <a:alpha val="90000"/>
+      </a:schemeClr>
+    </dgm:linClrLst>
+    <dgm:effectClrLst/>
+    <dgm:txLinClrLst/>
+    <dgm:txFillClrLst meth="repeat">
+      <a:schemeClr val="dk1"/>
+    </dgm:txFillClrLst>
+    <dgm:txEffectClrLst/>
+  </dgm:styleLbl>
+  <dgm:styleLbl name="bgAccFollowNode1">
+    <dgm:fillClrLst meth="repeat">
+      <a:schemeClr val="accent2">
+        <a:tint val="40000"/>
+        <a:alpha val="90000"/>
+      </a:schemeClr>
+      <a:schemeClr val="accent3">
+        <a:tint val="40000"/>
+        <a:alpha val="90000"/>
+      </a:schemeClr>
+      <a:schemeClr val="accent4">
+        <a:tint val="40000"/>
+        <a:alpha val="90000"/>
+      </a:schemeClr>
+      <a:schemeClr val="accent5">
+        <a:tint val="40000"/>
+        <a:alpha val="90000"/>
+      </a:schemeClr>
+      <a:schemeClr val="accent6">
+        <a:tint val="40000"/>
+        <a:alpha val="90000"/>
+      </a:schemeClr>
+    </dgm:fillClrLst>
+    <dgm:linClrLst meth="repeat">
+      <a:schemeClr val="accent2">
+        <a:tint val="40000"/>
+        <a:alpha val="90000"/>
+      </a:schemeClr>
+      <a:schemeClr val="accent3">
+        <a:tint val="40000"/>
+        <a:alpha val="90000"/>
+      </a:schemeClr>
+      <a:schemeClr val="accent4">
+        <a:tint val="40000"/>
+        <a:alpha val="90000"/>
+      </a:schemeClr>
+      <a:schemeClr val="accent5">
+        <a:tint val="40000"/>
+        <a:alpha val="90000"/>
+      </a:schemeClr>
+      <a:schemeClr val="accent6">
+        <a:tint val="40000"/>
+        <a:alpha val="90000"/>
+      </a:schemeClr>
+    </dgm:linClrLst>
+    <dgm:effectClrLst/>
+    <dgm:txLinClrLst/>
+    <dgm:txFillClrLst meth="repeat">
+      <a:schemeClr val="dk1"/>
+    </dgm:txFillClrLst>
+    <dgm:txEffectClrLst/>
+  </dgm:styleLbl>
+  <dgm:styleLbl name="fgAcc0">
+    <dgm:fillClrLst meth="repeat">
+      <a:schemeClr val="lt1">
+        <a:alpha val="90000"/>
+      </a:schemeClr>
+    </dgm:fillClrLst>
+    <dgm:linClrLst>
+      <a:schemeClr val="accent1"/>
+    </dgm:linClrLst>
+    <dgm:effectClrLst/>
+    <dgm:txLinClrLst/>
+    <dgm:txFillClrLst meth="repeat">
+      <a:schemeClr val="dk1"/>
+    </dgm:txFillClrLst>
+    <dgm:txEffectClrLst/>
+  </dgm:styleLbl>
+  <dgm:styleLbl name="fgAcc2">
+    <dgm:fillClrLst meth="repeat">
+      <a:schemeClr val="lt1">
+        <a:alpha val="90000"/>
+      </a:schemeClr>
+    </dgm:fillClrLst>
+    <dgm:linClrLst>
+      <a:schemeClr val="accent2"/>
+    </dgm:linClrLst>
+    <dgm:effectClrLst/>
+    <dgm:txLinClrLst/>
+    <dgm:txFillClrLst meth="repeat">
+      <a:schemeClr val="dk1"/>
+    </dgm:txFillClrLst>
+    <dgm:txEffectClrLst/>
+  </dgm:styleLbl>
+  <dgm:styleLbl name="fgAcc3">
+    <dgm:fillClrLst meth="repeat">
+      <a:schemeClr val="lt1">
+        <a:alpha val="90000"/>
+      </a:schemeClr>
+    </dgm:fillClrLst>
+    <dgm:linClrLst>
+      <a:schemeClr val="accent3"/>
+    </dgm:linClrLst>
+    <dgm:effectClrLst/>
+    <dgm:txLinClrLst/>
+    <dgm:txFillClrLst meth="repeat">
+      <a:schemeClr val="dk1"/>
+    </dgm:txFillClrLst>
+    <dgm:txEffectClrLst/>
+  </dgm:styleLbl>
+  <dgm:styleLbl name="fgAcc4">
+    <dgm:fillClrLst meth="repeat">
+      <a:schemeClr val="lt1">
+        <a:alpha val="90000"/>
+      </a:schemeClr>
+    </dgm:fillClrLst>
+    <dgm:linClrLst>
+      <a:schemeClr val="accent4"/>
+    </dgm:linClrLst>
+    <dgm:effectClrLst/>
+    <dgm:txLinClrLst/>
+    <dgm:txFillClrLst meth="repeat">
+      <a:schemeClr val="dk1"/>
+    </dgm:txFillClrLst>
+    <dgm:txEffectClrLst/>
+  </dgm:styleLbl>
+  <dgm:styleLbl name="bgShp">
+    <dgm:fillClrLst meth="repeat">
+      <a:schemeClr val="accent2"/>
+      <a:schemeClr val="accent3"/>
+      <a:schemeClr val="accent4"/>
+      <a:schemeClr val="accent5"/>
+      <a:schemeClr val="accent6"/>
+    </dgm:fillClrLst>
+    <dgm:linClrLst meth="repeat">
+      <a:schemeClr val="lt1">
+        <a:alpha val="0"/>
+      </a:schemeClr>
+    </dgm:linClrLst>
+    <dgm:effectClrLst/>
+    <dgm:txLinClrLst/>
+    <dgm:txFillClrLst/>
+    <dgm:txEffectClrLst/>
+  </dgm:styleLbl>
+  <dgm:styleLbl name="dkBgShp">
+    <dgm:fillClrLst meth="repeat">
+      <a:schemeClr val="accent2">
+        <a:shade val="90000"/>
+      </a:schemeClr>
+    </dgm:fillClrLst>
+    <dgm:linClrLst meth="repeat">
+      <a:schemeClr val="dk1"/>
+    </dgm:linClrLst>
+    <dgm:effectClrLst/>
+    <dgm:txLinClrLst/>
+    <dgm:txFillClrLst meth="repeat">
+      <a:schemeClr val="lt1"/>
+    </dgm:txFillClrLst>
+    <dgm:txEffectClrLst/>
+  </dgm:styleLbl>
+  <dgm:styleLbl name="trBgShp">
+    <dgm:fillClrLst meth="repeat">
+      <a:schemeClr val="accent1">
+        <a:tint val="50000"/>
+        <a:alpha val="40000"/>
+      </a:schemeClr>
+    </dgm:fillClrLst>
+    <dgm:linClrLst meth="repeat">
+      <a:schemeClr val="accent2"/>
+    </dgm:linClrLst>
+    <dgm:effectClrLst/>
+    <dgm:txLinClrLst/>
+    <dgm:txFillClrLst meth="repeat">
+      <a:schemeClr val="lt1"/>
+    </dgm:txFillClrLst>
+    <dgm:txEffectClrLst/>
+  </dgm:styleLbl>
+  <dgm:styleLbl name="fgShp">
+    <dgm:fillClrLst meth="repeat">
+      <a:schemeClr val="accent2">
+        <a:tint val="40000"/>
+      </a:schemeClr>
+    </dgm:fillClrLst>
+    <dgm:linClrLst meth="repeat">
+      <a:schemeClr val="lt1"/>
+    </dgm:linClrLst>
+    <dgm:effectClrLst/>
+    <dgm:txLinClrLst/>
+    <dgm:txFillClrLst meth="repeat">
+      <a:schemeClr val="dk1"/>
+    </dgm:txFillClrLst>
+    <dgm:txEffectClrLst/>
+  </dgm:styleLbl>
+  <dgm:styleLbl name="revTx">
+    <dgm:fillClrLst meth="repeat">
+      <a:schemeClr val="lt1">
+        <a:alpha val="0"/>
+      </a:schemeClr>
+    </dgm:fillClrLst>
+    <dgm:linClrLst meth="repeat">
+      <a:schemeClr val="dk1">
+        <a:alpha val="0"/>
+      </a:schemeClr>
+    </dgm:linClrLst>
+    <dgm:effectClrLst/>
+    <dgm:txLinClrLst/>
+    <dgm:txFillClrLst meth="repeat">
+      <a:schemeClr val="bg1"/>
+    </dgm:txFillClrLst>
+    <dgm:txEffectClrLst/>
+  </dgm:styleLbl>
+</dgm:colorsDef>
+</file>
+
+<file path=ppt/diagrams/colors2.xml><?xml version="1.0" encoding="utf-8"?>
+<dgm:colorsDef xmlns:dgm="http://schemas.openxmlformats.org/drawingml/2006/diagram" xmlns:a="http://schemas.openxmlformats.org/drawingml/2006/main" uniqueId="urn:microsoft.com/office/officeart/2005/8/colors/colorful2">
+  <dgm:title val=""/>
+  <dgm:desc val=""/>
+  <dgm:catLst>
+    <dgm:cat type="colorful" pri="10200"/>
+  </dgm:catLst>
+  <dgm:styleLbl name="node0">
+    <dgm:fillClrLst meth="repeat">
+      <a:schemeClr val="accent1"/>
+    </dgm:fillClrLst>
+    <dgm:linClrLst meth="repeat">
+      <a:schemeClr val="lt1"/>
+    </dgm:linClrLst>
+    <dgm:effectClrLst/>
+    <dgm:txLinClrLst/>
+    <dgm:txFillClrLst/>
+    <dgm:txEffectClrLst/>
+  </dgm:styleLbl>
+  <dgm:styleLbl name="node1">
+    <dgm:fillClrLst>
+      <a:schemeClr val="accent2"/>
+      <a:schemeClr val="accent3"/>
+    </dgm:fillClrLst>
+    <dgm:linClrLst meth="repeat">
+      <a:schemeClr val="lt1"/>
+    </dgm:linClrLst>
+    <dgm:effectClrLst/>
+    <dgm:txLinClrLst/>
+    <dgm:txFillClrLst/>
+    <dgm:txEffectClrLst/>
+  </dgm:styleLbl>
+  <dgm:styleLbl name="alignNode1">
+    <dgm:fillClrLst>
+      <a:schemeClr val="accent2"/>
+      <a:schemeClr val="accent3"/>
+    </dgm:fillClrLst>
+    <dgm:linClrLst>
+      <a:schemeClr val="accent2"/>
+      <a:schemeClr val="accent3"/>
+    </dgm:linClrLst>
+    <dgm:effectClrLst/>
+    <dgm:txLinClrLst/>
+    <dgm:txFillClrLst/>
+    <dgm:txEffectClrLst/>
+  </dgm:styleLbl>
+  <dgm:styleLbl name="lnNode1">
+    <dgm:fillClrLst>
+      <a:schemeClr val="accent2"/>
+      <a:schemeClr val="accent3"/>
+    </dgm:fillClrLst>
+    <dgm:linClrLst meth="repeat">
+      <a:schemeClr val="lt1"/>
+    </dgm:linClrLst>
+    <dgm:effectClrLst/>
+    <dgm:txLinClrLst/>
+    <dgm:txFillClrLst/>
+    <dgm:txEffectClrLst/>
+  </dgm:styleLbl>
+  <dgm:styleLbl name="vennNode1">
+    <dgm:fillClrLst>
+      <a:schemeClr val="accent2">
+        <a:alpha val="50000"/>
+      </a:schemeClr>
+      <a:schemeClr val="accent3">
+        <a:alpha val="50000"/>
+      </a:schemeClr>
+    </dgm:fillClrLst>
+    <dgm:linClrLst meth="repeat">
+      <a:schemeClr val="lt1"/>
+    </dgm:linClrLst>
+    <dgm:effectClrLst/>
+    <dgm:txLinClrLst/>
+    <dgm:txFillClrLst/>
+    <dgm:txEffectClrLst/>
+  </dgm:styleLbl>
+  <dgm:styleLbl name="node2">
+    <dgm:fillClrLst>
+      <a:schemeClr val="accent3"/>
+    </dgm:fillClrLst>
+    <dgm:linClrLst meth="repeat">
+      <a:schemeClr val="lt1"/>
+    </dgm:linClrLst>
+    <dgm:effectClrLst/>
+    <dgm:txLinClrLst/>
+    <dgm:txFillClrLst/>
+    <dgm:txEffectClrLst/>
+  </dgm:styleLbl>
+  <dgm:styleLbl name="node3">
+    <dgm:fillClrLst>
+      <a:schemeClr val="accent4"/>
+    </dgm:fillClrLst>
+    <dgm:linClrLst meth="repeat">
+      <a:schemeClr val="lt1"/>
+    </dgm:linClrLst>
+    <dgm:effectClrLst/>
+    <dgm:txLinClrLst/>
+    <dgm:txFillClrLst/>
+    <dgm:txEffectClrLst/>
+  </dgm:styleLbl>
+  <dgm:styleLbl name="node4">
+    <dgm:fillClrLst>
+      <a:schemeClr val="accent5"/>
+    </dgm:fillClrLst>
+    <dgm:linClrLst meth="repeat">
+      <a:schemeClr val="lt1"/>
+    </dgm:linClrLst>
+    <dgm:effectClrLst/>
+    <dgm:txLinClrLst/>
+    <dgm:txFillClrLst/>
+    <dgm:txEffectClrLst/>
+  </dgm:styleLbl>
+  <dgm:styleLbl name="fgImgPlace1">
+    <dgm:fillClrLst>
+      <a:schemeClr val="accent2">
+        <a:tint val="50000"/>
+      </a:schemeClr>
+      <a:schemeClr val="accent3">
+        <a:tint val="50000"/>
+      </a:schemeClr>
+    </dgm:fillClrLst>
+    <dgm:linClrLst meth="repeat">
+      <a:schemeClr val="lt1"/>
+    </dgm:linClrLst>
+    <dgm:effectClrLst/>
+    <dgm:txLinClrLst/>
+    <dgm:txFillClrLst meth="repeat">
+      <a:schemeClr val="lt1"/>
+    </dgm:txFillClrLst>
+    <dgm:txEffectClrLst/>
+  </dgm:styleLbl>
+  <dgm:styleLbl name="alignImgPlace1">
+    <dgm:fillClrLst>
+      <a:schemeClr val="accent2">
+        <a:tint val="50000"/>
+      </a:schemeClr>
+      <a:schemeClr val="accent3">
+        <a:tint val="20000"/>
+      </a:schemeClr>
+    </dgm:fillClrLst>
+    <dgm:linClrLst meth="repeat">
+      <a:schemeClr val="lt1"/>
+    </dgm:linClrLst>
+    <dgm:effectClrLst/>
+    <dgm:txLinClrLst/>
+    <dgm:txFillClrLst meth="repeat">
+      <a:schemeClr val="lt1"/>
+    </dgm:txFillClrLst>
+    <dgm:txEffectClrLst/>
+  </dgm:styleLbl>
+  <dgm:styleLbl name="bgImgPlace1">
+    <dgm:fillClrLst>
+      <a:schemeClr val="accent2">
+        <a:tint val="50000"/>
+      </a:schemeClr>
+      <a:schemeClr val="accent3">
+        <a:tint val="20000"/>
+      </a:schemeClr>
+    </dgm:fillClrLst>
+    <dgm:linClrLst meth="repeat">
+      <a:schemeClr val="lt1"/>
+    </dgm:linClrLst>
+    <dgm:effectClrLst/>
+    <dgm:txLinClrLst/>
+    <dgm:txFillClrLst meth="repeat">
+      <a:schemeClr val="lt1"/>
+    </dgm:txFillClrLst>
+    <dgm:txEffectClrLst/>
+  </dgm:styleLbl>
+  <dgm:styleLbl name="sibTrans2D1">
+    <dgm:fillClrLst>
+      <a:schemeClr val="accent2"/>
+      <a:schemeClr val="accent3"/>
+    </dgm:fillClrLst>
+    <dgm:linClrLst meth="repeat">
+      <a:schemeClr val="lt1"/>
+    </dgm:linClrLst>
+    <dgm:effectClrLst/>
+    <dgm:txLinClrLst/>
+    <dgm:txFillClrLst/>
+    <dgm:txEffectClrLst/>
+  </dgm:styleLbl>
+  <dgm:styleLbl name="fgSibTrans2D1">
+    <dgm:fillClrLst>
+      <a:schemeClr val="accent2"/>
+      <a:schemeClr val="accent3"/>
+    </dgm:fillClrLst>
+    <dgm:linClrLst meth="repeat">
+      <a:schemeClr val="lt1"/>
+    </dgm:linClrLst>
+    <dgm:effectClrLst/>
+    <dgm:txLinClrLst/>
+    <dgm:txFillClrLst meth="repeat">
+      <a:schemeClr val="lt1"/>
+    </dgm:txFillClrLst>
+    <dgm:txEffectClrLst/>
+  </dgm:styleLbl>
+  <dgm:styleLbl name="bgSibTrans2D1">
+    <dgm:fillClrLst>
+      <a:schemeClr val="accent2"/>
+      <a:schemeClr val="accent3"/>
+    </dgm:fillClrLst>
+    <dgm:linClrLst meth="repeat">
+      <a:schemeClr val="lt1"/>
+    </dgm:linClrLst>
+    <dgm:effectClrLst/>
+    <dgm:txLinClrLst/>
+    <dgm:txFillClrLst meth="repeat">
+      <a:schemeClr val="lt1"/>
+    </dgm:txFillClrLst>
+    <dgm:txEffectClrLst/>
+  </dgm:styleLbl>
+  <dgm:styleLbl name="sibTrans1D1">
+    <dgm:fillClrLst/>
+    <dgm:linClrLst>
+      <a:schemeClr val="accent2"/>
+      <a:schemeClr val="accent3"/>
+    </dgm:linClrLst>
+    <dgm:effectClrLst/>
+    <dgm:txLinClrLst/>
+    <dgm:txFillClrLst meth="repeat">
+      <a:schemeClr val="tx1"/>
+    </dgm:txFillClrLst>
+    <dgm:txEffectClrLst/>
+  </dgm:styleLbl>
+  <dgm:styleLbl name="callout">
+    <dgm:fillClrLst meth="repeat">
+      <a:schemeClr val="accent2"/>
+    </dgm:fillClrLst>
+    <dgm:linClrLst meth="repeat">
+      <a:schemeClr val="accent2">
+        <a:tint val="50000"/>
+      </a:schemeClr>
+    </dgm:linClrLst>
+    <dgm:effectClrLst/>
+    <dgm:txLinClrLst/>
+    <dgm:txFillClrLst meth="repeat">
+      <a:schemeClr val="tx1"/>
+    </dgm:txFillClrLst>
+    <dgm:txEffectClrLst/>
+  </dgm:styleLbl>
+  <dgm:styleLbl name="asst0">
+    <dgm:fillClrLst meth="repeat">
+      <a:schemeClr val="accent2"/>
+    </dgm:fillClrLst>
+    <dgm:linClrLst meth="repeat">
+      <a:schemeClr val="lt1">
+        <a:shade val="80000"/>
+      </a:schemeClr>
+    </dgm:linClrLst>
+    <dgm:effectClrLst/>
+    <dgm:txLinClrLst/>
+    <dgm:txFillClrLst/>
+    <dgm:txEffectClrLst/>
+  </dgm:styleLbl>
+  <dgm:styleLbl name="asst1">
+    <dgm:fillClrLst meth="repeat">
+      <a:schemeClr val="accent3"/>
+    </dgm:fillClrLst>
+    <dgm:linClrLst meth="repeat">
+      <a:schemeClr val="lt1">
+        <a:shade val="80000"/>
+      </a:schemeClr>
+    </dgm:linClrLst>
+    <dgm:effectClrLst/>
+    <dgm:txLinClrLst/>
+    <dgm:txFillClrLst/>
+    <dgm:txEffectClrLst/>
+  </dgm:styleLbl>
+  <dgm:styleLbl name="asst2">
+    <dgm:fillClrLst>
+      <a:schemeClr val="accent4"/>
+    </dgm:fillClrLst>
+    <dgm:linClrLst meth="repeat">
+      <a:schemeClr val="lt1"/>
+    </dgm:linClrLst>
+    <dgm:effectClrLst/>
+    <dgm:txLinClrLst/>
+    <dgm:txFillClrLst/>
+    <dgm:txEffectClrLst/>
+  </dgm:styleLbl>
+  <dgm:styleLbl name="asst3">
+    <dgm:fillClrLst>
+      <a:schemeClr val="accent5"/>
+    </dgm:fillClrLst>
+    <dgm:linClrLst meth="repeat">
+      <a:schemeClr val="lt1"/>
+    </dgm:linClrLst>
+    <dgm:effectClrLst/>
+    <dgm:txLinClrLst/>
+    <dgm:txFillClrLst/>
+    <dgm:txEffectClrLst/>
+  </dgm:styleLbl>
+  <dgm:styleLbl name="asst4">
+    <dgm:fillClrLst>
+      <a:schemeClr val="accent6"/>
+    </dgm:fillClrLst>
+    <dgm:linClrLst meth="repeat">
+      <a:schemeClr val="lt1"/>
+    </dgm:linClrLst>
+    <dgm:effectClrLst/>
+    <dgm:txLinClrLst/>
+    <dgm:txFillClrLst/>
+    <dgm:txEffectClrLst/>
+  </dgm:styleLbl>
+  <dgm:styleLbl name="parChTrans2D1">
+    <dgm:fillClrLst meth="repeat">
+      <a:schemeClr val="accent2"/>
+    </dgm:fillClrLst>
+    <dgm:linClrLst meth="repeat">
+      <a:schemeClr val="lt1"/>
+    </dgm:linClrLst>
+    <dgm:effectClrLst/>
+    <dgm:txLinClrLst/>
+    <dgm:txFillClrLst meth="repeat">
+      <a:schemeClr val="lt1"/>
+    </dgm:txFillClrLst>
+    <dgm:txEffectClrLst/>
+  </dgm:styleLbl>
+  <dgm:styleLbl name="parChTrans2D2">
+    <dgm:fillClrLst meth="repeat">
+      <a:schemeClr val="accent3"/>
+    </dgm:fillClrLst>
+    <dgm:linClrLst meth="repeat">
+      <a:schemeClr val="lt1"/>
+    </dgm:linClrLst>
+    <dgm:effectClrLst/>
+    <dgm:txLinClrLst/>
+    <dgm:txFillClrLst/>
+    <dgm:txEffectClrLst/>
+  </dgm:styleLbl>
+  <dgm:styleLbl name="parChTrans2D3">
+    <dgm:fillClrLst meth="repeat">
+      <a:schemeClr val="accent4"/>
+    </dgm:fillClrLst>
+    <dgm:linClrLst meth="repeat">
+      <a:schemeClr val="lt1"/>
+    </dgm:linClrLst>
+    <dgm:effectClrLst/>
+    <dgm:txLinClrLst/>
+    <dgm:txFillClrLst/>
+    <dgm:txEffectClrLst/>
+  </dgm:styleLbl>
+  <dgm:styleLbl name="parChTrans2D4">
+    <dgm:fillClrLst meth="repeat">
+      <a:schemeClr val="accent5"/>
+    </dgm:fillClrLst>
+    <dgm:linClrLst meth="repeat">
+      <a:schemeClr val="lt1"/>
+    </dgm:linClrLst>
+    <dgm:effectClrLst/>
+    <dgm:txLinClrLst/>
+    <dgm:txFillClrLst meth="repeat">
+      <a:schemeClr val="lt1"/>
+    </dgm:txFillClrLst>
+    <dgm:txEffectClrLst/>
+  </dgm:styleLbl>
+  <dgm:styleLbl name="parChTrans1D1">
+    <dgm:fillClrLst meth="repeat">
+      <a:schemeClr val="accent2"/>
+    </dgm:fillClrLst>
+    <dgm:linClrLst meth="repeat">
+      <a:schemeClr val="accent2"/>
+    </dgm:linClrLst>
+    <dgm:effectClrLst/>
+    <dgm:txLinClrLst/>
+    <dgm:txFillClrLst meth="repeat">
+      <a:schemeClr val="tx1"/>
+    </dgm:txFillClrLst>
+    <dgm:txEffectClrLst/>
+  </dgm:styleLbl>
+  <dgm:styleLbl name="parChTrans1D2">
+    <dgm:fillClrLst meth="repeat">
+      <a:schemeClr val="accent2">
+        <a:tint val="90000"/>
+      </a:schemeClr>
+    </dgm:fillClrLst>
+    <dgm:linClrLst meth="repeat">
+      <a:schemeClr val="accent3"/>
+    </dgm:linClrLst>
+    <dgm:effectClrLst/>
+    <dgm:txLinClrLst/>
+    <dgm:txFillClrLst meth="repeat">
+      <a:schemeClr val="tx1"/>
+    </dgm:txFillClrLst>
+    <dgm:txEffectClrLst/>
+  </dgm:styleLbl>
+  <dgm:styleLbl name="parChTrans1D3">
+    <dgm:fillClrLst meth="repeat">
+      <a:schemeClr val="accent2">
+        <a:tint val="70000"/>
+      </a:schemeClr>
+    </dgm:fillClrLst>
+    <dgm:linClrLst meth="repeat">
+      <a:schemeClr val="accent4"/>
+    </dgm:linClrLst>
+    <dgm:effectClrLst/>
+    <dgm:txLinClrLst/>
+    <dgm:txFillClrLst meth="repeat">
+      <a:schemeClr val="tx1"/>
+    </dgm:txFillClrLst>
+    <dgm:txEffectClrLst/>
+  </dgm:styleLbl>
+  <dgm:styleLbl name="parChTrans1D4">
+    <dgm:fillClrLst meth="repeat">
+      <a:schemeClr val="accent2">
+        <a:tint val="50000"/>
+      </a:schemeClr>
+    </dgm:fillClrLst>
+    <dgm:linClrLst meth="repeat">
+      <a:schemeClr val="accent5"/>
+    </dgm:linClrLst>
+    <dgm:effectClrLst/>
+    <dgm:txLinClrLst/>
+    <dgm:txFillClrLst meth="repeat">
+      <a:schemeClr val="tx1"/>
+    </dgm:txFillClrLst>
+    <dgm:txEffectClrLst/>
+  </dgm:styleLbl>
+  <dgm:styleLbl name="fgAcc1">
+    <dgm:fillClrLst meth="repeat">
+      <a:schemeClr val="lt1">
+        <a:alpha val="90000"/>
+      </a:schemeClr>
+    </dgm:fillClrLst>
+    <dgm:linClrLst>
+      <a:schemeClr val="accent2"/>
+      <a:schemeClr val="accent3"/>
+    </dgm:linClrLst>
+    <dgm:effectClrLst/>
+    <dgm:txLinClrLst/>
+    <dgm:txFillClrLst meth="repeat">
+      <a:schemeClr val="dk1"/>
+    </dgm:txFillClrLst>
+    <dgm:txEffectClrLst/>
+  </dgm:styleLbl>
+  <dgm:styleLbl name="conFgAcc1">
+    <dgm:fillClrLst meth="repeat">
+      <a:schemeClr val="lt1">
+        <a:alpha val="90000"/>
+      </a:schemeClr>
+    </dgm:fillClrLst>
+    <dgm:linClrLst>
+      <a:schemeClr val="accent2"/>
+      <a:schemeClr val="accent3"/>
+    </dgm:linClrLst>
+    <dgm:effectClrLst/>
+    <dgm:txLinClrLst/>
+    <dgm:txFillClrLst meth="repeat">
+      <a:schemeClr val="dk1"/>
+    </dgm:txFillClrLst>
+    <dgm:txEffectClrLst/>
+  </dgm:styleLbl>
+  <dgm:styleLbl name="alignAcc1">
+    <dgm:fillClrLst meth="repeat">
+      <a:schemeClr val="lt1">
+        <a:alpha val="90000"/>
+      </a:schemeClr>
+    </dgm:fillClrLst>
+    <dgm:linClrLst>
+      <a:schemeClr val="accent2"/>
+      <a:schemeClr val="accent3"/>
+    </dgm:linClrLst>
+    <dgm:effectClrLst/>
+    <dgm:txLinClrLst/>
+    <dgm:txFillClrLst meth="repeat">
+      <a:schemeClr val="dk1"/>
+    </dgm:txFillClrLst>
+    <dgm:txEffectClrLst/>
+  </dgm:styleLbl>
+  <dgm:styleLbl name="trAlignAcc1">
+    <dgm:fillClrLst meth="repeat">
+      <a:schemeClr val="lt1">
+        <a:alpha val="40000"/>
+      </a:schemeClr>
+    </dgm:fillClrLst>
+    <dgm:linClrLst meth="repeat">
+      <a:schemeClr val="accent2"/>
+    </dgm:linClrLst>
+    <dgm:effectClrLst/>
+    <dgm:txLinClrLst/>
+    <dgm:txFillClrLst meth="repeat">
+      <a:schemeClr val="dk1"/>
+    </dgm:txFillClrLst>
+    <dgm:txEffectClrLst/>
+  </dgm:styleLbl>
+  <dgm:styleLbl name="bgAcc1">
+    <dgm:fillClrLst meth="repeat">
+      <a:schemeClr val="lt1">
+        <a:alpha val="90000"/>
+      </a:schemeClr>
+    </dgm:fillClrLst>
+    <dgm:linClrLst>
+      <a:schemeClr val="accent2"/>
+      <a:schemeClr val="accent3"/>
+    </dgm:linClrLst>
+    <dgm:effectClrLst/>
+    <dgm:txLinClrLst/>
+    <dgm:txFillClrLst meth="repeat">
+      <a:schemeClr val="dk1"/>
+    </dgm:txFillClrLst>
+    <dgm:txEffectClrLst/>
+  </dgm:styleLbl>
+  <dgm:styleLbl name="solidFgAcc1">
+    <dgm:fillClrLst meth="repeat">
+      <a:schemeClr val="lt1"/>
+    </dgm:fillClrLst>
+    <dgm:linClrLst>
+      <a:schemeClr val="accent2"/>
+      <a:schemeClr val="accent3"/>
+    </dgm:linClrLst>
+    <dgm:effectClrLst/>
+    <dgm:txLinClrLst/>
+    <dgm:txFillClrLst meth="repeat">
+      <a:schemeClr val="dk1"/>
+    </dgm:txFillClrLst>
+    <dgm:txEffectClrLst/>
+  </dgm:styleLbl>
+  <dgm:styleLbl name="solidAlignAcc1">
+    <dgm:fillClrLst meth="repeat">
+      <a:schemeClr val="lt1"/>
+    </dgm:fillClrLst>
+    <dgm:linClrLst>
+      <a:schemeClr val="accent2"/>
+      <a:schemeClr val="accent3"/>
+    </dgm:linClrLst>
+    <dgm:effectClrLst/>
+    <dgm:txLinClrLst/>
+    <dgm:txFillClrLst meth="repeat">
+      <a:schemeClr val="dk1"/>
+    </dgm:txFillClrLst>
+    <dgm:txEffectClrLst/>
+  </dgm:styleLbl>
+  <dgm:styleLbl name="solidBgAcc1">
+    <dgm:fillClrLst meth="repeat">
+      <a:schemeClr val="lt1"/>
+    </dgm:fillClrLst>
+    <dgm:linClrLst>
+      <a:schemeClr val="accent2"/>
+      <a:schemeClr val="accent3"/>
+    </dgm:linClrLst>
+    <dgm:effectClrLst/>
+    <dgm:txLinClrLst/>
+    <dgm:txFillClrLst meth="repeat">
+      <a:schemeClr val="dk1"/>
+    </dgm:txFillClrLst>
+    <dgm:txEffectClrLst/>
+  </dgm:styleLbl>
+  <dgm:styleLbl name="fgAccFollowNode1">
+    <dgm:fillClrLst>
+      <a:schemeClr val="accent2">
+        <a:tint val="40000"/>
+        <a:alpha val="90000"/>
+      </a:schemeClr>
+      <a:schemeClr val="accent3">
+        <a:tint val="40000"/>
+        <a:alpha val="90000"/>
+      </a:schemeClr>
+    </dgm:fillClrLst>
+    <dgm:linClrLst>
+      <a:schemeClr val="accent2">
+        <a:tint val="40000"/>
+        <a:alpha val="90000"/>
+      </a:schemeClr>
+      <a:schemeClr val="accent3">
+        <a:tint val="40000"/>
+        <a:alpha val="90000"/>
+      </a:schemeClr>
+    </dgm:linClrLst>
+    <dgm:effectClrLst/>
+    <dgm:txLinClrLst/>
+    <dgm:txFillClrLst meth="repeat">
+      <a:schemeClr val="dk1"/>
+    </dgm:txFillClrLst>
+    <dgm:txEffectClrLst/>
+  </dgm:styleLbl>
+  <dgm:styleLbl name="alignAccFollowNode1">
+    <dgm:fillClrLst>
+      <a:schemeClr val="accent2">
+        <a:tint val="40000"/>
+        <a:alpha val="90000"/>
+      </a:schemeClr>
+      <a:schemeClr val="accent3">
+        <a:tint val="40000"/>
+        <a:alpha val="90000"/>
+      </a:schemeClr>
+    </dgm:fillClrLst>
+    <dgm:linClrLst>
+      <a:schemeClr val="accent2">
+        <a:tint val="40000"/>
+        <a:alpha val="90000"/>
+      </a:schemeClr>
+      <a:schemeClr val="accent3">
+        <a:tint val="40000"/>
+        <a:alpha val="90000"/>
+      </a:schemeClr>
+    </dgm:linClrLst>
+    <dgm:effectClrLst/>
+    <dgm:txLinClrLst/>
+    <dgm:txFillClrLst meth="repeat">
+      <a:schemeClr val="dk1"/>
+    </dgm:txFillClrLst>
+    <dgm:txEffectClrLst/>
+  </dgm:styleLbl>
+  <dgm:styleLbl name="bgAccFollowNode1">
+    <dgm:fillClrLst>
+      <a:schemeClr val="accent2">
+        <a:tint val="40000"/>
+        <a:alpha val="90000"/>
+      </a:schemeClr>
+      <a:schemeClr val="accent3">
+        <a:tint val="40000"/>
+        <a:alpha val="90000"/>
+      </a:schemeClr>
+    </dgm:fillClrLst>
+    <dgm:linClrLst>
+      <a:schemeClr val="accent2">
+        <a:tint val="40000"/>
+        <a:alpha val="90000"/>
+      </a:schemeClr>
+      <a:schemeClr val="accent3">
+        <a:tint val="40000"/>
+        <a:alpha val="90000"/>
+      </a:schemeClr>
+    </dgm:linClrLst>
+    <dgm:effectClrLst/>
+    <dgm:txLinClrLst/>
+    <dgm:txFillClrLst meth="repeat">
+      <a:schemeClr val="dk1"/>
+    </dgm:txFillClrLst>
+    <dgm:txEffectClrLst/>
+  </dgm:styleLbl>
+  <dgm:styleLbl name="fgAcc0">
+    <dgm:fillClrLst meth="repeat">
+      <a:schemeClr val="lt1">
+        <a:alpha val="90000"/>
+      </a:schemeClr>
+    </dgm:fillClrLst>
+    <dgm:linClrLst>
+      <a:schemeClr val="accent1"/>
+    </dgm:linClrLst>
+    <dgm:effectClrLst/>
+    <dgm:txLinClrLst/>
+    <dgm:txFillClrLst meth="repeat">
+      <a:schemeClr val="dk1"/>
+    </dgm:txFillClrLst>
+    <dgm:txEffectClrLst/>
+  </dgm:styleLbl>
+  <dgm:styleLbl name="fgAcc2">
+    <dgm:fillClrLst meth="repeat">
+      <a:schemeClr val="lt1">
+        <a:alpha val="90000"/>
+      </a:schemeClr>
+    </dgm:fillClrLst>
+    <dgm:linClrLst>
+      <a:schemeClr val="accent3"/>
+    </dgm:linClrLst>
+    <dgm:effectClrLst/>
+    <dgm:txLinClrLst/>
+    <dgm:txFillClrLst meth="repeat">
+      <a:schemeClr val="dk1"/>
+    </dgm:txFillClrLst>
+    <dgm:txEffectClrLst/>
+  </dgm:styleLbl>
+  <dgm:styleLbl name="fgAcc3">
+    <dgm:fillClrLst meth="repeat">
+      <a:schemeClr val="lt1">
+        <a:alpha val="90000"/>
+      </a:schemeClr>
+    </dgm:fillClrLst>
+    <dgm:linClrLst>
+      <a:schemeClr val="accent4"/>
+    </dgm:linClrLst>
+    <dgm:effectClrLst/>
+    <dgm:txLinClrLst/>
+    <dgm:txFillClrLst meth="repeat">
+      <a:schemeClr val="dk1"/>
+    </dgm:txFillClrLst>
+    <dgm:txEffectClrLst/>
+  </dgm:styleLbl>
+  <dgm:styleLbl name="fgAcc4">
+    <dgm:fillClrLst meth="repeat">
+      <a:schemeClr val="lt1">
+        <a:alpha val="90000"/>
+      </a:schemeClr>
+    </dgm:fillClrLst>
+    <dgm:linClrLst>
+      <a:schemeClr val="accent5"/>
+    </dgm:linClrLst>
+    <dgm:effectClrLst/>
+    <dgm:txLinClrLst/>
+    <dgm:txFillClrLst meth="repeat">
+      <a:schemeClr val="dk1"/>
+    </dgm:txFillClrLst>
+    <dgm:txEffectClrLst/>
+  </dgm:styleLbl>
+  <dgm:styleLbl name="bgShp">
+    <dgm:fillClrLst meth="repeat">
+      <a:schemeClr val="accent2">
+        <a:tint val="40000"/>
+      </a:schemeClr>
+    </dgm:fillClrLst>
+    <dgm:linClrLst meth="repeat">
+      <a:schemeClr val="dk1"/>
+    </dgm:linClrLst>
+    <dgm:effectClrLst/>
+    <dgm:txLinClrLst/>
+    <dgm:txFillClrLst meth="repeat">
+      <a:schemeClr val="dk1"/>
+    </dgm:txFillClrLst>
+    <dgm:txEffectClrLst/>
+  </dgm:styleLbl>
+  <dgm:styleLbl name="dkBgShp">
+    <dgm:fillClrLst meth="repeat">
+      <a:schemeClr val="accent2">
+        <a:shade val="90000"/>
+      </a:schemeClr>
+    </dgm:fillClrLst>
+    <dgm:linClrLst meth="repeat">
+      <a:schemeClr val="dk1"/>
+    </dgm:linClrLst>
+    <dgm:effectClrLst/>
+    <dgm:txLinClrLst/>
+    <dgm:txFillClrLst meth="repeat">
+      <a:schemeClr val="lt1"/>
+    </dgm:txFillClrLst>
+    <dgm:txEffectClrLst/>
+  </dgm:styleLbl>
+  <dgm:styleLbl name="trBgShp">
+    <dgm:fillClrLst meth="repeat">
+      <a:schemeClr val="accent2">
+        <a:tint val="50000"/>
+        <a:alpha val="40000"/>
+      </a:schemeClr>
+    </dgm:fillClrLst>
+    <dgm:linClrLst meth="repeat">
+      <a:schemeClr val="accent2"/>
+    </dgm:linClrLst>
+    <dgm:effectClrLst/>
+    <dgm:txLinClrLst/>
+    <dgm:txFillClrLst meth="repeat">
+      <a:schemeClr val="lt1"/>
+    </dgm:txFillClrLst>
+    <dgm:txEffectClrLst/>
+  </dgm:styleLbl>
+  <dgm:styleLbl name="fgShp">
+    <dgm:fillClrLst meth="repeat">
+      <a:schemeClr val="accent2">
+        <a:tint val="40000"/>
+      </a:schemeClr>
+    </dgm:fillClrLst>
+    <dgm:linClrLst meth="repeat">
+      <a:schemeClr val="lt1"/>
+    </dgm:linClrLst>
+    <dgm:effectClrLst/>
+    <dgm:txLinClrLst/>
+    <dgm:txFillClrLst meth="repeat">
+      <a:schemeClr val="dk1"/>
+    </dgm:txFillClrLst>
+    <dgm:txEffectClrLst/>
+  </dgm:styleLbl>
+  <dgm:styleLbl name="revTx">
+    <dgm:fillClrLst meth="repeat">
+      <a:schemeClr val="lt1">
+        <a:alpha val="0"/>
+      </a:schemeClr>
+    </dgm:fillClrLst>
+    <dgm:linClrLst meth="repeat">
+      <a:schemeClr val="dk1">
+        <a:alpha val="0"/>
+      </a:schemeClr>
+    </dgm:linClrLst>
+    <dgm:effectClrLst/>
+    <dgm:txLinClrLst/>
+    <dgm:txFillClrLst meth="repeat">
+      <a:schemeClr val="tx1"/>
+    </dgm:txFillClrLst>
+    <dgm:txEffectClrLst/>
+  </dgm:styleLbl>
+</dgm:colorsDef>
+</file>
+
+<file path=ppt/diagrams/data1.xml><?xml version="1.0" encoding="utf-8"?>
+<dgm:dataModel xmlns:dgm="http://schemas.openxmlformats.org/drawingml/2006/diagram" xmlns:a="http://schemas.openxmlformats.org/drawingml/2006/main">
+  <dgm:ptLst>
+    <dgm:pt modelId="{AD5BCFB2-99C9-4B96-A7F6-DC9038C63060}" type="doc">
+      <dgm:prSet loTypeId="urn:microsoft.com/office/officeart/2018/2/layout/IconVerticalSolidList" loCatId="icon" qsTypeId="urn:microsoft.com/office/officeart/2005/8/quickstyle/simple1" qsCatId="simple" csTypeId="urn:microsoft.com/office/officeart/2018/5/colors/Iconchunking_neutralicontext_colorful1" csCatId="colorful" phldr="1"/>
+      <dgm:spPr/>
+      <dgm:t>
+        <a:bodyPr/>
+        <a:lstStyle/>
+        <a:p>
+          <a:endParaRPr lang="en-US"/>
+        </a:p>
+      </dgm:t>
+    </dgm:pt>
+    <dgm:pt modelId="{9EB5ADCB-8B6E-4BE7-9D15-7CF5FB658D94}">
+      <dgm:prSet/>
+      <dgm:spPr/>
+      <dgm:t>
+        <a:bodyPr/>
+        <a:lstStyle/>
+        <a:p>
+          <a:r>
+            <a:rPr lang="ru-RU" baseline="0"/>
+            <a:t>Российские исследователи сходятся во мнении, что внедрение больших языковых моделей приводит к изменению роли преподавателя. Он всё в большей степени выступает не источником информации, а модератором и наставником, формирующим у студентов навыки критического мышления, анализа и осознанного использования цифровых инструментов.</a:t>
+          </a:r>
+          <a:endParaRPr lang="en-US"/>
+        </a:p>
+      </dgm:t>
+    </dgm:pt>
+    <dgm:pt modelId="{175B6F52-0913-4B22-90C0-729DBC98713F}" type="parTrans" cxnId="{888D44D7-C931-4B1F-B8A0-2370EAB3B590}">
+      <dgm:prSet/>
+      <dgm:spPr/>
+      <dgm:t>
+        <a:bodyPr/>
+        <a:lstStyle/>
+        <a:p>
+          <a:endParaRPr lang="en-US"/>
+        </a:p>
+      </dgm:t>
+    </dgm:pt>
+    <dgm:pt modelId="{8CFCE8DB-32CD-4511-BCB0-FA7BC503953E}" type="sibTrans" cxnId="{888D44D7-C931-4B1F-B8A0-2370EAB3B590}">
+      <dgm:prSet/>
+      <dgm:spPr/>
+      <dgm:t>
+        <a:bodyPr/>
+        <a:lstStyle/>
+        <a:p>
+          <a:endParaRPr lang="en-US"/>
+        </a:p>
+      </dgm:t>
+    </dgm:pt>
+    <dgm:pt modelId="{E8D78DE8-574D-42DA-AA0B-21BAC6FC4CAF}">
+      <dgm:prSet/>
+      <dgm:spPr/>
+      <dgm:t>
+        <a:bodyPr/>
+        <a:lstStyle/>
+        <a:p>
+          <a:r>
+            <a:rPr lang="ru-RU" baseline="0" dirty="0"/>
+            <a:t>Также они сходятся во мнении, что LLM не являются самостоятельной педагогической технологией, а выступают инструментом, эффективность которого определяется методикой применения и уровнем цифровой компетентности пользователей </a:t>
+          </a:r>
+          <a:endParaRPr lang="en-US" dirty="0"/>
+        </a:p>
+      </dgm:t>
+    </dgm:pt>
+    <dgm:pt modelId="{65012946-E927-4817-8C2B-36638405C720}" type="parTrans" cxnId="{3F950FB1-FD02-475F-8F9C-BCE8A6552158}">
+      <dgm:prSet/>
+      <dgm:spPr/>
+      <dgm:t>
+        <a:bodyPr/>
+        <a:lstStyle/>
+        <a:p>
+          <a:endParaRPr lang="en-US"/>
+        </a:p>
+      </dgm:t>
+    </dgm:pt>
+    <dgm:pt modelId="{1E739F8F-2351-4FCF-9CD2-ED9B9E95C2CF}" type="sibTrans" cxnId="{3F950FB1-FD02-475F-8F9C-BCE8A6552158}">
+      <dgm:prSet/>
+      <dgm:spPr/>
+      <dgm:t>
+        <a:bodyPr/>
+        <a:lstStyle/>
+        <a:p>
+          <a:endParaRPr lang="en-US"/>
+        </a:p>
+      </dgm:t>
+    </dgm:pt>
+    <dgm:pt modelId="{77337821-CFB8-422A-A5BD-F5C874401CD9}" type="pres">
+      <dgm:prSet presAssocID="{AD5BCFB2-99C9-4B96-A7F6-DC9038C63060}" presName="root" presStyleCnt="0">
+        <dgm:presLayoutVars>
+          <dgm:dir/>
+          <dgm:resizeHandles val="exact"/>
+        </dgm:presLayoutVars>
+      </dgm:prSet>
+      <dgm:spPr/>
+    </dgm:pt>
+    <dgm:pt modelId="{7ECB6E58-2421-43C9-9762-D914E502574B}" type="pres">
+      <dgm:prSet presAssocID="{9EB5ADCB-8B6E-4BE7-9D15-7CF5FB658D94}" presName="compNode" presStyleCnt="0"/>
+      <dgm:spPr/>
+    </dgm:pt>
+    <dgm:pt modelId="{35B6D5B5-7F05-4419-89E9-908787F814E1}" type="pres">
+      <dgm:prSet presAssocID="{9EB5ADCB-8B6E-4BE7-9D15-7CF5FB658D94}" presName="bgRect" presStyleLbl="bgShp" presStyleIdx="0" presStyleCnt="2"/>
+      <dgm:spPr/>
+    </dgm:pt>
+    <dgm:pt modelId="{AD12AB43-74A3-434C-9E82-87423BC4A22A}" type="pres">
+      <dgm:prSet presAssocID="{9EB5ADCB-8B6E-4BE7-9D15-7CF5FB658D94}" presName="iconRect" presStyleLbl="node1" presStyleIdx="0" presStyleCnt="2"/>
+      <dgm:spPr>
+        <a:blipFill>
+          <a:blip xmlns:r="http://schemas.openxmlformats.org/officeDocument/2006/relationships">
+            <a:extLst>
+              <a:ext uri="{28A0092B-C50C-407E-A947-70E740481C1C}">
+                <a14:useLocalDpi xmlns:a14="http://schemas.microsoft.com/office/drawing/2010/main" val="0"/>
+              </a:ext>
+              <a:ext uri="{96DAC541-7B7A-43D3-8B79-37D633B846F1}">
+                <asvg:svgBlip xmlns:asvg="http://schemas.microsoft.com/office/drawing/2016/SVG/main" r:embed="rId1"/>
+              </a:ext>
+            </a:extLst>
+          </a:blip>
+          <a:stretch>
+            <a:fillRect/>
+          </a:stretch>
+        </a:blipFill>
+        <a:ln>
+          <a:noFill/>
+        </a:ln>
+      </dgm:spPr>
+      <dgm:extLst>
+        <a:ext uri="{E40237B7-FDA0-4F09-8148-C483321AD2D9}">
+          <dgm14:cNvPr xmlns:dgm14="http://schemas.microsoft.com/office/drawing/2010/diagram" id="0" name="" descr="Флажок"/>
+        </a:ext>
+      </dgm:extLst>
+    </dgm:pt>
+    <dgm:pt modelId="{F5FDFBDE-BB4D-4A4D-8502-A5C1667EFA9C}" type="pres">
+      <dgm:prSet presAssocID="{9EB5ADCB-8B6E-4BE7-9D15-7CF5FB658D94}" presName="spaceRect" presStyleCnt="0"/>
+      <dgm:spPr/>
+    </dgm:pt>
+    <dgm:pt modelId="{2068F52B-DFBF-4129-B41F-714C6ACD11C7}" type="pres">
+      <dgm:prSet presAssocID="{9EB5ADCB-8B6E-4BE7-9D15-7CF5FB658D94}" presName="parTx" presStyleLbl="revTx" presStyleIdx="0" presStyleCnt="2">
+        <dgm:presLayoutVars>
+          <dgm:chMax val="0"/>
+          <dgm:chPref val="0"/>
+        </dgm:presLayoutVars>
+      </dgm:prSet>
+      <dgm:spPr/>
+    </dgm:pt>
+    <dgm:pt modelId="{AB0F13BD-F239-4B95-B6F8-217A2D3ED0F1}" type="pres">
+      <dgm:prSet presAssocID="{8CFCE8DB-32CD-4511-BCB0-FA7BC503953E}" presName="sibTrans" presStyleCnt="0"/>
+      <dgm:spPr/>
+    </dgm:pt>
+    <dgm:pt modelId="{7D5F8FA7-5E6A-4554-B88C-05D7894E45C9}" type="pres">
+      <dgm:prSet presAssocID="{E8D78DE8-574D-42DA-AA0B-21BAC6FC4CAF}" presName="compNode" presStyleCnt="0"/>
+      <dgm:spPr/>
+    </dgm:pt>
+    <dgm:pt modelId="{F8636798-32E4-4AB8-A2CC-A6909531EA94}" type="pres">
+      <dgm:prSet presAssocID="{E8D78DE8-574D-42DA-AA0B-21BAC6FC4CAF}" presName="bgRect" presStyleLbl="bgShp" presStyleIdx="1" presStyleCnt="2"/>
+      <dgm:spPr/>
+    </dgm:pt>
+    <dgm:pt modelId="{661F9D01-FD81-4D22-AB44-A6F3C561D014}" type="pres">
+      <dgm:prSet presAssocID="{E8D78DE8-574D-42DA-AA0B-21BAC6FC4CAF}" presName="iconRect" presStyleLbl="node1" presStyleIdx="1" presStyleCnt="2"/>
+      <dgm:spPr>
+        <a:blipFill>
+          <a:blip xmlns:r="http://schemas.openxmlformats.org/officeDocument/2006/relationships">
+            <a:extLst>
+              <a:ext uri="{28A0092B-C50C-407E-A947-70E740481C1C}">
+                <a14:useLocalDpi xmlns:a14="http://schemas.microsoft.com/office/drawing/2010/main" val="0"/>
+              </a:ext>
+              <a:ext uri="{96DAC541-7B7A-43D3-8B79-37D633B846F1}">
+                <asvg:svgBlip xmlns:asvg="http://schemas.microsoft.com/office/drawing/2016/SVG/main" r:embed="rId2"/>
+              </a:ext>
+            </a:extLst>
+          </a:blip>
+          <a:stretch>
+            <a:fillRect/>
+          </a:stretch>
+        </a:blipFill>
+        <a:ln>
+          <a:noFill/>
+        </a:ln>
+      </dgm:spPr>
+      <dgm:extLst>
+        <a:ext uri="{E40237B7-FDA0-4F09-8148-C483321AD2D9}">
+          <dgm14:cNvPr xmlns:dgm14="http://schemas.microsoft.com/office/drawing/2010/diagram" id="0" name="" descr="Пешком"/>
+        </a:ext>
+      </dgm:extLst>
+    </dgm:pt>
+    <dgm:pt modelId="{B164B06B-E8BE-4A9D-A555-DD95FC9C080B}" type="pres">
+      <dgm:prSet presAssocID="{E8D78DE8-574D-42DA-AA0B-21BAC6FC4CAF}" presName="spaceRect" presStyleCnt="0"/>
+      <dgm:spPr/>
+    </dgm:pt>
+    <dgm:pt modelId="{97DD26DC-BB44-4D1D-B157-C3AC120222A2}" type="pres">
+      <dgm:prSet presAssocID="{E8D78DE8-574D-42DA-AA0B-21BAC6FC4CAF}" presName="parTx" presStyleLbl="revTx" presStyleIdx="1" presStyleCnt="2">
+        <dgm:presLayoutVars>
+          <dgm:chMax val="0"/>
+          <dgm:chPref val="0"/>
+        </dgm:presLayoutVars>
+      </dgm:prSet>
+      <dgm:spPr/>
+    </dgm:pt>
+  </dgm:ptLst>
+  <dgm:cxnLst>
+    <dgm:cxn modelId="{B9750535-DFF2-446D-826C-D2DDBA3BCA5D}" type="presOf" srcId="{9EB5ADCB-8B6E-4BE7-9D15-7CF5FB658D94}" destId="{2068F52B-DFBF-4129-B41F-714C6ACD11C7}" srcOrd="0" destOrd="0" presId="urn:microsoft.com/office/officeart/2018/2/layout/IconVerticalSolidList"/>
+    <dgm:cxn modelId="{330EBD6F-8E85-4592-9FBA-35E50C7CDF61}" type="presOf" srcId="{E8D78DE8-574D-42DA-AA0B-21BAC6FC4CAF}" destId="{97DD26DC-BB44-4D1D-B157-C3AC120222A2}" srcOrd="0" destOrd="0" presId="urn:microsoft.com/office/officeart/2018/2/layout/IconVerticalSolidList"/>
+    <dgm:cxn modelId="{CA45DF6F-1BFF-4222-9C02-C8C817E54D8E}" type="presOf" srcId="{AD5BCFB2-99C9-4B96-A7F6-DC9038C63060}" destId="{77337821-CFB8-422A-A5BD-F5C874401CD9}" srcOrd="0" destOrd="0" presId="urn:microsoft.com/office/officeart/2018/2/layout/IconVerticalSolidList"/>
+    <dgm:cxn modelId="{3F950FB1-FD02-475F-8F9C-BCE8A6552158}" srcId="{AD5BCFB2-99C9-4B96-A7F6-DC9038C63060}" destId="{E8D78DE8-574D-42DA-AA0B-21BAC6FC4CAF}" srcOrd="1" destOrd="0" parTransId="{65012946-E927-4817-8C2B-36638405C720}" sibTransId="{1E739F8F-2351-4FCF-9CD2-ED9B9E95C2CF}"/>
+    <dgm:cxn modelId="{888D44D7-C931-4B1F-B8A0-2370EAB3B590}" srcId="{AD5BCFB2-99C9-4B96-A7F6-DC9038C63060}" destId="{9EB5ADCB-8B6E-4BE7-9D15-7CF5FB658D94}" srcOrd="0" destOrd="0" parTransId="{175B6F52-0913-4B22-90C0-729DBC98713F}" sibTransId="{8CFCE8DB-32CD-4511-BCB0-FA7BC503953E}"/>
+    <dgm:cxn modelId="{5E788E82-A503-45D1-9009-2D97618481FB}" type="presParOf" srcId="{77337821-CFB8-422A-A5BD-F5C874401CD9}" destId="{7ECB6E58-2421-43C9-9762-D914E502574B}" srcOrd="0" destOrd="0" presId="urn:microsoft.com/office/officeart/2018/2/layout/IconVerticalSolidList"/>
+    <dgm:cxn modelId="{7568971A-3F1C-4AE2-A30C-AB4C38CE5F66}" type="presParOf" srcId="{7ECB6E58-2421-43C9-9762-D914E502574B}" destId="{35B6D5B5-7F05-4419-89E9-908787F814E1}" srcOrd="0" destOrd="0" presId="urn:microsoft.com/office/officeart/2018/2/layout/IconVerticalSolidList"/>
+    <dgm:cxn modelId="{7D6DBC72-1074-498A-9461-260FABEC2E8A}" type="presParOf" srcId="{7ECB6E58-2421-43C9-9762-D914E502574B}" destId="{AD12AB43-74A3-434C-9E82-87423BC4A22A}" srcOrd="1" destOrd="0" presId="urn:microsoft.com/office/officeart/2018/2/layout/IconVerticalSolidList"/>
+    <dgm:cxn modelId="{21B0422B-543F-49A1-8056-41BD1B9BD25C}" type="presParOf" srcId="{7ECB6E58-2421-43C9-9762-D914E502574B}" destId="{F5FDFBDE-BB4D-4A4D-8502-A5C1667EFA9C}" srcOrd="2" destOrd="0" presId="urn:microsoft.com/office/officeart/2018/2/layout/IconVerticalSolidList"/>
+    <dgm:cxn modelId="{25681C7A-D728-4C2E-99F3-11EB23957708}" type="presParOf" srcId="{7ECB6E58-2421-43C9-9762-D914E502574B}" destId="{2068F52B-DFBF-4129-B41F-714C6ACD11C7}" srcOrd="3" destOrd="0" presId="urn:microsoft.com/office/officeart/2018/2/layout/IconVerticalSolidList"/>
+    <dgm:cxn modelId="{E564E279-1AAA-4030-95E4-1934DF5F038E}" type="presParOf" srcId="{77337821-CFB8-422A-A5BD-F5C874401CD9}" destId="{AB0F13BD-F239-4B95-B6F8-217A2D3ED0F1}" srcOrd="1" destOrd="0" presId="urn:microsoft.com/office/officeart/2018/2/layout/IconVerticalSolidList"/>
+    <dgm:cxn modelId="{D63C3738-25BF-4CB5-A063-74F28B763695}" type="presParOf" srcId="{77337821-CFB8-422A-A5BD-F5C874401CD9}" destId="{7D5F8FA7-5E6A-4554-B88C-05D7894E45C9}" srcOrd="2" destOrd="0" presId="urn:microsoft.com/office/officeart/2018/2/layout/IconVerticalSolidList"/>
+    <dgm:cxn modelId="{6E74ABFD-F9B8-4FC1-AF05-8FEDB99393DC}" type="presParOf" srcId="{7D5F8FA7-5E6A-4554-B88C-05D7894E45C9}" destId="{F8636798-32E4-4AB8-A2CC-A6909531EA94}" srcOrd="0" destOrd="0" presId="urn:microsoft.com/office/officeart/2018/2/layout/IconVerticalSolidList"/>
+    <dgm:cxn modelId="{C9A97353-D26A-46AA-8CF9-22B9BBE5D879}" type="presParOf" srcId="{7D5F8FA7-5E6A-4554-B88C-05D7894E45C9}" destId="{661F9D01-FD81-4D22-AB44-A6F3C561D014}" srcOrd="1" destOrd="0" presId="urn:microsoft.com/office/officeart/2018/2/layout/IconVerticalSolidList"/>
+    <dgm:cxn modelId="{8E9D2CD9-55A3-48D7-8F7F-F95C9F135F25}" type="presParOf" srcId="{7D5F8FA7-5E6A-4554-B88C-05D7894E45C9}" destId="{B164B06B-E8BE-4A9D-A555-DD95FC9C080B}" srcOrd="2" destOrd="0" presId="urn:microsoft.com/office/officeart/2018/2/layout/IconVerticalSolidList"/>
+    <dgm:cxn modelId="{60433ED3-0A0B-4790-803B-CFDEA7261682}" type="presParOf" srcId="{7D5F8FA7-5E6A-4554-B88C-05D7894E45C9}" destId="{97DD26DC-BB44-4D1D-B157-C3AC120222A2}" srcOrd="3" destOrd="0" presId="urn:microsoft.com/office/officeart/2018/2/layout/IconVerticalSolidList"/>
+  </dgm:cxnLst>
+  <dgm:bg/>
+  <dgm:whole/>
+  <dgm:extLst>
+    <a:ext uri="http://schemas.microsoft.com/office/drawing/2008/diagram">
+      <dsp:dataModelExt xmlns:dsp="http://schemas.microsoft.com/office/drawing/2008/diagram" relId="rId6" minVer="http://schemas.openxmlformats.org/drawingml/2006/diagram"/>
+    </a:ext>
+  </dgm:extLst>
+</dgm:dataModel>
+</file>
+
+<file path=ppt/diagrams/data2.xml><?xml version="1.0" encoding="utf-8"?>
+<dgm:dataModel xmlns:dgm="http://schemas.openxmlformats.org/drawingml/2006/diagram" xmlns:a="http://schemas.openxmlformats.org/drawingml/2006/main">
+  <dgm:ptLst>
+    <dgm:pt modelId="{0518625F-9509-491E-BCAE-55747D15975B}" type="doc">
+      <dgm:prSet loTypeId="urn:microsoft.com/office/officeart/2005/8/layout/hierarchy1" loCatId="hierarchy" qsTypeId="urn:microsoft.com/office/officeart/2005/8/quickstyle/simple2" qsCatId="simple" csTypeId="urn:microsoft.com/office/officeart/2005/8/colors/colorful2" csCatId="colorful" phldr="1"/>
+      <dgm:spPr/>
+      <dgm:t>
+        <a:bodyPr/>
+        <a:lstStyle/>
+        <a:p>
+          <a:endParaRPr lang="en-US"/>
+        </a:p>
+      </dgm:t>
+    </dgm:pt>
+    <dgm:pt modelId="{D9193987-8101-43D8-9701-4BD883559726}">
+      <dgm:prSet/>
+      <dgm:spPr/>
+      <dgm:t>
+        <a:bodyPr/>
+        <a:lstStyle/>
+        <a:p>
+          <a:r>
+            <a:rPr lang="ru-RU" dirty="0"/>
+            <a:t>Риски</a:t>
+          </a:r>
+          <a:endParaRPr lang="en-US" dirty="0"/>
+        </a:p>
+      </dgm:t>
+    </dgm:pt>
+    <dgm:pt modelId="{0BB5E093-1B3A-433A-829B-5DE60FA0F402}" type="parTrans" cxnId="{A9AECB52-523D-4EC3-AEE5-DD58853983C9}">
+      <dgm:prSet/>
+      <dgm:spPr/>
+      <dgm:t>
+        <a:bodyPr/>
+        <a:lstStyle/>
+        <a:p>
+          <a:endParaRPr lang="en-US"/>
+        </a:p>
+      </dgm:t>
+    </dgm:pt>
+    <dgm:pt modelId="{F5808E76-7C99-4DA0-8E80-B3BC164EDA59}" type="sibTrans" cxnId="{A9AECB52-523D-4EC3-AEE5-DD58853983C9}">
+      <dgm:prSet/>
+      <dgm:spPr/>
+      <dgm:t>
+        <a:bodyPr/>
+        <a:lstStyle/>
+        <a:p>
+          <a:endParaRPr lang="en-US"/>
+        </a:p>
+      </dgm:t>
+    </dgm:pt>
+    <dgm:pt modelId="{59E03643-E6E1-4281-B04A-7D7DFDC4CEE0}">
+      <dgm:prSet/>
+      <dgm:spPr/>
+      <dgm:t>
+        <a:bodyPr/>
+        <a:lstStyle/>
+        <a:p>
+          <a:r>
+            <a:rPr lang="ru-RU" baseline="0"/>
+            <a:t>академической нечестности</a:t>
+          </a:r>
+          <a:endParaRPr lang="en-US"/>
+        </a:p>
+      </dgm:t>
+    </dgm:pt>
+    <dgm:pt modelId="{51180EB5-68F9-4A62-974C-97F1D6E913EC}" type="parTrans" cxnId="{98C9EB36-8B30-4702-A023-B0DE493E12C5}">
+      <dgm:prSet/>
+      <dgm:spPr/>
+      <dgm:t>
+        <a:bodyPr/>
+        <a:lstStyle/>
+        <a:p>
+          <a:endParaRPr lang="en-US"/>
+        </a:p>
+      </dgm:t>
+    </dgm:pt>
+    <dgm:pt modelId="{3A2EC777-3706-4D1E-9A8C-AD36404C3CFA}" type="sibTrans" cxnId="{98C9EB36-8B30-4702-A023-B0DE493E12C5}">
+      <dgm:prSet/>
+      <dgm:spPr/>
+      <dgm:t>
+        <a:bodyPr/>
+        <a:lstStyle/>
+        <a:p>
+          <a:endParaRPr lang="en-US"/>
+        </a:p>
+      </dgm:t>
+    </dgm:pt>
+    <dgm:pt modelId="{8C4A0970-7AE9-4027-AE72-583FF50C6FCA}">
+      <dgm:prSet/>
+      <dgm:spPr/>
+      <dgm:t>
+        <a:bodyPr/>
+        <a:lstStyle/>
+        <a:p>
+          <a:r>
+            <a:rPr lang="ru-RU" baseline="0"/>
+            <a:t>«галлюцинации» языковых моделей</a:t>
+          </a:r>
+          <a:endParaRPr lang="en-US"/>
+        </a:p>
+      </dgm:t>
+    </dgm:pt>
+    <dgm:pt modelId="{4CCB1107-078E-40E1-A8B1-3A3819753469}" type="parTrans" cxnId="{4E691D21-BD3C-45C6-84E5-A56FBDA12BA9}">
+      <dgm:prSet/>
+      <dgm:spPr/>
+      <dgm:t>
+        <a:bodyPr/>
+        <a:lstStyle/>
+        <a:p>
+          <a:endParaRPr lang="en-US"/>
+        </a:p>
+      </dgm:t>
+    </dgm:pt>
+    <dgm:pt modelId="{38F054C5-CE6A-4FF2-871A-636695AC3773}" type="sibTrans" cxnId="{4E691D21-BD3C-45C6-84E5-A56FBDA12BA9}">
+      <dgm:prSet/>
+      <dgm:spPr/>
+      <dgm:t>
+        <a:bodyPr/>
+        <a:lstStyle/>
+        <a:p>
+          <a:endParaRPr lang="en-US"/>
+        </a:p>
+      </dgm:t>
+    </dgm:pt>
+    <dgm:pt modelId="{9AF18987-13CB-4A04-B4A1-3FE2FEBC255E}">
+      <dgm:prSet/>
+      <dgm:spPr/>
+      <dgm:t>
+        <a:bodyPr/>
+        <a:lstStyle/>
+        <a:p>
+          <a:r>
+            <a:rPr lang="ru-RU" baseline="0"/>
+            <a:t>нормативное регулирование</a:t>
+          </a:r>
+          <a:endParaRPr lang="en-US"/>
+        </a:p>
+      </dgm:t>
+    </dgm:pt>
+    <dgm:pt modelId="{22A83A0E-BEF4-41D1-9A0F-4EFC9F3FFFDB}" type="parTrans" cxnId="{03B872F3-1FF7-4681-89C5-8B08EE1834FE}">
+      <dgm:prSet/>
+      <dgm:spPr/>
+      <dgm:t>
+        <a:bodyPr/>
+        <a:lstStyle/>
+        <a:p>
+          <a:endParaRPr lang="en-US"/>
+        </a:p>
+      </dgm:t>
+    </dgm:pt>
+    <dgm:pt modelId="{E420B78F-EBF0-43D5-A2A6-1DC373338C96}" type="sibTrans" cxnId="{03B872F3-1FF7-4681-89C5-8B08EE1834FE}">
+      <dgm:prSet/>
+      <dgm:spPr/>
+      <dgm:t>
+        <a:bodyPr/>
+        <a:lstStyle/>
+        <a:p>
+          <a:endParaRPr lang="en-US"/>
+        </a:p>
+      </dgm:t>
+    </dgm:pt>
+    <dgm:pt modelId="{EA9194AF-0373-41D8-A04A-58C85C223F99}" type="pres">
+      <dgm:prSet presAssocID="{0518625F-9509-491E-BCAE-55747D15975B}" presName="hierChild1" presStyleCnt="0">
+        <dgm:presLayoutVars>
+          <dgm:chPref val="1"/>
+          <dgm:dir/>
+          <dgm:animOne val="branch"/>
+          <dgm:animLvl val="lvl"/>
+          <dgm:resizeHandles/>
+        </dgm:presLayoutVars>
+      </dgm:prSet>
+      <dgm:spPr/>
+    </dgm:pt>
+    <dgm:pt modelId="{34140E40-7C55-4673-BA77-464F27518CDE}" type="pres">
+      <dgm:prSet presAssocID="{D9193987-8101-43D8-9701-4BD883559726}" presName="hierRoot1" presStyleCnt="0"/>
+      <dgm:spPr/>
+    </dgm:pt>
+    <dgm:pt modelId="{7FF6FB9E-0806-43EB-9323-438FBA819467}" type="pres">
+      <dgm:prSet presAssocID="{D9193987-8101-43D8-9701-4BD883559726}" presName="composite" presStyleCnt="0"/>
+      <dgm:spPr/>
+    </dgm:pt>
+    <dgm:pt modelId="{5078DE82-6AB0-474D-9535-CB9E2E71C2BF}" type="pres">
+      <dgm:prSet presAssocID="{D9193987-8101-43D8-9701-4BD883559726}" presName="background" presStyleLbl="node0" presStyleIdx="0" presStyleCnt="1"/>
+      <dgm:spPr/>
+    </dgm:pt>
+    <dgm:pt modelId="{DD8A2743-3896-4F42-9095-2AC4307E66E2}" type="pres">
+      <dgm:prSet presAssocID="{D9193987-8101-43D8-9701-4BD883559726}" presName="text" presStyleLbl="fgAcc0" presStyleIdx="0" presStyleCnt="1">
+        <dgm:presLayoutVars>
+          <dgm:chPref val="3"/>
+        </dgm:presLayoutVars>
+      </dgm:prSet>
+      <dgm:spPr/>
+    </dgm:pt>
+    <dgm:pt modelId="{B6C69ADB-C586-4ACF-A818-9B1C17BC748D}" type="pres">
+      <dgm:prSet presAssocID="{D9193987-8101-43D8-9701-4BD883559726}" presName="hierChild2" presStyleCnt="0"/>
+      <dgm:spPr/>
+    </dgm:pt>
+    <dgm:pt modelId="{CBAA838E-6914-4E30-9E05-A7A9C5ADE2F9}" type="pres">
+      <dgm:prSet presAssocID="{51180EB5-68F9-4A62-974C-97F1D6E913EC}" presName="Name10" presStyleLbl="parChTrans1D2" presStyleIdx="0" presStyleCnt="3"/>
+      <dgm:spPr/>
+    </dgm:pt>
+    <dgm:pt modelId="{EB0FDFC1-C20B-4540-AFC5-F95B0362F531}" type="pres">
+      <dgm:prSet presAssocID="{59E03643-E6E1-4281-B04A-7D7DFDC4CEE0}" presName="hierRoot2" presStyleCnt="0"/>
+      <dgm:spPr/>
+    </dgm:pt>
+    <dgm:pt modelId="{F1E5269C-85A7-441B-AD6B-444701B56010}" type="pres">
+      <dgm:prSet presAssocID="{59E03643-E6E1-4281-B04A-7D7DFDC4CEE0}" presName="composite2" presStyleCnt="0"/>
+      <dgm:spPr/>
+    </dgm:pt>
+    <dgm:pt modelId="{DA563EA3-48D3-46D0-B68D-A51A4235941C}" type="pres">
+      <dgm:prSet presAssocID="{59E03643-E6E1-4281-B04A-7D7DFDC4CEE0}" presName="background2" presStyleLbl="node2" presStyleIdx="0" presStyleCnt="3"/>
+      <dgm:spPr/>
+    </dgm:pt>
+    <dgm:pt modelId="{EFEB9268-E797-4F69-8E56-B45D35098714}" type="pres">
+      <dgm:prSet presAssocID="{59E03643-E6E1-4281-B04A-7D7DFDC4CEE0}" presName="text2" presStyleLbl="fgAcc2" presStyleIdx="0" presStyleCnt="3">
+        <dgm:presLayoutVars>
+          <dgm:chPref val="3"/>
+        </dgm:presLayoutVars>
+      </dgm:prSet>
+      <dgm:spPr/>
+    </dgm:pt>
+    <dgm:pt modelId="{824A0CB2-F604-48AC-AD02-7D44041CF740}" type="pres">
+      <dgm:prSet presAssocID="{59E03643-E6E1-4281-B04A-7D7DFDC4CEE0}" presName="hierChild3" presStyleCnt="0"/>
+      <dgm:spPr/>
+    </dgm:pt>
+    <dgm:pt modelId="{7C0E5BCA-9C3A-4859-9EFD-44628139DCA7}" type="pres">
+      <dgm:prSet presAssocID="{4CCB1107-078E-40E1-A8B1-3A3819753469}" presName="Name10" presStyleLbl="parChTrans1D2" presStyleIdx="1" presStyleCnt="3"/>
+      <dgm:spPr/>
+    </dgm:pt>
+    <dgm:pt modelId="{5428F3BA-3FF2-4FFF-A1B4-981A384C6053}" type="pres">
+      <dgm:prSet presAssocID="{8C4A0970-7AE9-4027-AE72-583FF50C6FCA}" presName="hierRoot2" presStyleCnt="0"/>
+      <dgm:spPr/>
+    </dgm:pt>
+    <dgm:pt modelId="{2C88F6E2-58A9-457F-AD92-3937D6D56006}" type="pres">
+      <dgm:prSet presAssocID="{8C4A0970-7AE9-4027-AE72-583FF50C6FCA}" presName="composite2" presStyleCnt="0"/>
+      <dgm:spPr/>
+    </dgm:pt>
+    <dgm:pt modelId="{B9D6C9AC-24E6-4BF1-A657-C51C1B19E7DB}" type="pres">
+      <dgm:prSet presAssocID="{8C4A0970-7AE9-4027-AE72-583FF50C6FCA}" presName="background2" presStyleLbl="node2" presStyleIdx="1" presStyleCnt="3"/>
+      <dgm:spPr/>
+    </dgm:pt>
+    <dgm:pt modelId="{341CC215-21C5-435D-8163-C7372573831D}" type="pres">
+      <dgm:prSet presAssocID="{8C4A0970-7AE9-4027-AE72-583FF50C6FCA}" presName="text2" presStyleLbl="fgAcc2" presStyleIdx="1" presStyleCnt="3">
+        <dgm:presLayoutVars>
+          <dgm:chPref val="3"/>
+        </dgm:presLayoutVars>
+      </dgm:prSet>
+      <dgm:spPr/>
+    </dgm:pt>
+    <dgm:pt modelId="{96064DF2-7024-4350-A8FF-86FEFE42D7E6}" type="pres">
+      <dgm:prSet presAssocID="{8C4A0970-7AE9-4027-AE72-583FF50C6FCA}" presName="hierChild3" presStyleCnt="0"/>
+      <dgm:spPr/>
+    </dgm:pt>
+    <dgm:pt modelId="{86932DE1-8D02-4AB8-810E-634DC890F336}" type="pres">
+      <dgm:prSet presAssocID="{22A83A0E-BEF4-41D1-9A0F-4EFC9F3FFFDB}" presName="Name10" presStyleLbl="parChTrans1D2" presStyleIdx="2" presStyleCnt="3"/>
+      <dgm:spPr/>
+    </dgm:pt>
+    <dgm:pt modelId="{A6EB6E25-2881-45C7-AC17-58406C19BE4F}" type="pres">
+      <dgm:prSet presAssocID="{9AF18987-13CB-4A04-B4A1-3FE2FEBC255E}" presName="hierRoot2" presStyleCnt="0"/>
+      <dgm:spPr/>
+    </dgm:pt>
+    <dgm:pt modelId="{2922B3FD-D9A2-43D5-9D4D-3D30939B62DA}" type="pres">
+      <dgm:prSet presAssocID="{9AF18987-13CB-4A04-B4A1-3FE2FEBC255E}" presName="composite2" presStyleCnt="0"/>
+      <dgm:spPr/>
+    </dgm:pt>
+    <dgm:pt modelId="{BDF651BC-E07E-4091-9B9F-5B1923C2F297}" type="pres">
+      <dgm:prSet presAssocID="{9AF18987-13CB-4A04-B4A1-3FE2FEBC255E}" presName="background2" presStyleLbl="node2" presStyleIdx="2" presStyleCnt="3"/>
+      <dgm:spPr/>
+    </dgm:pt>
+    <dgm:pt modelId="{6470AECC-C311-47BE-BDEC-57FDE0753C4B}" type="pres">
+      <dgm:prSet presAssocID="{9AF18987-13CB-4A04-B4A1-3FE2FEBC255E}" presName="text2" presStyleLbl="fgAcc2" presStyleIdx="2" presStyleCnt="3">
+        <dgm:presLayoutVars>
+          <dgm:chPref val="3"/>
+        </dgm:presLayoutVars>
+      </dgm:prSet>
+      <dgm:spPr/>
+    </dgm:pt>
+    <dgm:pt modelId="{E75735A6-F2EC-4A73-A30C-78AD7B41CF71}" type="pres">
+      <dgm:prSet presAssocID="{9AF18987-13CB-4A04-B4A1-3FE2FEBC255E}" presName="hierChild3" presStyleCnt="0"/>
+      <dgm:spPr/>
+    </dgm:pt>
+  </dgm:ptLst>
+  <dgm:cxnLst>
+    <dgm:cxn modelId="{4E691D21-BD3C-45C6-84E5-A56FBDA12BA9}" srcId="{D9193987-8101-43D8-9701-4BD883559726}" destId="{8C4A0970-7AE9-4027-AE72-583FF50C6FCA}" srcOrd="1" destOrd="0" parTransId="{4CCB1107-078E-40E1-A8B1-3A3819753469}" sibTransId="{38F054C5-CE6A-4FF2-871A-636695AC3773}"/>
+    <dgm:cxn modelId="{98C9EB36-8B30-4702-A023-B0DE493E12C5}" srcId="{D9193987-8101-43D8-9701-4BD883559726}" destId="{59E03643-E6E1-4281-B04A-7D7DFDC4CEE0}" srcOrd="0" destOrd="0" parTransId="{51180EB5-68F9-4A62-974C-97F1D6E913EC}" sibTransId="{3A2EC777-3706-4D1E-9A8C-AD36404C3CFA}"/>
+    <dgm:cxn modelId="{A9AECB52-523D-4EC3-AEE5-DD58853983C9}" srcId="{0518625F-9509-491E-BCAE-55747D15975B}" destId="{D9193987-8101-43D8-9701-4BD883559726}" srcOrd="0" destOrd="0" parTransId="{0BB5E093-1B3A-433A-829B-5DE60FA0F402}" sibTransId="{F5808E76-7C99-4DA0-8E80-B3BC164EDA59}"/>
+    <dgm:cxn modelId="{CDA49E90-A25C-4788-92A9-877BCAA108FE}" type="presOf" srcId="{8C4A0970-7AE9-4027-AE72-583FF50C6FCA}" destId="{341CC215-21C5-435D-8163-C7372573831D}" srcOrd="0" destOrd="0" presId="urn:microsoft.com/office/officeart/2005/8/layout/hierarchy1"/>
+    <dgm:cxn modelId="{94C7159B-EBD3-4C4E-851F-441170621B5D}" type="presOf" srcId="{0518625F-9509-491E-BCAE-55747D15975B}" destId="{EA9194AF-0373-41D8-A04A-58C85C223F99}" srcOrd="0" destOrd="0" presId="urn:microsoft.com/office/officeart/2005/8/layout/hierarchy1"/>
+    <dgm:cxn modelId="{AC43D6AE-A23E-4BD4-AEA2-543A7B7B7340}" type="presOf" srcId="{9AF18987-13CB-4A04-B4A1-3FE2FEBC255E}" destId="{6470AECC-C311-47BE-BDEC-57FDE0753C4B}" srcOrd="0" destOrd="0" presId="urn:microsoft.com/office/officeart/2005/8/layout/hierarchy1"/>
+    <dgm:cxn modelId="{CD4E57BD-4ECD-4A85-8F9D-DC9CD96653A0}" type="presOf" srcId="{22A83A0E-BEF4-41D1-9A0F-4EFC9F3FFFDB}" destId="{86932DE1-8D02-4AB8-810E-634DC890F336}" srcOrd="0" destOrd="0" presId="urn:microsoft.com/office/officeart/2005/8/layout/hierarchy1"/>
+    <dgm:cxn modelId="{104AE8BE-2508-4363-9ADF-54F56D78632D}" type="presOf" srcId="{D9193987-8101-43D8-9701-4BD883559726}" destId="{DD8A2743-3896-4F42-9095-2AC4307E66E2}" srcOrd="0" destOrd="0" presId="urn:microsoft.com/office/officeart/2005/8/layout/hierarchy1"/>
+    <dgm:cxn modelId="{FA8B7EE3-EA1E-4772-944E-D35998930D1A}" type="presOf" srcId="{51180EB5-68F9-4A62-974C-97F1D6E913EC}" destId="{CBAA838E-6914-4E30-9E05-A7A9C5ADE2F9}" srcOrd="0" destOrd="0" presId="urn:microsoft.com/office/officeart/2005/8/layout/hierarchy1"/>
+    <dgm:cxn modelId="{A849BEE5-7A7F-4589-9D13-5263950D6880}" type="presOf" srcId="{59E03643-E6E1-4281-B04A-7D7DFDC4CEE0}" destId="{EFEB9268-E797-4F69-8E56-B45D35098714}" srcOrd="0" destOrd="0" presId="urn:microsoft.com/office/officeart/2005/8/layout/hierarchy1"/>
+    <dgm:cxn modelId="{06F5FDEE-D19E-4EE6-BB35-D33C490C17F5}" type="presOf" srcId="{4CCB1107-078E-40E1-A8B1-3A3819753469}" destId="{7C0E5BCA-9C3A-4859-9EFD-44628139DCA7}" srcOrd="0" destOrd="0" presId="urn:microsoft.com/office/officeart/2005/8/layout/hierarchy1"/>
+    <dgm:cxn modelId="{03B872F3-1FF7-4681-89C5-8B08EE1834FE}" srcId="{D9193987-8101-43D8-9701-4BD883559726}" destId="{9AF18987-13CB-4A04-B4A1-3FE2FEBC255E}" srcOrd="2" destOrd="0" parTransId="{22A83A0E-BEF4-41D1-9A0F-4EFC9F3FFFDB}" sibTransId="{E420B78F-EBF0-43D5-A2A6-1DC373338C96}"/>
+    <dgm:cxn modelId="{F3A1E3FF-3DC3-4077-9351-298F9705B499}" type="presParOf" srcId="{EA9194AF-0373-41D8-A04A-58C85C223F99}" destId="{34140E40-7C55-4673-BA77-464F27518CDE}" srcOrd="0" destOrd="0" presId="urn:microsoft.com/office/officeart/2005/8/layout/hierarchy1"/>
+    <dgm:cxn modelId="{6BC31086-3571-40EB-86FD-FF373CA7EEF3}" type="presParOf" srcId="{34140E40-7C55-4673-BA77-464F27518CDE}" destId="{7FF6FB9E-0806-43EB-9323-438FBA819467}" srcOrd="0" destOrd="0" presId="urn:microsoft.com/office/officeart/2005/8/layout/hierarchy1"/>
+    <dgm:cxn modelId="{46B22102-BBEA-4623-AAC3-5C84E5906970}" type="presParOf" srcId="{7FF6FB9E-0806-43EB-9323-438FBA819467}" destId="{5078DE82-6AB0-474D-9535-CB9E2E71C2BF}" srcOrd="0" destOrd="0" presId="urn:microsoft.com/office/officeart/2005/8/layout/hierarchy1"/>
+    <dgm:cxn modelId="{6EDA1D6B-4BE0-4098-B7BC-8FC07D2D5400}" type="presParOf" srcId="{7FF6FB9E-0806-43EB-9323-438FBA819467}" destId="{DD8A2743-3896-4F42-9095-2AC4307E66E2}" srcOrd="1" destOrd="0" presId="urn:microsoft.com/office/officeart/2005/8/layout/hierarchy1"/>
+    <dgm:cxn modelId="{AA16E747-169A-4B08-85E2-48894EA86BC4}" type="presParOf" srcId="{34140E40-7C55-4673-BA77-464F27518CDE}" destId="{B6C69ADB-C586-4ACF-A818-9B1C17BC748D}" srcOrd="1" destOrd="0" presId="urn:microsoft.com/office/officeart/2005/8/layout/hierarchy1"/>
+    <dgm:cxn modelId="{44DB5494-C9FA-4850-83F2-5898900CC4EC}" type="presParOf" srcId="{B6C69ADB-C586-4ACF-A818-9B1C17BC748D}" destId="{CBAA838E-6914-4E30-9E05-A7A9C5ADE2F9}" srcOrd="0" destOrd="0" presId="urn:microsoft.com/office/officeart/2005/8/layout/hierarchy1"/>
+    <dgm:cxn modelId="{69B5353E-3144-4DEC-B0A3-3E5D5DADDE1D}" type="presParOf" srcId="{B6C69ADB-C586-4ACF-A818-9B1C17BC748D}" destId="{EB0FDFC1-C20B-4540-AFC5-F95B0362F531}" srcOrd="1" destOrd="0" presId="urn:microsoft.com/office/officeart/2005/8/layout/hierarchy1"/>
+    <dgm:cxn modelId="{AA701766-9EE0-4652-8009-5FDC5BEFD9E3}" type="presParOf" srcId="{EB0FDFC1-C20B-4540-AFC5-F95B0362F531}" destId="{F1E5269C-85A7-441B-AD6B-444701B56010}" srcOrd="0" destOrd="0" presId="urn:microsoft.com/office/officeart/2005/8/layout/hierarchy1"/>
+    <dgm:cxn modelId="{591DE85F-FB47-4BF8-A9A2-F50219F2415F}" type="presParOf" srcId="{F1E5269C-85A7-441B-AD6B-444701B56010}" destId="{DA563EA3-48D3-46D0-B68D-A51A4235941C}" srcOrd="0" destOrd="0" presId="urn:microsoft.com/office/officeart/2005/8/layout/hierarchy1"/>
+    <dgm:cxn modelId="{6A33C941-9E6F-46C4-8CB7-D165F36FC290}" type="presParOf" srcId="{F1E5269C-85A7-441B-AD6B-444701B56010}" destId="{EFEB9268-E797-4F69-8E56-B45D35098714}" srcOrd="1" destOrd="0" presId="urn:microsoft.com/office/officeart/2005/8/layout/hierarchy1"/>
+    <dgm:cxn modelId="{B90DB284-ADDE-43CF-BB62-5D80D8E21512}" type="presParOf" srcId="{EB0FDFC1-C20B-4540-AFC5-F95B0362F531}" destId="{824A0CB2-F604-48AC-AD02-7D44041CF740}" srcOrd="1" destOrd="0" presId="urn:microsoft.com/office/officeart/2005/8/layout/hierarchy1"/>
+    <dgm:cxn modelId="{EF3FD48F-9A2B-4CB6-9C08-4042B5DD4CFA}" type="presParOf" srcId="{B6C69ADB-C586-4ACF-A818-9B1C17BC748D}" destId="{7C0E5BCA-9C3A-4859-9EFD-44628139DCA7}" srcOrd="2" destOrd="0" presId="urn:microsoft.com/office/officeart/2005/8/layout/hierarchy1"/>
+    <dgm:cxn modelId="{D1D9E8DD-0F3C-42AD-A6DF-6A2F116C89F8}" type="presParOf" srcId="{B6C69ADB-C586-4ACF-A818-9B1C17BC748D}" destId="{5428F3BA-3FF2-4FFF-A1B4-981A384C6053}" srcOrd="3" destOrd="0" presId="urn:microsoft.com/office/officeart/2005/8/layout/hierarchy1"/>
+    <dgm:cxn modelId="{0F6B69F8-2C45-427F-8198-CB15A07E758C}" type="presParOf" srcId="{5428F3BA-3FF2-4FFF-A1B4-981A384C6053}" destId="{2C88F6E2-58A9-457F-AD92-3937D6D56006}" srcOrd="0" destOrd="0" presId="urn:microsoft.com/office/officeart/2005/8/layout/hierarchy1"/>
+    <dgm:cxn modelId="{79AC5C66-6FF5-43DD-91CB-406EC9058E7F}" type="presParOf" srcId="{2C88F6E2-58A9-457F-AD92-3937D6D56006}" destId="{B9D6C9AC-24E6-4BF1-A657-C51C1B19E7DB}" srcOrd="0" destOrd="0" presId="urn:microsoft.com/office/officeart/2005/8/layout/hierarchy1"/>
+    <dgm:cxn modelId="{B3177CBB-A843-4684-958A-73B09E187B2E}" type="presParOf" srcId="{2C88F6E2-58A9-457F-AD92-3937D6D56006}" destId="{341CC215-21C5-435D-8163-C7372573831D}" srcOrd="1" destOrd="0" presId="urn:microsoft.com/office/officeart/2005/8/layout/hierarchy1"/>
+    <dgm:cxn modelId="{3A57AD6F-C8F0-43BF-8B6C-A20314776302}" type="presParOf" srcId="{5428F3BA-3FF2-4FFF-A1B4-981A384C6053}" destId="{96064DF2-7024-4350-A8FF-86FEFE42D7E6}" srcOrd="1" destOrd="0" presId="urn:microsoft.com/office/officeart/2005/8/layout/hierarchy1"/>
+    <dgm:cxn modelId="{687718F0-0CA6-4CB5-8BF6-1465C9FC270D}" type="presParOf" srcId="{B6C69ADB-C586-4ACF-A818-9B1C17BC748D}" destId="{86932DE1-8D02-4AB8-810E-634DC890F336}" srcOrd="4" destOrd="0" presId="urn:microsoft.com/office/officeart/2005/8/layout/hierarchy1"/>
+    <dgm:cxn modelId="{0ED7FA81-1E96-4A1F-9E3D-00D989C6DB02}" type="presParOf" srcId="{B6C69ADB-C586-4ACF-A818-9B1C17BC748D}" destId="{A6EB6E25-2881-45C7-AC17-58406C19BE4F}" srcOrd="5" destOrd="0" presId="urn:microsoft.com/office/officeart/2005/8/layout/hierarchy1"/>
+    <dgm:cxn modelId="{C8081B0D-6BE4-4504-AC16-E46DE64B31CD}" type="presParOf" srcId="{A6EB6E25-2881-45C7-AC17-58406C19BE4F}" destId="{2922B3FD-D9A2-43D5-9D4D-3D30939B62DA}" srcOrd="0" destOrd="0" presId="urn:microsoft.com/office/officeart/2005/8/layout/hierarchy1"/>
+    <dgm:cxn modelId="{C51C90C3-DEF8-4D5E-B029-33CA878D1FDA}" type="presParOf" srcId="{2922B3FD-D9A2-43D5-9D4D-3D30939B62DA}" destId="{BDF651BC-E07E-4091-9B9F-5B1923C2F297}" srcOrd="0" destOrd="0" presId="urn:microsoft.com/office/officeart/2005/8/layout/hierarchy1"/>
+    <dgm:cxn modelId="{5EAF407D-7913-44A2-99A0-50542B39706C}" type="presParOf" srcId="{2922B3FD-D9A2-43D5-9D4D-3D30939B62DA}" destId="{6470AECC-C311-47BE-BDEC-57FDE0753C4B}" srcOrd="1" destOrd="0" presId="urn:microsoft.com/office/officeart/2005/8/layout/hierarchy1"/>
+    <dgm:cxn modelId="{07AF3DDB-1E6B-4210-92D7-25A6124DF90D}" type="presParOf" srcId="{A6EB6E25-2881-45C7-AC17-58406C19BE4F}" destId="{E75735A6-F2EC-4A73-A30C-78AD7B41CF71}" srcOrd="1" destOrd="0" presId="urn:microsoft.com/office/officeart/2005/8/layout/hierarchy1"/>
+  </dgm:cxnLst>
+  <dgm:bg/>
+  <dgm:whole/>
+  <dgm:extLst>
+    <a:ext uri="http://schemas.microsoft.com/office/drawing/2008/diagram">
+      <dsp:dataModelExt xmlns:dsp="http://schemas.microsoft.com/office/drawing/2008/diagram" relId="rId6" minVer="http://schemas.openxmlformats.org/drawingml/2006/diagram"/>
+    </a:ext>
+  </dgm:extLst>
+</dgm:dataModel>
+</file>
+
+<file path=ppt/diagrams/drawing1.xml><?xml version="1.0" encoding="utf-8"?>
+<dsp:drawing xmlns:dgm="http://schemas.openxmlformats.org/drawingml/2006/diagram" xmlns:dsp="http://schemas.microsoft.com/office/drawing/2008/diagram" xmlns:a="http://schemas.openxmlformats.org/drawingml/2006/main">
+  <dsp:spTree>
+    <dsp:nvGrpSpPr>
+      <dsp:cNvPr id="0" name=""/>
+      <dsp:cNvGrpSpPr/>
+    </dsp:nvGrpSpPr>
+    <dsp:grpSpPr/>
+    <dsp:sp modelId="{35B6D5B5-7F05-4419-89E9-908787F814E1}">
+      <dsp:nvSpPr>
+        <dsp:cNvPr id="0" name=""/>
+        <dsp:cNvSpPr/>
+      </dsp:nvSpPr>
+      <dsp:spPr>
+        <a:xfrm>
+          <a:off x="0" y="682740"/>
+          <a:ext cx="8785735" cy="1260443"/>
+        </a:xfrm>
+        <a:prstGeom prst="roundRect">
+          <a:avLst>
+            <a:gd name="adj" fmla="val 10000"/>
+          </a:avLst>
+        </a:prstGeom>
+        <a:solidFill>
+          <a:schemeClr val="accent2">
+            <a:hueOff val="0"/>
+            <a:satOff val="0"/>
+            <a:lumOff val="0"/>
+            <a:alphaOff val="0"/>
+          </a:schemeClr>
+        </a:solidFill>
+        <a:ln>
+          <a:noFill/>
+        </a:ln>
+        <a:effectLst/>
+      </dsp:spPr>
+      <dsp:style>
+        <a:lnRef idx="0">
+          <a:scrgbClr r="0" g="0" b="0"/>
+        </a:lnRef>
+        <a:fillRef idx="1">
+          <a:scrgbClr r="0" g="0" b="0"/>
+        </a:fillRef>
+        <a:effectRef idx="0">
+          <a:scrgbClr r="0" g="0" b="0"/>
+        </a:effectRef>
+        <a:fontRef idx="minor"/>
+      </dsp:style>
+    </dsp:sp>
+    <dsp:sp modelId="{AD12AB43-74A3-434C-9E82-87423BC4A22A}">
+      <dsp:nvSpPr>
+        <dsp:cNvPr id="0" name=""/>
+        <dsp:cNvSpPr/>
+      </dsp:nvSpPr>
+      <dsp:spPr>
+        <a:xfrm>
+          <a:off x="381284" y="966339"/>
+          <a:ext cx="693243" cy="693243"/>
+        </a:xfrm>
+        <a:prstGeom prst="rect">
+          <a:avLst/>
+        </a:prstGeom>
+        <a:blipFill>
+          <a:blip xmlns:r="http://schemas.openxmlformats.org/officeDocument/2006/relationships">
+            <a:extLst>
+              <a:ext uri="{28A0092B-C50C-407E-A947-70E740481C1C}">
+                <a14:useLocalDpi xmlns:a14="http://schemas.microsoft.com/office/drawing/2010/main" val="0"/>
+              </a:ext>
+              <a:ext uri="{96DAC541-7B7A-43D3-8B79-37D633B846F1}">
+                <asvg:svgBlip xmlns:asvg="http://schemas.microsoft.com/office/drawing/2016/SVG/main" r:embed="rId1"/>
+              </a:ext>
+            </a:extLst>
+          </a:blip>
+          <a:stretch>
+            <a:fillRect/>
+          </a:stretch>
+        </a:blipFill>
+        <a:ln w="13970" cap="flat" cmpd="sng" algn="ctr">
+          <a:noFill/>
+          <a:prstDash val="solid"/>
+        </a:ln>
+        <a:effectLst/>
+      </dsp:spPr>
+      <dsp:style>
+        <a:lnRef idx="2">
+          <a:scrgbClr r="0" g="0" b="0"/>
+        </a:lnRef>
+        <a:fillRef idx="1">
+          <a:scrgbClr r="0" g="0" b="0"/>
+        </a:fillRef>
+        <a:effectRef idx="0">
+          <a:scrgbClr r="0" g="0" b="0"/>
+        </a:effectRef>
+        <a:fontRef idx="minor">
+          <a:schemeClr val="lt1"/>
+        </a:fontRef>
+      </dsp:style>
+    </dsp:sp>
+    <dsp:sp modelId="{2068F52B-DFBF-4129-B41F-714C6ACD11C7}">
+      <dsp:nvSpPr>
+        <dsp:cNvPr id="0" name=""/>
+        <dsp:cNvSpPr/>
+      </dsp:nvSpPr>
+      <dsp:spPr>
+        <a:xfrm>
+          <a:off x="1455812" y="682740"/>
+          <a:ext cx="7329922" cy="1260443"/>
+        </a:xfrm>
+        <a:prstGeom prst="rect">
+          <a:avLst/>
+        </a:prstGeom>
+        <a:noFill/>
+        <a:ln>
+          <a:noFill/>
+        </a:ln>
+        <a:effectLst/>
+      </dsp:spPr>
+      <dsp:style>
+        <a:lnRef idx="0">
+          <a:scrgbClr r="0" g="0" b="0"/>
+        </a:lnRef>
+        <a:fillRef idx="0">
+          <a:scrgbClr r="0" g="0" b="0"/>
+        </a:fillRef>
+        <a:effectRef idx="0">
+          <a:scrgbClr r="0" g="0" b="0"/>
+        </a:effectRef>
+        <a:fontRef idx="minor"/>
+      </dsp:style>
+      <dsp:txBody>
+        <a:bodyPr spcFirstLastPara="0" vert="horz" wrap="square" lIns="133397" tIns="133397" rIns="133397" bIns="133397" numCol="1" spcCol="1270" anchor="ctr" anchorCtr="0">
+          <a:noAutofit/>
+        </a:bodyPr>
+        <a:lstStyle/>
+        <a:p>
+          <a:pPr marL="0" lvl="0" indent="0" algn="l" defTabSz="622300">
+            <a:lnSpc>
+              <a:spcPct val="90000"/>
+            </a:lnSpc>
+            <a:spcBef>
+              <a:spcPct val="0"/>
+            </a:spcBef>
+            <a:spcAft>
+              <a:spcPct val="35000"/>
+            </a:spcAft>
+            <a:buNone/>
+          </a:pPr>
+          <a:r>
+            <a:rPr lang="ru-RU" sz="1400" kern="1200" baseline="0"/>
+            <a:t>Российские исследователи сходятся во мнении, что внедрение больших языковых моделей приводит к изменению роли преподавателя. Он всё в большей степени выступает не источником информации, а модератором и наставником, формирующим у студентов навыки критического мышления, анализа и осознанного использования цифровых инструментов.</a:t>
+          </a:r>
+          <a:endParaRPr lang="en-US" sz="1400" kern="1200"/>
+        </a:p>
+      </dsp:txBody>
+      <dsp:txXfrm>
+        <a:off x="1455812" y="682740"/>
+        <a:ext cx="7329922" cy="1260443"/>
+      </dsp:txXfrm>
+    </dsp:sp>
+    <dsp:sp modelId="{F8636798-32E4-4AB8-A2CC-A6909531EA94}">
+      <dsp:nvSpPr>
+        <dsp:cNvPr id="0" name=""/>
+        <dsp:cNvSpPr/>
+      </dsp:nvSpPr>
+      <dsp:spPr>
+        <a:xfrm>
+          <a:off x="0" y="2258294"/>
+          <a:ext cx="8785735" cy="1260443"/>
+        </a:xfrm>
+        <a:prstGeom prst="roundRect">
+          <a:avLst>
+            <a:gd name="adj" fmla="val 10000"/>
+          </a:avLst>
+        </a:prstGeom>
+        <a:solidFill>
+          <a:schemeClr val="accent3">
+            <a:hueOff val="0"/>
+            <a:satOff val="0"/>
+            <a:lumOff val="0"/>
+            <a:alphaOff val="0"/>
+          </a:schemeClr>
+        </a:solidFill>
+        <a:ln>
+          <a:noFill/>
+        </a:ln>
+        <a:effectLst/>
+      </dsp:spPr>
+      <dsp:style>
+        <a:lnRef idx="0">
+          <a:scrgbClr r="0" g="0" b="0"/>
+        </a:lnRef>
+        <a:fillRef idx="1">
+          <a:scrgbClr r="0" g="0" b="0"/>
+        </a:fillRef>
+        <a:effectRef idx="0">
+          <a:scrgbClr r="0" g="0" b="0"/>
+        </a:effectRef>
+        <a:fontRef idx="minor"/>
+      </dsp:style>
+    </dsp:sp>
+    <dsp:sp modelId="{661F9D01-FD81-4D22-AB44-A6F3C561D014}">
+      <dsp:nvSpPr>
+        <dsp:cNvPr id="0" name=""/>
+        <dsp:cNvSpPr/>
+      </dsp:nvSpPr>
+      <dsp:spPr>
+        <a:xfrm>
+          <a:off x="381284" y="2541894"/>
+          <a:ext cx="693243" cy="693243"/>
+        </a:xfrm>
+        <a:prstGeom prst="rect">
+          <a:avLst/>
+        </a:prstGeom>
+        <a:blipFill>
+          <a:blip xmlns:r="http://schemas.openxmlformats.org/officeDocument/2006/relationships">
+            <a:extLst>
+              <a:ext uri="{28A0092B-C50C-407E-A947-70E740481C1C}">
+                <a14:useLocalDpi xmlns:a14="http://schemas.microsoft.com/office/drawing/2010/main" val="0"/>
+              </a:ext>
+              <a:ext uri="{96DAC541-7B7A-43D3-8B79-37D633B846F1}">
+                <asvg:svgBlip xmlns:asvg="http://schemas.microsoft.com/office/drawing/2016/SVG/main" r:embed="rId2"/>
+              </a:ext>
+            </a:extLst>
+          </a:blip>
+          <a:stretch>
+            <a:fillRect/>
+          </a:stretch>
+        </a:blipFill>
+        <a:ln w="13970" cap="flat" cmpd="sng" algn="ctr">
+          <a:noFill/>
+          <a:prstDash val="solid"/>
+        </a:ln>
+        <a:effectLst/>
+      </dsp:spPr>
+      <dsp:style>
+        <a:lnRef idx="2">
+          <a:scrgbClr r="0" g="0" b="0"/>
+        </a:lnRef>
+        <a:fillRef idx="1">
+          <a:scrgbClr r="0" g="0" b="0"/>
+        </a:fillRef>
+        <a:effectRef idx="0">
+          <a:scrgbClr r="0" g="0" b="0"/>
+        </a:effectRef>
+        <a:fontRef idx="minor">
+          <a:schemeClr val="lt1"/>
+        </a:fontRef>
+      </dsp:style>
+    </dsp:sp>
+    <dsp:sp modelId="{97DD26DC-BB44-4D1D-B157-C3AC120222A2}">
+      <dsp:nvSpPr>
+        <dsp:cNvPr id="0" name=""/>
+        <dsp:cNvSpPr/>
+      </dsp:nvSpPr>
+      <dsp:spPr>
+        <a:xfrm>
+          <a:off x="1455812" y="2258294"/>
+          <a:ext cx="7329922" cy="1260443"/>
+        </a:xfrm>
+        <a:prstGeom prst="rect">
+          <a:avLst/>
+        </a:prstGeom>
+        <a:noFill/>
+        <a:ln>
+          <a:noFill/>
+        </a:ln>
+        <a:effectLst/>
+      </dsp:spPr>
+      <dsp:style>
+        <a:lnRef idx="0">
+          <a:scrgbClr r="0" g="0" b="0"/>
+        </a:lnRef>
+        <a:fillRef idx="0">
+          <a:scrgbClr r="0" g="0" b="0"/>
+        </a:fillRef>
+        <a:effectRef idx="0">
+          <a:scrgbClr r="0" g="0" b="0"/>
+        </a:effectRef>
+        <a:fontRef idx="minor"/>
+      </dsp:style>
+      <dsp:txBody>
+        <a:bodyPr spcFirstLastPara="0" vert="horz" wrap="square" lIns="133397" tIns="133397" rIns="133397" bIns="133397" numCol="1" spcCol="1270" anchor="ctr" anchorCtr="0">
+          <a:noAutofit/>
+        </a:bodyPr>
+        <a:lstStyle/>
+        <a:p>
+          <a:pPr marL="0" lvl="0" indent="0" algn="l" defTabSz="622300">
+            <a:lnSpc>
+              <a:spcPct val="90000"/>
+            </a:lnSpc>
+            <a:spcBef>
+              <a:spcPct val="0"/>
+            </a:spcBef>
+            <a:spcAft>
+              <a:spcPct val="35000"/>
+            </a:spcAft>
+            <a:buNone/>
+          </a:pPr>
+          <a:r>
+            <a:rPr lang="ru-RU" sz="1400" kern="1200" baseline="0" dirty="0"/>
+            <a:t>Также они сходятся во мнении, что LLM не являются самостоятельной педагогической технологией, а выступают инструментом, эффективность которого определяется методикой применения и уровнем цифровой компетентности пользователей </a:t>
+          </a:r>
+          <a:endParaRPr lang="en-US" sz="1400" kern="1200" dirty="0"/>
+        </a:p>
+      </dsp:txBody>
+      <dsp:txXfrm>
+        <a:off x="1455812" y="2258294"/>
+        <a:ext cx="7329922" cy="1260443"/>
+      </dsp:txXfrm>
+    </dsp:sp>
+  </dsp:spTree>
+</dsp:drawing>
+</file>
+
+<file path=ppt/diagrams/drawing2.xml><?xml version="1.0" encoding="utf-8"?>
+<dsp:drawing xmlns:dgm="http://schemas.openxmlformats.org/drawingml/2006/diagram" xmlns:dsp="http://schemas.microsoft.com/office/drawing/2008/diagram" xmlns:a="http://schemas.openxmlformats.org/drawingml/2006/main">
+  <dsp:spTree>
+    <dsp:nvGrpSpPr>
+      <dsp:cNvPr id="0" name=""/>
+      <dsp:cNvGrpSpPr/>
+    </dsp:nvGrpSpPr>
+    <dsp:grpSpPr/>
+    <dsp:sp modelId="{86932DE1-8D02-4AB8-810E-634DC890F336}">
+      <dsp:nvSpPr>
+        <dsp:cNvPr id="0" name=""/>
+        <dsp:cNvSpPr/>
+      </dsp:nvSpPr>
+      <dsp:spPr>
+        <a:xfrm>
+          <a:off x="4790216" y="1660087"/>
+          <a:ext cx="3191549" cy="759443"/>
+        </a:xfrm>
+        <a:custGeom>
+          <a:avLst/>
+          <a:gdLst/>
+          <a:ahLst/>
+          <a:cxnLst/>
+          <a:rect l="0" t="0" r="0" b="0"/>
+          <a:pathLst>
+            <a:path>
+              <a:moveTo>
+                <a:pt x="0" y="0"/>
+              </a:moveTo>
+              <a:lnTo>
+                <a:pt x="0" y="517538"/>
+              </a:lnTo>
+              <a:lnTo>
+                <a:pt x="3191549" y="517538"/>
+              </a:lnTo>
+              <a:lnTo>
+                <a:pt x="3191549" y="759443"/>
+              </a:lnTo>
+            </a:path>
+          </a:pathLst>
+        </a:custGeom>
+        <a:noFill/>
+        <a:ln w="13970" cap="flat" cmpd="sng" algn="ctr">
+          <a:solidFill>
+            <a:schemeClr val="accent3">
+              <a:hueOff val="0"/>
+              <a:satOff val="0"/>
+              <a:lumOff val="0"/>
+              <a:alphaOff val="0"/>
+            </a:schemeClr>
+          </a:solidFill>
+          <a:prstDash val="solid"/>
+        </a:ln>
+        <a:effectLst/>
+      </dsp:spPr>
+      <dsp:style>
+        <a:lnRef idx="2">
+          <a:scrgbClr r="0" g="0" b="0"/>
+        </a:lnRef>
+        <a:fillRef idx="0">
+          <a:scrgbClr r="0" g="0" b="0"/>
+        </a:fillRef>
+        <a:effectRef idx="0">
+          <a:scrgbClr r="0" g="0" b="0"/>
+        </a:effectRef>
+        <a:fontRef idx="minor"/>
+      </dsp:style>
+    </dsp:sp>
+    <dsp:sp modelId="{7C0E5BCA-9C3A-4859-9EFD-44628139DCA7}">
+      <dsp:nvSpPr>
+        <dsp:cNvPr id="0" name=""/>
+        <dsp:cNvSpPr/>
+      </dsp:nvSpPr>
+      <dsp:spPr>
+        <a:xfrm>
+          <a:off x="4744496" y="1660087"/>
+          <a:ext cx="91440" cy="759443"/>
+        </a:xfrm>
+        <a:custGeom>
+          <a:avLst/>
+          <a:gdLst/>
+          <a:ahLst/>
+          <a:cxnLst/>
+          <a:rect l="0" t="0" r="0" b="0"/>
+          <a:pathLst>
+            <a:path>
+              <a:moveTo>
+                <a:pt x="45720" y="0"/>
+              </a:moveTo>
+              <a:lnTo>
+                <a:pt x="45720" y="759443"/>
+              </a:lnTo>
+            </a:path>
+          </a:pathLst>
+        </a:custGeom>
+        <a:noFill/>
+        <a:ln w="13970" cap="flat" cmpd="sng" algn="ctr">
+          <a:solidFill>
+            <a:schemeClr val="accent3">
+              <a:hueOff val="0"/>
+              <a:satOff val="0"/>
+              <a:lumOff val="0"/>
+              <a:alphaOff val="0"/>
+            </a:schemeClr>
+          </a:solidFill>
+          <a:prstDash val="solid"/>
+        </a:ln>
+        <a:effectLst/>
+      </dsp:spPr>
+      <dsp:style>
+        <a:lnRef idx="2">
+          <a:scrgbClr r="0" g="0" b="0"/>
+        </a:lnRef>
+        <a:fillRef idx="0">
+          <a:scrgbClr r="0" g="0" b="0"/>
+        </a:fillRef>
+        <a:effectRef idx="0">
+          <a:scrgbClr r="0" g="0" b="0"/>
+        </a:effectRef>
+        <a:fontRef idx="minor"/>
+      </dsp:style>
+    </dsp:sp>
+    <dsp:sp modelId="{CBAA838E-6914-4E30-9E05-A7A9C5ADE2F9}">
+      <dsp:nvSpPr>
+        <dsp:cNvPr id="0" name=""/>
+        <dsp:cNvSpPr/>
+      </dsp:nvSpPr>
+      <dsp:spPr>
+        <a:xfrm>
+          <a:off x="1598666" y="1660087"/>
+          <a:ext cx="3191549" cy="759443"/>
+        </a:xfrm>
+        <a:custGeom>
+          <a:avLst/>
+          <a:gdLst/>
+          <a:ahLst/>
+          <a:cxnLst/>
+          <a:rect l="0" t="0" r="0" b="0"/>
+          <a:pathLst>
+            <a:path>
+              <a:moveTo>
+                <a:pt x="3191549" y="0"/>
+              </a:moveTo>
+              <a:lnTo>
+                <a:pt x="3191549" y="517538"/>
+              </a:lnTo>
+              <a:lnTo>
+                <a:pt x="0" y="517538"/>
+              </a:lnTo>
+              <a:lnTo>
+                <a:pt x="0" y="759443"/>
+              </a:lnTo>
+            </a:path>
+          </a:pathLst>
+        </a:custGeom>
+        <a:noFill/>
+        <a:ln w="13970" cap="flat" cmpd="sng" algn="ctr">
+          <a:solidFill>
+            <a:schemeClr val="accent3">
+              <a:hueOff val="0"/>
+              <a:satOff val="0"/>
+              <a:lumOff val="0"/>
+              <a:alphaOff val="0"/>
+            </a:schemeClr>
+          </a:solidFill>
+          <a:prstDash val="solid"/>
+        </a:ln>
+        <a:effectLst/>
+      </dsp:spPr>
+      <dsp:style>
+        <a:lnRef idx="2">
+          <a:scrgbClr r="0" g="0" b="0"/>
+        </a:lnRef>
+        <a:fillRef idx="0">
+          <a:scrgbClr r="0" g="0" b="0"/>
+        </a:fillRef>
+        <a:effectRef idx="0">
+          <a:scrgbClr r="0" g="0" b="0"/>
+        </a:effectRef>
+        <a:fontRef idx="minor"/>
+      </dsp:style>
+    </dsp:sp>
+    <dsp:sp modelId="{5078DE82-6AB0-474D-9535-CB9E2E71C2BF}">
+      <dsp:nvSpPr>
+        <dsp:cNvPr id="0" name=""/>
+        <dsp:cNvSpPr/>
+      </dsp:nvSpPr>
+      <dsp:spPr>
+        <a:xfrm>
+          <a:off x="3484582" y="1932"/>
+          <a:ext cx="2611268" cy="1658155"/>
+        </a:xfrm>
+        <a:prstGeom prst="roundRect">
+          <a:avLst>
+            <a:gd name="adj" fmla="val 10000"/>
+          </a:avLst>
+        </a:prstGeom>
+        <a:solidFill>
+          <a:schemeClr val="accent1">
+            <a:hueOff val="0"/>
+            <a:satOff val="0"/>
+            <a:lumOff val="0"/>
+            <a:alphaOff val="0"/>
+          </a:schemeClr>
+        </a:solidFill>
+        <a:ln w="17145" cap="flat" cmpd="sng" algn="ctr">
+          <a:solidFill>
+            <a:schemeClr val="lt1">
+              <a:hueOff val="0"/>
+              <a:satOff val="0"/>
+              <a:lumOff val="0"/>
+              <a:alphaOff val="0"/>
+            </a:schemeClr>
+          </a:solidFill>
+          <a:prstDash val="solid"/>
+        </a:ln>
+        <a:effectLst/>
+      </dsp:spPr>
+      <dsp:style>
+        <a:lnRef idx="3">
+          <a:scrgbClr r="0" g="0" b="0"/>
+        </a:lnRef>
+        <a:fillRef idx="1">
+          <a:scrgbClr r="0" g="0" b="0"/>
+        </a:fillRef>
+        <a:effectRef idx="1">
+          <a:scrgbClr r="0" g="0" b="0"/>
+        </a:effectRef>
+        <a:fontRef idx="minor">
+          <a:schemeClr val="lt1"/>
+        </a:fontRef>
+      </dsp:style>
+    </dsp:sp>
+    <dsp:sp modelId="{DD8A2743-3896-4F42-9095-2AC4307E66E2}">
+      <dsp:nvSpPr>
+        <dsp:cNvPr id="0" name=""/>
+        <dsp:cNvSpPr/>
+      </dsp:nvSpPr>
+      <dsp:spPr>
+        <a:xfrm>
+          <a:off x="3774723" y="277566"/>
+          <a:ext cx="2611268" cy="1658155"/>
+        </a:xfrm>
+        <a:prstGeom prst="roundRect">
+          <a:avLst>
+            <a:gd name="adj" fmla="val 10000"/>
+          </a:avLst>
+        </a:prstGeom>
+        <a:solidFill>
+          <a:schemeClr val="lt1">
+            <a:alpha val="90000"/>
+            <a:hueOff val="0"/>
+            <a:satOff val="0"/>
+            <a:lumOff val="0"/>
+            <a:alphaOff val="0"/>
+          </a:schemeClr>
+        </a:solidFill>
+        <a:ln w="13970" cap="flat" cmpd="sng" algn="ctr">
+          <a:solidFill>
+            <a:schemeClr val="accent1">
+              <a:hueOff val="0"/>
+              <a:satOff val="0"/>
+              <a:lumOff val="0"/>
+              <a:alphaOff val="0"/>
+            </a:schemeClr>
+          </a:solidFill>
+          <a:prstDash val="solid"/>
+        </a:ln>
+        <a:effectLst/>
+      </dsp:spPr>
+      <dsp:style>
+        <a:lnRef idx="2">
+          <a:scrgbClr r="0" g="0" b="0"/>
+        </a:lnRef>
+        <a:fillRef idx="1">
+          <a:scrgbClr r="0" g="0" b="0"/>
+        </a:fillRef>
+        <a:effectRef idx="0">
+          <a:scrgbClr r="0" g="0" b="0"/>
+        </a:effectRef>
+        <a:fontRef idx="minor"/>
+      </dsp:style>
+      <dsp:txBody>
+        <a:bodyPr spcFirstLastPara="0" vert="horz" wrap="square" lIns="83820" tIns="83820" rIns="83820" bIns="83820" numCol="1" spcCol="1270" anchor="ctr" anchorCtr="0">
+          <a:noAutofit/>
+        </a:bodyPr>
+        <a:lstStyle/>
+        <a:p>
+          <a:pPr marL="0" lvl="0" indent="0" algn="ctr" defTabSz="977900">
+            <a:lnSpc>
+              <a:spcPct val="90000"/>
+            </a:lnSpc>
+            <a:spcBef>
+              <a:spcPct val="0"/>
+            </a:spcBef>
+            <a:spcAft>
+              <a:spcPct val="35000"/>
+            </a:spcAft>
+            <a:buNone/>
+          </a:pPr>
+          <a:r>
+            <a:rPr lang="ru-RU" sz="2200" kern="1200" dirty="0"/>
+            <a:t>Риски</a:t>
+          </a:r>
+          <a:endParaRPr lang="en-US" sz="2200" kern="1200" dirty="0"/>
+        </a:p>
+      </dsp:txBody>
+      <dsp:txXfrm>
+        <a:off x="3823289" y="326132"/>
+        <a:ext cx="2514136" cy="1561023"/>
+      </dsp:txXfrm>
+    </dsp:sp>
+    <dsp:sp modelId="{DA563EA3-48D3-46D0-B68D-A51A4235941C}">
+      <dsp:nvSpPr>
+        <dsp:cNvPr id="0" name=""/>
+        <dsp:cNvSpPr/>
+      </dsp:nvSpPr>
+      <dsp:spPr>
+        <a:xfrm>
+          <a:off x="293032" y="2419531"/>
+          <a:ext cx="2611268" cy="1658155"/>
+        </a:xfrm>
+        <a:prstGeom prst="roundRect">
+          <a:avLst>
+            <a:gd name="adj" fmla="val 10000"/>
+          </a:avLst>
+        </a:prstGeom>
+        <a:solidFill>
+          <a:schemeClr val="accent3">
+            <a:hueOff val="0"/>
+            <a:satOff val="0"/>
+            <a:lumOff val="0"/>
+            <a:alphaOff val="0"/>
+          </a:schemeClr>
+        </a:solidFill>
+        <a:ln w="17145" cap="flat" cmpd="sng" algn="ctr">
+          <a:solidFill>
+            <a:schemeClr val="lt1">
+              <a:hueOff val="0"/>
+              <a:satOff val="0"/>
+              <a:lumOff val="0"/>
+              <a:alphaOff val="0"/>
+            </a:schemeClr>
+          </a:solidFill>
+          <a:prstDash val="solid"/>
+        </a:ln>
+        <a:effectLst/>
+      </dsp:spPr>
+      <dsp:style>
+        <a:lnRef idx="3">
+          <a:scrgbClr r="0" g="0" b="0"/>
+        </a:lnRef>
+        <a:fillRef idx="1">
+          <a:scrgbClr r="0" g="0" b="0"/>
+        </a:fillRef>
+        <a:effectRef idx="1">
+          <a:scrgbClr r="0" g="0" b="0"/>
+        </a:effectRef>
+        <a:fontRef idx="minor">
+          <a:schemeClr val="lt1"/>
+        </a:fontRef>
+      </dsp:style>
+    </dsp:sp>
+    <dsp:sp modelId="{EFEB9268-E797-4F69-8E56-B45D35098714}">
+      <dsp:nvSpPr>
+        <dsp:cNvPr id="0" name=""/>
+        <dsp:cNvSpPr/>
+      </dsp:nvSpPr>
+      <dsp:spPr>
+        <a:xfrm>
+          <a:off x="583173" y="2695165"/>
+          <a:ext cx="2611268" cy="1658155"/>
+        </a:xfrm>
+        <a:prstGeom prst="roundRect">
+          <a:avLst>
+            <a:gd name="adj" fmla="val 10000"/>
+          </a:avLst>
+        </a:prstGeom>
+        <a:solidFill>
+          <a:schemeClr val="lt1">
+            <a:alpha val="90000"/>
+            <a:hueOff val="0"/>
+            <a:satOff val="0"/>
+            <a:lumOff val="0"/>
+            <a:alphaOff val="0"/>
+          </a:schemeClr>
+        </a:solidFill>
+        <a:ln w="13970" cap="flat" cmpd="sng" algn="ctr">
+          <a:solidFill>
+            <a:schemeClr val="accent3">
+              <a:hueOff val="0"/>
+              <a:satOff val="0"/>
+              <a:lumOff val="0"/>
+              <a:alphaOff val="0"/>
+            </a:schemeClr>
+          </a:solidFill>
+          <a:prstDash val="solid"/>
+        </a:ln>
+        <a:effectLst/>
+      </dsp:spPr>
+      <dsp:style>
+        <a:lnRef idx="2">
+          <a:scrgbClr r="0" g="0" b="0"/>
+        </a:lnRef>
+        <a:fillRef idx="1">
+          <a:scrgbClr r="0" g="0" b="0"/>
+        </a:fillRef>
+        <a:effectRef idx="0">
+          <a:scrgbClr r="0" g="0" b="0"/>
+        </a:effectRef>
+        <a:fontRef idx="minor"/>
+      </dsp:style>
+      <dsp:txBody>
+        <a:bodyPr spcFirstLastPara="0" vert="horz" wrap="square" lIns="83820" tIns="83820" rIns="83820" bIns="83820" numCol="1" spcCol="1270" anchor="ctr" anchorCtr="0">
+          <a:noAutofit/>
+        </a:bodyPr>
+        <a:lstStyle/>
+        <a:p>
+          <a:pPr marL="0" lvl="0" indent="0" algn="ctr" defTabSz="977900">
+            <a:lnSpc>
+              <a:spcPct val="90000"/>
+            </a:lnSpc>
+            <a:spcBef>
+              <a:spcPct val="0"/>
+            </a:spcBef>
+            <a:spcAft>
+              <a:spcPct val="35000"/>
+            </a:spcAft>
+            <a:buNone/>
+          </a:pPr>
+          <a:r>
+            <a:rPr lang="ru-RU" sz="2200" kern="1200" baseline="0"/>
+            <a:t>академической нечестности</a:t>
+          </a:r>
+          <a:endParaRPr lang="en-US" sz="2200" kern="1200"/>
+        </a:p>
+      </dsp:txBody>
+      <dsp:txXfrm>
+        <a:off x="631739" y="2743731"/>
+        <a:ext cx="2514136" cy="1561023"/>
+      </dsp:txXfrm>
+    </dsp:sp>
+    <dsp:sp modelId="{B9D6C9AC-24E6-4BF1-A657-C51C1B19E7DB}">
+      <dsp:nvSpPr>
+        <dsp:cNvPr id="0" name=""/>
+        <dsp:cNvSpPr/>
+      </dsp:nvSpPr>
+      <dsp:spPr>
+        <a:xfrm>
+          <a:off x="3484582" y="2419531"/>
+          <a:ext cx="2611268" cy="1658155"/>
+        </a:xfrm>
+        <a:prstGeom prst="roundRect">
+          <a:avLst>
+            <a:gd name="adj" fmla="val 10000"/>
+          </a:avLst>
+        </a:prstGeom>
+        <a:solidFill>
+          <a:schemeClr val="accent3">
+            <a:hueOff val="0"/>
+            <a:satOff val="0"/>
+            <a:lumOff val="0"/>
+            <a:alphaOff val="0"/>
+          </a:schemeClr>
+        </a:solidFill>
+        <a:ln w="17145" cap="flat" cmpd="sng" algn="ctr">
+          <a:solidFill>
+            <a:schemeClr val="lt1">
+              <a:hueOff val="0"/>
+              <a:satOff val="0"/>
+              <a:lumOff val="0"/>
+              <a:alphaOff val="0"/>
+            </a:schemeClr>
+          </a:solidFill>
+          <a:prstDash val="solid"/>
+        </a:ln>
+        <a:effectLst/>
+      </dsp:spPr>
+      <dsp:style>
+        <a:lnRef idx="3">
+          <a:scrgbClr r="0" g="0" b="0"/>
+        </a:lnRef>
+        <a:fillRef idx="1">
+          <a:scrgbClr r="0" g="0" b="0"/>
+        </a:fillRef>
+        <a:effectRef idx="1">
+          <a:scrgbClr r="0" g="0" b="0"/>
+        </a:effectRef>
+        <a:fontRef idx="minor">
+          <a:schemeClr val="lt1"/>
+        </a:fontRef>
+      </dsp:style>
+    </dsp:sp>
+    <dsp:sp modelId="{341CC215-21C5-435D-8163-C7372573831D}">
+      <dsp:nvSpPr>
+        <dsp:cNvPr id="0" name=""/>
+        <dsp:cNvSpPr/>
+      </dsp:nvSpPr>
+      <dsp:spPr>
+        <a:xfrm>
+          <a:off x="3774723" y="2695165"/>
+          <a:ext cx="2611268" cy="1658155"/>
+        </a:xfrm>
+        <a:prstGeom prst="roundRect">
+          <a:avLst>
+            <a:gd name="adj" fmla="val 10000"/>
+          </a:avLst>
+        </a:prstGeom>
+        <a:solidFill>
+          <a:schemeClr val="lt1">
+            <a:alpha val="90000"/>
+            <a:hueOff val="0"/>
+            <a:satOff val="0"/>
+            <a:lumOff val="0"/>
+            <a:alphaOff val="0"/>
+          </a:schemeClr>
+        </a:solidFill>
+        <a:ln w="13970" cap="flat" cmpd="sng" algn="ctr">
+          <a:solidFill>
+            <a:schemeClr val="accent3">
+              <a:hueOff val="0"/>
+              <a:satOff val="0"/>
+              <a:lumOff val="0"/>
+              <a:alphaOff val="0"/>
+            </a:schemeClr>
+          </a:solidFill>
+          <a:prstDash val="solid"/>
+        </a:ln>
+        <a:effectLst/>
+      </dsp:spPr>
+      <dsp:style>
+        <a:lnRef idx="2">
+          <a:scrgbClr r="0" g="0" b="0"/>
+        </a:lnRef>
+        <a:fillRef idx="1">
+          <a:scrgbClr r="0" g="0" b="0"/>
+        </a:fillRef>
+        <a:effectRef idx="0">
+          <a:scrgbClr r="0" g="0" b="0"/>
+        </a:effectRef>
+        <a:fontRef idx="minor"/>
+      </dsp:style>
+      <dsp:txBody>
+        <a:bodyPr spcFirstLastPara="0" vert="horz" wrap="square" lIns="83820" tIns="83820" rIns="83820" bIns="83820" numCol="1" spcCol="1270" anchor="ctr" anchorCtr="0">
+          <a:noAutofit/>
+        </a:bodyPr>
+        <a:lstStyle/>
+        <a:p>
+          <a:pPr marL="0" lvl="0" indent="0" algn="ctr" defTabSz="977900">
+            <a:lnSpc>
+              <a:spcPct val="90000"/>
+            </a:lnSpc>
+            <a:spcBef>
+              <a:spcPct val="0"/>
+            </a:spcBef>
+            <a:spcAft>
+              <a:spcPct val="35000"/>
+            </a:spcAft>
+            <a:buNone/>
+          </a:pPr>
+          <a:r>
+            <a:rPr lang="ru-RU" sz="2200" kern="1200" baseline="0"/>
+            <a:t>«галлюцинации» языковых моделей</a:t>
+          </a:r>
+          <a:endParaRPr lang="en-US" sz="2200" kern="1200"/>
+        </a:p>
+      </dsp:txBody>
+      <dsp:txXfrm>
+        <a:off x="3823289" y="2743731"/>
+        <a:ext cx="2514136" cy="1561023"/>
+      </dsp:txXfrm>
+    </dsp:sp>
+    <dsp:sp modelId="{BDF651BC-E07E-4091-9B9F-5B1923C2F297}">
+      <dsp:nvSpPr>
+        <dsp:cNvPr id="0" name=""/>
+        <dsp:cNvSpPr/>
+      </dsp:nvSpPr>
+      <dsp:spPr>
+        <a:xfrm>
+          <a:off x="6676132" y="2419531"/>
+          <a:ext cx="2611268" cy="1658155"/>
+        </a:xfrm>
+        <a:prstGeom prst="roundRect">
+          <a:avLst>
+            <a:gd name="adj" fmla="val 10000"/>
+          </a:avLst>
+        </a:prstGeom>
+        <a:solidFill>
+          <a:schemeClr val="accent3">
+            <a:hueOff val="0"/>
+            <a:satOff val="0"/>
+            <a:lumOff val="0"/>
+            <a:alphaOff val="0"/>
+          </a:schemeClr>
+        </a:solidFill>
+        <a:ln w="17145" cap="flat" cmpd="sng" algn="ctr">
+          <a:solidFill>
+            <a:schemeClr val="lt1">
+              <a:hueOff val="0"/>
+              <a:satOff val="0"/>
+              <a:lumOff val="0"/>
+              <a:alphaOff val="0"/>
+            </a:schemeClr>
+          </a:solidFill>
+          <a:prstDash val="solid"/>
+        </a:ln>
+        <a:effectLst/>
+      </dsp:spPr>
+      <dsp:style>
+        <a:lnRef idx="3">
+          <a:scrgbClr r="0" g="0" b="0"/>
+        </a:lnRef>
+        <a:fillRef idx="1">
+          <a:scrgbClr r="0" g="0" b="0"/>
+        </a:fillRef>
+        <a:effectRef idx="1">
+          <a:scrgbClr r="0" g="0" b="0"/>
+        </a:effectRef>
+        <a:fontRef idx="minor">
+          <a:schemeClr val="lt1"/>
+        </a:fontRef>
+      </dsp:style>
+    </dsp:sp>
+    <dsp:sp modelId="{6470AECC-C311-47BE-BDEC-57FDE0753C4B}">
+      <dsp:nvSpPr>
+        <dsp:cNvPr id="0" name=""/>
+        <dsp:cNvSpPr/>
+      </dsp:nvSpPr>
+      <dsp:spPr>
+        <a:xfrm>
+          <a:off x="6966273" y="2695165"/>
+          <a:ext cx="2611268" cy="1658155"/>
+        </a:xfrm>
+        <a:prstGeom prst="roundRect">
+          <a:avLst>
+            <a:gd name="adj" fmla="val 10000"/>
+          </a:avLst>
+        </a:prstGeom>
+        <a:solidFill>
+          <a:schemeClr val="lt1">
+            <a:alpha val="90000"/>
+            <a:hueOff val="0"/>
+            <a:satOff val="0"/>
+            <a:lumOff val="0"/>
+            <a:alphaOff val="0"/>
+          </a:schemeClr>
+        </a:solidFill>
+        <a:ln w="13970" cap="flat" cmpd="sng" algn="ctr">
+          <a:solidFill>
+            <a:schemeClr val="accent3">
+              <a:hueOff val="0"/>
+              <a:satOff val="0"/>
+              <a:lumOff val="0"/>
+              <a:alphaOff val="0"/>
+            </a:schemeClr>
+          </a:solidFill>
+          <a:prstDash val="solid"/>
+        </a:ln>
+        <a:effectLst/>
+      </dsp:spPr>
+      <dsp:style>
+        <a:lnRef idx="2">
+          <a:scrgbClr r="0" g="0" b="0"/>
+        </a:lnRef>
+        <a:fillRef idx="1">
+          <a:scrgbClr r="0" g="0" b="0"/>
+        </a:fillRef>
+        <a:effectRef idx="0">
+          <a:scrgbClr r="0" g="0" b="0"/>
+        </a:effectRef>
+        <a:fontRef idx="minor"/>
+      </dsp:style>
+      <dsp:txBody>
+        <a:bodyPr spcFirstLastPara="0" vert="horz" wrap="square" lIns="83820" tIns="83820" rIns="83820" bIns="83820" numCol="1" spcCol="1270" anchor="ctr" anchorCtr="0">
+          <a:noAutofit/>
+        </a:bodyPr>
+        <a:lstStyle/>
+        <a:p>
+          <a:pPr marL="0" lvl="0" indent="0" algn="ctr" defTabSz="977900">
+            <a:lnSpc>
+              <a:spcPct val="90000"/>
+            </a:lnSpc>
+            <a:spcBef>
+              <a:spcPct val="0"/>
+            </a:spcBef>
+            <a:spcAft>
+              <a:spcPct val="35000"/>
+            </a:spcAft>
+            <a:buNone/>
+          </a:pPr>
+          <a:r>
+            <a:rPr lang="ru-RU" sz="2200" kern="1200" baseline="0"/>
+            <a:t>нормативное регулирование</a:t>
+          </a:r>
+          <a:endParaRPr lang="en-US" sz="2200" kern="1200"/>
+        </a:p>
+      </dsp:txBody>
+      <dsp:txXfrm>
+        <a:off x="7014839" y="2743731"/>
+        <a:ext cx="2514136" cy="1561023"/>
+      </dsp:txXfrm>
+    </dsp:sp>
+  </dsp:spTree>
+</dsp:drawing>
+</file>
+
+<file path=ppt/diagrams/layout1.xml><?xml version="1.0" encoding="utf-8"?>
+<dgm:layoutDef xmlns:dgm="http://schemas.openxmlformats.org/drawingml/2006/diagram" xmlns:a="http://schemas.openxmlformats.org/drawingml/2006/main" uniqueId="urn:microsoft.com/office/officeart/2018/2/layout/IconVerticalSolidList">
+  <dgm:title val="Icon Vertical Solid List"/>
+  <dgm:desc val="Use to show a series of visuals from top to bottom with Level 1 or Level 1 and Level 2 text grouped in a shape. Works best with icons or small pictures with lengthier descriptions."/>
+  <dgm:catLst>
+    <dgm:cat type="icon" pri="500"/>
+  </dgm:catLst>
+  <dgm:sampData useDef="1">
+    <dgm:dataModel>
+      <dgm:ptLst/>
+      <dgm:bg/>
+      <dgm:whole/>
+    </dgm:dataModel>
+  </dgm:sampData>
+  <dgm:styleData useDef="1">
+    <dgm:dataModel>
+      <dgm:ptLst/>
+      <dgm:bg/>
+      <dgm:whole/>
+    </dgm:dataModel>
+  </dgm:styleData>
+  <dgm:clrData useDef="1">
+    <dgm:dataModel>
+      <dgm:ptLst/>
+      <dgm:bg/>
+      <dgm:whole/>
+    </dgm:dataModel>
+  </dgm:clrData>
+  <dgm:layoutNode name="root">
+    <dgm:varLst>
+      <dgm:dir/>
+      <dgm:resizeHandles val="exact"/>
+    </dgm:varLst>
+    <dgm:choose name="Name0">
+      <dgm:if name="Name1" axis="self" func="var" arg="dir" op="equ" val="norm">
+        <dgm:alg type="lin">
+          <dgm:param type="linDir" val="fromT"/>
+          <dgm:param type="nodeHorzAlign" val="l"/>
+        </dgm:alg>
+      </dgm:if>
+      <dgm:else name="Name2">
+        <dgm:alg type="lin">
+          <dgm:param type="linDir" val="fromT"/>
+          <dgm:param type="nodeHorzAlign" val="r"/>
+        </dgm:alg>
+      </dgm:else>
+    </dgm:choose>
+    <dgm:shape xmlns:r="http://schemas.openxmlformats.org/officeDocument/2006/relationships" r:blip="">
+      <dgm:adjLst/>
+    </dgm:shape>
+    <dgm:presOf/>
+    <dgm:choose name="Name3">
+      <dgm:if name="Name4" axis="ch" ptType="node" func="cnt" op="lte" val="3">
+        <dgm:constrLst>
+          <dgm:constr type="h" for="ch" forName="compNode" refType="h" fact="0.3"/>
+          <dgm:constr type="w" for="ch" forName="compNode" refType="w"/>
+          <dgm:constr type="h" for="ch" forName="sibTrans" refType="h" refFor="ch" refForName="compNode" fact="0.25"/>
+          <dgm:constr type="primFontSz" for="des" forName="parTx" val="25"/>
+          <dgm:constr type="primFontSz" for="des" forName="desTx" refType="primFontSz" refFor="des" refForName="parTx" op="lte" fact="0.75"/>
+          <dgm:constr type="h" for="des" forName="compNode" op="equ"/>
+          <dgm:constr type="h" for="des" forName="bgRect" op="equ"/>
+          <dgm:constr type="h" for="des" forName="iconRect" op="equ"/>
+          <dgm:constr type="w" for="des" forName="iconRect" op="equ"/>
+          <dgm:constr type="h" for="des" forName="spaceRect" op="equ"/>
+          <dgm:constr type="h" for="des" forName="parTx" op="equ"/>
+          <dgm:constr type="h" for="des" forName="desTx" op="equ"/>
+        </dgm:constrLst>
+      </dgm:if>
+      <dgm:if name="Name5" axis="ch" ptType="node" func="cnt" op="lte" val="4">
+        <dgm:constrLst>
+          <dgm:constr type="h" for="ch" forName="compNode" refType="h" fact="0.3"/>
+          <dgm:constr type="w" for="ch" forName="compNode" refType="w"/>
+          <dgm:constr type="h" for="ch" forName="sibTrans" refType="h" refFor="ch" refForName="compNode" fact="0.25"/>
+          <dgm:constr type="primFontSz" for="des" forName="parTx" val="22"/>
+          <dgm:constr type="primFontSz" for="des" forName="desTx" refType="primFontSz" refFor="des" refForName="parTx" op="lte" fact="0.75"/>
+          <dgm:constr type="h" for="des" forName="compNode" op="equ"/>
+          <dgm:constr type="h" for="des" forName="bgRect" op="equ"/>
+          <dgm:constr type="h" for="des" forName="iconRect" op="equ"/>
+          <dgm:constr type="w" for="des" forName="iconRect" op="equ"/>
+          <dgm:constr type="h" for="des" forName="spaceRect" op="equ"/>
+          <dgm:constr type="h" for="des" forName="parTx" op="equ"/>
+          <dgm:constr type="h" for="des" forName="desTx" op="equ"/>
+        </dgm:constrLst>
+      </dgm:if>
+      <dgm:if name="Name6" axis="ch" ptType="node" func="cnt" op="lte" val="6">
+        <dgm:constrLst>
+          <dgm:constr type="h" for="ch" forName="compNode" refType="h" fact="0.3"/>
+          <dgm:constr type="w" for="ch" forName="compNode" refType="w"/>
+          <dgm:constr type="h" for="ch" forName="sibTrans" refType="h" refFor="ch" refForName="compNode" fact="0.25"/>
+          <dgm:constr type="primFontSz" for="des" forName="parTx" val="19"/>
+          <dgm:constr type="primFontSz" for="des" forName="desTx" refType="primFontSz" refFor="des" refForName="parTx" op="lte" fact="0.75"/>
+          <dgm:constr type="h" for="des" forName="compNode" op="equ"/>
+          <dgm:constr type="h" for="des" forName="bgRect" op="equ"/>
+          <dgm:constr type="h" for="des" forName="iconRect" op="equ"/>
+          <dgm:constr type="w" for="des" forName="iconRect" op="equ"/>
+          <dgm:constr type="h" for="des" forName="spaceRect" op="equ"/>
+          <dgm:constr type="h" for="des" forName="parTx" op="equ"/>
+          <dgm:constr type="h" for="des" forName="desTx" op="equ"/>
+        </dgm:constrLst>
+      </dgm:if>
+      <dgm:else name="Name7">
+        <dgm:constrLst>
+          <dgm:constr type="h" for="ch" forName="compNode" refType="h" fact="0.3"/>
+          <dgm:constr type="w" for="ch" forName="compNode" refType="w"/>
+          <dgm:constr type="h" for="ch" forName="sibTrans" refType="h" refFor="ch" refForName="compNode" fact="0.25"/>
+          <dgm:constr type="primFontSz" for="des" forName="parTx" val="16"/>
+          <dgm:constr type="primFontSz" for="des" forName="desTx" refType="primFontSz" refFor="des" refForName="parTx" op="lte" fact="0.75"/>
+          <dgm:constr type="h" for="des" forName="compNode" op="equ"/>
+          <dgm:constr type="h" for="des" forName="bgRect" op="equ"/>
+          <dgm:constr type="h" for="des" forName="iconRect" op="equ"/>
+          <dgm:constr type="w" for="des" forName="iconRect" op="equ"/>
+          <dgm:constr type="h" for="des" forName="spaceRect" op="equ"/>
+          <dgm:constr type="h" for="des" forName="parTx" op="equ"/>
+          <dgm:constr type="h" for="des" forName="desTx" op="equ"/>
+        </dgm:constrLst>
+      </dgm:else>
+    </dgm:choose>
+    <dgm:ruleLst>
+      <dgm:rule type="h" for="ch" forName="compNode" val="0" fact="NaN" max="NaN"/>
+    </dgm:ruleLst>
+    <dgm:forEach name="Name8" axis="ch" ptType="node">
+      <dgm:layoutNode name="compNode">
+        <dgm:alg type="composite"/>
+        <dgm:shape xmlns:r="http://schemas.openxmlformats.org/officeDocument/2006/relationships" r:blip="">
+          <dgm:adjLst/>
+        </dgm:shape>
+        <dgm:presOf axis="self"/>
+        <dgm:choose name="Name9">
+          <dgm:if name="Name10" axis="ch" ptType="node" func="cnt" op="gte" val="1">
+            <dgm:constrLst>
+              <dgm:constr type="w" for="ch" forName="bgRect" refType="w"/>
+              <dgm:constr type="h" for="ch" forName="bgRect" refType="h"/>
+              <dgm:constr type="l" for="ch" forName="bgRect"/>
+              <dgm:constr type="t" for="ch" forName="bgRect"/>
+              <dgm:constr type="h" for="ch" forName="iconRect" refType="h" fact="0.55"/>
+              <dgm:constr type="w" for="ch" forName="iconRect" refType="h" refFor="ch" refForName="iconRect"/>
+              <dgm:constr type="l" for="ch" forName="iconRect" refType="h" refFor="ch" refForName="iconRect" fact="0.55"/>
+              <dgm:constr type="ctrY" for="ch" forName="iconRect" refType="ctrY" refFor="ch" refForName="bgRect"/>
+              <dgm:constr type="w" for="ch" forName="spaceRect" refType="l" refFor="ch" refForName="iconRect"/>
+              <dgm:constr type="h" for="ch" forName="spaceRect" refType="h"/>
+              <dgm:constr type="l" for="ch" forName="spaceRect" refType="r" refFor="ch" refForName="iconRect"/>
+              <dgm:constr type="t" for="ch" forName="spaceRect"/>
+              <dgm:constr type="w" for="ch" forName="parTx" refType="w" fact="0.45"/>
+              <dgm:constr type="h" for="ch" forName="parTx" refType="h"/>
+              <dgm:constr type="l" for="ch" forName="parTx" refType="r" refFor="ch" refForName="spaceRect"/>
+              <dgm:constr type="t" for="ch" forName="parTx"/>
+              <dgm:constr type="h" for="ch" forName="desTx" refType="h"/>
+              <dgm:constr type="l" for="ch" forName="desTx" refType="r" refFor="ch" refForName="parTx"/>
+              <dgm:constr type="t" for="ch" forName="desTx"/>
+            </dgm:constrLst>
+          </dgm:if>
+          <dgm:else name="Name11">
+            <dgm:constrLst>
+              <dgm:constr type="w" for="ch" forName="bgRect" refType="w"/>
+              <dgm:constr type="h" for="ch" forName="bgRect" refType="h"/>
+              <dgm:constr type="l" for="ch" forName="bgRect"/>
+              <dgm:constr type="t" for="ch" forName="bgRect"/>
+              <dgm:constr type="h" for="ch" forName="iconRect" refType="h" fact="0.55"/>
+              <dgm:constr type="w" for="ch" forName="iconRect" refType="h" refFor="ch" refForName="iconRect"/>
+              <dgm:constr type="l" for="ch" forName="iconRect" refType="h" refFor="ch" refForName="iconRect" fact="0.55"/>
+              <dgm:constr type="ctrY" for="ch" forName="iconRect" refType="ctrY" refFor="ch" refForName="bgRect"/>
+              <dgm:constr type="w" for="ch" forName="spaceRect" refType="l" refFor="ch" refForName="iconRect"/>
+              <dgm:constr type="h" for="ch" forName="spaceRect" refType="h"/>
+              <dgm:constr type="l" for="ch" forName="spaceRect" refType="r" refFor="ch" refForName="iconRect"/>
+              <dgm:constr type="t" for="ch" forName="spaceRect"/>
+              <dgm:constr type="h" for="ch" forName="parTx" refType="h"/>
+              <dgm:constr type="l" for="ch" forName="parTx" refType="r" refFor="ch" refForName="spaceRect"/>
+              <dgm:constr type="t" for="ch" forName="parTx"/>
+            </dgm:constrLst>
+          </dgm:else>
+        </dgm:choose>
+        <dgm:ruleLst>
+          <dgm:rule type="h" val="INF" fact="NaN" max="NaN"/>
+        </dgm:ruleLst>
+        <dgm:layoutNode name="bgRect" styleLbl="bgShp">
+          <dgm:alg type="sp"/>
+          <dgm:shape xmlns:r="http://schemas.openxmlformats.org/officeDocument/2006/relationships" type="roundRect" r:blip="">
+            <dgm:adjLst>
+              <dgm:adj idx="1" val="0.1"/>
+            </dgm:adjLst>
+          </dgm:shape>
+          <dgm:presOf/>
+          <dgm:constrLst/>
+          <dgm:ruleLst/>
+        </dgm:layoutNode>
+        <dgm:layoutNode name="iconRect" styleLbl="node1">
+          <dgm:alg type="sp"/>
+          <dgm:shape xmlns:r="http://schemas.openxmlformats.org/officeDocument/2006/relationships" type="rect" r:blip="" blipPhldr="1">
+            <dgm:adjLst/>
+          </dgm:shape>
+          <dgm:presOf/>
+          <dgm:constrLst/>
+          <dgm:ruleLst/>
+        </dgm:layoutNode>
+        <dgm:layoutNode name="spaceRect">
+          <dgm:alg type="sp"/>
+          <dgm:shape xmlns:r="http://schemas.openxmlformats.org/officeDocument/2006/relationships" r:blip="">
+            <dgm:adjLst/>
+          </dgm:shape>
+          <dgm:presOf/>
+          <dgm:constrLst/>
+          <dgm:ruleLst/>
+        </dgm:layoutNode>
+        <dgm:layoutNode name="parTx" styleLbl="revTx">
+          <dgm:varLst>
+            <dgm:chMax val="0"/>
+            <dgm:chPref val="0"/>
+          </dgm:varLst>
+          <dgm:alg type="tx">
+            <dgm:param type="txAnchorVert" val="mid"/>
+            <dgm:param type="parTxLTRAlign" val="l"/>
+            <dgm:param type="shpTxLTRAlignCh" val="l"/>
+            <dgm:param type="parTxRTLAlign" val="r"/>
+            <dgm:param type="shpTxRTLAlignCh" val="r"/>
+          </dgm:alg>
+          <dgm:shape xmlns:r="http://schemas.openxmlformats.org/officeDocument/2006/relationships" type="rect" r:blip="">
+            <dgm:adjLst/>
+          </dgm:shape>
+          <dgm:presOf axis="self" ptType="node"/>
+          <dgm:constrLst>
+            <dgm:constr type="lMarg" refType="h" fact="0.3"/>
+            <dgm:constr type="rMarg" refType="h" fact="0.3"/>
+            <dgm:constr type="tMarg" refType="h" fact="0.3"/>
+            <dgm:constr type="bMarg" refType="h" fact="0.3"/>
+          </dgm:constrLst>
+          <dgm:ruleLst>
+            <dgm:rule type="primFontSz" val="14" fact="NaN" max="NaN"/>
+            <dgm:rule type="h" val="INF" fact="NaN" max="NaN"/>
+          </dgm:ruleLst>
+        </dgm:layoutNode>
+        <dgm:choose name="Name12">
+          <dgm:if name="Name13" axis="ch" ptType="node" func="cnt" op="gte" val="1">
+            <dgm:layoutNode name="desTx" styleLbl="revTx">
+              <dgm:varLst/>
+              <dgm:alg type="tx">
+                <dgm:param type="txAnchorVertCh" val="mid"/>
+                <dgm:param type="parTxLTRAlign" val="l"/>
+                <dgm:param type="shpTxLTRAlignCh" val="l"/>
+                <dgm:param type="parTxRTLAlign" val="r"/>
+                <dgm:param type="shpTxRTLAlignCh" val="r"/>
+                <dgm:param type="stBulletLvl" val="0"/>
+              </dgm:alg>
+              <dgm:shape xmlns:r="http://schemas.openxmlformats.org/officeDocument/2006/relationships" type="rect" r:blip="">
+                <dgm:adjLst/>
+              </dgm:shape>
+              <dgm:presOf axis="des" ptType="node"/>
+              <dgm:constrLst>
+                <dgm:constr type="primFontSz" val="18"/>
+                <dgm:constr type="secFontSz" refType="primFontSz"/>
+                <dgm:constr type="lMarg" refType="h" fact="0.3"/>
+                <dgm:constr type="rMarg" refType="h" fact="0.3"/>
+                <dgm:constr type="tMarg" refType="h" fact="0.3"/>
+                <dgm:constr type="bMarg" refType="h" fact="0.3"/>
+              </dgm:constrLst>
+              <dgm:ruleLst>
+                <dgm:rule type="primFontSz" val="11" fact="NaN" max="NaN"/>
+              </dgm:ruleLst>
+            </dgm:layoutNode>
+          </dgm:if>
+          <dgm:else name="Name14"/>
+        </dgm:choose>
+      </dgm:layoutNode>
+      <dgm:forEach name="Name15" axis="followSib" ptType="sibTrans" cnt="1">
+        <dgm:layoutNode name="sibTrans">
+          <dgm:alg type="sp"/>
+          <dgm:shape xmlns:r="http://schemas.openxmlformats.org/officeDocument/2006/relationships" r:blip="">
+            <dgm:adjLst/>
+          </dgm:shape>
+          <dgm:presOf axis="self"/>
+          <dgm:constrLst/>
+          <dgm:ruleLst/>
+        </dgm:layoutNode>
+      </dgm:forEach>
+    </dgm:forEach>
+  </dgm:layoutNode>
+  <dgm:extLst>
+    <a:ext uri="{68A01E43-0DF5-4B5B-8FA6-DAF915123BFB}">
+      <dgm1612:lstStyle xmlns:dgm1612="http://schemas.microsoft.com/office/drawing/2016/12/diagram">
+        <a:lvl1pPr>
+          <a:lnSpc>
+            <a:spcPct val="100000"/>
+          </a:lnSpc>
+        </a:lvl1pPr>
+        <a:lvl2pPr>
+          <a:lnSpc>
+            <a:spcPct val="100000"/>
+          </a:lnSpc>
+        </a:lvl2pPr>
+      </dgm1612:lstStyle>
+    </a:ext>
+  </dgm:extLst>
+</dgm:layoutDef>
+</file>
+
+<file path=ppt/diagrams/layout2.xml><?xml version="1.0" encoding="utf-8"?>
+<dgm:layoutDef xmlns:dgm="http://schemas.openxmlformats.org/drawingml/2006/diagram" xmlns:a="http://schemas.openxmlformats.org/drawingml/2006/main" uniqueId="urn:microsoft.com/office/officeart/2005/8/layout/hierarchy1">
+  <dgm:title val=""/>
+  <dgm:desc val=""/>
+  <dgm:catLst>
+    <dgm:cat type="hierarchy" pri="2000"/>
+  </dgm:catLst>
+  <dgm:sampData>
+    <dgm:dataModel>
+      <dgm:ptLst>
+        <dgm:pt modelId="0" type="doc"/>
+        <dgm:pt modelId="1">
+          <dgm:prSet phldr="1"/>
+        </dgm:pt>
+        <dgm:pt modelId="2">
+          <dgm:prSet phldr="1"/>
+        </dgm:pt>
+        <dgm:pt modelId="21">
+          <dgm:prSet phldr="1"/>
+        </dgm:pt>
+        <dgm:pt modelId="22">
+          <dgm:prSet phldr="1"/>
+        </dgm:pt>
+        <dgm:pt modelId="3">
+          <dgm:prSet phldr="1"/>
+        </dgm:pt>
+        <dgm:pt modelId="31">
+          <dgm:prSet phldr="1"/>
+        </dgm:pt>
+      </dgm:ptLst>
+      <dgm:cxnLst>
+        <dgm:cxn modelId="4" srcId="0" destId="1" srcOrd="0" destOrd="0"/>
+        <dgm:cxn modelId="5" srcId="1" destId="2" srcOrd="0" destOrd="0"/>
+        <dgm:cxn modelId="6" srcId="1" destId="3" srcOrd="1" destOrd="0"/>
+        <dgm:cxn modelId="23" srcId="2" destId="21" srcOrd="0" destOrd="0"/>
+        <dgm:cxn modelId="24" srcId="2" destId="22" srcOrd="1" destOrd="0"/>
+        <dgm:cxn modelId="33" srcId="3" destId="31" srcOrd="0" destOrd="0"/>
+      </dgm:cxnLst>
+      <dgm:bg/>
+      <dgm:whole/>
+    </dgm:dataModel>
+  </dgm:sampData>
+  <dgm:styleData>
+    <dgm:dataModel>
+      <dgm:ptLst>
+        <dgm:pt modelId="0" type="doc"/>
+        <dgm:pt modelId="1"/>
+        <dgm:pt modelId="11"/>
+        <dgm:pt modelId="12"/>
+      </dgm:ptLst>
+      <dgm:cxnLst>
+        <dgm:cxn modelId="2" srcId="0" destId="1" srcOrd="0" destOrd="0"/>
+        <dgm:cxn modelId="13" srcId="1" destId="11" srcOrd="0" destOrd="0"/>
+        <dgm:cxn modelId="14" srcId="1" destId="12" srcOrd="1" destOrd="0"/>
+      </dgm:cxnLst>
+      <dgm:bg/>
+      <dgm:whole/>
+    </dgm:dataModel>
+  </dgm:styleData>
+  <dgm:clrData>
+    <dgm:dataModel>
+      <dgm:ptLst>
+        <dgm:pt modelId="0" type="doc"/>
+        <dgm:pt modelId="1"/>
+        <dgm:pt modelId="2"/>
+        <dgm:pt modelId="21"/>
+        <dgm:pt modelId="211"/>
+        <dgm:pt modelId="3"/>
+        <dgm:pt modelId="31"/>
+        <dgm:pt modelId="311"/>
+      </dgm:ptLst>
+      <dgm:cxnLst>
+        <dgm:cxn modelId="4" srcId="0" destId="1" srcOrd="0" destOrd="0"/>
+        <dgm:cxn modelId="5" srcId="1" destId="2" srcOrd="0" destOrd="0"/>
+        <dgm:cxn modelId="6" srcId="1" destId="3" srcOrd="1" destOrd="0"/>
+        <dgm:cxn modelId="23" srcId="2" destId="21" srcOrd="0" destOrd="0"/>
+        <dgm:cxn modelId="24" srcId="21" destId="211" srcOrd="0" destOrd="0"/>
+        <dgm:cxn modelId="33" srcId="3" destId="31" srcOrd="0" destOrd="0"/>
+        <dgm:cxn modelId="34" srcId="31" destId="311" srcOrd="0" destOrd="0"/>
+      </dgm:cxnLst>
+      <dgm:bg/>
+      <dgm:whole/>
+    </dgm:dataModel>
+  </dgm:clrData>
+  <dgm:layoutNode name="hierChild1">
+    <dgm:varLst>
+      <dgm:chPref val="1"/>
+      <dgm:dir/>
+      <dgm:animOne val="branch"/>
+      <dgm:animLvl val="lvl"/>
+      <dgm:resizeHandles/>
+    </dgm:varLst>
+    <dgm:choose name="Name0">
+      <dgm:if name="Name1" func="var" arg="dir" op="equ" val="norm">
+        <dgm:alg type="hierChild">
+          <dgm:param type="linDir" val="fromL"/>
+        </dgm:alg>
+      </dgm:if>
+      <dgm:else name="Name2">
+        <dgm:alg type="hierChild">
+          <dgm:param type="linDir" val="fromR"/>
+        </dgm:alg>
+      </dgm:else>
+    </dgm:choose>
+    <dgm:shape xmlns:r="http://schemas.openxmlformats.org/officeDocument/2006/relationships" r:blip="">
+      <dgm:adjLst/>
+    </dgm:shape>
+    <dgm:presOf/>
+    <dgm:constrLst>
+      <dgm:constr type="primFontSz" for="des" ptType="node" op="equ" val="65"/>
+      <dgm:constr type="w" for="des" forName="composite" refType="w"/>
+      <dgm:constr type="h" for="des" forName="composite" refType="w" refFor="des" refForName="composite" fact="0.667"/>
+      <dgm:constr type="w" for="des" forName="composite2" refType="w" refFor="des" refForName="composite"/>
+      <dgm:constr type="h" for="des" forName="composite2" refType="h" refFor="des" refForName="composite"/>
+      <dgm:constr type="w" for="des" forName="composite3" refType="w" refFor="des" refForName="composite"/>
+      <dgm:constr type="h" for="des" forName="composite3" refType="h" refFor="des" refForName="composite"/>
+      <dgm:constr type="w" for="des" forName="composite4" refType="w" refFor="des" refForName="composite"/>
+      <dgm:constr type="h" for="des" forName="composite4" refType="h" refFor="des" refForName="composite"/>
+      <dgm:constr type="w" for="des" forName="composite5" refType="w" refFor="des" refForName="composite"/>
+      <dgm:constr type="h" for="des" forName="composite5" refType="h" refFor="des" refForName="composite"/>
+      <dgm:constr type="sibSp" refType="w" refFor="des" refForName="composite" fact="0.1"/>
+      <dgm:constr type="sibSp" for="des" forName="hierChild2" refType="sibSp"/>
+      <dgm:constr type="sibSp" for="des" forName="hierChild3" refType="sibSp"/>
+      <dgm:constr type="sibSp" for="des" forName="hierChild4" refType="sibSp"/>
+      <dgm:constr type="sibSp" for="des" forName="hierChild5" refType="sibSp"/>
+      <dgm:constr type="sibSp" for="des" forName="hierChild6" refType="sibSp"/>
+      <dgm:constr type="sp" for="des" forName="hierRoot1" refType="h" refFor="des" refForName="composite" fact="0.25"/>
+      <dgm:constr type="sp" for="des" forName="hierRoot2" refType="sp" refFor="des" refForName="hierRoot1"/>
+      <dgm:constr type="sp" for="des" forName="hierRoot3" refType="sp" refFor="des" refForName="hierRoot1"/>
+      <dgm:constr type="sp" for="des" forName="hierRoot4" refType="sp" refFor="des" refForName="hierRoot1"/>
+      <dgm:constr type="sp" for="des" forName="hierRoot5" refType="sp" refFor="des" refForName="hierRoot1"/>
+    </dgm:constrLst>
+    <dgm:ruleLst/>
+    <dgm:forEach name="Name3" axis="ch">
+      <dgm:forEach name="Name4" axis="self" ptType="node">
+        <dgm:layoutNode name="hierRoot1">
+          <dgm:alg type="hierRoot"/>
+          <dgm:shape xmlns:r="http://schemas.openxmlformats.org/officeDocument/2006/relationships" r:blip="">
+            <dgm:adjLst/>
+          </dgm:shape>
+          <dgm:presOf/>
+          <dgm:constrLst>
+            <dgm:constr type="bendDist" for="des" ptType="parTrans" refType="sp" fact="0.5"/>
+          </dgm:constrLst>
+          <dgm:ruleLst/>
+          <dgm:layoutNode name="composite">
+            <dgm:alg type="composite"/>
+            <dgm:shape xmlns:r="http://schemas.openxmlformats.org/officeDocument/2006/relationships" r:blip="">
+              <dgm:adjLst/>
+            </dgm:shape>
+            <dgm:presOf/>
+            <dgm:constrLst>
+              <dgm:constr type="w" for="ch" forName="background" refType="w" fact="0.9"/>
+              <dgm:constr type="h" for="ch" forName="background" refType="w" refFor="ch" refForName="background" fact="0.635"/>
+              <dgm:constr type="t" for="ch" forName="background"/>
+              <dgm:constr type="l" for="ch" forName="background"/>
+              <dgm:constr type="w" for="ch" forName="text" refType="w" fact="0.9"/>
+              <dgm:constr type="h" for="ch" forName="text" refType="w" refFor="ch" refForName="text" fact="0.635"/>
+              <dgm:constr type="t" for="ch" forName="text" refType="w" fact="0.095"/>
+              <dgm:constr type="l" for="ch" forName="text" refType="w" fact="0.1"/>
+            </dgm:constrLst>
+            <dgm:ruleLst/>
+            <dgm:layoutNode name="background" styleLbl="node0" moveWith="text">
+              <dgm:alg type="sp"/>
+              <dgm:shape xmlns:r="http://schemas.openxmlformats.org/officeDocument/2006/relationships" type="roundRect" r:blip="">
+                <dgm:adjLst>
+                  <dgm:adj idx="1" val="0.1"/>
+                </dgm:adjLst>
+              </dgm:shape>
+              <dgm:presOf/>
+              <dgm:constrLst/>
+              <dgm:ruleLst/>
+            </dgm:layoutNode>
+            <dgm:layoutNode name="text" styleLbl="fgAcc0">
+              <dgm:varLst>
+                <dgm:chPref val="3"/>
+              </dgm:varLst>
+              <dgm:alg type="tx"/>
+              <dgm:shape xmlns:r="http://schemas.openxmlformats.org/officeDocument/2006/relationships" type="roundRect" r:blip="">
+                <dgm:adjLst>
+                  <dgm:adj idx="1" val="0.1"/>
+                </dgm:adjLst>
+              </dgm:shape>
+              <dgm:presOf axis="self"/>
+              <dgm:constrLst>
+                <dgm:constr type="tMarg" refType="primFontSz" fact="0.3"/>
+                <dgm:constr type="bMarg" refType="primFontSz" fact="0.3"/>
+                <dgm:constr type="lMarg" refType="primFontSz" fact="0.3"/>
+                <dgm:constr type="rMarg" refType="primFontSz" fact="0.3"/>
+              </dgm:constrLst>
+              <dgm:ruleLst>
+                <dgm:rule type="primFontSz" val="5" fact="NaN" max="NaN"/>
+              </dgm:ruleLst>
+            </dgm:layoutNode>
+          </dgm:layoutNode>
+          <dgm:layoutNode name="hierChild2">
+            <dgm:choose name="Name5">
+              <dgm:if name="Name6" func="var" arg="dir" op="equ" val="norm">
+                <dgm:alg type="hierChild">
+                  <dgm:param type="linDir" val="fromL"/>
+                </dgm:alg>
+              </dgm:if>
+              <dgm:else name="Name7">
+                <dgm:alg type="hierChild">
+                  <dgm:param type="linDir" val="fromR"/>
+                </dgm:alg>
+              </dgm:else>
+            </dgm:choose>
+            <dgm:shape xmlns:r="http://schemas.openxmlformats.org/officeDocument/2006/relationships" r:blip="">
+              <dgm:adjLst/>
+            </dgm:shape>
+            <dgm:presOf/>
+            <dgm:constrLst/>
+            <dgm:ruleLst/>
+            <dgm:forEach name="Name8" axis="ch">
+              <dgm:forEach name="Name9" axis="self" ptType="parTrans" cnt="1">
+                <dgm:layoutNode name="Name10">
+                  <dgm:alg type="conn">
+                    <dgm:param type="dim" val="1D"/>
+                    <dgm:param type="endSty" val="noArr"/>
+                    <dgm:param type="connRout" val="bend"/>
+                    <dgm:param type="bendPt" val="end"/>
+                    <dgm:param type="begPts" val="bCtr"/>
+                    <dgm:param type="endPts" val="tCtr"/>
+                    <dgm:param type="srcNode" val="background"/>
+                    <dgm:param type="dstNode" val="background2"/>
+                  </dgm:alg>
+                  <dgm:shape xmlns:r="http://schemas.openxmlformats.org/officeDocument/2006/relationships" type="conn" r:blip="" zOrderOff="-999">
+                    <dgm:adjLst/>
+                  </dgm:shape>
+                  <dgm:presOf axis="self"/>
+                  <dgm:constrLst>
+                    <dgm:constr type="begPad"/>
+                    <dgm:constr type="endPad"/>
+                  </dgm:constrLst>
+                  <dgm:ruleLst/>
+                </dgm:layoutNode>
+              </dgm:forEach>
+              <dgm:forEach name="Name11" axis="self" ptType="node">
+                <dgm:layoutNode name="hierRoot2">
+                  <dgm:alg type="hierRoot"/>
+                  <dgm:shape xmlns:r="http://schemas.openxmlformats.org/officeDocument/2006/relationships" r:blip="">
+                    <dgm:adjLst/>
+                  </dgm:shape>
+                  <dgm:presOf/>
+                  <dgm:constrLst>
+                    <dgm:constr type="bendDist" for="des" ptType="parTrans" refType="sp" fact="0.5"/>
+                  </dgm:constrLst>
+                  <dgm:ruleLst/>
+                  <dgm:layoutNode name="composite2">
+                    <dgm:alg type="composite"/>
+                    <dgm:shape xmlns:r="http://schemas.openxmlformats.org/officeDocument/2006/relationships" r:blip="">
+                      <dgm:adjLst/>
+                    </dgm:shape>
+                    <dgm:presOf/>
+                    <dgm:constrLst>
+                      <dgm:constr type="w" for="ch" forName="background2" refType="w" fact="0.9"/>
+                      <dgm:constr type="h" for="ch" forName="background2" refType="w" refFor="ch" refForName="background2" fact="0.635"/>
+                      <dgm:constr type="t" for="ch" forName="background2"/>
+                      <dgm:constr type="l" for="ch" forName="background2"/>
+                      <dgm:constr type="w" for="ch" forName="text2" refType="w" fact="0.9"/>
+                      <dgm:constr type="h" for="ch" forName="text2" refType="w" refFor="ch" refForName="text2" fact="0.635"/>
+                      <dgm:constr type="t" for="ch" forName="text2" refType="w" fact="0.095"/>
+                      <dgm:constr type="l" for="ch" forName="text2" refType="w" fact="0.1"/>
+                    </dgm:constrLst>
+                    <dgm:ruleLst/>
+                    <dgm:layoutNode name="background2" moveWith="text2">
+                      <dgm:alg type="sp"/>
+                      <dgm:shape xmlns:r="http://schemas.openxmlformats.org/officeDocument/2006/relationships" type="roundRect" r:blip="">
+                        <dgm:adjLst>
+                          <dgm:adj idx="1" val="0.1"/>
+                        </dgm:adjLst>
+                      </dgm:shape>
+                      <dgm:presOf/>
+                      <dgm:constrLst/>
+                      <dgm:ruleLst/>
+                    </dgm:layoutNode>
+                    <dgm:layoutNode name="text2" styleLbl="fgAcc2">
+                      <dgm:varLst>
+                        <dgm:chPref val="3"/>
+                      </dgm:varLst>
+                      <dgm:alg type="tx"/>
+                      <dgm:shape xmlns:r="http://schemas.openxmlformats.org/officeDocument/2006/relationships" type="roundRect" r:blip="">
+                        <dgm:adjLst>
+                          <dgm:adj idx="1" val="0.1"/>
+                        </dgm:adjLst>
+                      </dgm:shape>
+                      <dgm:presOf axis="self"/>
+                      <dgm:constrLst>
+                        <dgm:constr type="tMarg" refType="primFontSz" fact="0.3"/>
+                        <dgm:constr type="bMarg" refType="primFontSz" fact="0.3"/>
+                        <dgm:constr type="lMarg" refType="primFontSz" fact="0.3"/>
+                        <dgm:constr type="rMarg" refType="primFontSz" fact="0.3"/>
+                      </dgm:constrLst>
+                      <dgm:ruleLst>
+                        <dgm:rule type="primFontSz" val="5" fact="NaN" max="NaN"/>
+                      </dgm:ruleLst>
+                    </dgm:layoutNode>
+                  </dgm:layoutNode>
+                  <dgm:layoutNode name="hierChild3">
+                    <dgm:choose name="Name12">
+                      <dgm:if name="Name13" func="var" arg="dir" op="equ" val="norm">
+                        <dgm:alg type="hierChild">
+                          <dgm:param type="linDir" val="fromL"/>
+                        </dgm:alg>
+                      </dgm:if>
+                      <dgm:else name="Name14">
+                        <dgm:alg type="hierChild">
+                          <dgm:param type="linDir" val="fromR"/>
+                        </dgm:alg>
+                      </dgm:else>
+                    </dgm:choose>
+                    <dgm:shape xmlns:r="http://schemas.openxmlformats.org/officeDocument/2006/relationships" r:blip="">
+                      <dgm:adjLst/>
+                    </dgm:shape>
+                    <dgm:presOf/>
+                    <dgm:constrLst/>
+                    <dgm:ruleLst/>
+                    <dgm:forEach name="Name15" axis="ch">
+                      <dgm:forEach name="Name16" axis="self" ptType="parTrans" cnt="1">
+                        <dgm:layoutNode name="Name17">
+                          <dgm:alg type="conn">
+                            <dgm:param type="dim" val="1D"/>
+                            <dgm:param type="endSty" val="noArr"/>
+                            <dgm:param type="connRout" val="bend"/>
+                            <dgm:param type="bendPt" val="end"/>
+                            <dgm:param type="begPts" val="bCtr"/>
+                            <dgm:param type="endPts" val="tCtr"/>
+                            <dgm:param type="srcNode" val="background2"/>
+                            <dgm:param type="dstNode" val="background3"/>
+                          </dgm:alg>
+                          <dgm:shape xmlns:r="http://schemas.openxmlformats.org/officeDocument/2006/relationships" type="conn" r:blip="" zOrderOff="-999">
+                            <dgm:adjLst/>
+                          </dgm:shape>
+                          <dgm:presOf axis="self"/>
+                          <dgm:constrLst>
+                            <dgm:constr type="begPad"/>
+                            <dgm:constr type="endPad"/>
+                          </dgm:constrLst>
+                          <dgm:ruleLst/>
+                        </dgm:layoutNode>
+                      </dgm:forEach>
+                      <dgm:forEach name="Name18" axis="self" ptType="node">
+                        <dgm:layoutNode name="hierRoot3">
+                          <dgm:alg type="hierRoot"/>
+                          <dgm:shape xmlns:r="http://schemas.openxmlformats.org/officeDocument/2006/relationships" r:blip="">
+                            <dgm:adjLst/>
+                          </dgm:shape>
+                          <dgm:presOf/>
+                          <dgm:constrLst>
+                            <dgm:constr type="bendDist" for="des" ptType="parTrans" refType="sp" fact="0.5"/>
+                          </dgm:constrLst>
+                          <dgm:ruleLst/>
+                          <dgm:layoutNode name="composite3">
+                            <dgm:alg type="composite"/>
+                            <dgm:shape xmlns:r="http://schemas.openxmlformats.org/officeDocument/2006/relationships" r:blip="">
+                              <dgm:adjLst/>
+                            </dgm:shape>
+                            <dgm:presOf/>
+                            <dgm:constrLst>
+                              <dgm:constr type="w" for="ch" forName="background3" refType="w" fact="0.9"/>
+                              <dgm:constr type="h" for="ch" forName="background3" refType="w" refFor="ch" refForName="background3" fact="0.635"/>
+                              <dgm:constr type="t" for="ch" forName="background3"/>
+                              <dgm:constr type="l" for="ch" forName="background3"/>
+                              <dgm:constr type="w" for="ch" forName="text3" refType="w" fact="0.9"/>
+                              <dgm:constr type="h" for="ch" forName="text3" refType="w" refFor="ch" refForName="text3" fact="0.635"/>
+                              <dgm:constr type="t" for="ch" forName="text3" refType="w" fact="0.095"/>
+                              <dgm:constr type="l" for="ch" forName="text3" refType="w" fact="0.1"/>
+                            </dgm:constrLst>
+                            <dgm:ruleLst/>
+                            <dgm:layoutNode name="background3" moveWith="text3">
+                              <dgm:alg type="sp"/>
+                              <dgm:shape xmlns:r="http://schemas.openxmlformats.org/officeDocument/2006/relationships" type="roundRect" r:blip="">
+                                <dgm:adjLst>
+                                  <dgm:adj idx="1" val="0.1"/>
+                                </dgm:adjLst>
+                              </dgm:shape>
+                              <dgm:presOf/>
+                              <dgm:constrLst/>
+                              <dgm:ruleLst/>
+                            </dgm:layoutNode>
+                            <dgm:layoutNode name="text3" styleLbl="fgAcc3">
+                              <dgm:varLst>
+                                <dgm:chPref val="3"/>
+                              </dgm:varLst>
+                              <dgm:alg type="tx"/>
+                              <dgm:shape xmlns:r="http://schemas.openxmlformats.org/officeDocument/2006/relationships" type="roundRect" r:blip="">
+                                <dgm:adjLst>
+                                  <dgm:adj idx="1" val="0.1"/>
+                                </dgm:adjLst>
+                              </dgm:shape>
+                              <dgm:presOf axis="self"/>
+                              <dgm:constrLst>
+                                <dgm:constr type="tMarg" refType="primFontSz" fact="0.3"/>
+                                <dgm:constr type="bMarg" refType="primFontSz" fact="0.3"/>
+                                <dgm:constr type="lMarg" refType="primFontSz" fact="0.3"/>
+                                <dgm:constr type="rMarg" refType="primFontSz" fact="0.3"/>
+                              </dgm:constrLst>
+                              <dgm:ruleLst>
+                                <dgm:rule type="primFontSz" val="5" fact="NaN" max="NaN"/>
+                              </dgm:ruleLst>
+                            </dgm:layoutNode>
+                          </dgm:layoutNode>
+                          <dgm:layoutNode name="hierChild4">
+                            <dgm:choose name="Name19">
+                              <dgm:if name="Name20" func="var" arg="dir" op="equ" val="norm">
+                                <dgm:alg type="hierChild">
+                                  <dgm:param type="linDir" val="fromL"/>
+                                </dgm:alg>
+                              </dgm:if>
+                              <dgm:else name="Name21">
+                                <dgm:alg type="hierChild">
+                                  <dgm:param type="linDir" val="fromR"/>
+                                </dgm:alg>
+                              </dgm:else>
+                            </dgm:choose>
+                            <dgm:shape xmlns:r="http://schemas.openxmlformats.org/officeDocument/2006/relationships" r:blip="">
+                              <dgm:adjLst/>
+                            </dgm:shape>
+                            <dgm:presOf/>
+                            <dgm:constrLst/>
+                            <dgm:ruleLst/>
+                            <dgm:forEach name="repeat" axis="ch">
+                              <dgm:forEach name="Name22" axis="self" ptType="parTrans" cnt="1">
+                                <dgm:layoutNode name="Name23">
+                                  <dgm:choose name="Name24">
+                                    <dgm:if name="Name25" axis="self" func="depth" op="lte" val="4">
+                                      <dgm:alg type="conn">
+                                        <dgm:param type="dim" val="1D"/>
+                                        <dgm:param type="endSty" val="noArr"/>
+                                        <dgm:param type="connRout" val="bend"/>
+                                        <dgm:param type="bendPt" val="end"/>
+                                        <dgm:param type="begPts" val="bCtr"/>
+                                        <dgm:param type="endPts" val="tCtr"/>
+                                        <dgm:param type="srcNode" val="background3"/>
+                                        <dgm:param type="dstNode" val="background4"/>
+                                      </dgm:alg>
+                                    </dgm:if>
+                                    <dgm:else name="Name26">
+                                      <dgm:alg type="conn">
+                                        <dgm:param type="dim" val="1D"/>
+                                        <dgm:param type="endSty" val="noArr"/>
+                                        <dgm:param type="connRout" val="bend"/>
+                                        <dgm:param type="bendPt" val="end"/>
+                                        <dgm:param type="begPts" val="bCtr"/>
+                                        <dgm:param type="endPts" val="tCtr"/>
+                                        <dgm:param type="srcNode" val="background4"/>
+                                        <dgm:param type="dstNode" val="background4"/>
+                                      </dgm:alg>
+                                    </dgm:else>
+                                  </dgm:choose>
+                                  <dgm:shape xmlns:r="http://schemas.openxmlformats.org/officeDocument/2006/relationships" type="conn" r:blip="" zOrderOff="-999">
+                                    <dgm:adjLst/>
+                                  </dgm:shape>
+                                  <dgm:presOf axis="self"/>
+                                  <dgm:constrLst>
+                                    <dgm:constr type="begPad"/>
+                                    <dgm:constr type="endPad"/>
+                                  </dgm:constrLst>
+                                  <dgm:ruleLst/>
+                                </dgm:layoutNode>
+                              </dgm:forEach>
+                              <dgm:forEach name="Name27" axis="self" ptType="node">
+                                <dgm:layoutNode name="hierRoot4">
+                                  <dgm:alg type="hierRoot"/>
+                                  <dgm:shape xmlns:r="http://schemas.openxmlformats.org/officeDocument/2006/relationships" r:blip="">
+                                    <dgm:adjLst/>
+                                  </dgm:shape>
+                                  <dgm:presOf/>
+                                  <dgm:constrLst>
+                                    <dgm:constr type="bendDist" for="des" ptType="parTrans" refType="sp" fact="0.5"/>
+                                  </dgm:constrLst>
+                                  <dgm:ruleLst/>
+                                  <dgm:layoutNode name="composite4">
+                                    <dgm:alg type="composite"/>
+                                    <dgm:shape xmlns:r="http://schemas.openxmlformats.org/officeDocument/2006/relationships" r:blip="">
+                                      <dgm:adjLst/>
+                                    </dgm:shape>
+                                    <dgm:presOf/>
+                                    <dgm:constrLst>
+                                      <dgm:constr type="w" for="ch" forName="background4" refType="w" fact="0.9"/>
+                                      <dgm:constr type="h" for="ch" forName="background4" refType="w" refFor="ch" refForName="background4" fact="0.635"/>
+                                      <dgm:constr type="t" for="ch" forName="background4"/>
+                                      <dgm:constr type="l" for="ch" forName="background4"/>
+                                      <dgm:constr type="w" for="ch" forName="text4" refType="w" fact="0.9"/>
+                                      <dgm:constr type="h" for="ch" forName="text4" refType="w" refFor="ch" refForName="text4" fact="0.635"/>
+                                      <dgm:constr type="t" for="ch" forName="text4" refType="w" fact="0.095"/>
+                                      <dgm:constr type="l" for="ch" forName="text4" refType="w" fact="0.1"/>
+                                    </dgm:constrLst>
+                                    <dgm:ruleLst/>
+                                    <dgm:layoutNode name="background4" moveWith="text4">
+                                      <dgm:alg type="sp"/>
+                                      <dgm:shape xmlns:r="http://schemas.openxmlformats.org/officeDocument/2006/relationships" type="roundRect" r:blip="">
+                                        <dgm:adjLst>
+                                          <dgm:adj idx="1" val="0.1"/>
+                                        </dgm:adjLst>
+                                      </dgm:shape>
+                                      <dgm:presOf/>
+                                      <dgm:constrLst/>
+                                      <dgm:ruleLst/>
+                                    </dgm:layoutNode>
+                                    <dgm:layoutNode name="text4" styleLbl="fgAcc4">
+                                      <dgm:varLst>
+                                        <dgm:chPref val="3"/>
+                                      </dgm:varLst>
+                                      <dgm:alg type="tx"/>
+                                      <dgm:shape xmlns:r="http://schemas.openxmlformats.org/officeDocument/2006/relationships" type="roundRect" r:blip="">
+                                        <dgm:adjLst>
+                                          <dgm:adj idx="1" val="0.1"/>
+                                        </dgm:adjLst>
+                                      </dgm:shape>
+                                      <dgm:presOf axis="self"/>
+                                      <dgm:constrLst>
+                                        <dgm:constr type="tMarg" refType="primFontSz" fact="0.3"/>
+                                        <dgm:constr type="bMarg" refType="primFontSz" fact="0.3"/>
+                                        <dgm:constr type="lMarg" refType="primFontSz" fact="0.3"/>
+                                        <dgm:constr type="rMarg" refType="primFontSz" fact="0.3"/>
+                                      </dgm:constrLst>
+                                      <dgm:ruleLst>
+                                        <dgm:rule type="primFontSz" val="5" fact="NaN" max="NaN"/>
+                                      </dgm:ruleLst>
+                                    </dgm:layoutNode>
+                                  </dgm:layoutNode>
+                                  <dgm:layoutNode name="hierChild5">
+                                    <dgm:choose name="Name28">
+                                      <dgm:if name="Name29" func="var" arg="dir" op="equ" val="norm">
+                                        <dgm:alg type="hierChild">
+                                          <dgm:param type="linDir" val="fromL"/>
+                                        </dgm:alg>
+                                      </dgm:if>
+                                      <dgm:else name="Name30">
+                                        <dgm:alg type="hierChild">
+                                          <dgm:param type="linDir" val="fromR"/>
+                                        </dgm:alg>
+                                      </dgm:else>
+                                    </dgm:choose>
+                                    <dgm:shape xmlns:r="http://schemas.openxmlformats.org/officeDocument/2006/relationships" r:blip="">
+                                      <dgm:adjLst/>
+                                    </dgm:shape>
+                                    <dgm:presOf/>
+                                    <dgm:constrLst/>
+                                    <dgm:ruleLst/>
+                                    <dgm:forEach name="Name31" ref="repeat"/>
+                                  </dgm:layoutNode>
+                                </dgm:layoutNode>
+                              </dgm:forEach>
+                            </dgm:forEach>
+                          </dgm:layoutNode>
+                        </dgm:layoutNode>
+                      </dgm:forEach>
+                    </dgm:forEach>
+                  </dgm:layoutNode>
+                </dgm:layoutNode>
+              </dgm:forEach>
+            </dgm:forEach>
+          </dgm:layoutNode>
+        </dgm:layoutNode>
+      </dgm:forEach>
+    </dgm:forEach>
+  </dgm:layoutNode>
+</dgm:layoutDef>
+</file>
+
+<file path=ppt/diagrams/quickStyle1.xml><?xml version="1.0" encoding="utf-8"?>
+<dgm:styleDef xmlns:dgm="http://schemas.openxmlformats.org/drawingml/2006/diagram" xmlns:a="http://schemas.openxmlformats.org/drawingml/2006/main" uniqueId="urn:microsoft.com/office/officeart/2005/8/quickstyle/simple1">
+  <dgm:title val=""/>
+  <dgm:desc val=""/>
+  <dgm:catLst>
+    <dgm:cat type="simple" pri="10100"/>
+  </dgm:catLst>
+  <dgm:scene3d>
+    <a:camera prst="orthographicFront"/>
+    <a:lightRig rig="threePt" dir="t"/>
+  </dgm:scene3d>
+  <dgm:styleLbl name="node0">
+    <dgm:scene3d>
+      <a:camera prst="orthographicFront"/>
+      <a:lightRig rig="threePt" dir="t"/>
+    </dgm:scene3d>
+    <dgm:sp3d/>
+    <dgm:txPr/>
+    <dgm:style>
+      <a:lnRef idx="2">
+        <a:scrgbClr r="0" g="0" b="0"/>
+      </a:lnRef>
+      <a:fillRef idx="1">
+        <a:scrgbClr r="0" g="0" b="0"/>
+      </a:fillRef>
+      <a:effectRef idx="0">
+        <a:scrgbClr r="0" g="0" b="0"/>
+      </a:effectRef>
+      <a:fontRef idx="minor">
+        <a:schemeClr val="lt1"/>
+      </a:fontRef>
+    </dgm:style>
+  </dgm:styleLbl>
+  <dgm:styleLbl name="lnNode1">
+    <dgm:scene3d>
+      <a:camera prst="orthographicFront"/>
+      <a:lightRig rig="threePt" dir="t"/>
+    </dgm:scene3d>
+    <dgm:sp3d/>
+    <dgm:txPr/>
+    <dgm:style>
+      <a:lnRef idx="2">
+        <a:scrgbClr r="0" g="0" b="0"/>
+      </a:lnRef>
+      <a:fillRef idx="1">
+        <a:scrgbClr r="0" g="0" b="0"/>
+      </a:fillRef>
+      <a:effectRef idx="0">
+        <a:scrgbClr r="0" g="0" b="0"/>
+      </a:effectRef>
+      <a:fontRef idx="minor">
+        <a:schemeClr val="lt1"/>
+      </a:fontRef>
+    </dgm:style>
+  </dgm:styleLbl>
+  <dgm:styleLbl name="vennNode1">
+    <dgm:scene3d>
+      <a:camera prst="orthographicFront"/>
+      <a:lightRig rig="threePt" dir="t"/>
+    </dgm:scene3d>
+    <dgm:sp3d/>
+    <dgm:txPr/>
+    <dgm:style>
+      <a:lnRef idx="2">
+        <a:scrgbClr r="0" g="0" b="0"/>
+      </a:lnRef>
+      <a:fillRef idx="1">
+        <a:scrgbClr r="0" g="0" b="0"/>
+      </a:fillRef>
+      <a:effectRef idx="0">
+        <a:scrgbClr r="0" g="0" b="0"/>
+      </a:effectRef>
+      <a:fontRef idx="minor">
+        <a:schemeClr val="tx1"/>
+      </a:fontRef>
+    </dgm:style>
+  </dgm:styleLbl>
+  <dgm:styleLbl name="alignNode1">
+    <dgm:scene3d>
+      <a:camera prst="orthographicFront"/>
+      <a:lightRig rig="threePt" dir="t"/>
+    </dgm:scene3d>
+    <dgm:sp3d/>
+    <dgm:txPr/>
+    <dgm:style>
+      <a:lnRef idx="2">
+        <a:scrgbClr r="0" g="0" b="0"/>
+      </a:lnRef>
+      <a:fillRef idx="1">
+        <a:scrgbClr r="0" g="0" b="0"/>
+      </a:fillRef>
+      <a:effectRef idx="0">
+        <a:scrgbClr r="0" g="0" b="0"/>
+      </a:effectRef>
+      <a:fontRef idx="minor">
+        <a:schemeClr val="lt1"/>
+      </a:fontRef>
+    </dgm:style>
+  </dgm:styleLbl>
+  <dgm:styleLbl name="node1">
+    <dgm:scene3d>
+      <a:camera prst="orthographicFront"/>
+      <a:lightRig rig="threePt" dir="t"/>
+    </dgm:scene3d>
+    <dgm:sp3d/>
+    <dgm:txPr/>
+    <dgm:style>
+      <a:lnRef idx="2">
+        <a:scrgbClr r="0" g="0" b="0"/>
+      </a:lnRef>
+      <a:fillRef idx="1">
+        <a:scrgbClr r="0" g="0" b="0"/>
+      </a:fillRef>
+      <a:effectRef idx="0">
+        <a:scrgbClr r="0" g="0" b="0"/>
+      </a:effectRef>
+      <a:fontRef idx="minor">
+        <a:schemeClr val="lt1"/>
+      </a:fontRef>
+    </dgm:style>
+  </dgm:styleLbl>
+  <dgm:styleLbl name="node2">
+    <dgm:scene3d>
+      <a:camera prst="orthographicFront"/>
+      <a:lightRig rig="threePt" dir="t"/>
+    </dgm:scene3d>
+    <dgm:sp3d/>
+    <dgm:txPr/>
+    <dgm:style>
+      <a:lnRef idx="2">
+        <a:scrgbClr r="0" g="0" b="0"/>
+      </a:lnRef>
+      <a:fillRef idx="1">
+        <a:scrgbClr r="0" g="0" b="0"/>
+      </a:fillRef>
+      <a:effectRef idx="0">
+        <a:scrgbClr r="0" g="0" b="0"/>
+      </a:effectRef>
+      <a:fontRef idx="minor">
+        <a:schemeClr val="lt1"/>
+      </a:fontRef>
+    </dgm:style>
+  </dgm:styleLbl>
+  <dgm:styleLbl name="node3">
+    <dgm:scene3d>
+      <a:camera prst="orthographicFront"/>
+      <a:lightRig rig="threePt" dir="t"/>
+    </dgm:scene3d>
+    <dgm:sp3d/>
+    <dgm:txPr/>
+    <dgm:style>
+      <a:lnRef idx="2">
+        <a:scrgbClr r="0" g="0" b="0"/>
+      </a:lnRef>
+      <a:fillRef idx="1">
+        <a:scrgbClr r="0" g="0" b="0"/>
+      </a:fillRef>
+      <a:effectRef idx="0">
+        <a:scrgbClr r="0" g="0" b="0"/>
+      </a:effectRef>
+      <a:fontRef idx="minor">
+        <a:schemeClr val="lt1"/>
+      </a:fontRef>
+    </dgm:style>
+  </dgm:styleLbl>
+  <dgm:styleLbl name="node4">
+    <dgm:scene3d>
+      <a:camera prst="orthographicFront"/>
+      <a:lightRig rig="threePt" dir="t"/>
+    </dgm:scene3d>
+    <dgm:sp3d/>
+    <dgm:txPr/>
+    <dgm:style>
+      <a:lnRef idx="2">
+        <a:scrgbClr r="0" g="0" b="0"/>
+      </a:lnRef>
+      <a:fillRef idx="1">
+        <a:scrgbClr r="0" g="0" b="0"/>
+      </a:fillRef>
+      <a:effectRef idx="0">
+        <a:scrgbClr r="0" g="0" b="0"/>
+      </a:effectRef>
+      <a:fontRef idx="minor">
+        <a:schemeClr val="lt1"/>
+      </a:fontRef>
+    </dgm:style>
+  </dgm:styleLbl>
+  <dgm:styleLbl name="fgImgPlace1">
+    <dgm:scene3d>
+      <a:camera prst="orthographicFront"/>
+      <a:lightRig rig="threePt" dir="t"/>
+    </dgm:scene3d>
+    <dgm:sp3d/>
+    <dgm:txPr/>
+    <dgm:style>
+      <a:lnRef idx="2">
+        <a:scrgbClr r="0" g="0" b="0"/>
+      </a:lnRef>
+      <a:fillRef idx="1">
+        <a:scrgbClr r="0" g="0" b="0"/>
+      </a:fillRef>
+      <a:effectRef idx="0">
+        <a:scrgbClr r="0" g="0" b="0"/>
+      </a:effectRef>
+      <a:fontRef idx="minor"/>
+    </dgm:style>
+  </dgm:styleLbl>
+  <dgm:styleLbl name="alignImgPlace1">
+    <dgm:scene3d>
+      <a:camera prst="orthographicFront"/>
+      <a:lightRig rig="threePt" dir="t"/>
+    </dgm:scene3d>
+    <dgm:sp3d/>
+    <dgm:txPr/>
+    <dgm:style>
+      <a:lnRef idx="2">
+        <a:scrgbClr r="0" g="0" b="0"/>
+      </a:lnRef>
+      <a:fillRef idx="1">
+        <a:scrgbClr r="0" g="0" b="0"/>
+      </a:fillRef>
+      <a:effectRef idx="0">
+        <a:scrgbClr r="0" g="0" b="0"/>
+      </a:effectRef>
+      <a:fontRef idx="minor"/>
+    </dgm:style>
+  </dgm:styleLbl>
+  <dgm:styleLbl name="bgImgPlace1">
+    <dgm:scene3d>
+      <a:camera prst="orthographicFront"/>
+      <a:lightRig rig="threePt" dir="t"/>
+    </dgm:scene3d>
+    <dgm:sp3d/>
+    <dgm:txPr/>
+    <dgm:style>
+      <a:lnRef idx="2">
+        <a:scrgbClr r="0" g="0" b="0"/>
+      </a:lnRef>
+      <a:fillRef idx="1">
+        <a:scrgbClr r="0" g="0" b="0"/>
+      </a:fillRef>
+      <a:effectRef idx="0">
+        <a:scrgbClr r="0" g="0" b="0"/>
+      </a:effectRef>
+      <a:fontRef idx="minor"/>
+    </dgm:style>
+  </dgm:styleLbl>
+  <dgm:styleLbl name="sibTrans2D1">
+    <dgm:scene3d>
+      <a:camera prst="orthographicFront"/>
+      <a:lightRig rig="threePt" dir="t"/>
+    </dgm:scene3d>
+    <dgm:sp3d/>
+    <dgm:txPr/>
+    <dgm:style>
+      <a:lnRef idx="0">
+        <a:scrgbClr r="0" g="0" b="0"/>
+      </a:lnRef>
+      <a:fillRef idx="1">
+        <a:scrgbClr r="0" g="0" b="0"/>
+      </a:fillRef>
+      <a:effectRef idx="0">
+        <a:scrgbClr r="0" g="0" b="0"/>
+      </a:effectRef>
+      <a:fontRef idx="minor">
+        <a:schemeClr val="lt1"/>
+      </a:fontRef>
+    </dgm:style>
+  </dgm:styleLbl>
+  <dgm:styleLbl name="fgSibTrans2D1">
+    <dgm:scene3d>
+      <a:camera prst="orthographicFront"/>
+      <a:lightRig rig="threePt" dir="t"/>
+    </dgm:scene3d>
+    <dgm:sp3d/>
+    <dgm:txPr/>
+    <dgm:style>
+      <a:lnRef idx="0">
+        <a:scrgbClr r="0" g="0" b="0"/>
+      </a:lnRef>
+      <a:fillRef idx="1">
+        <a:scrgbClr r="0" g="0" b="0"/>
+      </a:fillRef>
+      <a:effectRef idx="0">
+        <a:scrgbClr r="0" g="0" b="0"/>
+      </a:effectRef>
+      <a:fontRef idx="minor">
+        <a:schemeClr val="lt1"/>
+      </a:fontRef>
+    </dgm:style>
+  </dgm:styleLbl>
+  <dgm:styleLbl name="bgSibTrans2D1">
+    <dgm:scene3d>
+      <a:camera prst="orthographicFront"/>
+      <a:lightRig rig="threePt" dir="t"/>
+    </dgm:scene3d>
+    <dgm:sp3d/>
+    <dgm:txPr/>
+    <dgm:style>
+      <a:lnRef idx="0">
+        <a:scrgbClr r="0" g="0" b="0"/>
+      </a:lnRef>
+      <a:fillRef idx="1">
+        <a:scrgbClr r="0" g="0" b="0"/>
+      </a:fillRef>
+      <a:effectRef idx="0">
+        <a:scrgbClr r="0" g="0" b="0"/>
+      </a:effectRef>
+      <a:fontRef idx="minor">
+        <a:schemeClr val="lt1"/>
+      </a:fontRef>
+    </dgm:style>
+  </dgm:styleLbl>
+  <dgm:styleLbl name="sibTrans1D1">
+    <dgm:scene3d>
+      <a:camera prst="orthographicFront"/>
+      <a:lightRig rig="threePt" dir="t"/>
+    </dgm:scene3d>
+    <dgm:sp3d/>
+    <dgm:txPr/>
+    <dgm:style>
+      <a:lnRef idx="1">
+        <a:scrgbClr r="0" g="0" b="0"/>
+      </a:lnRef>
+      <a:fillRef idx="0">
+        <a:scrgbClr r="0" g="0" b="0"/>
+      </a:fillRef>
+      <a:effectRef idx="0">
+        <a:scrgbClr r="0" g="0" b="0"/>
+      </a:effectRef>
+      <a:fontRef idx="minor"/>
+    </dgm:style>
+  </dgm:styleLbl>
+  <dgm:styleLbl name="callout">
+    <dgm:scene3d>
+      <a:camera prst="orthographicFront"/>
+      <a:lightRig rig="threePt" dir="t"/>
+    </dgm:scene3d>
+    <dgm:sp3d/>
+    <dgm:txPr/>
+    <dgm:style>
+      <a:lnRef idx="2">
+        <a:scrgbClr r="0" g="0" b="0"/>
+      </a:lnRef>
+      <a:fillRef idx="1">
+        <a:scrgbClr r="0" g="0" b="0"/>
+      </a:fillRef>
+      <a:effectRef idx="0">
+        <a:scrgbClr r="0" g="0" b="0"/>
+      </a:effectRef>
+      <a:fontRef idx="minor"/>
+    </dgm:style>
+  </dgm:styleLbl>
+  <dgm:styleLbl name="asst0">
+    <dgm:scene3d>
+      <a:camera prst="orthographicFront"/>
+      <a:lightRig rig="threePt" dir="t"/>
+    </dgm:scene3d>
+    <dgm:sp3d/>
+    <dgm:txPr/>
+    <dgm:style>
+      <a:lnRef idx="2">
+        <a:scrgbClr r="0" g="0" b="0"/>
+      </a:lnRef>
+      <a:fillRef idx="1">
+        <a:scrgbClr r="0" g="0" b="0"/>
+      </a:fillRef>
+      <a:effectRef idx="0">
+        <a:scrgbClr r="0" g="0" b="0"/>
+      </a:effectRef>
+      <a:fontRef idx="minor">
+        <a:schemeClr val="lt1"/>
+      </a:fontRef>
+    </dgm:style>
+  </dgm:styleLbl>
+  <dgm:styleLbl name="asst1">
+    <dgm:scene3d>
+      <a:camera prst="orthographicFront"/>
+      <a:lightRig rig="threePt" dir="t"/>
+    </dgm:scene3d>
+    <dgm:sp3d/>
+    <dgm:txPr/>
+    <dgm:style>
+      <a:lnRef idx="2">
+        <a:scrgbClr r="0" g="0" b="0"/>
+      </a:lnRef>
+      <a:fillRef idx="1">
+        <a:scrgbClr r="0" g="0" b="0"/>
+      </a:fillRef>
+      <a:effectRef idx="0">
+        <a:scrgbClr r="0" g="0" b="0"/>
+      </a:effectRef>
+      <a:fontRef idx="minor">
+        <a:schemeClr val="lt1"/>
+      </a:fontRef>
+    </dgm:style>
+  </dgm:styleLbl>
+  <dgm:styleLbl name="asst2">
+    <dgm:scene3d>
+      <a:camera prst="orthographicFront"/>
+      <a:lightRig rig="threePt" dir="t"/>
+    </dgm:scene3d>
+    <dgm:sp3d/>
+    <dgm:txPr/>
+    <dgm:style>
+      <a:lnRef idx="2">
+        <a:scrgbClr r="0" g="0" b="0"/>
+      </a:lnRef>
+      <a:fillRef idx="1">
+        <a:scrgbClr r="0" g="0" b="0"/>
+      </a:fillRef>
+      <a:effectRef idx="0">
+        <a:scrgbClr r="0" g="0" b="0"/>
+      </a:effectRef>
+      <a:fontRef idx="minor">
+        <a:schemeClr val="lt1"/>
+      </a:fontRef>
+    </dgm:style>
+  </dgm:styleLbl>
+  <dgm:styleLbl name="asst3">
+    <dgm:scene3d>
+      <a:camera prst="orthographicFront"/>
+      <a:lightRig rig="threePt" dir="t"/>
+    </dgm:scene3d>
+    <dgm:sp3d/>
+    <dgm:txPr/>
+    <dgm:style>
+      <a:lnRef idx="2">
+        <a:scrgbClr r="0" g="0" b="0"/>
+      </a:lnRef>
+      <a:fillRef idx="1">
+        <a:scrgbClr r="0" g="0" b="0"/>
+      </a:fillRef>
+      <a:effectRef idx="0">
+        <a:scrgbClr r="0" g="0" b="0"/>
+      </a:effectRef>
+      <a:fontRef idx="minor">
+        <a:schemeClr val="lt1"/>
+      </a:fontRef>
+    </dgm:style>
+  </dgm:styleLbl>
+  <dgm:styleLbl name="asst4">
+    <dgm:scene3d>
+      <a:camera prst="orthographicFront"/>
+      <a:lightRig rig="threePt" dir="t"/>
+    </dgm:scene3d>
+    <dgm:sp3d/>
+    <dgm:txPr/>
+    <dgm:style>
+      <a:lnRef idx="2">
+        <a:scrgbClr r="0" g="0" b="0"/>
+      </a:lnRef>
+      <a:fillRef idx="1">
+        <a:scrgbClr r="0" g="0" b="0"/>
+      </a:fillRef>
+      <a:effectRef idx="0">
+        <a:scrgbClr r="0" g="0" b="0"/>
+      </a:effectRef>
+      <a:fontRef idx="minor">
+        <a:schemeClr val="lt1"/>
+      </a:fontRef>
+    </dgm:style>
+  </dgm:styleLbl>
+  <dgm:styleLbl name="parChTrans2D1">
+    <dgm:scene3d>
+      <a:camera prst="orthographicFront"/>
+      <a:lightRig rig="threePt" dir="t"/>
+    </dgm:scene3d>
+    <dgm:sp3d/>
+    <dgm:txPr/>
+    <dgm:style>
+      <a:lnRef idx="2">
+        <a:scrgbClr r="0" g="0" b="0"/>
+      </a:lnRef>
+      <a:fillRef idx="1">
+        <a:scrgbClr r="0" g="0" b="0"/>
+      </a:fillRef>
+      <a:effectRef idx="0">
+        <a:scrgbClr r="0" g="0" b="0"/>
+      </a:effectRef>
+      <a:fontRef idx="minor">
+        <a:schemeClr val="lt1"/>
+      </a:fontRef>
+    </dgm:style>
+  </dgm:styleLbl>
+  <dgm:styleLbl name="parChTrans2D2">
+    <dgm:scene3d>
+      <a:camera prst="orthographicFront"/>
+      <a:lightRig rig="threePt" dir="t"/>
+    </dgm:scene3d>
+    <dgm:sp3d/>
+    <dgm:txPr/>
+    <dgm:style>
+      <a:lnRef idx="2">
+        <a:scrgbClr r="0" g="0" b="0"/>
+      </a:lnRef>
+      <a:fillRef idx="1">
+        <a:scrgbClr r="0" g="0" b="0"/>
+      </a:fillRef>
+      <a:effectRef idx="0">
+        <a:scrgbClr r="0" g="0" b="0"/>
+      </a:effectRef>
+      <a:fontRef idx="minor">
+        <a:schemeClr val="lt1"/>
+      </a:fontRef>
+    </dgm:style>
+  </dgm:styleLbl>
+  <dgm:styleLbl name="parChTrans2D3">
+    <dgm:scene3d>
+      <a:camera prst="orthographicFront"/>
+      <a:lightRig rig="threePt" dir="t"/>
+    </dgm:scene3d>
+    <dgm:sp3d/>
+    <dgm:txPr/>
+    <dgm:style>
+      <a:lnRef idx="2">
+        <a:scrgbClr r="0" g="0" b="0"/>
+      </a:lnRef>
+      <a:fillRef idx="1">
+        <a:scrgbClr r="0" g="0" b="0"/>
+      </a:fillRef>
+      <a:effectRef idx="0">
+        <a:scrgbClr r="0" g="0" b="0"/>
+      </a:effectRef>
+      <a:fontRef idx="minor">
+        <a:schemeClr val="lt1"/>
+      </a:fontRef>
+    </dgm:style>
+  </dgm:styleLbl>
+  <dgm:styleLbl name="parChTrans2D4">
+    <dgm:scene3d>
+      <a:camera prst="orthographicFront"/>
+      <a:lightRig rig="threePt" dir="t"/>
+    </dgm:scene3d>
+    <dgm:sp3d/>
+    <dgm:txPr/>
+    <dgm:style>
+      <a:lnRef idx="2">
+        <a:scrgbClr r="0" g="0" b="0"/>
+      </a:lnRef>
+      <a:fillRef idx="1">
+        <a:scrgbClr r="0" g="0" b="0"/>
+      </a:fillRef>
+      <a:effectRef idx="0">
+        <a:scrgbClr r="0" g="0" b="0"/>
+      </a:effectRef>
+      <a:fontRef idx="minor">
+        <a:schemeClr val="lt1"/>
+      </a:fontRef>
+    </dgm:style>
+  </dgm:styleLbl>
+  <dgm:styleLbl name="parChTrans1D1">
+    <dgm:scene3d>
+      <a:camera prst="orthographicFront"/>
+      <a:lightRig rig="threePt" dir="t"/>
+    </dgm:scene3d>
+    <dgm:sp3d/>
+    <dgm:txPr/>
+    <dgm:style>
+      <a:lnRef idx="2">
+        <a:scrgbClr r="0" g="0" b="0"/>
+      </a:lnRef>
+      <a:fillRef idx="0">
+        <a:scrgbClr r="0" g="0" b="0"/>
+      </a:fillRef>
+      <a:effectRef idx="0">
+        <a:scrgbClr r="0" g="0" b="0"/>
+      </a:effectRef>
+      <a:fontRef idx="minor"/>
+    </dgm:style>
+  </dgm:styleLbl>
+  <dgm:styleLbl name="parChTrans1D2">
+    <dgm:scene3d>
+      <a:camera prst="orthographicFront"/>
+      <a:lightRig rig="threePt" dir="t"/>
+    </dgm:scene3d>
+    <dgm:sp3d/>
+    <dgm:txPr/>
+    <dgm:style>
+      <a:lnRef idx="2">
+        <a:scrgbClr r="0" g="0" b="0"/>
+      </a:lnRef>
+      <a:fillRef idx="0">
+        <a:scrgbClr r="0" g="0" b="0"/>
+      </a:fillRef>
+      <a:effectRef idx="0">
+        <a:scrgbClr r="0" g="0" b="0"/>
+      </a:effectRef>
+      <a:fontRef idx="minor"/>
+    </dgm:style>
+  </dgm:styleLbl>
+  <dgm:styleLbl name="parChTrans1D3">
+    <dgm:scene3d>
+      <a:camera prst="orthographicFront"/>
+      <a:lightRig rig="threePt" dir="t"/>
+    </dgm:scene3d>
+    <dgm:sp3d/>
+    <dgm:txPr/>
+    <dgm:style>
+      <a:lnRef idx="2">
+        <a:scrgbClr r="0" g="0" b="0"/>
+      </a:lnRef>
+      <a:fillRef idx="0">
+        <a:scrgbClr r="0" g="0" b="0"/>
+      </a:fillRef>
+      <a:effectRef idx="0">
+        <a:scrgbClr r="0" g="0" b="0"/>
+      </a:effectRef>
+      <a:fontRef idx="minor"/>
+    </dgm:style>
+  </dgm:styleLbl>
+  <dgm:styleLbl name="parChTrans1D4">
+    <dgm:scene3d>
+      <a:camera prst="orthographicFront"/>
+      <a:lightRig rig="threePt" dir="t"/>
+    </dgm:scene3d>
+    <dgm:sp3d/>
+    <dgm:txPr/>
+    <dgm:style>
+      <a:lnRef idx="2">
+        <a:scrgbClr r="0" g="0" b="0"/>
+      </a:lnRef>
+      <a:fillRef idx="0">
+        <a:scrgbClr r="0" g="0" b="0"/>
+      </a:fillRef>
+      <a:effectRef idx="0">
+        <a:scrgbClr r="0" g="0" b="0"/>
+      </a:effectRef>
+      <a:fontRef idx="minor"/>
+    </dgm:style>
+  </dgm:styleLbl>
+  <dgm:styleLbl name="fgAcc1">
+    <dgm:scene3d>
+      <a:camera prst="orthographicFront"/>
+      <a:lightRig rig="threePt" dir="t"/>
+    </dgm:scene3d>
+    <dgm:sp3d/>
+    <dgm:txPr/>
+    <dgm:style>
+      <a:lnRef idx="2">
+        <a:scrgbClr r="0" g="0" b="0"/>
+      </a:lnRef>
+      <a:fillRef idx="1">
+        <a:scrgbClr r="0" g="0" b="0"/>
+      </a:fillRef>
+      <a:effectRef idx="0">
+        <a:scrgbClr r="0" g="0" b="0"/>
+      </a:effectRef>
+      <a:fontRef idx="minor"/>
+    </dgm:style>
+  </dgm:styleLbl>
+  <dgm:styleLbl name="conFgAcc1">
+    <dgm:scene3d>
+      <a:camera prst="orthographicFront"/>
+      <a:lightRig rig="threePt" dir="t"/>
+    </dgm:scene3d>
+    <dgm:sp3d/>
+    <dgm:txPr/>
+    <dgm:style>
+      <a:lnRef idx="2">
+        <a:scrgbClr r="0" g="0" b="0"/>
+      </a:lnRef>
+      <a:fillRef idx="1">
+        <a:scrgbClr r="0" g="0" b="0"/>
+      </a:fillRef>
+      <a:effectRef idx="0">
+        <a:scrgbClr r="0" g="0" b="0"/>
+      </a:effectRef>
+      <a:fontRef idx="minor"/>
+    </dgm:style>
+  </dgm:styleLbl>
+  <dgm:styleLbl name="alignAcc1">
+    <dgm:scene3d>
+      <a:camera prst="orthographicFront"/>
+      <a:lightRig rig="threePt" dir="t"/>
+    </dgm:scene3d>
+    <dgm:sp3d/>
+    <dgm:txPr/>
+    <dgm:style>
+      <a:lnRef idx="2">
+        <a:scrgbClr r="0" g="0" b="0"/>
+      </a:lnRef>
+      <a:fillRef idx="1">
+        <a:scrgbClr r="0" g="0" b="0"/>
+      </a:fillRef>
+      <a:effectRef idx="0">
+        <a:scrgbClr r="0" g="0" b="0"/>
+      </a:effectRef>
+      <a:fontRef idx="minor"/>
+    </dgm:style>
+  </dgm:styleLbl>
+  <dgm:styleLbl name="trAlignAcc1">
+    <dgm:scene3d>
+      <a:camera prst="orthographicFront"/>
+      <a:lightRig rig="threePt" dir="t"/>
+    </dgm:scene3d>
+    <dgm:sp3d/>
+    <dgm:txPr/>
+    <dgm:style>
+      <a:lnRef idx="1">
+        <a:scrgbClr r="0" g="0" b="0"/>
+      </a:lnRef>
+      <a:fillRef idx="1">
+        <a:scrgbClr r="0" g="0" b="0"/>
+      </a:fillRef>
+      <a:effectRef idx="0">
+        <a:scrgbClr r="0" g="0" b="0"/>
+      </a:effectRef>
+      <a:fontRef idx="minor"/>
+    </dgm:style>
+  </dgm:styleLbl>
+  <dgm:styleLbl name="bgAcc1">
+    <dgm:scene3d>
+      <a:camera prst="orthographicFront"/>
+      <a:lightRig rig="threePt" dir="t"/>
+    </dgm:scene3d>
+    <dgm:sp3d/>
+    <dgm:txPr/>
+    <dgm:style>
+      <a:lnRef idx="2">
+        <a:scrgbClr r="0" g="0" b="0"/>
+      </a:lnRef>
+      <a:fillRef idx="1">
+        <a:scrgbClr r="0" g="0" b="0"/>
+      </a:fillRef>
+      <a:effectRef idx="0">
+        <a:scrgbClr r="0" g="0" b="0"/>
+      </a:effectRef>
+      <a:fontRef idx="minor"/>
+    </dgm:style>
+  </dgm:styleLbl>
+  <dgm:styleLbl name="solidFgAcc1">
+    <dgm:scene3d>
+      <a:camera prst="orthographicFront"/>
+      <a:lightRig rig="threePt" dir="t"/>
+    </dgm:scene3d>
+    <dgm:sp3d/>
+    <dgm:txPr/>
+    <dgm:style>
+      <a:lnRef idx="2">
+        <a:scrgbClr r="0" g="0" b="0"/>
+      </a:lnRef>
+      <a:fillRef idx="1">
+        <a:scrgbClr r="0" g="0" b="0"/>
+      </a:fillRef>
+      <a:effectRef idx="0">
+        <a:scrgbClr r="0" g="0" b="0"/>
+      </a:effectRef>
+      <a:fontRef idx="minor"/>
+    </dgm:style>
+  </dgm:styleLbl>
+  <dgm:styleLbl name="solidAlignAcc1">
+    <dgm:scene3d>
+      <a:camera prst="orthographicFront"/>
+      <a:lightRig rig="threePt" dir="t"/>
+    </dgm:scene3d>
+    <dgm:sp3d/>
+    <dgm:txPr/>
+    <dgm:style>
+      <a:lnRef idx="2">
+        <a:scrgbClr r="0" g="0" b="0"/>
+      </a:lnRef>
+      <a:fillRef idx="1">
+        <a:scrgbClr r="0" g="0" b="0"/>
+      </a:fillRef>
+      <a:effectRef idx="0">
+        <a:scrgbClr r="0" g="0" b="0"/>
+      </a:effectRef>
+      <a:fontRef idx="minor"/>
+    </dgm:style>
+  </dgm:styleLbl>
+  <dgm:styleLbl name="solidBgAcc1">
+    <dgm:scene3d>
+      <a:camera prst="orthographicFront"/>
+      <a:lightRig rig="threePt" dir="t"/>
+    </dgm:scene3d>
+    <dgm:sp3d/>
+    <dgm:txPr/>
+    <dgm:style>
+      <a:lnRef idx="2">
+        <a:scrgbClr r="0" g="0" b="0"/>
+      </a:lnRef>
+      <a:fillRef idx="1">
+        <a:scrgbClr r="0" g="0" b="0"/>
+      </a:fillRef>
+      <a:effectRef idx="0">
+        <a:scrgbClr r="0" g="0" b="0"/>
+      </a:effectRef>
+      <a:fontRef idx="minor"/>
+    </dgm:style>
+  </dgm:styleLbl>
+  <dgm:styleLbl name="fgAccFollowNode1">
+    <dgm:scene3d>
+      <a:camera prst="orthographicFront"/>
+      <a:lightRig rig="threePt" dir="t"/>
+    </dgm:scene3d>
+    <dgm:sp3d/>
+    <dgm:txPr/>
+    <dgm:style>
+      <a:lnRef idx="2">
+        <a:scrgbClr r="0" g="0" b="0"/>
+      </a:lnRef>
+      <a:fillRef idx="1">
+        <a:scrgbClr r="0" g="0" b="0"/>
+      </a:fillRef>
+      <a:effectRef idx="0">
+        <a:scrgbClr r="0" g="0" b="0"/>
+      </a:effectRef>
+      <a:fontRef idx="minor"/>
+    </dgm:style>
+  </dgm:styleLbl>
+  <dgm:styleLbl name="alignAccFollowNode1">
+    <dgm:scene3d>
+      <a:camera prst="orthographicFront"/>
+      <a:lightRig rig="threePt" dir="t"/>
+    </dgm:scene3d>
+    <dgm:sp3d/>
+    <dgm:txPr/>
+    <dgm:style>
+      <a:lnRef idx="2">
+        <a:scrgbClr r="0" g="0" b="0"/>
+      </a:lnRef>
+      <a:fillRef idx="1">
+        <a:scrgbClr r="0" g="0" b="0"/>
+      </a:fillRef>
+      <a:effectRef idx="0">
+        <a:scrgbClr r="0" g="0" b="0"/>
+      </a:effectRef>
+      <a:fontRef idx="minor"/>
+    </dgm:style>
+  </dgm:styleLbl>
+  <dgm:styleLbl name="bgAccFollowNode1">
+    <dgm:scene3d>
+      <a:camera prst="orthographicFront"/>
+      <a:lightRig rig="threePt" dir="t"/>
+    </dgm:scene3d>
+    <dgm:sp3d/>
+    <dgm:txPr/>
+    <dgm:style>
+      <a:lnRef idx="2">
+        <a:scrgbClr r="0" g="0" b="0"/>
+      </a:lnRef>
+      <a:fillRef idx="1">
+        <a:scrgbClr r="0" g="0" b="0"/>
+      </a:fillRef>
+      <a:effectRef idx="0">
+        <a:scrgbClr r="0" g="0" b="0"/>
+      </a:effectRef>
+      <a:fontRef idx="minor"/>
+    </dgm:style>
+  </dgm:styleLbl>
+  <dgm:styleLbl name="fgAcc0">
+    <dgm:scene3d>
+      <a:camera prst="orthographicFront"/>
+      <a:lightRig rig="threePt" dir="t"/>
+    </dgm:scene3d>
+    <dgm:sp3d/>
+    <dgm:txPr/>
+    <dgm:style>
+      <a:lnRef idx="2">
+        <a:scrgbClr r="0" g="0" b="0"/>
+      </a:lnRef>
+      <a:fillRef idx="1">
+        <a:scrgbClr r="0" g="0" b="0"/>
+      </a:fillRef>
+      <a:effectRef idx="0">
+        <a:scrgbClr r="0" g="0" b="0"/>
+      </a:effectRef>
+      <a:fontRef idx="minor"/>
+    </dgm:style>
+  </dgm:styleLbl>
+  <dgm:styleLbl name="fgAcc2">
+    <dgm:scene3d>
+      <a:camera prst="orthographicFront"/>
+      <a:lightRig rig="threePt" dir="t"/>
+    </dgm:scene3d>
+    <dgm:sp3d/>
+    <dgm:txPr/>
+    <dgm:style>
+      <a:lnRef idx="2">
+        <a:scrgbClr r="0" g="0" b="0"/>
+      </a:lnRef>
+      <a:fillRef idx="1">
+        <a:scrgbClr r="0" g="0" b="0"/>
+      </a:fillRef>
+      <a:effectRef idx="0">
+        <a:scrgbClr r="0" g="0" b="0"/>
+      </a:effectRef>
+      <a:fontRef idx="minor"/>
+    </dgm:style>
+  </dgm:styleLbl>
+  <dgm:styleLbl name="fgAcc3">
+    <dgm:scene3d>
+      <a:camera prst="orthographicFront"/>
+      <a:lightRig rig="threePt" dir="t"/>
+    </dgm:scene3d>
+    <dgm:sp3d/>
+    <dgm:txPr/>
+    <dgm:style>
+      <a:lnRef idx="2">
+        <a:scrgbClr r="0" g="0" b="0"/>
+      </a:lnRef>
+      <a:fillRef idx="1">
+        <a:scrgbClr r="0" g="0" b="0"/>
+      </a:fillRef>
+      <a:effectRef idx="0">
+        <a:scrgbClr r="0" g="0" b="0"/>
+      </a:effectRef>
+      <a:fontRef idx="minor"/>
+    </dgm:style>
+  </dgm:styleLbl>
+  <dgm:styleLbl name="fgAcc4">
+    <dgm:scene3d>
+      <a:camera prst="orthographicFront"/>
+      <a:lightRig rig="threePt" dir="t"/>
+    </dgm:scene3d>
+    <dgm:sp3d/>
+    <dgm:txPr/>
+    <dgm:style>
+      <a:lnRef idx="2">
+        <a:scrgbClr r="0" g="0" b="0"/>
+      </a:lnRef>
+      <a:fillRef idx="1">
+        <a:scrgbClr r="0" g="0" b="0"/>
+      </a:fillRef>
+      <a:effectRef idx="0">
+        <a:scrgbClr r="0" g="0" b="0"/>
+      </a:effectRef>
+      <a:fontRef idx="minor"/>
+    </dgm:style>
+  </dgm:styleLbl>
+  <dgm:styleLbl name="bgShp">
+    <dgm:scene3d>
+      <a:camera prst="orthographicFront"/>
+      <a:lightRig rig="threePt" dir="t"/>
+    </dgm:scene3d>
+    <dgm:sp3d/>
+    <dgm:txPr/>
+    <dgm:style>
+      <a:lnRef idx="0">
+        <a:scrgbClr r="0" g="0" b="0"/>
+      </a:lnRef>
+      <a:fillRef idx="1">
+        <a:scrgbClr r="0" g="0" b="0"/>
+      </a:fillRef>
+      <a:effectRef idx="0">
+        <a:scrgbClr r="0" g="0" b="0"/>
+      </a:effectRef>
+      <a:fontRef idx="minor"/>
+    </dgm:style>
+  </dgm:styleLbl>
+  <dgm:styleLbl name="dkBgShp">
+    <dgm:scene3d>
+      <a:camera prst="orthographicFront"/>
+      <a:lightRig rig="threePt" dir="t"/>
+    </dgm:scene3d>
+    <dgm:sp3d/>
+    <dgm:txPr/>
+    <dgm:style>
+      <a:lnRef idx="0">
+        <a:scrgbClr r="0" g="0" b="0"/>
+      </a:lnRef>
+      <a:fillRef idx="1">
+        <a:scrgbClr r="0" g="0" b="0"/>
+      </a:fillRef>
+      <a:effectRef idx="0">
+        <a:scrgbClr r="0" g="0" b="0"/>
+      </a:effectRef>
+      <a:fontRef idx="minor"/>
+    </dgm:style>
+  </dgm:styleLbl>
+  <dgm:styleLbl name="trBgShp">
+    <dgm:scene3d>
+      <a:camera prst="orthographicFront"/>
+      <a:lightRig rig="threePt" dir="t"/>
+    </dgm:scene3d>
+    <dgm:sp3d/>
+    <dgm:txPr/>
+    <dgm:style>
+      <a:lnRef idx="0">
+        <a:scrgbClr r="0" g="0" b="0"/>
+      </a:lnRef>
+      <a:fillRef idx="1">
+        <a:scrgbClr r="0" g="0" b="0"/>
+      </a:fillRef>
+      <a:effectRef idx="0">
+        <a:scrgbClr r="0" g="0" b="0"/>
+      </a:effectRef>
+      <a:fontRef idx="minor"/>
+    </dgm:style>
+  </dgm:styleLbl>
+  <dgm:styleLbl name="fgShp">
+    <dgm:scene3d>
+      <a:camera prst="orthographicFront"/>
+      <a:lightRig rig="threePt" dir="t"/>
+    </dgm:scene3d>
+    <dgm:sp3d/>
+    <dgm:txPr/>
+    <dgm:style>
+      <a:lnRef idx="2">
+        <a:scrgbClr r="0" g="0" b="0"/>
+      </a:lnRef>
+      <a:fillRef idx="1">
+        <a:scrgbClr r="0" g="0" b="0"/>
+      </a:fillRef>
+      <a:effectRef idx="0">
+        <a:scrgbClr r="0" g="0" b="0"/>
+      </a:effectRef>
+      <a:fontRef idx="minor"/>
+    </dgm:style>
+  </dgm:styleLbl>
+  <dgm:styleLbl name="revTx">
+    <dgm:scene3d>
+      <a:camera prst="orthographicFront"/>
+      <a:lightRig rig="threePt" dir="t"/>
+    </dgm:scene3d>
+    <dgm:sp3d/>
+    <dgm:txPr/>
+    <dgm:style>
+      <a:lnRef idx="0">
+        <a:scrgbClr r="0" g="0" b="0"/>
+      </a:lnRef>
+      <a:fillRef idx="0">
+        <a:scrgbClr r="0" g="0" b="0"/>
+      </a:fillRef>
+      <a:effectRef idx="0">
+        <a:scrgbClr r="0" g="0" b="0"/>
+      </a:effectRef>
+      <a:fontRef idx="minor"/>
+    </dgm:style>
+  </dgm:styleLbl>
+</dgm:styleDef>
+</file>
+
+<file path=ppt/diagrams/quickStyle2.xml><?xml version="1.0" encoding="utf-8"?>
+<dgm:styleDef xmlns:dgm="http://schemas.openxmlformats.org/drawingml/2006/diagram" xmlns:a="http://schemas.openxmlformats.org/drawingml/2006/main" uniqueId="urn:microsoft.com/office/officeart/2005/8/quickstyle/simple2">
+  <dgm:title val=""/>
+  <dgm:desc val=""/>
+  <dgm:catLst>
+    <dgm:cat type="simple" pri="10200"/>
+  </dgm:catLst>
+  <dgm:scene3d>
+    <a:camera prst="orthographicFront"/>
+    <a:lightRig rig="threePt" dir="t"/>
+  </dgm:scene3d>
+  <dgm:styleLbl name="node0">
+    <dgm:scene3d>
+      <a:camera prst="orthographicFront"/>
+      <a:lightRig rig="threePt" dir="t"/>
+    </dgm:scene3d>
+    <dgm:sp3d/>
+    <dgm:txPr/>
+    <dgm:style>
+      <a:lnRef idx="3">
+        <a:scrgbClr r="0" g="0" b="0"/>
+      </a:lnRef>
+      <a:fillRef idx="1">
+        <a:scrgbClr r="0" g="0" b="0"/>
+      </a:fillRef>
+      <a:effectRef idx="1">
+        <a:scrgbClr r="0" g="0" b="0"/>
+      </a:effectRef>
+      <a:fontRef idx="minor">
+        <a:schemeClr val="lt1"/>
+      </a:fontRef>
+    </dgm:style>
+  </dgm:styleLbl>
+  <dgm:styleLbl name="lnNode1">
+    <dgm:scene3d>
+      <a:camera prst="orthographicFront"/>
+      <a:lightRig rig="threePt" dir="t"/>
+    </dgm:scene3d>
+    <dgm:sp3d/>
+    <dgm:txPr/>
+    <dgm:style>
+      <a:lnRef idx="3">
+        <a:scrgbClr r="0" g="0" b="0"/>
+      </a:lnRef>
+      <a:fillRef idx="1">
+        <a:scrgbClr r="0" g="0" b="0"/>
+      </a:fillRef>
+      <a:effectRef idx="1">
+        <a:scrgbClr r="0" g="0" b="0"/>
+      </a:effectRef>
+      <a:fontRef idx="minor">
+        <a:schemeClr val="lt1"/>
+      </a:fontRef>
+    </dgm:style>
+  </dgm:styleLbl>
+  <dgm:styleLbl name="vennNode1">
+    <dgm:scene3d>
+      <a:camera prst="orthographicFront"/>
+      <a:lightRig rig="threePt" dir="t"/>
+    </dgm:scene3d>
+    <dgm:sp3d/>
+    <dgm:txPr/>
+    <dgm:style>
+      <a:lnRef idx="3">
+        <a:scrgbClr r="0" g="0" b="0"/>
+      </a:lnRef>
+      <a:fillRef idx="1">
+        <a:scrgbClr r="0" g="0" b="0"/>
+      </a:fillRef>
+      <a:effectRef idx="0">
+        <a:scrgbClr r="0" g="0" b="0"/>
+      </a:effectRef>
+      <a:fontRef idx="minor">
+        <a:schemeClr val="tx1"/>
+      </a:fontRef>
+    </dgm:style>
+  </dgm:styleLbl>
+  <dgm:styleLbl name="alignNode1">
+    <dgm:scene3d>
+      <a:camera prst="orthographicFront"/>
+      <a:lightRig rig="threePt" dir="t"/>
+    </dgm:scene3d>
+    <dgm:sp3d/>
+    <dgm:txPr/>
+    <dgm:style>
+      <a:lnRef idx="2">
+        <a:scrgbClr r="0" g="0" b="0"/>
+      </a:lnRef>
+      <a:fillRef idx="1">
+        <a:scrgbClr r="0" g="0" b="0"/>
+      </a:fillRef>
+      <a:effectRef idx="1">
+        <a:scrgbClr r="0" g="0" b="0"/>
+      </a:effectRef>
+      <a:fontRef idx="minor">
+        <a:schemeClr val="lt1"/>
+      </a:fontRef>
+    </dgm:style>
+  </dgm:styleLbl>
+  <dgm:styleLbl name="node1">
+    <dgm:scene3d>
+      <a:camera prst="orthographicFront"/>
+      <a:lightRig rig="threePt" dir="t"/>
+    </dgm:scene3d>
+    <dgm:sp3d/>
+    <dgm:txPr/>
+    <dgm:style>
+      <a:lnRef idx="3">
+        <a:scrgbClr r="0" g="0" b="0"/>
+      </a:lnRef>
+      <a:fillRef idx="1">
+        <a:scrgbClr r="0" g="0" b="0"/>
+      </a:fillRef>
+      <a:effectRef idx="1">
+        <a:scrgbClr r="0" g="0" b="0"/>
+      </a:effectRef>
+      <a:fontRef idx="minor">
+        <a:schemeClr val="lt1"/>
+      </a:fontRef>
+    </dgm:style>
+  </dgm:styleLbl>
+  <dgm:styleLbl name="node2">
+    <dgm:scene3d>
+      <a:camera prst="orthographicFront"/>
+      <a:lightRig rig="threePt" dir="t"/>
+    </dgm:scene3d>
+    <dgm:sp3d/>
+    <dgm:txPr/>
+    <dgm:style>
+      <a:lnRef idx="3">
+        <a:scrgbClr r="0" g="0" b="0"/>
+      </a:lnRef>
+      <a:fillRef idx="1">
+        <a:scrgbClr r="0" g="0" b="0"/>
+      </a:fillRef>
+      <a:effectRef idx="1">
+        <a:scrgbClr r="0" g="0" b="0"/>
+      </a:effectRef>
+      <a:fontRef idx="minor">
+        <a:schemeClr val="lt1"/>
+      </a:fontRef>
+    </dgm:style>
+  </dgm:styleLbl>
+  <dgm:styleLbl name="node3">
+    <dgm:scene3d>
+      <a:camera prst="orthographicFront"/>
+      <a:lightRig rig="threePt" dir="t"/>
+    </dgm:scene3d>
+    <dgm:sp3d/>
+    <dgm:txPr/>
+    <dgm:style>
+      <a:lnRef idx="3">
+        <a:scrgbClr r="0" g="0" b="0"/>
+      </a:lnRef>
+      <a:fillRef idx="1">
+        <a:scrgbClr r="0" g="0" b="0"/>
+      </a:fillRef>
+      <a:effectRef idx="1">
+        <a:scrgbClr r="0" g="0" b="0"/>
+      </a:effectRef>
+      <a:fontRef idx="minor">
+        <a:schemeClr val="lt1"/>
+      </a:fontRef>
+    </dgm:style>
+  </dgm:styleLbl>
+  <dgm:styleLbl name="node4">
+    <dgm:scene3d>
+      <a:camera prst="orthographicFront"/>
+      <a:lightRig rig="threePt" dir="t"/>
+    </dgm:scene3d>
+    <dgm:sp3d/>
+    <dgm:txPr/>
+    <dgm:style>
+      <a:lnRef idx="3">
+        <a:scrgbClr r="0" g="0" b="0"/>
+      </a:lnRef>
+      <a:fillRef idx="1">
+        <a:scrgbClr r="0" g="0" b="0"/>
+      </a:fillRef>
+      <a:effectRef idx="1">
+        <a:scrgbClr r="0" g="0" b="0"/>
+      </a:effectRef>
+      <a:fontRef idx="minor">
+        <a:schemeClr val="lt1"/>
+      </a:fontRef>
+    </dgm:style>
+  </dgm:styleLbl>
+  <dgm:styleLbl name="fgImgPlace1">
+    <dgm:scene3d>
+      <a:camera prst="orthographicFront"/>
+      <a:lightRig rig="threePt" dir="t"/>
+    </dgm:scene3d>
+    <dgm:sp3d/>
+    <dgm:txPr/>
+    <dgm:style>
+      <a:lnRef idx="3">
+        <a:scrgbClr r="0" g="0" b="0"/>
+      </a:lnRef>
+      <a:fillRef idx="1">
+        <a:scrgbClr r="0" g="0" b="0"/>
+      </a:fillRef>
+      <a:effectRef idx="1">
+        <a:scrgbClr r="0" g="0" b="0"/>
+      </a:effectRef>
+      <a:fontRef idx="minor"/>
+    </dgm:style>
+  </dgm:styleLbl>
+  <dgm:styleLbl name="alignImgPlace1">
+    <dgm:scene3d>
+      <a:camera prst="orthographicFront"/>
+      <a:lightRig rig="threePt" dir="t"/>
+    </dgm:scene3d>
+    <dgm:sp3d/>
+    <dgm:txPr/>
+    <dgm:style>
+      <a:lnRef idx="3">
+        <a:scrgbClr r="0" g="0" b="0"/>
+      </a:lnRef>
+      <a:fillRef idx="1">
+        <a:scrgbClr r="0" g="0" b="0"/>
+      </a:fillRef>
+      <a:effectRef idx="1">
+        <a:scrgbClr r="0" g="0" b="0"/>
+      </a:effectRef>
+      <a:fontRef idx="minor"/>
+    </dgm:style>
+  </dgm:styleLbl>
+  <dgm:styleLbl name="bgImgPlace1">
+    <dgm:scene3d>
+      <a:camera prst="orthographicFront"/>
+      <a:lightRig rig="threePt" dir="t"/>
+    </dgm:scene3d>
+    <dgm:sp3d/>
+    <dgm:txPr/>
+    <dgm:style>
+      <a:lnRef idx="3">
+        <a:scrgbClr r="0" g="0" b="0"/>
+      </a:lnRef>
+      <a:fillRef idx="1">
+        <a:scrgbClr r="0" g="0" b="0"/>
+      </a:fillRef>
+      <a:effectRef idx="1">
+        <a:scrgbClr r="0" g="0" b="0"/>
+      </a:effectRef>
+      <a:fontRef idx="minor"/>
+    </dgm:style>
+  </dgm:styleLbl>
+  <dgm:styleLbl name="sibTrans2D1">
+    <dgm:scene3d>
+      <a:camera prst="orthographicFront"/>
+      <a:lightRig rig="threePt" dir="t"/>
+    </dgm:scene3d>
+    <dgm:sp3d/>
+    <dgm:txPr/>
+    <dgm:style>
+      <a:lnRef idx="0">
+        <a:scrgbClr r="0" g="0" b="0"/>
+      </a:lnRef>
+      <a:fillRef idx="1">
+        <a:scrgbClr r="0" g="0" b="0"/>
+      </a:fillRef>
+      <a:effectRef idx="1">
+        <a:scrgbClr r="0" g="0" b="0"/>
+      </a:effectRef>
+      <a:fontRef idx="minor">
+        <a:schemeClr val="lt1"/>
+      </a:fontRef>
+    </dgm:style>
+  </dgm:styleLbl>
+  <dgm:styleLbl name="fgSibTrans2D1">
+    <dgm:scene3d>
+      <a:camera prst="orthographicFront"/>
+      <a:lightRig rig="threePt" dir="t"/>
+    </dgm:scene3d>
+    <dgm:sp3d/>
+    <dgm:txPr/>
+    <dgm:style>
+      <a:lnRef idx="0">
+        <a:scrgbClr r="0" g="0" b="0"/>
+      </a:lnRef>
+      <a:fillRef idx="1">
+        <a:scrgbClr r="0" g="0" b="0"/>
+      </a:fillRef>
+      <a:effectRef idx="1">
+        <a:scrgbClr r="0" g="0" b="0"/>
+      </a:effectRef>
+      <a:fontRef idx="minor">
+        <a:schemeClr val="lt1"/>
+      </a:fontRef>
+    </dgm:style>
+  </dgm:styleLbl>
+  <dgm:styleLbl name="bgSibTrans2D1">
+    <dgm:scene3d>
+      <a:camera prst="orthographicFront"/>
+      <a:lightRig rig="threePt" dir="t"/>
+    </dgm:scene3d>
+    <dgm:sp3d/>
+    <dgm:txPr/>
+    <dgm:style>
+      <a:lnRef idx="0">
+        <a:scrgbClr r="0" g="0" b="0"/>
+      </a:lnRef>
+      <a:fillRef idx="1">
+        <a:scrgbClr r="0" g="0" b="0"/>
+      </a:fillRef>
+      <a:effectRef idx="1">
+        <a:scrgbClr r="0" g="0" b="0"/>
+      </a:effectRef>
+      <a:fontRef idx="minor">
+        <a:schemeClr val="lt1"/>
+      </a:fontRef>
+    </dgm:style>
+  </dgm:styleLbl>
+  <dgm:styleLbl name="sibTrans1D1">
+    <dgm:scene3d>
+      <a:camera prst="orthographicFront"/>
+      <a:lightRig rig="threePt" dir="t"/>
+    </dgm:scene3d>
+    <dgm:sp3d/>
+    <dgm:txPr/>
+    <dgm:style>
+      <a:lnRef idx="1">
+        <a:scrgbClr r="0" g="0" b="0"/>
+      </a:lnRef>
+      <a:fillRef idx="0">
+        <a:scrgbClr r="0" g="0" b="0"/>
+      </a:fillRef>
+      <a:effectRef idx="0">
+        <a:scrgbClr r="0" g="0" b="0"/>
+      </a:effectRef>
+      <a:fontRef idx="minor"/>
+    </dgm:style>
+  </dgm:styleLbl>
+  <dgm:styleLbl name="callout">
+    <dgm:scene3d>
+      <a:camera prst="orthographicFront"/>
+      <a:lightRig rig="threePt" dir="t"/>
+    </dgm:scene3d>
+    <dgm:sp3d/>
+    <dgm:txPr/>
+    <dgm:style>
+      <a:lnRef idx="2">
+        <a:scrgbClr r="0" g="0" b="0"/>
+      </a:lnRef>
+      <a:fillRef idx="1">
+        <a:scrgbClr r="0" g="0" b="0"/>
+      </a:fillRef>
+      <a:effectRef idx="1">
+        <a:scrgbClr r="0" g="0" b="0"/>
+      </a:effectRef>
+      <a:fontRef idx="minor"/>
+    </dgm:style>
+  </dgm:styleLbl>
+  <dgm:styleLbl name="asst0">
+    <dgm:scene3d>
+      <a:camera prst="orthographicFront"/>
+      <a:lightRig rig="threePt" dir="t"/>
+    </dgm:scene3d>
+    <dgm:sp3d/>
+    <dgm:txPr/>
+    <dgm:style>
+      <a:lnRef idx="3">
+        <a:scrgbClr r="0" g="0" b="0"/>
+      </a:lnRef>
+      <a:fillRef idx="1">
+        <a:scrgbClr r="0" g="0" b="0"/>
+      </a:fillRef>
+      <a:effectRef idx="1">
+        <a:scrgbClr r="0" g="0" b="0"/>
+      </a:effectRef>
+      <a:fontRef idx="minor">
+        <a:schemeClr val="lt1"/>
+      </a:fontRef>
+    </dgm:style>
+  </dgm:styleLbl>
+  <dgm:styleLbl name="asst1">
+    <dgm:scene3d>
+      <a:camera prst="orthographicFront"/>
+      <a:lightRig rig="threePt" dir="t"/>
+    </dgm:scene3d>
+    <dgm:sp3d/>
+    <dgm:txPr/>
+    <dgm:style>
+      <a:lnRef idx="3">
+        <a:scrgbClr r="0" g="0" b="0"/>
+      </a:lnRef>
+      <a:fillRef idx="1">
+        <a:scrgbClr r="0" g="0" b="0"/>
+      </a:fillRef>
+      <a:effectRef idx="1">
+        <a:scrgbClr r="0" g="0" b="0"/>
+      </a:effectRef>
+      <a:fontRef idx="minor">
+        <a:schemeClr val="lt1"/>
+      </a:fontRef>
+    </dgm:style>
+  </dgm:styleLbl>
+  <dgm:styleLbl name="asst2">
+    <dgm:scene3d>
+      <a:camera prst="orthographicFront"/>
+      <a:lightRig rig="threePt" dir="t"/>
+    </dgm:scene3d>
+    <dgm:sp3d/>
+    <dgm:txPr/>
+    <dgm:style>
+      <a:lnRef idx="3">
+        <a:scrgbClr r="0" g="0" b="0"/>
+      </a:lnRef>
+      <a:fillRef idx="1">
+        <a:scrgbClr r="0" g="0" b="0"/>
+      </a:fillRef>
+      <a:effectRef idx="1">
+        <a:scrgbClr r="0" g="0" b="0"/>
+      </a:effectRef>
+      <a:fontRef idx="minor">
+        <a:schemeClr val="lt1"/>
+      </a:fontRef>
+    </dgm:style>
+  </dgm:styleLbl>
+  <dgm:styleLbl name="asst3">
+    <dgm:scene3d>
+      <a:camera prst="orthographicFront"/>
+      <a:lightRig rig="threePt" dir="t"/>
+    </dgm:scene3d>
+    <dgm:sp3d/>
+    <dgm:txPr/>
+    <dgm:style>
+      <a:lnRef idx="3">
+        <a:scrgbClr r="0" g="0" b="0"/>
+      </a:lnRef>
+      <a:fillRef idx="1">
+        <a:scrgbClr r="0" g="0" b="0"/>
+      </a:fillRef>
+      <a:effectRef idx="1">
+        <a:scrgbClr r="0" g="0" b="0"/>
+      </a:effectRef>
+      <a:fontRef idx="minor">
+        <a:schemeClr val="lt1"/>
+      </a:fontRef>
+    </dgm:style>
+  </dgm:styleLbl>
+  <dgm:styleLbl name="asst4">
+    <dgm:scene3d>
+      <a:camera prst="orthographicFront"/>
+      <a:lightRig rig="threePt" dir="t"/>
+    </dgm:scene3d>
+    <dgm:sp3d/>
+    <dgm:txPr/>
+    <dgm:style>
+      <a:lnRef idx="3">
+        <a:scrgbClr r="0" g="0" b="0"/>
+      </a:lnRef>
+      <a:fillRef idx="1">
+        <a:scrgbClr r="0" g="0" b="0"/>
+      </a:fillRef>
+      <a:effectRef idx="1">
+        <a:scrgbClr r="0" g="0" b="0"/>
+      </a:effectRef>
+      <a:fontRef idx="minor">
+        <a:schemeClr val="lt1"/>
+      </a:fontRef>
+    </dgm:style>
+  </dgm:styleLbl>
+  <dgm:styleLbl name="parChTrans2D1">
+    <dgm:scene3d>
+      <a:camera prst="orthographicFront"/>
+      <a:lightRig rig="threePt" dir="t"/>
+    </dgm:scene3d>
+    <dgm:sp3d/>
+    <dgm:txPr/>
+    <dgm:style>
+      <a:lnRef idx="3">
+        <a:scrgbClr r="0" g="0" b="0"/>
+      </a:lnRef>
+      <a:fillRef idx="1">
+        <a:scrgbClr r="0" g="0" b="0"/>
+      </a:fillRef>
+      <a:effectRef idx="1">
+        <a:scrgbClr r="0" g="0" b="0"/>
+      </a:effectRef>
+      <a:fontRef idx="minor">
+        <a:schemeClr val="lt1"/>
+      </a:fontRef>
+    </dgm:style>
+  </dgm:styleLbl>
+  <dgm:styleLbl name="parChTrans2D2">
+    <dgm:scene3d>
+      <a:camera prst="orthographicFront"/>
+      <a:lightRig rig="threePt" dir="t"/>
+    </dgm:scene3d>
+    <dgm:sp3d/>
+    <dgm:txPr/>
+    <dgm:style>
+      <a:lnRef idx="3">
+        <a:scrgbClr r="0" g="0" b="0"/>
+      </a:lnRef>
+      <a:fillRef idx="1">
+        <a:scrgbClr r="0" g="0" b="0"/>
+      </a:fillRef>
+      <a:effectRef idx="1">
+        <a:scrgbClr r="0" g="0" b="0"/>
+      </a:effectRef>
+      <a:fontRef idx="minor">
+        <a:schemeClr val="lt1"/>
+      </a:fontRef>
+    </dgm:style>
+  </dgm:styleLbl>
+  <dgm:styleLbl name="parChTrans2D3">
+    <dgm:scene3d>
+      <a:camera prst="orthographicFront"/>
+      <a:lightRig rig="threePt" dir="t"/>
+    </dgm:scene3d>
+    <dgm:sp3d/>
+    <dgm:txPr/>
+    <dgm:style>
+      <a:lnRef idx="3">
+        <a:scrgbClr r="0" g="0" b="0"/>
+      </a:lnRef>
+      <a:fillRef idx="1">
+        <a:scrgbClr r="0" g="0" b="0"/>
+      </a:fillRef>
+      <a:effectRef idx="1">
+        <a:scrgbClr r="0" g="0" b="0"/>
+      </a:effectRef>
+      <a:fontRef idx="minor">
+        <a:schemeClr val="lt1"/>
+      </a:fontRef>
+    </dgm:style>
+  </dgm:styleLbl>
+  <dgm:styleLbl name="parChTrans2D4">
+    <dgm:scene3d>
+      <a:camera prst="orthographicFront"/>
+      <a:lightRig rig="threePt" dir="t"/>
+    </dgm:scene3d>
+    <dgm:sp3d/>
+    <dgm:txPr/>
+    <dgm:style>
+      <a:lnRef idx="3">
+        <a:scrgbClr r="0" g="0" b="0"/>
+      </a:lnRef>
+      <a:fillRef idx="1">
+        <a:scrgbClr r="0" g="0" b="0"/>
+      </a:fillRef>
+      <a:effectRef idx="1">
+        <a:scrgbClr r="0" g="0" b="0"/>
+      </a:effectRef>
+      <a:fontRef idx="minor">
+        <a:schemeClr val="lt1"/>
+      </a:fontRef>
+    </dgm:style>
+  </dgm:styleLbl>
+  <dgm:styleLbl name="parChTrans1D1">
+    <dgm:scene3d>
+      <a:camera prst="orthographicFront"/>
+      <a:lightRig rig="threePt" dir="t"/>
+    </dgm:scene3d>
+    <dgm:sp3d/>
+    <dgm:txPr/>
+    <dgm:style>
+      <a:lnRef idx="2">
+        <a:scrgbClr r="0" g="0" b="0"/>
+      </a:lnRef>
+      <a:fillRef idx="0">
+        <a:scrgbClr r="0" g="0" b="0"/>
+      </a:fillRef>
+      <a:effectRef idx="0">
+        <a:scrgbClr r="0" g="0" b="0"/>
+      </a:effectRef>
+      <a:fontRef idx="minor"/>
+    </dgm:style>
+  </dgm:styleLbl>
+  <dgm:styleLbl name="parChTrans1D2">
+    <dgm:scene3d>
+      <a:camera prst="orthographicFront"/>
+      <a:lightRig rig="threePt" dir="t"/>
+    </dgm:scene3d>
+    <dgm:sp3d/>
+    <dgm:txPr/>
+    <dgm:style>
+      <a:lnRef idx="2">
+        <a:scrgbClr r="0" g="0" b="0"/>
+      </a:lnRef>
+      <a:fillRef idx="0">
+        <a:scrgbClr r="0" g="0" b="0"/>
+      </a:fillRef>
+      <a:effectRef idx="0">
+        <a:scrgbClr r="0" g="0" b="0"/>
+      </a:effectRef>
+      <a:fontRef idx="minor"/>
+    </dgm:style>
+  </dgm:styleLbl>
+  <dgm:styleLbl name="parChTrans1D3">
+    <dgm:scene3d>
+      <a:camera prst="orthographicFront"/>
+      <a:lightRig rig="threePt" dir="t"/>
+    </dgm:scene3d>
+    <dgm:sp3d/>
+    <dgm:txPr/>
+    <dgm:style>
+      <a:lnRef idx="2">
+        <a:scrgbClr r="0" g="0" b="0"/>
+      </a:lnRef>
+      <a:fillRef idx="0">
+        <a:scrgbClr r="0" g="0" b="0"/>
+      </a:fillRef>
+      <a:effectRef idx="0">
+        <a:scrgbClr r="0" g="0" b="0"/>
+      </a:effectRef>
+      <a:fontRef idx="minor"/>
+    </dgm:style>
+  </dgm:styleLbl>
+  <dgm:styleLbl name="parChTrans1D4">
+    <dgm:scene3d>
+      <a:camera prst="orthographicFront"/>
+      <a:lightRig rig="threePt" dir="t"/>
+    </dgm:scene3d>
+    <dgm:sp3d/>
+    <dgm:txPr/>
+    <dgm:style>
+      <a:lnRef idx="2">
+        <a:scrgbClr r="0" g="0" b="0"/>
+      </a:lnRef>
+      <a:fillRef idx="0">
+        <a:scrgbClr r="0" g="0" b="0"/>
+      </a:fillRef>
+      <a:effectRef idx="0">
+        <a:scrgbClr r="0" g="0" b="0"/>
+      </a:effectRef>
+      <a:fontRef idx="minor"/>
+    </dgm:style>
+  </dgm:styleLbl>
+  <dgm:styleLbl name="fgAcc1">
+    <dgm:scene3d>
+      <a:camera prst="orthographicFront"/>
+      <a:lightRig rig="threePt" dir="t"/>
+    </dgm:scene3d>
+    <dgm:sp3d/>
+    <dgm:txPr/>
+    <dgm:style>
+      <a:lnRef idx="2">
+        <a:scrgbClr r="0" g="0" b="0"/>
+      </a:lnRef>
+      <a:fillRef idx="1">
+        <a:scrgbClr r="0" g="0" b="0"/>
+      </a:fillRef>
+      <a:effectRef idx="0">
+        <a:scrgbClr r="0" g="0" b="0"/>
+      </a:effectRef>
+      <a:fontRef idx="minor"/>
+    </dgm:style>
+  </dgm:styleLbl>
+  <dgm:styleLbl name="conFgAcc1">
+    <dgm:scene3d>
+      <a:camera prst="orthographicFront"/>
+      <a:lightRig rig="threePt" dir="t"/>
+    </dgm:scene3d>
+    <dgm:sp3d/>
+    <dgm:txPr/>
+    <dgm:style>
+      <a:lnRef idx="2">
+        <a:scrgbClr r="0" g="0" b="0"/>
+      </a:lnRef>
+      <a:fillRef idx="1">
+        <a:scrgbClr r="0" g="0" b="0"/>
+      </a:fillRef>
+      <a:effectRef idx="0">
+        <a:scrgbClr r="0" g="0" b="0"/>
+      </a:effectRef>
+      <a:fontRef idx="minor"/>
+    </dgm:style>
+  </dgm:styleLbl>
+  <dgm:styleLbl name="alignAcc1">
+    <dgm:scene3d>
+      <a:camera prst="orthographicFront"/>
+      <a:lightRig rig="threePt" dir="t"/>
+    </dgm:scene3d>
+    <dgm:sp3d/>
+    <dgm:txPr/>
+    <dgm:style>
+      <a:lnRef idx="2">
+        <a:scrgbClr r="0" g="0" b="0"/>
+      </a:lnRef>
+      <a:fillRef idx="1">
+        <a:scrgbClr r="0" g="0" b="0"/>
+      </a:fillRef>
+      <a:effectRef idx="0">
+        <a:scrgbClr r="0" g="0" b="0"/>
+      </a:effectRef>
+      <a:fontRef idx="minor"/>
+    </dgm:style>
+  </dgm:styleLbl>
+  <dgm:styleLbl name="trAlignAcc1">
+    <dgm:scene3d>
+      <a:camera prst="orthographicFront"/>
+      <a:lightRig rig="threePt" dir="t"/>
+    </dgm:scene3d>
+    <dgm:sp3d/>
+    <dgm:txPr/>
+    <dgm:style>
+      <a:lnRef idx="1">
+        <a:scrgbClr r="0" g="0" b="0"/>
+      </a:lnRef>
+      <a:fillRef idx="1">
+        <a:scrgbClr r="0" g="0" b="0"/>
+      </a:fillRef>
+      <a:effectRef idx="0">
+        <a:scrgbClr r="0" g="0" b="0"/>
+      </a:effectRef>
+      <a:fontRef idx="minor"/>
+    </dgm:style>
+  </dgm:styleLbl>
+  <dgm:styleLbl name="bgAcc1">
+    <dgm:scene3d>
+      <a:camera prst="orthographicFront"/>
+      <a:lightRig rig="threePt" dir="t"/>
+    </dgm:scene3d>
+    <dgm:sp3d/>
+    <dgm:txPr/>
+    <dgm:style>
+      <a:lnRef idx="2">
+        <a:scrgbClr r="0" g="0" b="0"/>
+      </a:lnRef>
+      <a:fillRef idx="1">
+        <a:scrgbClr r="0" g="0" b="0"/>
+      </a:fillRef>
+      <a:effectRef idx="0">
+        <a:scrgbClr r="0" g="0" b="0"/>
+      </a:effectRef>
+      <a:fontRef idx="minor"/>
+    </dgm:style>
+  </dgm:styleLbl>
+  <dgm:styleLbl name="solidFgAcc1">
+    <dgm:scene3d>
+      <a:camera prst="orthographicFront"/>
+      <a:lightRig rig="threePt" dir="t"/>
+    </dgm:scene3d>
+    <dgm:sp3d/>
+    <dgm:txPr/>
+    <dgm:style>
+      <a:lnRef idx="2">
+        <a:scrgbClr r="0" g="0" b="0"/>
+      </a:lnRef>
+      <a:fillRef idx="1">
+        <a:scrgbClr r="0" g="0" b="0"/>
+      </a:fillRef>
+      <a:effectRef idx="0">
+        <a:scrgbClr r="0" g="0" b="0"/>
+      </a:effectRef>
+      <a:fontRef idx="minor"/>
+    </dgm:style>
+  </dgm:styleLbl>
+  <dgm:styleLbl name="solidAlignAcc1">
+    <dgm:scene3d>
+      <a:camera prst="orthographicFront"/>
+      <a:lightRig rig="threePt" dir="t"/>
+    </dgm:scene3d>
+    <dgm:sp3d/>
+    <dgm:txPr/>
+    <dgm:style>
+      <a:lnRef idx="2">
+        <a:scrgbClr r="0" g="0" b="0"/>
+      </a:lnRef>
+      <a:fillRef idx="1">
+        <a:scrgbClr r="0" g="0" b="0"/>
+      </a:fillRef>
+      <a:effectRef idx="0">
+        <a:scrgbClr r="0" g="0" b="0"/>
+      </a:effectRef>
+      <a:fontRef idx="minor"/>
+    </dgm:style>
+  </dgm:styleLbl>
+  <dgm:styleLbl name="solidBgAcc1">
+    <dgm:scene3d>
+      <a:camera prst="orthographicFront"/>
+      <a:lightRig rig="threePt" dir="t"/>
+    </dgm:scene3d>
+    <dgm:sp3d/>
+    <dgm:txPr/>
+    <dgm:style>
+      <a:lnRef idx="2">
+        <a:scrgbClr r="0" g="0" b="0"/>
+      </a:lnRef>
+      <a:fillRef idx="1">
+        <a:scrgbClr r="0" g="0" b="0"/>
+      </a:fillRef>
+      <a:effectRef idx="0">
+        <a:scrgbClr r="0" g="0" b="0"/>
+      </a:effectRef>
+      <a:fontRef idx="minor"/>
+    </dgm:style>
+  </dgm:styleLbl>
+  <dgm:styleLbl name="fgAccFollowNode1">
+    <dgm:scene3d>
+      <a:camera prst="orthographicFront"/>
+      <a:lightRig rig="threePt" dir="t"/>
+    </dgm:scene3d>
+    <dgm:sp3d/>
+    <dgm:txPr/>
+    <dgm:style>
+      <a:lnRef idx="2">
+        <a:scrgbClr r="0" g="0" b="0"/>
+      </a:lnRef>
+      <a:fillRef idx="1">
+        <a:scrgbClr r="0" g="0" b="0"/>
+      </a:fillRef>
+      <a:effectRef idx="0">
+        <a:scrgbClr r="0" g="0" b="0"/>
+      </a:effectRef>
+      <a:fontRef idx="minor"/>
+    </dgm:style>
+  </dgm:styleLbl>
+  <dgm:styleLbl name="alignAccFollowNode1">
+    <dgm:scene3d>
+      <a:camera prst="orthographicFront"/>
+      <a:lightRig rig="threePt" dir="t"/>
+    </dgm:scene3d>
+    <dgm:sp3d/>
+    <dgm:txPr/>
+    <dgm:style>
+      <a:lnRef idx="2">
+        <a:scrgbClr r="0" g="0" b="0"/>
+      </a:lnRef>
+      <a:fillRef idx="1">
+        <a:scrgbClr r="0" g="0" b="0"/>
+      </a:fillRef>
+      <a:effectRef idx="0">
+        <a:scrgbClr r="0" g="0" b="0"/>
+      </a:effectRef>
+      <a:fontRef idx="minor"/>
+    </dgm:style>
+  </dgm:styleLbl>
+  <dgm:styleLbl name="bgAccFollowNode1">
+    <dgm:scene3d>
+      <a:camera prst="orthographicFront"/>
+      <a:lightRig rig="threePt" dir="t"/>
+    </dgm:scene3d>
+    <dgm:sp3d/>
+    <dgm:txPr/>
+    <dgm:style>
+      <a:lnRef idx="2">
+        <a:scrgbClr r="0" g="0" b="0"/>
+      </a:lnRef>
+      <a:fillRef idx="1">
+        <a:scrgbClr r="0" g="0" b="0"/>
+      </a:fillRef>
+      <a:effectRef idx="0">
+        <a:scrgbClr r="0" g="0" b="0"/>
+      </a:effectRef>
+      <a:fontRef idx="minor"/>
+    </dgm:style>
+  </dgm:styleLbl>
+  <dgm:styleLbl name="fgAcc0">
+    <dgm:scene3d>
+      <a:camera prst="orthographicFront"/>
+      <a:lightRig rig="threePt" dir="t"/>
+    </dgm:scene3d>
+    <dgm:sp3d/>
+    <dgm:txPr/>
+    <dgm:style>
+      <a:lnRef idx="2">
+        <a:scrgbClr r="0" g="0" b="0"/>
+      </a:lnRef>
+      <a:fillRef idx="1">
+        <a:scrgbClr r="0" g="0" b="0"/>
+      </a:fillRef>
+      <a:effectRef idx="0">
+        <a:scrgbClr r="0" g="0" b="0"/>
+      </a:effectRef>
+      <a:fontRef idx="minor"/>
+    </dgm:style>
+  </dgm:styleLbl>
+  <dgm:styleLbl name="fgAcc2">
+    <dgm:scene3d>
+      <a:camera prst="orthographicFront"/>
+      <a:lightRig rig="threePt" dir="t"/>
+    </dgm:scene3d>
+    <dgm:sp3d/>
+    <dgm:txPr/>
+    <dgm:style>
+      <a:lnRef idx="2">
+        <a:scrgbClr r="0" g="0" b="0"/>
+      </a:lnRef>
+      <a:fillRef idx="1">
+        <a:scrgbClr r="0" g="0" b="0"/>
+      </a:fillRef>
+      <a:effectRef idx="0">
+        <a:scrgbClr r="0" g="0" b="0"/>
+      </a:effectRef>
+      <a:fontRef idx="minor"/>
+    </dgm:style>
+  </dgm:styleLbl>
+  <dgm:styleLbl name="fgAcc3">
+    <dgm:scene3d>
+      <a:camera prst="orthographicFront"/>
+      <a:lightRig rig="threePt" dir="t"/>
+    </dgm:scene3d>
+    <dgm:sp3d/>
+    <dgm:txPr/>
+    <dgm:style>
+      <a:lnRef idx="2">
+        <a:scrgbClr r="0" g="0" b="0"/>
+      </a:lnRef>
+      <a:fillRef idx="1">
+        <a:scrgbClr r="0" g="0" b="0"/>
+      </a:fillRef>
+      <a:effectRef idx="0">
+        <a:scrgbClr r="0" g="0" b="0"/>
+      </a:effectRef>
+      <a:fontRef idx="minor"/>
+    </dgm:style>
+  </dgm:styleLbl>
+  <dgm:styleLbl name="fgAcc4">
+    <dgm:scene3d>
+      <a:camera prst="orthographicFront"/>
+      <a:lightRig rig="threePt" dir="t"/>
+    </dgm:scene3d>
+    <dgm:sp3d/>
+    <dgm:txPr/>
+    <dgm:style>
+      <a:lnRef idx="2">
+        <a:scrgbClr r="0" g="0" b="0"/>
+      </a:lnRef>
+      <a:fillRef idx="1">
+        <a:scrgbClr r="0" g="0" b="0"/>
+      </a:fillRef>
+      <a:effectRef idx="0">
+        <a:scrgbClr r="0" g="0" b="0"/>
+      </a:effectRef>
+      <a:fontRef idx="minor"/>
+    </dgm:style>
+  </dgm:styleLbl>
+  <dgm:styleLbl name="bgShp">
+    <dgm:scene3d>
+      <a:camera prst="orthographicFront"/>
+      <a:lightRig rig="threePt" dir="t"/>
+    </dgm:scene3d>
+    <dgm:sp3d/>
+    <dgm:txPr/>
+    <dgm:style>
+      <a:lnRef idx="0">
+        <a:scrgbClr r="0" g="0" b="0"/>
+      </a:lnRef>
+      <a:fillRef idx="1">
+        <a:scrgbClr r="0" g="0" b="0"/>
+      </a:fillRef>
+      <a:effectRef idx="0">
+        <a:scrgbClr r="0" g="0" b="0"/>
+      </a:effectRef>
+      <a:fontRef idx="minor"/>
+    </dgm:style>
+  </dgm:styleLbl>
+  <dgm:styleLbl name="dkBgShp">
+    <dgm:scene3d>
+      <a:camera prst="orthographicFront"/>
+      <a:lightRig rig="threePt" dir="t"/>
+    </dgm:scene3d>
+    <dgm:sp3d/>
+    <dgm:txPr/>
+    <dgm:style>
+      <a:lnRef idx="0">
+        <a:scrgbClr r="0" g="0" b="0"/>
+      </a:lnRef>
+      <a:fillRef idx="1">
+        <a:scrgbClr r="0" g="0" b="0"/>
+      </a:fillRef>
+      <a:effectRef idx="0">
+        <a:scrgbClr r="0" g="0" b="0"/>
+      </a:effectRef>
+      <a:fontRef idx="minor"/>
+    </dgm:style>
+  </dgm:styleLbl>
+  <dgm:styleLbl name="trBgShp">
+    <dgm:scene3d>
+      <a:camera prst="orthographicFront"/>
+      <a:lightRig rig="threePt" dir="t"/>
+    </dgm:scene3d>
+    <dgm:sp3d/>
+    <dgm:txPr/>
+    <dgm:style>
+      <a:lnRef idx="0">
+        <a:scrgbClr r="0" g="0" b="0"/>
+      </a:lnRef>
+      <a:fillRef idx="1">
+        <a:scrgbClr r="0" g="0" b="0"/>
+      </a:fillRef>
+      <a:effectRef idx="0">
+        <a:scrgbClr r="0" g="0" b="0"/>
+      </a:effectRef>
+      <a:fontRef idx="minor"/>
+    </dgm:style>
+  </dgm:styleLbl>
+  <dgm:styleLbl name="fgShp">
+    <dgm:scene3d>
+      <a:camera prst="orthographicFront"/>
+      <a:lightRig rig="threePt" dir="t"/>
+    </dgm:scene3d>
+    <dgm:sp3d/>
+    <dgm:txPr/>
+    <dgm:style>
+      <a:lnRef idx="3">
+        <a:scrgbClr r="0" g="0" b="0"/>
+      </a:lnRef>
+      <a:fillRef idx="1">
+        <a:scrgbClr r="0" g="0" b="0"/>
+      </a:fillRef>
+      <a:effectRef idx="1">
+        <a:scrgbClr r="0" g="0" b="0"/>
+      </a:effectRef>
+      <a:fontRef idx="minor"/>
+    </dgm:style>
+  </dgm:styleLbl>
+  <dgm:styleLbl name="revTx">
+    <dgm:scene3d>
+      <a:camera prst="orthographicFront"/>
+      <a:lightRig rig="threePt" dir="t"/>
+    </dgm:scene3d>
+    <dgm:sp3d/>
+    <dgm:txPr/>
+    <dgm:style>
+      <a:lnRef idx="0">
+        <a:scrgbClr r="0" g="0" b="0"/>
+      </a:lnRef>
+      <a:fillRef idx="0">
+        <a:scrgbClr r="0" g="0" b="0"/>
+      </a:fillRef>
+      <a:effectRef idx="0">
+        <a:scrgbClr r="0" g="0" b="0"/>
+      </a:effectRef>
+      <a:fontRef idx="minor"/>
+    </dgm:style>
+  </dgm:styleLbl>
+</dgm:styleDef>
+</file>
+
 <file path=ppt/slideLayouts/slideLayout1.xml><?xml version="1.0" encoding="utf-8"?>
 <p:sldLayout xmlns:a="http://schemas.openxmlformats.org/drawingml/2006/main" xmlns:r="http://schemas.openxmlformats.org/officeDocument/2006/relationships" xmlns:p="http://schemas.openxmlformats.org/presentationml/2006/main" showMasterSp="0" type="title" preserve="1">
   <p:cSld name="Титульный слайд">
@@ -287,7 +6493,7 @@
           <a:p>
             <a:fld id="{6D5ECD92-1D4B-4C92-88C6-1BDE7FDE9838}" type="datetimeFigureOut">
               <a:rPr lang="ru-RU" smtClean="0"/>
-              <a:t>01.04.2026</a:t>
+              <a:t>02.04.2026</a:t>
             </a:fld>
             <a:endParaRPr lang="ru-RU"/>
           </a:p>
@@ -522,7 +6728,7 @@
           <a:p>
             <a:fld id="{6D5ECD92-1D4B-4C92-88C6-1BDE7FDE9838}" type="datetimeFigureOut">
               <a:rPr lang="ru-RU" smtClean="0"/>
-              <a:t>01.04.2026</a:t>
+              <a:t>02.04.2026</a:t>
             </a:fld>
             <a:endParaRPr lang="ru-RU"/>
           </a:p>
@@ -702,7 +6908,7 @@
           <a:p>
             <a:fld id="{6D5ECD92-1D4B-4C92-88C6-1BDE7FDE9838}" type="datetimeFigureOut">
               <a:rPr lang="ru-RU" smtClean="0"/>
-              <a:t>01.04.2026</a:t>
+              <a:t>02.04.2026</a:t>
             </a:fld>
             <a:endParaRPr lang="ru-RU"/>
           </a:p>
@@ -872,7 +7078,7 @@
           <a:p>
             <a:fld id="{6D5ECD92-1D4B-4C92-88C6-1BDE7FDE9838}" type="datetimeFigureOut">
               <a:rPr lang="ru-RU" smtClean="0"/>
-              <a:t>01.04.2026</a:t>
+              <a:t>02.04.2026</a:t>
             </a:fld>
             <a:endParaRPr lang="ru-RU"/>
           </a:p>
@@ -1126,7 +7332,7 @@
           <a:p>
             <a:fld id="{6D5ECD92-1D4B-4C92-88C6-1BDE7FDE9838}" type="datetimeFigureOut">
               <a:rPr lang="ru-RU" smtClean="0"/>
-              <a:t>01.04.2026</a:t>
+              <a:t>02.04.2026</a:t>
             </a:fld>
             <a:endParaRPr lang="ru-RU"/>
           </a:p>
@@ -1452,7 +7658,7 @@
           <a:p>
             <a:fld id="{6D5ECD92-1D4B-4C92-88C6-1BDE7FDE9838}" type="datetimeFigureOut">
               <a:rPr lang="ru-RU" smtClean="0"/>
-              <a:t>01.04.2026</a:t>
+              <a:t>02.04.2026</a:t>
             </a:fld>
             <a:endParaRPr lang="ru-RU"/>
           </a:p>
@@ -1903,7 +8109,7 @@
           <a:p>
             <a:fld id="{6D5ECD92-1D4B-4C92-88C6-1BDE7FDE9838}" type="datetimeFigureOut">
               <a:rPr lang="ru-RU" smtClean="0"/>
-              <a:t>01.04.2026</a:t>
+              <a:t>02.04.2026</a:t>
             </a:fld>
             <a:endParaRPr lang="ru-RU"/>
           </a:p>
@@ -2021,7 +8227,7 @@
           <a:p>
             <a:fld id="{6D5ECD92-1D4B-4C92-88C6-1BDE7FDE9838}" type="datetimeFigureOut">
               <a:rPr lang="ru-RU" smtClean="0"/>
-              <a:t>01.04.2026</a:t>
+              <a:t>02.04.2026</a:t>
             </a:fld>
             <a:endParaRPr lang="ru-RU"/>
           </a:p>
@@ -2116,7 +8322,7 @@
           <a:p>
             <a:fld id="{6D5ECD92-1D4B-4C92-88C6-1BDE7FDE9838}" type="datetimeFigureOut">
               <a:rPr lang="ru-RU" smtClean="0"/>
-              <a:t>01.04.2026</a:t>
+              <a:t>02.04.2026</a:t>
             </a:fld>
             <a:endParaRPr lang="ru-RU"/>
           </a:p>
@@ -2403,7 +8609,7 @@
           <a:p>
             <a:fld id="{6D5ECD92-1D4B-4C92-88C6-1BDE7FDE9838}" type="datetimeFigureOut">
               <a:rPr lang="ru-RU" smtClean="0"/>
-              <a:t>01.04.2026</a:t>
+              <a:t>02.04.2026</a:t>
             </a:fld>
             <a:endParaRPr lang="ru-RU"/>
           </a:p>
@@ -2725,7 +8931,7 @@
           <a:p>
             <a:fld id="{6D5ECD92-1D4B-4C92-88C6-1BDE7FDE9838}" type="datetimeFigureOut">
               <a:rPr lang="ru-RU" smtClean="0"/>
-              <a:t>01.04.2026</a:t>
+              <a:t>02.04.2026</a:t>
             </a:fld>
             <a:endParaRPr lang="ru-RU"/>
           </a:p>
@@ -2986,7 +9192,7 @@
           <a:p>
             <a:fld id="{6D5ECD92-1D4B-4C92-88C6-1BDE7FDE9838}" type="datetimeFigureOut">
               <a:rPr lang="ru-RU" smtClean="0"/>
-              <a:t>01.04.2026</a:t>
+              <a:t>02.04.2026</a:t>
             </a:fld>
             <a:endParaRPr lang="ru-RU"/>
           </a:p>
@@ -3606,7 +9812,7 @@
         </p:nvSpPr>
         <p:spPr>
           <a:xfrm>
-            <a:off x="1" y="313731"/>
+            <a:off x="318655" y="300321"/>
             <a:ext cx="11554690" cy="1045186"/>
           </a:xfrm>
           <a:prstGeom prst="rect">
@@ -3998,15 +10204,22 @@
               <a:t>20</a:t>
             </a:r>
             <a:r>
-              <a:rPr lang="ru-RU" sz="1800" dirty="0">
+              <a:rPr lang="ru-RU" sz="1800">
                 <a:solidFill>
                   <a:schemeClr val="tx1"/>
                 </a:solidFill>
                 <a:latin typeface="Helvetica" panose="020B0604020202020204" pitchFamily="34" charset="0"/>
                 <a:cs typeface="Helvetica" panose="020B0604020202020204" pitchFamily="34" charset="0"/>
               </a:rPr>
-              <a:t>25 </a:t>
+              <a:t>26 </a:t>
             </a:r>
+            <a:endParaRPr lang="ru-RU" sz="1800" dirty="0">
+              <a:solidFill>
+                <a:schemeClr val="tx1"/>
+              </a:solidFill>
+              <a:latin typeface="Helvetica" panose="020B0604020202020204" pitchFamily="34" charset="0"/>
+              <a:cs typeface="Helvetica" panose="020B0604020202020204" pitchFamily="34" charset="0"/>
+            </a:endParaRPr>
           </a:p>
         </p:txBody>
       </p:sp>
@@ -4101,6 +10314,14 @@
 <file path=ppt/slides/slide2.xml><?xml version="1.0" encoding="utf-8"?>
 <p:sld xmlns:a="http://schemas.openxmlformats.org/drawingml/2006/main" xmlns:r="http://schemas.openxmlformats.org/officeDocument/2006/relationships" xmlns:p="http://schemas.openxmlformats.org/presentationml/2006/main">
   <p:cSld>
+    <p:bg>
+      <p:bgPr>
+        <a:solidFill>
+          <a:schemeClr val="bg1"/>
+        </a:solidFill>
+        <a:effectLst/>
+      </p:bgPr>
+    </p:bg>
     <p:spTree>
       <p:nvGrpSpPr>
         <p:cNvPr id="1" name=""/>
@@ -4131,9 +10352,16 @@
             <p:ph type="title"/>
           </p:nvPr>
         </p:nvSpPr>
-        <p:spPr/>
+        <p:spPr>
+          <a:xfrm>
+            <a:off x="6420464" y="539087"/>
+            <a:ext cx="4534047" cy="1584895"/>
+          </a:xfrm>
+        </p:spPr>
         <p:txBody>
-          <a:bodyPr/>
+          <a:bodyPr>
+            <a:normAutofit/>
+          </a:bodyPr>
           <a:lstStyle/>
           <a:p>
             <a:r>
@@ -4143,6 +10371,53 @@
           </a:p>
         </p:txBody>
       </p:sp>
+      <p:pic>
+        <p:nvPicPr>
+          <p:cNvPr id="1026" name="Picture 2" descr="ChatGPT — Википедия">
+            <a:extLst>
+              <a:ext uri="{FF2B5EF4-FFF2-40B4-BE49-F238E27FC236}">
+                <a16:creationId xmlns:a16="http://schemas.microsoft.com/office/drawing/2014/main" id="{E17C653F-148F-B6F6-5C50-EC781DE495BE}"/>
+              </a:ext>
+            </a:extLst>
+          </p:cNvPr>
+          <p:cNvPicPr>
+            <a:picLocks noChangeAspect="1" noChangeArrowheads="1"/>
+          </p:cNvPicPr>
+          <p:nvPr/>
+        </p:nvPicPr>
+        <p:blipFill>
+          <a:blip r:embed="rId2">
+            <a:extLst>
+              <a:ext uri="{28A0092B-C50C-407E-A947-70E740481C1C}">
+                <a14:useLocalDpi xmlns:a14="http://schemas.microsoft.com/office/drawing/2010/main" val="0"/>
+              </a:ext>
+            </a:extLst>
+          </a:blip>
+          <a:srcRect l="5572" r="5556"/>
+          <a:stretch>
+            <a:fillRect/>
+          </a:stretch>
+        </p:blipFill>
+        <p:spPr bwMode="auto">
+          <a:xfrm>
+            <a:off x="20" y="10"/>
+            <a:ext cx="6094799" cy="6857990"/>
+          </a:xfrm>
+          <a:prstGeom prst="rect">
+            <a:avLst/>
+          </a:prstGeom>
+          <a:noFill/>
+          <a:extLst>
+            <a:ext uri="{909E8E84-426E-40DD-AFC4-6F175D3DCCD1}">
+              <a14:hiddenFill xmlns:a14="http://schemas.microsoft.com/office/drawing/2010/main">
+                <a:solidFill>
+                  <a:srgbClr val="FFFFFF"/>
+                </a:solidFill>
+              </a14:hiddenFill>
+            </a:ext>
+          </a:extLst>
+        </p:spPr>
+      </p:pic>
       <p:sp>
         <p:nvSpPr>
           <p:cNvPr id="5" name="Объект 4">
@@ -4159,7 +10434,12 @@
             <p:ph idx="1"/>
           </p:nvPr>
         </p:nvSpPr>
-        <p:spPr/>
+        <p:spPr>
+          <a:xfrm>
+            <a:off x="6420463" y="2438399"/>
+            <a:ext cx="4572002" cy="3880514"/>
+          </a:xfrm>
+        </p:spPr>
         <p:txBody>
           <a:bodyPr>
             <a:normAutofit/>
@@ -4167,9 +10447,10 @@
           <a:lstStyle/>
           <a:p>
             <a:r>
-              <a:rPr lang="ru-RU" sz="2400" dirty="0"/>
+              <a:rPr lang="ru-RU" sz="1700"/>
               <a:t>Активное развитие технологий искусственного интеллекта в последние годы привело к появлению больших языковых моделей, способных генерировать связный текст, отвечать на вопросы, анализировать и обобщать информацию. Эти возможности обусловили повышенный интерес к применению LLM в образовательной сфере. В российской научной литературе данная проблематика стала активно обсуждаться с 2023 года, что связано с распространением моделей типа ChatGPT и аналогичных систем</a:t>
             </a:r>
+            <a:endParaRPr lang="ru-RU" sz="1700" dirty="0"/>
           </a:p>
         </p:txBody>
       </p:sp>
@@ -4189,6 +10470,17 @@
 <file path=ppt/slides/slide3.xml><?xml version="1.0" encoding="utf-8"?>
 <p:sld xmlns:a="http://schemas.openxmlformats.org/drawingml/2006/main" xmlns:r="http://schemas.openxmlformats.org/officeDocument/2006/relationships" xmlns:p="http://schemas.openxmlformats.org/presentationml/2006/main">
   <p:cSld>
+    <p:bg>
+      <p:bgPr>
+        <a:solidFill>
+          <a:schemeClr val="bg1">
+            <a:tint val="95000"/>
+            <a:satMod val="170000"/>
+          </a:schemeClr>
+        </a:solidFill>
+        <a:effectLst/>
+      </p:bgPr>
+    </p:bg>
     <p:spTree>
       <p:nvGrpSpPr>
         <p:cNvPr id="1" name=""/>
@@ -4205,6 +10497,132 @@
       </p:grpSpPr>
       <p:sp>
         <p:nvSpPr>
+          <p:cNvPr id="8" name="Rectangle 7">
+            <a:extLst>
+              <a:ext uri="{FF2B5EF4-FFF2-40B4-BE49-F238E27FC236}">
+                <a16:creationId xmlns:a16="http://schemas.microsoft.com/office/drawing/2014/main" id="{106378C3-EA41-4A0B-8144-97AF179E9AB7}"/>
+              </a:ext>
+              <a:ext uri="{C183D7F6-B498-43B3-948B-1728B52AA6E4}">
+                <adec:decorative xmlns:adec="http://schemas.microsoft.com/office/drawing/2017/decorative" val="1"/>
+              </a:ext>
+            </a:extLst>
+          </p:cNvPr>
+          <p:cNvSpPr>
+            <a:spLocks noGrp="1" noRot="1" noChangeAspect="1" noMove="1" noResize="1" noEditPoints="1" noAdjustHandles="1" noChangeArrowheads="1" noChangeShapeType="1" noTextEdit="1"/>
+          </p:cNvSpPr>
+          <p:nvPr>
+            <p:extLst>
+              <p:ext uri="{386F3935-93C4-4BCD-93E2-E3B085C9AB24}">
+                <p16:designElem xmlns:p16="http://schemas.microsoft.com/office/powerpoint/2015/main" val="1"/>
+              </p:ext>
+            </p:extLst>
+          </p:nvPr>
+        </p:nvSpPr>
+        <p:spPr>
+          <a:xfrm>
+            <a:off x="0" y="1"/>
+            <a:ext cx="1286934" cy="6858000"/>
+          </a:xfrm>
+          <a:prstGeom prst="rect">
+            <a:avLst/>
+          </a:prstGeom>
+          <a:ln>
+            <a:noFill/>
+          </a:ln>
+        </p:spPr>
+        <p:style>
+          <a:lnRef idx="2">
+            <a:schemeClr val="accent1">
+              <a:shade val="50000"/>
+            </a:schemeClr>
+          </a:lnRef>
+          <a:fillRef idx="1">
+            <a:schemeClr val="accent1"/>
+          </a:fillRef>
+          <a:effectRef idx="0">
+            <a:schemeClr val="accent1"/>
+          </a:effectRef>
+          <a:fontRef idx="minor">
+            <a:schemeClr val="lt1"/>
+          </a:fontRef>
+        </p:style>
+        <p:txBody>
+          <a:bodyPr rtlCol="0" anchor="ctr"/>
+          <a:lstStyle/>
+          <a:p>
+            <a:pPr algn="ctr"/>
+            <a:endParaRPr lang="en-US"/>
+          </a:p>
+        </p:txBody>
+      </p:sp>
+      <p:sp>
+        <p:nvSpPr>
+          <p:cNvPr id="10" name="Rectangle 9">
+            <a:extLst>
+              <a:ext uri="{FF2B5EF4-FFF2-40B4-BE49-F238E27FC236}">
+                <a16:creationId xmlns:a16="http://schemas.microsoft.com/office/drawing/2014/main" id="{2ABC575D-863A-449B-AA18-A22D2A84C832}"/>
+              </a:ext>
+              <a:ext uri="{C183D7F6-B498-43B3-948B-1728B52AA6E4}">
+                <adec:decorative xmlns:adec="http://schemas.microsoft.com/office/drawing/2017/decorative" val="1"/>
+              </a:ext>
+            </a:extLst>
+          </p:cNvPr>
+          <p:cNvSpPr>
+            <a:spLocks noGrp="1" noRot="1" noChangeAspect="1" noMove="1" noResize="1" noEditPoints="1" noAdjustHandles="1" noChangeArrowheads="1" noChangeShapeType="1" noTextEdit="1"/>
+          </p:cNvSpPr>
+          <p:nvPr>
+            <p:extLst>
+              <p:ext uri="{386F3935-93C4-4BCD-93E2-E3B085C9AB24}">
+                <p16:designElem xmlns:p16="http://schemas.microsoft.com/office/powerpoint/2015/main" val="1"/>
+              </p:ext>
+            </p:extLst>
+          </p:nvPr>
+        </p:nvSpPr>
+        <p:spPr>
+          <a:xfrm>
+            <a:off x="6129752" y="0"/>
+            <a:ext cx="5165308" cy="6858000"/>
+          </a:xfrm>
+          <a:prstGeom prst="rect">
+            <a:avLst/>
+          </a:prstGeom>
+          <a:solidFill>
+            <a:schemeClr val="bg1">
+              <a:lumMod val="85000"/>
+              <a:lumOff val="15000"/>
+            </a:schemeClr>
+          </a:solidFill>
+          <a:ln>
+            <a:noFill/>
+          </a:ln>
+        </p:spPr>
+        <p:style>
+          <a:lnRef idx="2">
+            <a:schemeClr val="accent1">
+              <a:shade val="50000"/>
+            </a:schemeClr>
+          </a:lnRef>
+          <a:fillRef idx="1">
+            <a:schemeClr val="accent1"/>
+          </a:fillRef>
+          <a:effectRef idx="0">
+            <a:schemeClr val="accent1"/>
+          </a:effectRef>
+          <a:fontRef idx="minor">
+            <a:schemeClr val="lt1"/>
+          </a:fontRef>
+        </p:style>
+        <p:txBody>
+          <a:bodyPr rtlCol="0" anchor="ctr"/>
+          <a:lstStyle/>
+          <a:p>
+            <a:pPr algn="ctr"/>
+            <a:endParaRPr lang="en-US"/>
+          </a:p>
+        </p:txBody>
+      </p:sp>
+      <p:sp>
+        <p:nvSpPr>
           <p:cNvPr id="2" name="Заголовок 1">
             <a:extLst>
               <a:ext uri="{FF2B5EF4-FFF2-40B4-BE49-F238E27FC236}">
@@ -4219,9 +10637,16 @@
             <p:ph type="title"/>
           </p:nvPr>
         </p:nvSpPr>
-        <p:spPr/>
+        <p:spPr>
+          <a:xfrm>
+            <a:off x="6485993" y="643465"/>
+            <a:ext cx="4419074" cy="5560272"/>
+          </a:xfrm>
+        </p:spPr>
         <p:txBody>
-          <a:bodyPr/>
+          <a:bodyPr anchor="ctr">
+            <a:normAutofit/>
+          </a:bodyPr>
           <a:lstStyle/>
           <a:p>
             <a:r>
@@ -4247,20 +10672,89 @@
             <p:ph idx="1"/>
           </p:nvPr>
         </p:nvSpPr>
-        <p:spPr/>
+        <p:spPr>
+          <a:xfrm>
+            <a:off x="1732248" y="643465"/>
+            <a:ext cx="4009730" cy="5528735"/>
+          </a:xfrm>
+        </p:spPr>
         <p:txBody>
-          <a:bodyPr>
-            <a:normAutofit/>
+          <a:bodyPr anchor="ctr">
+            <a:noAutofit/>
           </a:bodyPr>
           <a:lstStyle/>
           <a:p>
             <a:r>
-              <a:rPr lang="ru-RU" sz="3600" dirty="0"/>
+              <a:rPr lang="ru-RU" sz="2800" dirty="0"/>
               <a:t>Обзор и анализ российских научных публикаций, посвящённых использованию больших языковых моделей в образовании, а также выявление основных тенденций и проблем, отражённых в отечественных исследованиях.</a:t>
             </a:r>
           </a:p>
           <a:p>
-            <a:endParaRPr lang="ru-RU" sz="3600" dirty="0"/>
+            <a:endParaRPr lang="ru-RU" sz="2800" dirty="0"/>
+          </a:p>
+        </p:txBody>
+      </p:sp>
+      <p:sp>
+        <p:nvSpPr>
+          <p:cNvPr id="12" name="Rectangle 11">
+            <a:extLst>
+              <a:ext uri="{FF2B5EF4-FFF2-40B4-BE49-F238E27FC236}">
+                <a16:creationId xmlns:a16="http://schemas.microsoft.com/office/drawing/2014/main" id="{732A87A1-E008-492C-8D91-EA0B5488DA8C}"/>
+              </a:ext>
+              <a:ext uri="{C183D7F6-B498-43B3-948B-1728B52AA6E4}">
+                <adec:decorative xmlns:adec="http://schemas.microsoft.com/office/drawing/2017/decorative" val="1"/>
+              </a:ext>
+            </a:extLst>
+          </p:cNvPr>
+          <p:cNvSpPr>
+            <a:spLocks noGrp="1" noRot="1" noChangeAspect="1" noMove="1" noResize="1" noEditPoints="1" noAdjustHandles="1" noChangeArrowheads="1" noChangeShapeType="1" noTextEdit="1"/>
+          </p:cNvSpPr>
+          <p:nvPr>
+            <p:extLst>
+              <p:ext uri="{386F3935-93C4-4BCD-93E2-E3B085C9AB24}">
+                <p16:designElem xmlns:p16="http://schemas.microsoft.com/office/powerpoint/2015/main" val="1"/>
+              </p:ext>
+            </p:extLst>
+          </p:nvPr>
+        </p:nvSpPr>
+        <p:spPr>
+          <a:xfrm>
+            <a:off x="11292840" y="0"/>
+            <a:ext cx="914400" cy="6858000"/>
+          </a:xfrm>
+          <a:prstGeom prst="rect">
+            <a:avLst/>
+          </a:prstGeom>
+          <a:solidFill>
+            <a:schemeClr val="tx2">
+              <a:lumMod val="75000"/>
+            </a:schemeClr>
+          </a:solidFill>
+          <a:ln>
+            <a:noFill/>
+          </a:ln>
+        </p:spPr>
+        <p:style>
+          <a:lnRef idx="2">
+            <a:schemeClr val="accent1">
+              <a:shade val="50000"/>
+            </a:schemeClr>
+          </a:lnRef>
+          <a:fillRef idx="1">
+            <a:schemeClr val="accent1"/>
+          </a:fillRef>
+          <a:effectRef idx="0">
+            <a:schemeClr val="accent1"/>
+          </a:effectRef>
+          <a:fontRef idx="minor">
+            <a:schemeClr val="lt1"/>
+          </a:fontRef>
+        </p:style>
+        <p:txBody>
+          <a:bodyPr/>
+          <a:lstStyle/>
+          <a:p>
+            <a:endParaRPr lang="ru-RU"/>
           </a:p>
         </p:txBody>
       </p:sp>
@@ -4272,7 +10766,7 @@
     </p:extLst>
   </p:cSld>
   <p:clrMapOvr>
-    <a:masterClrMapping/>
+    <a:overrideClrMapping bg1="dk1" tx1="lt1" bg2="dk2" tx2="lt2" accent1="accent1" accent2="accent2" accent3="accent3" accent4="accent4" accent5="accent5" accent6="accent6" hlink="hlink" folHlink="folHlink"/>
   </p:clrMapOvr>
 </p:sld>
 </file>
@@ -4280,6 +10774,14 @@
 <file path=ppt/slides/slide4.xml><?xml version="1.0" encoding="utf-8"?>
 <p:sld xmlns:a="http://schemas.openxmlformats.org/drawingml/2006/main" xmlns:r="http://schemas.openxmlformats.org/officeDocument/2006/relationships" xmlns:p="http://schemas.openxmlformats.org/presentationml/2006/main">
   <p:cSld>
+    <p:bg>
+      <p:bgPr>
+        <a:solidFill>
+          <a:schemeClr val="bg1"/>
+        </a:solidFill>
+        <a:effectLst/>
+      </p:bgPr>
+    </p:bg>
     <p:spTree>
       <p:nvGrpSpPr>
         <p:cNvPr id="1" name=""/>
@@ -4310,35 +10812,12 @@
             <p:ph type="title"/>
           </p:nvPr>
         </p:nvSpPr>
-        <p:spPr/>
-        <p:txBody>
-          <a:bodyPr/>
-          <a:lstStyle/>
-          <a:p>
-            <a:r>
-              <a:rPr lang="ru-RU" dirty="0"/>
-              <a:t>Влияние</a:t>
-            </a:r>
-          </a:p>
-        </p:txBody>
-      </p:sp>
-      <p:sp>
-        <p:nvSpPr>
-          <p:cNvPr id="3" name="Объект 2">
-            <a:extLst>
-              <a:ext uri="{FF2B5EF4-FFF2-40B4-BE49-F238E27FC236}">
-                <a16:creationId xmlns:a16="http://schemas.microsoft.com/office/drawing/2014/main" id="{3CA7B7C6-C1CE-1949-5ED0-7EB7FBA2C061}"/>
-              </a:ext>
-            </a:extLst>
-          </p:cNvPr>
-          <p:cNvSpPr>
-            <a:spLocks noGrp="1"/>
-          </p:cNvSpPr>
-          <p:nvPr>
-            <p:ph idx="1"/>
-          </p:nvPr>
-        </p:nvSpPr>
-        <p:spPr/>
+        <p:spPr>
+          <a:xfrm>
+            <a:off x="1261872" y="365760"/>
+            <a:ext cx="9692640" cy="1325562"/>
+          </a:xfrm>
+        </p:spPr>
         <p:txBody>
           <a:bodyPr>
             <a:normAutofit/>
@@ -4346,18 +10825,43 @@
           <a:lstStyle/>
           <a:p>
             <a:r>
-              <a:rPr lang="ru-RU" sz="2000" dirty="0"/>
-              <a:t>Российские исследователи сходятся во мнении, что внедрение больших языковых моделей приводит к изменению роли преподавателя. Он всё в большей степени выступает не источником информации, а модератором и наставником, формирующим у студентов навыки критического мышления, анализа и осознанного использования цифровых инструментов.</a:t>
-            </a:r>
-          </a:p>
-          <a:p>
-            <a:r>
-              <a:rPr lang="ru-RU" sz="2000" dirty="0"/>
-              <a:t>Авторы сходятся во мнении, что LLM не являются самостоятельной педагогической технологией, а выступают инструментом, эффективность которого определяется методикой применения и уровнем цифровой компетентности пользователей </a:t>
+              <a:rPr lang="ru-RU" dirty="0"/>
+              <a:t>Влияние</a:t>
             </a:r>
           </a:p>
         </p:txBody>
       </p:sp>
+      <p:graphicFrame>
+        <p:nvGraphicFramePr>
+          <p:cNvPr id="15" name="Объект 2">
+            <a:extLst>
+              <a:ext uri="{FF2B5EF4-FFF2-40B4-BE49-F238E27FC236}">
+                <a16:creationId xmlns:a16="http://schemas.microsoft.com/office/drawing/2014/main" id="{A8BBC859-A2D4-7B38-8F3A-34E426146193}"/>
+              </a:ext>
+            </a:extLst>
+          </p:cNvPr>
+          <p:cNvGraphicFramePr>
+            <a:graphicFrameLocks noGrp="1"/>
+          </p:cNvGraphicFramePr>
+          <p:nvPr>
+            <p:ph idx="1"/>
+            <p:extLst>
+              <p:ext uri="{D42A27DB-BD31-4B8C-83A1-F6EECF244321}">
+                <p14:modId xmlns:p14="http://schemas.microsoft.com/office/powerpoint/2010/main" val="3903176851"/>
+              </p:ext>
+            </p:extLst>
+          </p:nvPr>
+        </p:nvGraphicFramePr>
+        <p:xfrm>
+          <a:off x="1262063" y="2013055"/>
+          <a:ext cx="8785735" cy="4201478"/>
+        </p:xfrm>
+        <a:graphic>
+          <a:graphicData uri="http://schemas.openxmlformats.org/drawingml/2006/diagram">
+            <dgm:relIds xmlns:dgm="http://schemas.openxmlformats.org/drawingml/2006/diagram" xmlns:r="http://schemas.openxmlformats.org/officeDocument/2006/relationships" r:dm="rId2" r:lo="rId3" r:qs="rId4" r:cs="rId5"/>
+          </a:graphicData>
+        </a:graphic>
+      </p:graphicFrame>
     </p:spTree>
     <p:extLst>
       <p:ext uri="{BB962C8B-B14F-4D97-AF65-F5344CB8AC3E}">
@@ -4374,6 +10878,269 @@
 <file path=ppt/slides/slide5.xml><?xml version="1.0" encoding="utf-8"?>
 <p:sld xmlns:a="http://schemas.openxmlformats.org/drawingml/2006/main" xmlns:r="http://schemas.openxmlformats.org/officeDocument/2006/relationships" xmlns:p="http://schemas.openxmlformats.org/presentationml/2006/main">
   <p:cSld>
+    <p:bg>
+      <p:bgPr>
+        <a:solidFill>
+          <a:schemeClr val="bg1"/>
+        </a:solidFill>
+        <a:effectLst/>
+      </p:bgPr>
+    </p:bg>
+    <p:spTree>
+      <p:nvGrpSpPr>
+        <p:cNvPr id="1" name=""/>
+        <p:cNvGrpSpPr/>
+        <p:nvPr/>
+      </p:nvGrpSpPr>
+      <p:grpSpPr>
+        <a:xfrm>
+          <a:off x="0" y="0"/>
+          <a:ext cx="0" cy="0"/>
+          <a:chOff x="0" y="0"/>
+          <a:chExt cx="0" cy="0"/>
+        </a:xfrm>
+      </p:grpSpPr>
+      <p:sp useBgFill="1">
+        <p:nvSpPr>
+          <p:cNvPr id="9" name="Rectangle 8">
+            <a:extLst>
+              <a:ext uri="{FF2B5EF4-FFF2-40B4-BE49-F238E27FC236}">
+                <a16:creationId xmlns:a16="http://schemas.microsoft.com/office/drawing/2014/main" id="{876248C8-0720-48AB-91BA-5F530BB41E5E}"/>
+              </a:ext>
+              <a:ext uri="{C183D7F6-B498-43B3-948B-1728B52AA6E4}">
+                <adec:decorative xmlns:adec="http://schemas.microsoft.com/office/drawing/2017/decorative" val="1"/>
+              </a:ext>
+            </a:extLst>
+          </p:cNvPr>
+          <p:cNvSpPr>
+            <a:spLocks noGrp="1" noRot="1" noChangeAspect="1" noMove="1" noResize="1" noEditPoints="1" noAdjustHandles="1" noChangeArrowheads="1" noChangeShapeType="1" noTextEdit="1"/>
+          </p:cNvSpPr>
+          <p:nvPr>
+            <p:extLst>
+              <p:ext uri="{386F3935-93C4-4BCD-93E2-E3B085C9AB24}">
+                <p16:designElem xmlns:p16="http://schemas.microsoft.com/office/powerpoint/2015/main" val="1"/>
+              </p:ext>
+            </p:extLst>
+          </p:nvPr>
+        </p:nvSpPr>
+        <p:spPr>
+          <a:xfrm>
+            <a:off x="-1" y="0"/>
+            <a:ext cx="12220924" cy="6858000"/>
+          </a:xfrm>
+          <a:prstGeom prst="rect">
+            <a:avLst/>
+          </a:prstGeom>
+          <a:ln>
+            <a:noFill/>
+          </a:ln>
+        </p:spPr>
+        <p:style>
+          <a:lnRef idx="2">
+            <a:schemeClr val="accent1">
+              <a:shade val="50000"/>
+            </a:schemeClr>
+          </a:lnRef>
+          <a:fillRef idx="1">
+            <a:schemeClr val="accent1"/>
+          </a:fillRef>
+          <a:effectRef idx="0">
+            <a:schemeClr val="accent1"/>
+          </a:effectRef>
+          <a:fontRef idx="minor">
+            <a:schemeClr val="lt1"/>
+          </a:fontRef>
+        </p:style>
+        <p:txBody>
+          <a:bodyPr rtlCol="0" anchor="ctr"/>
+          <a:lstStyle/>
+          <a:p>
+            <a:pPr algn="ctr"/>
+            <a:endParaRPr lang="en-US"/>
+          </a:p>
+        </p:txBody>
+      </p:sp>
+      <p:sp>
+        <p:nvSpPr>
+          <p:cNvPr id="11" name="Rectangle 10">
+            <a:extLst>
+              <a:ext uri="{FF2B5EF4-FFF2-40B4-BE49-F238E27FC236}">
+                <a16:creationId xmlns:a16="http://schemas.microsoft.com/office/drawing/2014/main" id="{523BEDA7-D0B8-4802-8168-92452653BC9F}"/>
+              </a:ext>
+              <a:ext uri="{C183D7F6-B498-43B3-948B-1728B52AA6E4}">
+                <adec:decorative xmlns:adec="http://schemas.microsoft.com/office/drawing/2017/decorative" val="1"/>
+              </a:ext>
+            </a:extLst>
+          </p:cNvPr>
+          <p:cNvSpPr>
+            <a:spLocks noGrp="1" noRot="1" noChangeAspect="1" noMove="1" noResize="1" noEditPoints="1" noAdjustHandles="1" noChangeArrowheads="1" noChangeShapeType="1" noTextEdit="1"/>
+          </p:cNvSpPr>
+          <p:nvPr>
+            <p:extLst>
+              <p:ext uri="{386F3935-93C4-4BCD-93E2-E3B085C9AB24}">
+                <p16:designElem xmlns:p16="http://schemas.microsoft.com/office/powerpoint/2015/main" val="1"/>
+              </p:ext>
+            </p:extLst>
+          </p:nvPr>
+        </p:nvSpPr>
+        <p:spPr>
+          <a:xfrm>
+            <a:off x="0" y="0"/>
+            <a:ext cx="914400" cy="6858000"/>
+          </a:xfrm>
+          <a:prstGeom prst="rect">
+            <a:avLst/>
+          </a:prstGeom>
+          <a:solidFill>
+            <a:schemeClr val="tx2">
+              <a:lumMod val="75000"/>
+            </a:schemeClr>
+          </a:solidFill>
+          <a:ln>
+            <a:noFill/>
+          </a:ln>
+        </p:spPr>
+        <p:style>
+          <a:lnRef idx="2">
+            <a:schemeClr val="accent1">
+              <a:shade val="50000"/>
+            </a:schemeClr>
+          </a:lnRef>
+          <a:fillRef idx="1">
+            <a:schemeClr val="accent1"/>
+          </a:fillRef>
+          <a:effectRef idx="0">
+            <a:schemeClr val="accent1"/>
+          </a:effectRef>
+          <a:fontRef idx="minor">
+            <a:schemeClr val="lt1"/>
+          </a:fontRef>
+        </p:style>
+        <p:txBody>
+          <a:bodyPr/>
+          <a:lstStyle/>
+          <a:p>
+            <a:endParaRPr lang="ru-RU"/>
+          </a:p>
+        </p:txBody>
+      </p:sp>
+      <p:sp>
+        <p:nvSpPr>
+          <p:cNvPr id="13" name="Rectangle 12">
+            <a:extLst>
+              <a:ext uri="{FF2B5EF4-FFF2-40B4-BE49-F238E27FC236}">
+                <a16:creationId xmlns:a16="http://schemas.microsoft.com/office/drawing/2014/main" id="{D2EFF34B-7B1A-4F9D-8CEE-A40962BC7C21}"/>
+              </a:ext>
+              <a:ext uri="{C183D7F6-B498-43B3-948B-1728B52AA6E4}">
+                <adec:decorative xmlns:adec="http://schemas.microsoft.com/office/drawing/2017/decorative" val="1"/>
+              </a:ext>
+            </a:extLst>
+          </p:cNvPr>
+          <p:cNvSpPr>
+            <a:spLocks noGrp="1" noRot="1" noChangeAspect="1" noMove="1" noResize="1" noEditPoints="1" noAdjustHandles="1" noChangeArrowheads="1" noChangeShapeType="1" noTextEdit="1"/>
+          </p:cNvSpPr>
+          <p:nvPr>
+            <p:extLst>
+              <p:ext uri="{386F3935-93C4-4BCD-93E2-E3B085C9AB24}">
+                <p16:designElem xmlns:p16="http://schemas.microsoft.com/office/powerpoint/2015/main" val="1"/>
+              </p:ext>
+            </p:extLst>
+          </p:nvPr>
+        </p:nvSpPr>
+        <p:spPr>
+          <a:xfrm>
+            <a:off x="11763724" y="0"/>
+            <a:ext cx="457200" cy="6858000"/>
+          </a:xfrm>
+          <a:prstGeom prst="rect">
+            <a:avLst/>
+          </a:prstGeom>
+          <a:solidFill>
+            <a:schemeClr val="accent1"/>
+          </a:solidFill>
+          <a:ln>
+            <a:noFill/>
+          </a:ln>
+        </p:spPr>
+        <p:style>
+          <a:lnRef idx="2">
+            <a:schemeClr val="accent1">
+              <a:shade val="50000"/>
+            </a:schemeClr>
+          </a:lnRef>
+          <a:fillRef idx="1">
+            <a:schemeClr val="accent1"/>
+          </a:fillRef>
+          <a:effectRef idx="0">
+            <a:schemeClr val="accent1"/>
+          </a:effectRef>
+          <a:fontRef idx="minor">
+            <a:schemeClr val="lt1"/>
+          </a:fontRef>
+        </p:style>
+        <p:txBody>
+          <a:bodyPr/>
+          <a:lstStyle/>
+          <a:p>
+            <a:endParaRPr lang="ru-RU"/>
+          </a:p>
+        </p:txBody>
+      </p:sp>
+      <p:graphicFrame>
+        <p:nvGraphicFramePr>
+          <p:cNvPr id="5" name="Объект 2">
+            <a:extLst>
+              <a:ext uri="{FF2B5EF4-FFF2-40B4-BE49-F238E27FC236}">
+                <a16:creationId xmlns:a16="http://schemas.microsoft.com/office/drawing/2014/main" id="{C7FFA269-9AFA-5B0F-CA9F-A271956F7E24}"/>
+              </a:ext>
+            </a:extLst>
+          </p:cNvPr>
+          <p:cNvGraphicFramePr>
+            <a:graphicFrameLocks noGrp="1"/>
+          </p:cNvGraphicFramePr>
+          <p:nvPr>
+            <p:ph idx="1"/>
+            <p:extLst>
+              <p:ext uri="{D42A27DB-BD31-4B8C-83A1-F6EECF244321}">
+                <p14:modId xmlns:p14="http://schemas.microsoft.com/office/powerpoint/2010/main" val="2005269624"/>
+              </p:ext>
+            </p:extLst>
+          </p:nvPr>
+        </p:nvGraphicFramePr>
+        <p:xfrm>
+          <a:off x="1249681" y="1859280"/>
+          <a:ext cx="9870574" cy="4355253"/>
+        </p:xfrm>
+        <a:graphic>
+          <a:graphicData uri="http://schemas.openxmlformats.org/drawingml/2006/diagram">
+            <dgm:relIds xmlns:dgm="http://schemas.openxmlformats.org/drawingml/2006/diagram" xmlns:r="http://schemas.openxmlformats.org/officeDocument/2006/relationships" r:dm="rId2" r:lo="rId3" r:qs="rId4" r:cs="rId5"/>
+          </a:graphicData>
+        </a:graphic>
+      </p:graphicFrame>
+    </p:spTree>
+    <p:extLst>
+      <p:ext uri="{BB962C8B-B14F-4D97-AF65-F5344CB8AC3E}">
+        <p14:creationId xmlns:p14="http://schemas.microsoft.com/office/powerpoint/2010/main" val="3741870529"/>
+      </p:ext>
+    </p:extLst>
+  </p:cSld>
+  <p:clrMapOvr>
+    <a:masterClrMapping/>
+  </p:clrMapOvr>
+</p:sld>
+</file>
+
+<file path=ppt/slides/slide6.xml><?xml version="1.0" encoding="utf-8"?>
+<p:sld xmlns:a="http://schemas.openxmlformats.org/drawingml/2006/main" xmlns:r="http://schemas.openxmlformats.org/officeDocument/2006/relationships" xmlns:p="http://schemas.openxmlformats.org/presentationml/2006/main">
+  <p:cSld>
+    <p:bg>
+      <p:bgPr>
+        <a:solidFill>
+          <a:schemeClr val="bg1"/>
+        </a:solidFill>
+        <a:effectLst/>
+      </p:bgPr>
+    </p:bg>
     <p:spTree>
       <p:nvGrpSpPr>
         <p:cNvPr id="1" name=""/>
@@ -4390,118 +11157,130 @@
       </p:grpSpPr>
       <p:sp>
         <p:nvSpPr>
-          <p:cNvPr id="2" name="Заголовок 1">
+          <p:cNvPr id="8" name="Rectangle 7">
             <a:extLst>
               <a:ext uri="{FF2B5EF4-FFF2-40B4-BE49-F238E27FC236}">
-                <a16:creationId xmlns:a16="http://schemas.microsoft.com/office/drawing/2014/main" id="{A5B16721-06DC-59DE-04FD-05FA8E4DFB20}"/>
+                <a16:creationId xmlns:a16="http://schemas.microsoft.com/office/drawing/2014/main" id="{33801627-6861-4EA9-BE98-E0CE33A894D9}"/>
+              </a:ext>
+              <a:ext uri="{C183D7F6-B498-43B3-948B-1728B52AA6E4}">
+                <adec:decorative xmlns:adec="http://schemas.microsoft.com/office/drawing/2017/decorative" val="1"/>
               </a:ext>
             </a:extLst>
           </p:cNvPr>
           <p:cNvSpPr>
-            <a:spLocks noGrp="1"/>
+            <a:spLocks noGrp="1" noRot="1" noChangeAspect="1" noMove="1" noResize="1" noEditPoints="1" noAdjustHandles="1" noChangeArrowheads="1" noChangeShapeType="1" noTextEdit="1"/>
           </p:cNvSpPr>
           <p:nvPr>
-            <p:ph type="title"/>
+            <p:extLst>
+              <p:ext uri="{386F3935-93C4-4BCD-93E2-E3B085C9AB24}">
+                <p16:designElem xmlns:p16="http://schemas.microsoft.com/office/powerpoint/2015/main" val="1"/>
+              </p:ext>
+            </p:extLst>
           </p:nvPr>
         </p:nvSpPr>
-        <p:spPr/>
+        <p:spPr>
+          <a:xfrm>
+            <a:off x="1" y="0"/>
+            <a:ext cx="643466" cy="6858000"/>
+          </a:xfrm>
+          <a:prstGeom prst="rect">
+            <a:avLst/>
+          </a:prstGeom>
+          <a:solidFill>
+            <a:srgbClr val="0D0D0D"/>
+          </a:solidFill>
+          <a:ln>
+            <a:noFill/>
+          </a:ln>
+        </p:spPr>
+        <p:style>
+          <a:lnRef idx="2">
+            <a:schemeClr val="accent1">
+              <a:shade val="50000"/>
+            </a:schemeClr>
+          </a:lnRef>
+          <a:fillRef idx="1">
+            <a:schemeClr val="accent1"/>
+          </a:fillRef>
+          <a:effectRef idx="0">
+            <a:schemeClr val="accent1"/>
+          </a:effectRef>
+          <a:fontRef idx="minor">
+            <a:schemeClr val="lt1"/>
+          </a:fontRef>
+        </p:style>
         <p:txBody>
-          <a:bodyPr/>
+          <a:bodyPr rtlCol="0" anchor="ctr"/>
           <a:lstStyle/>
           <a:p>
-            <a:r>
-              <a:rPr lang="ru-RU" dirty="0"/>
-              <a:t>Риски</a:t>
-            </a:r>
+            <a:pPr algn="ctr"/>
+            <a:endParaRPr lang="en-US"/>
           </a:p>
         </p:txBody>
       </p:sp>
       <p:sp>
         <p:nvSpPr>
-          <p:cNvPr id="3" name="Объект 2">
+          <p:cNvPr id="10" name="Rectangle 9">
             <a:extLst>
               <a:ext uri="{FF2B5EF4-FFF2-40B4-BE49-F238E27FC236}">
-                <a16:creationId xmlns:a16="http://schemas.microsoft.com/office/drawing/2014/main" id="{22F0E43F-7A82-0F2D-C122-A94DAA48E3D3}"/>
+                <a16:creationId xmlns:a16="http://schemas.microsoft.com/office/drawing/2014/main" id="{93C1483F-490E-4C8A-8765-1F8AF0C67D5F}"/>
+              </a:ext>
+              <a:ext uri="{C183D7F6-B498-43B3-948B-1728B52AA6E4}">
+                <adec:decorative xmlns:adec="http://schemas.microsoft.com/office/drawing/2017/decorative" val="1"/>
               </a:ext>
             </a:extLst>
           </p:cNvPr>
           <p:cNvSpPr>
-            <a:spLocks noGrp="1"/>
+            <a:spLocks noGrp="1" noRot="1" noChangeAspect="1" noMove="1" noResize="1" noEditPoints="1" noAdjustHandles="1" noChangeArrowheads="1" noChangeShapeType="1" noTextEdit="1"/>
           </p:cNvSpPr>
           <p:nvPr>
-            <p:ph idx="1"/>
+            <p:extLst>
+              <p:ext uri="{386F3935-93C4-4BCD-93E2-E3B085C9AB24}">
+                <p16:designElem xmlns:p16="http://schemas.microsoft.com/office/powerpoint/2015/main" val="1"/>
+              </p:ext>
+            </p:extLst>
           </p:nvPr>
         </p:nvSpPr>
-        <p:spPr/>
+        <p:spPr>
+          <a:xfrm>
+            <a:off x="643466" y="0"/>
+            <a:ext cx="3736189" cy="6858000"/>
+          </a:xfrm>
+          <a:prstGeom prst="rect">
+            <a:avLst/>
+          </a:prstGeom>
+          <a:solidFill>
+            <a:srgbClr val="292929"/>
+          </a:solidFill>
+          <a:ln>
+            <a:noFill/>
+          </a:ln>
+        </p:spPr>
+        <p:style>
+          <a:lnRef idx="2">
+            <a:schemeClr val="accent1">
+              <a:shade val="50000"/>
+            </a:schemeClr>
+          </a:lnRef>
+          <a:fillRef idx="1">
+            <a:schemeClr val="accent1"/>
+          </a:fillRef>
+          <a:effectRef idx="0">
+            <a:schemeClr val="accent1"/>
+          </a:effectRef>
+          <a:fontRef idx="minor">
+            <a:schemeClr val="lt1"/>
+          </a:fontRef>
+        </p:style>
         <p:txBody>
-          <a:bodyPr>
-            <a:normAutofit/>
-          </a:bodyPr>
+          <a:bodyPr rtlCol="0" anchor="ctr"/>
           <a:lstStyle/>
           <a:p>
-            <a:pPr marL="0" indent="0">
-              <a:buNone/>
-            </a:pPr>
-            <a:r>
-              <a:rPr lang="ru-RU" sz="3600" dirty="0"/>
-              <a:t>Наиболее часто обсуждаемым риском в российских публикациях являются угрозы</a:t>
-            </a:r>
-            <a:r>
-              <a:rPr lang="en-US" sz="3600" dirty="0"/>
-              <a:t>:</a:t>
-            </a:r>
-          </a:p>
-          <a:p>
-            <a:r>
-              <a:rPr lang="ru-RU" sz="3600" dirty="0"/>
-              <a:t> академической нечестности</a:t>
-            </a:r>
-            <a:endParaRPr lang="en-US" sz="3600" dirty="0"/>
-          </a:p>
-          <a:p>
-            <a:r>
-              <a:rPr lang="ru-RU" sz="3600" dirty="0"/>
-              <a:t>«галлюцинации» языковых моделей</a:t>
-            </a:r>
-          </a:p>
-          <a:p>
-            <a:r>
-              <a:rPr lang="ru-RU" sz="3600" dirty="0"/>
-              <a:t>нормативное регулирование</a:t>
-            </a:r>
+            <a:pPr algn="ctr"/>
+            <a:endParaRPr lang="en-US"/>
           </a:p>
         </p:txBody>
       </p:sp>
-    </p:spTree>
-    <p:extLst>
-      <p:ext uri="{BB962C8B-B14F-4D97-AF65-F5344CB8AC3E}">
-        <p14:creationId xmlns:p14="http://schemas.microsoft.com/office/powerpoint/2010/main" val="3741870529"/>
-      </p:ext>
-    </p:extLst>
-  </p:cSld>
-  <p:clrMapOvr>
-    <a:masterClrMapping/>
-  </p:clrMapOvr>
-</p:sld>
-</file>
-
-<file path=ppt/slides/slide6.xml><?xml version="1.0" encoding="utf-8"?>
-<p:sld xmlns:a="http://schemas.openxmlformats.org/drawingml/2006/main" xmlns:r="http://schemas.openxmlformats.org/officeDocument/2006/relationships" xmlns:p="http://schemas.openxmlformats.org/presentationml/2006/main">
-  <p:cSld>
-    <p:spTree>
-      <p:nvGrpSpPr>
-        <p:cNvPr id="1" name=""/>
-        <p:cNvGrpSpPr/>
-        <p:nvPr/>
-      </p:nvGrpSpPr>
-      <p:grpSpPr>
-        <a:xfrm>
-          <a:off x="0" y="0"/>
-          <a:ext cx="0" cy="0"/>
-          <a:chOff x="0" y="0"/>
-          <a:chExt cx="0" cy="0"/>
-        </a:xfrm>
-      </p:grpSpPr>
       <p:sp>
         <p:nvSpPr>
           <p:cNvPr id="2" name="Заголовок 1">
@@ -4518,15 +11297,87 @@
             <p:ph type="title"/>
           </p:nvPr>
         </p:nvSpPr>
-        <p:spPr/>
+        <p:spPr>
+          <a:xfrm>
+            <a:off x="965198" y="643466"/>
+            <a:ext cx="3092718" cy="5528734"/>
+          </a:xfrm>
+          <a:noFill/>
+        </p:spPr>
         <p:txBody>
-          <a:bodyPr/>
+          <a:bodyPr anchor="t">
+            <a:normAutofit/>
+          </a:bodyPr>
           <a:lstStyle/>
           <a:p>
             <a:r>
-              <a:rPr lang="ru-RU" dirty="0"/>
+              <a:rPr lang="ru-RU" sz="2800">
+                <a:solidFill>
+                  <a:srgbClr val="FFFFFF"/>
+                </a:solidFill>
+              </a:rPr>
               <a:t>Перспективные направления</a:t>
             </a:r>
+          </a:p>
+        </p:txBody>
+      </p:sp>
+      <p:sp useBgFill="1">
+        <p:nvSpPr>
+          <p:cNvPr id="12" name="Rectangle 11">
+            <a:extLst>
+              <a:ext uri="{FF2B5EF4-FFF2-40B4-BE49-F238E27FC236}">
+                <a16:creationId xmlns:a16="http://schemas.microsoft.com/office/drawing/2014/main" id="{0249BF42-D05C-4553-9417-7B8695759291}"/>
+              </a:ext>
+              <a:ext uri="{C183D7F6-B498-43B3-948B-1728B52AA6E4}">
+                <adec:decorative xmlns:adec="http://schemas.microsoft.com/office/drawing/2017/decorative" val="1"/>
+              </a:ext>
+            </a:extLst>
+          </p:cNvPr>
+          <p:cNvSpPr>
+            <a:spLocks noGrp="1" noRot="1" noChangeAspect="1" noMove="1" noResize="1" noEditPoints="1" noAdjustHandles="1" noChangeArrowheads="1" noChangeShapeType="1" noTextEdit="1"/>
+          </p:cNvSpPr>
+          <p:nvPr>
+            <p:extLst>
+              <p:ext uri="{386F3935-93C4-4BCD-93E2-E3B085C9AB24}">
+                <p16:designElem xmlns:p16="http://schemas.microsoft.com/office/powerpoint/2015/main" val="1"/>
+              </p:ext>
+            </p:extLst>
+          </p:nvPr>
+        </p:nvSpPr>
+        <p:spPr>
+          <a:xfrm>
+            <a:off x="4379654" y="0"/>
+            <a:ext cx="6913185" cy="6858000"/>
+          </a:xfrm>
+          <a:prstGeom prst="rect">
+            <a:avLst/>
+          </a:prstGeom>
+          <a:ln>
+            <a:noFill/>
+          </a:ln>
+        </p:spPr>
+        <p:style>
+          <a:lnRef idx="2">
+            <a:schemeClr val="accent1">
+              <a:shade val="50000"/>
+            </a:schemeClr>
+          </a:lnRef>
+          <a:fillRef idx="1">
+            <a:schemeClr val="accent1"/>
+          </a:fillRef>
+          <a:effectRef idx="0">
+            <a:schemeClr val="accent1"/>
+          </a:effectRef>
+          <a:fontRef idx="minor">
+            <a:schemeClr val="lt1"/>
+          </a:fontRef>
+        </p:style>
+        <p:txBody>
+          <a:bodyPr rtlCol="0" anchor="ctr"/>
+          <a:lstStyle/>
+          <a:p>
+            <a:pPr algn="ctr"/>
+            <a:endParaRPr lang="en-US"/>
           </a:p>
         </p:txBody>
       </p:sp>
@@ -4546,7 +11397,12 @@
             <p:ph idx="1"/>
           </p:nvPr>
         </p:nvSpPr>
-        <p:spPr/>
+        <p:spPr>
+          <a:xfrm>
+            <a:off x="4821898" y="643466"/>
+            <a:ext cx="5827472" cy="5571067"/>
+          </a:xfrm>
+        </p:spPr>
         <p:txBody>
           <a:bodyPr>
             <a:normAutofit/>
@@ -4554,12 +11410,12 @@
           <a:lstStyle/>
           <a:p>
             <a:r>
-              <a:rPr lang="ru-RU" sz="2400" dirty="0"/>
+              <a:rPr lang="ru-RU" sz="2200"/>
               <a:t>Среди перспективных направлений внедрения больших языковых моделей в образовательную практику в России выделяются: разработка отечественных языковых моделей, учитывающих специфику русского языка и образовательных стандартов; создание локальных корпоративных решений для вузов; интеграция LLM в электронные образовательные среды и системы дистанционного обучения. Отдельно подчёркивается важность методического сопровождения и подготовки преподавателей к использованию данных технологий.</a:t>
             </a:r>
           </a:p>
           <a:p>
-            <a:endParaRPr lang="ru-RU" sz="2400" dirty="0"/>
+            <a:endParaRPr lang="ru-RU" sz="2200"/>
           </a:p>
         </p:txBody>
       </p:sp>
@@ -4579,6 +11435,14 @@
 <file path=ppt/slides/slide7.xml><?xml version="1.0" encoding="utf-8"?>
 <p:sld xmlns:a="http://schemas.openxmlformats.org/drawingml/2006/main" xmlns:r="http://schemas.openxmlformats.org/officeDocument/2006/relationships" xmlns:p="http://schemas.openxmlformats.org/presentationml/2006/main">
   <p:cSld>
+    <p:bg>
+      <p:bgPr>
+        <a:solidFill>
+          <a:schemeClr val="bg1"/>
+        </a:solidFill>
+        <a:effectLst/>
+      </p:bgPr>
+    </p:bg>
     <p:spTree>
       <p:nvGrpSpPr>
         <p:cNvPr id="1" name=""/>
@@ -4593,6 +11457,66 @@
           <a:chExt cx="0" cy="0"/>
         </a:xfrm>
       </p:grpSpPr>
+      <p:sp useBgFill="1">
+        <p:nvSpPr>
+          <p:cNvPr id="9" name="Rectangle 8">
+            <a:extLst>
+              <a:ext uri="{FF2B5EF4-FFF2-40B4-BE49-F238E27FC236}">
+                <a16:creationId xmlns:a16="http://schemas.microsoft.com/office/drawing/2014/main" id="{876248C8-0720-48AB-91BA-5F530BB41E5E}"/>
+              </a:ext>
+              <a:ext uri="{C183D7F6-B498-43B3-948B-1728B52AA6E4}">
+                <adec:decorative xmlns:adec="http://schemas.microsoft.com/office/drawing/2017/decorative" val="1"/>
+              </a:ext>
+            </a:extLst>
+          </p:cNvPr>
+          <p:cNvSpPr>
+            <a:spLocks noGrp="1" noRot="1" noChangeAspect="1" noMove="1" noResize="1" noEditPoints="1" noAdjustHandles="1" noChangeArrowheads="1" noChangeShapeType="1" noTextEdit="1"/>
+          </p:cNvSpPr>
+          <p:nvPr>
+            <p:extLst>
+              <p:ext uri="{386F3935-93C4-4BCD-93E2-E3B085C9AB24}">
+                <p16:designElem xmlns:p16="http://schemas.microsoft.com/office/powerpoint/2015/main" val="1"/>
+              </p:ext>
+            </p:extLst>
+          </p:nvPr>
+        </p:nvSpPr>
+        <p:spPr>
+          <a:xfrm>
+            <a:off x="-1" y="0"/>
+            <a:ext cx="12220924" cy="6858000"/>
+          </a:xfrm>
+          <a:prstGeom prst="rect">
+            <a:avLst/>
+          </a:prstGeom>
+          <a:ln>
+            <a:noFill/>
+          </a:ln>
+        </p:spPr>
+        <p:style>
+          <a:lnRef idx="2">
+            <a:schemeClr val="accent1">
+              <a:shade val="50000"/>
+            </a:schemeClr>
+          </a:lnRef>
+          <a:fillRef idx="1">
+            <a:schemeClr val="accent1"/>
+          </a:fillRef>
+          <a:effectRef idx="0">
+            <a:schemeClr val="accent1"/>
+          </a:effectRef>
+          <a:fontRef idx="minor">
+            <a:schemeClr val="lt1"/>
+          </a:fontRef>
+        </p:style>
+        <p:txBody>
+          <a:bodyPr rtlCol="0" anchor="ctr"/>
+          <a:lstStyle/>
+          <a:p>
+            <a:pPr algn="ctr"/>
+            <a:endParaRPr lang="en-US"/>
+          </a:p>
+        </p:txBody>
+      </p:sp>
       <p:sp>
         <p:nvSpPr>
           <p:cNvPr id="2" name="Заголовок 1">
@@ -4609,21 +11533,152 @@
             <p:ph type="title"/>
           </p:nvPr>
         </p:nvSpPr>
-        <p:spPr/>
+        <p:spPr>
+          <a:xfrm>
+            <a:off x="1261871" y="365760"/>
+            <a:ext cx="9858383" cy="1325562"/>
+          </a:xfrm>
+        </p:spPr>
         <p:txBody>
           <a:bodyPr>
-            <a:normAutofit fontScale="90000"/>
+            <a:normAutofit/>
           </a:bodyPr>
           <a:lstStyle/>
           <a:p>
             <a:r>
-              <a:rPr lang="ru-RU" dirty="0"/>
+              <a:rPr lang="ru-RU" sz="2800"/>
               <a:t>Сравнение преимуществ и недостатков разных больших языковых моделей</a:t>
             </a:r>
             <a:br>
-              <a:rPr lang="ru-RU" dirty="0"/>
+              <a:rPr lang="ru-RU" sz="2800"/>
             </a:br>
-            <a:endParaRPr lang="ru-RU" dirty="0"/>
+            <a:endParaRPr lang="ru-RU" sz="2800"/>
+          </a:p>
+        </p:txBody>
+      </p:sp>
+      <p:sp>
+        <p:nvSpPr>
+          <p:cNvPr id="11" name="Rectangle 10">
+            <a:extLst>
+              <a:ext uri="{FF2B5EF4-FFF2-40B4-BE49-F238E27FC236}">
+                <a16:creationId xmlns:a16="http://schemas.microsoft.com/office/drawing/2014/main" id="{523BEDA7-D0B8-4802-8168-92452653BC9F}"/>
+              </a:ext>
+              <a:ext uri="{C183D7F6-B498-43B3-948B-1728B52AA6E4}">
+                <adec:decorative xmlns:adec="http://schemas.microsoft.com/office/drawing/2017/decorative" val="1"/>
+              </a:ext>
+            </a:extLst>
+          </p:cNvPr>
+          <p:cNvSpPr>
+            <a:spLocks noGrp="1" noRot="1" noChangeAspect="1" noMove="1" noResize="1" noEditPoints="1" noAdjustHandles="1" noChangeArrowheads="1" noChangeShapeType="1" noTextEdit="1"/>
+          </p:cNvSpPr>
+          <p:nvPr>
+            <p:extLst>
+              <p:ext uri="{386F3935-93C4-4BCD-93E2-E3B085C9AB24}">
+                <p16:designElem xmlns:p16="http://schemas.microsoft.com/office/powerpoint/2015/main" val="1"/>
+              </p:ext>
+            </p:extLst>
+          </p:nvPr>
+        </p:nvSpPr>
+        <p:spPr>
+          <a:xfrm>
+            <a:off x="0" y="0"/>
+            <a:ext cx="914400" cy="6858000"/>
+          </a:xfrm>
+          <a:prstGeom prst="rect">
+            <a:avLst/>
+          </a:prstGeom>
+          <a:solidFill>
+            <a:schemeClr val="tx2">
+              <a:lumMod val="75000"/>
+            </a:schemeClr>
+          </a:solidFill>
+          <a:ln>
+            <a:noFill/>
+          </a:ln>
+        </p:spPr>
+        <p:style>
+          <a:lnRef idx="2">
+            <a:schemeClr val="accent1">
+              <a:shade val="50000"/>
+            </a:schemeClr>
+          </a:lnRef>
+          <a:fillRef idx="1">
+            <a:schemeClr val="accent1"/>
+          </a:fillRef>
+          <a:effectRef idx="0">
+            <a:schemeClr val="accent1"/>
+          </a:effectRef>
+          <a:fontRef idx="minor">
+            <a:schemeClr val="lt1"/>
+          </a:fontRef>
+        </p:style>
+        <p:txBody>
+          <a:bodyPr/>
+          <a:lstStyle/>
+          <a:p>
+            <a:endParaRPr lang="ru-RU"/>
+          </a:p>
+        </p:txBody>
+      </p:sp>
+      <p:sp>
+        <p:nvSpPr>
+          <p:cNvPr id="13" name="Rectangle 12">
+            <a:extLst>
+              <a:ext uri="{FF2B5EF4-FFF2-40B4-BE49-F238E27FC236}">
+                <a16:creationId xmlns:a16="http://schemas.microsoft.com/office/drawing/2014/main" id="{D2EFF34B-7B1A-4F9D-8CEE-A40962BC7C21}"/>
+              </a:ext>
+              <a:ext uri="{C183D7F6-B498-43B3-948B-1728B52AA6E4}">
+                <adec:decorative xmlns:adec="http://schemas.microsoft.com/office/drawing/2017/decorative" val="1"/>
+              </a:ext>
+            </a:extLst>
+          </p:cNvPr>
+          <p:cNvSpPr>
+            <a:spLocks noGrp="1" noRot="1" noChangeAspect="1" noMove="1" noResize="1" noEditPoints="1" noAdjustHandles="1" noChangeArrowheads="1" noChangeShapeType="1" noTextEdit="1"/>
+          </p:cNvSpPr>
+          <p:nvPr>
+            <p:extLst>
+              <p:ext uri="{386F3935-93C4-4BCD-93E2-E3B085C9AB24}">
+                <p16:designElem xmlns:p16="http://schemas.microsoft.com/office/powerpoint/2015/main" val="1"/>
+              </p:ext>
+            </p:extLst>
+          </p:nvPr>
+        </p:nvSpPr>
+        <p:spPr>
+          <a:xfrm>
+            <a:off x="11763724" y="0"/>
+            <a:ext cx="457200" cy="6858000"/>
+          </a:xfrm>
+          <a:prstGeom prst="rect">
+            <a:avLst/>
+          </a:prstGeom>
+          <a:solidFill>
+            <a:schemeClr val="accent1"/>
+          </a:solidFill>
+          <a:ln>
+            <a:noFill/>
+          </a:ln>
+        </p:spPr>
+        <p:style>
+          <a:lnRef idx="2">
+            <a:schemeClr val="accent1">
+              <a:shade val="50000"/>
+            </a:schemeClr>
+          </a:lnRef>
+          <a:fillRef idx="1">
+            <a:schemeClr val="accent1"/>
+          </a:fillRef>
+          <a:effectRef idx="0">
+            <a:schemeClr val="accent1"/>
+          </a:effectRef>
+          <a:fontRef idx="minor">
+            <a:schemeClr val="lt1"/>
+          </a:fontRef>
+        </p:style>
+        <p:txBody>
+          <a:bodyPr/>
+          <a:lstStyle/>
+          <a:p>
+            <a:endParaRPr lang="ru-RU"/>
           </a:p>
         </p:txBody>
       </p:sp>
@@ -4643,14 +11698,14 @@
             <p:ph idx="1"/>
             <p:extLst>
               <p:ext uri="{D42A27DB-BD31-4B8C-83A1-F6EECF244321}">
-                <p14:modId xmlns:p14="http://schemas.microsoft.com/office/powerpoint/2010/main" val="1139658620"/>
+                <p14:modId xmlns:p14="http://schemas.microsoft.com/office/powerpoint/2010/main" val="137554892"/>
               </p:ext>
             </p:extLst>
           </p:nvPr>
         </p:nvGraphicFramePr>
         <p:xfrm>
-          <a:off x="883920" y="1320800"/>
-          <a:ext cx="9946639" cy="4859336"/>
+          <a:off x="1071746" y="1508760"/>
+          <a:ext cx="10556373" cy="4983477"/>
         </p:xfrm>
         <a:graphic>
           <a:graphicData uri="http://schemas.openxmlformats.org/drawingml/2006/table">
@@ -4659,35 +11714,35 @@
                 <a:tableStyleId>{5C22544A-7EE6-4342-B048-85BDC9FD1C3A}</a:tableStyleId>
               </a:tblPr>
               <a:tblGrid>
-                <a:gridCol w="1669475">
+                <a:gridCol w="1532569">
                   <a:extLst>
                     <a:ext uri="{9D8B030D-6E8A-4147-A177-3AD203B41FA5}">
                       <a16:colId xmlns:a16="http://schemas.microsoft.com/office/drawing/2014/main" val="1756864948"/>
                     </a:ext>
                   </a:extLst>
                 </a:gridCol>
-                <a:gridCol w="1750004">
+                <a:gridCol w="1837254">
                   <a:extLst>
                     <a:ext uri="{9D8B030D-6E8A-4147-A177-3AD203B41FA5}">
                       <a16:colId xmlns:a16="http://schemas.microsoft.com/office/drawing/2014/main" val="2888553393"/>
                     </a:ext>
                   </a:extLst>
                 </a:gridCol>
-                <a:gridCol w="2372574">
+                <a:gridCol w="2602181">
                   <a:extLst>
                     <a:ext uri="{9D8B030D-6E8A-4147-A177-3AD203B41FA5}">
                       <a16:colId xmlns:a16="http://schemas.microsoft.com/office/drawing/2014/main" val="2670324195"/>
                     </a:ext>
                   </a:extLst>
                 </a:gridCol>
-                <a:gridCol w="2144401">
+                <a:gridCol w="2362184">
                   <a:extLst>
                     <a:ext uri="{9D8B030D-6E8A-4147-A177-3AD203B41FA5}">
                       <a16:colId xmlns:a16="http://schemas.microsoft.com/office/drawing/2014/main" val="2312963906"/>
                     </a:ext>
                   </a:extLst>
                 </a:gridCol>
-                <a:gridCol w="2010185">
+                <a:gridCol w="2222185">
                   <a:extLst>
                     <a:ext uri="{9D8B030D-6E8A-4147-A177-3AD203B41FA5}">
                       <a16:colId xmlns:a16="http://schemas.microsoft.com/office/drawing/2014/main" val="1339342657"/>
@@ -4695,7 +11750,7 @@
                   </a:extLst>
                 </a:gridCol>
               </a:tblGrid>
-              <a:tr h="409383">
+              <a:tr h="340075">
                 <a:tc>
                   <a:txBody>
                     <a:bodyPr/>
@@ -4711,12 +11766,12 @@
                         <a:buNone/>
                       </a:pPr>
                       <a:r>
-                        <a:rPr lang="ru-RU" sz="1100" kern="100">
+                        <a:rPr lang="ru-RU" sz="1200" kern="100" dirty="0">
                           <a:effectLst/>
                         </a:rPr>
                         <a:t>Название</a:t>
                       </a:r>
-                      <a:endParaRPr lang="ru-RU" sz="1100" kern="100">
+                      <a:endParaRPr lang="ru-RU" sz="1200" kern="100" dirty="0">
                         <a:effectLst/>
                         <a:latin typeface="Aptos" panose="020B0004020202020204" pitchFamily="34" charset="0"/>
                         <a:ea typeface="Aptos" panose="020B0004020202020204" pitchFamily="34" charset="0"/>
@@ -4724,7 +11779,7 @@
                       </a:endParaRPr>
                     </a:p>
                   </a:txBody>
-                  <a:tcPr marL="41375" marR="41375" marT="0" marB="0"/>
+                  <a:tcPr marL="40565" marR="40565" marT="0" marB="0"/>
                 </a:tc>
                 <a:tc>
                   <a:txBody>
@@ -4741,12 +11796,12 @@
                         <a:buNone/>
                       </a:pPr>
                       <a:r>
-                        <a:rPr lang="ru-RU" sz="1100" kern="100">
+                        <a:rPr lang="ru-RU" sz="1200" kern="100">
                           <a:effectLst/>
                         </a:rPr>
                         <a:t>Разработчик</a:t>
                       </a:r>
-                      <a:endParaRPr lang="ru-RU" sz="1100" kern="100">
+                      <a:endParaRPr lang="ru-RU" sz="1200" kern="100">
                         <a:effectLst/>
                         <a:latin typeface="Aptos" panose="020B0004020202020204" pitchFamily="34" charset="0"/>
                         <a:ea typeface="Aptos" panose="020B0004020202020204" pitchFamily="34" charset="0"/>
@@ -4754,7 +11809,7 @@
                       </a:endParaRPr>
                     </a:p>
                   </a:txBody>
-                  <a:tcPr marL="41375" marR="41375" marT="0" marB="0"/>
+                  <a:tcPr marL="40565" marR="40565" marT="0" marB="0"/>
                 </a:tc>
                 <a:tc>
                   <a:txBody>
@@ -4771,12 +11826,12 @@
                         <a:buNone/>
                       </a:pPr>
                       <a:r>
-                        <a:rPr lang="ru-RU" sz="1100" kern="100">
+                        <a:rPr lang="ru-RU" sz="1200" kern="100" dirty="0">
                           <a:effectLst/>
                         </a:rPr>
                         <a:t>Плюсы</a:t>
                       </a:r>
-                      <a:endParaRPr lang="ru-RU" sz="1100" kern="100">
+                      <a:endParaRPr lang="ru-RU" sz="1200" kern="100" dirty="0">
                         <a:effectLst/>
                         <a:latin typeface="Aptos" panose="020B0004020202020204" pitchFamily="34" charset="0"/>
                         <a:ea typeface="Aptos" panose="020B0004020202020204" pitchFamily="34" charset="0"/>
@@ -4784,7 +11839,7 @@
                       </a:endParaRPr>
                     </a:p>
                   </a:txBody>
-                  <a:tcPr marL="41375" marR="41375" marT="0" marB="0"/>
+                  <a:tcPr marL="40565" marR="40565" marT="0" marB="0"/>
                 </a:tc>
                 <a:tc>
                   <a:txBody>
@@ -4801,12 +11856,12 @@
                         <a:buNone/>
                       </a:pPr>
                       <a:r>
-                        <a:rPr lang="ru-RU" sz="1100" kern="100">
+                        <a:rPr lang="ru-RU" sz="1200" kern="100">
                           <a:effectLst/>
                         </a:rPr>
                         <a:t>Минусы</a:t>
                       </a:r>
-                      <a:endParaRPr lang="ru-RU" sz="1100" kern="100">
+                      <a:endParaRPr lang="ru-RU" sz="1200" kern="100">
                         <a:effectLst/>
                         <a:latin typeface="Aptos" panose="020B0004020202020204" pitchFamily="34" charset="0"/>
                         <a:ea typeface="Aptos" panose="020B0004020202020204" pitchFamily="34" charset="0"/>
@@ -4814,7 +11869,7 @@
                       </a:endParaRPr>
                     </a:p>
                   </a:txBody>
-                  <a:tcPr marL="41375" marR="41375" marT="0" marB="0"/>
+                  <a:tcPr marL="40565" marR="40565" marT="0" marB="0"/>
                 </a:tc>
                 <a:tc>
                   <a:txBody>
@@ -4831,12 +11886,12 @@
                         <a:buNone/>
                       </a:pPr>
                       <a:r>
-                        <a:rPr lang="ru-RU" sz="1100" kern="100">
+                        <a:rPr lang="ru-RU" sz="1200" kern="100">
                           <a:effectLst/>
                         </a:rPr>
                         <a:t>Особенности в обучении</a:t>
                       </a:r>
-                      <a:endParaRPr lang="ru-RU" sz="1100" kern="100">
+                      <a:endParaRPr lang="ru-RU" sz="1200" kern="100">
                         <a:effectLst/>
                         <a:latin typeface="Aptos" panose="020B0004020202020204" pitchFamily="34" charset="0"/>
                         <a:ea typeface="Aptos" panose="020B0004020202020204" pitchFamily="34" charset="0"/>
@@ -4844,7 +11899,7 @@
                       </a:endParaRPr>
                     </a:p>
                   </a:txBody>
-                  <a:tcPr marL="41375" marR="41375" marT="0" marB="0"/>
+                  <a:tcPr marL="40565" marR="40565" marT="0" marB="0"/>
                 </a:tc>
                 <a:extLst>
                   <a:ext uri="{0D108BD9-81ED-4DB2-BD59-A6C34878D82A}">
@@ -4852,7 +11907,7 @@
                   </a:ext>
                 </a:extLst>
               </a:tr>
-              <a:tr h="917466">
+              <a:tr h="967702">
                 <a:tc>
                   <a:txBody>
                     <a:bodyPr/>
@@ -4868,12 +11923,12 @@
                         <a:buNone/>
                       </a:pPr>
                       <a:r>
-                        <a:rPr lang="en-US" sz="1100" kern="100">
+                        <a:rPr lang="en-US" sz="1200" kern="100">
                           <a:effectLst/>
                         </a:rPr>
                         <a:t>ChatGPT</a:t>
                       </a:r>
-                      <a:endParaRPr lang="ru-RU" sz="1100" kern="100">
+                      <a:endParaRPr lang="ru-RU" sz="1200" kern="100">
                         <a:effectLst/>
                         <a:latin typeface="Aptos" panose="020B0004020202020204" pitchFamily="34" charset="0"/>
                         <a:ea typeface="Aptos" panose="020B0004020202020204" pitchFamily="34" charset="0"/>
@@ -4881,7 +11936,7 @@
                       </a:endParaRPr>
                     </a:p>
                   </a:txBody>
-                  <a:tcPr marL="41375" marR="41375" marT="0" marB="0"/>
+                  <a:tcPr marL="40565" marR="40565" marT="0" marB="0"/>
                 </a:tc>
                 <a:tc>
                   <a:txBody>
@@ -4898,12 +11953,12 @@
                         <a:buNone/>
                       </a:pPr>
                       <a:r>
-                        <a:rPr lang="en-US" sz="1100" kern="100">
+                        <a:rPr lang="en-US" sz="1200" kern="100" dirty="0">
                           <a:effectLst/>
                         </a:rPr>
                         <a:t>OpenAI</a:t>
                       </a:r>
-                      <a:endParaRPr lang="ru-RU" sz="1100" kern="100">
+                      <a:endParaRPr lang="ru-RU" sz="1200" kern="100" dirty="0">
                         <a:effectLst/>
                         <a:latin typeface="Aptos" panose="020B0004020202020204" pitchFamily="34" charset="0"/>
                         <a:ea typeface="Aptos" panose="020B0004020202020204" pitchFamily="34" charset="0"/>
@@ -4911,7 +11966,7 @@
                       </a:endParaRPr>
                     </a:p>
                   </a:txBody>
-                  <a:tcPr marL="41375" marR="41375" marT="0" marB="0"/>
+                  <a:tcPr marL="40565" marR="40565" marT="0" marB="0"/>
                 </a:tc>
                 <a:tc>
                   <a:txBody>
@@ -4928,12 +11983,12 @@
                         <a:buNone/>
                       </a:pPr>
                       <a:r>
-                        <a:rPr lang="ru-RU" sz="1100" kern="100">
+                        <a:rPr lang="ru-RU" sz="1200" kern="100">
                           <a:effectLst/>
                         </a:rPr>
                         <a:t>Высокое качество ответов, универсальность, поддержка диалога, генерация учебных материалов</a:t>
                       </a:r>
-                      <a:endParaRPr lang="ru-RU" sz="1100" kern="100">
+                      <a:endParaRPr lang="ru-RU" sz="1200" kern="100">
                         <a:effectLst/>
                         <a:latin typeface="Aptos" panose="020B0004020202020204" pitchFamily="34" charset="0"/>
                         <a:ea typeface="Aptos" panose="020B0004020202020204" pitchFamily="34" charset="0"/>
@@ -4941,7 +11996,7 @@
                       </a:endParaRPr>
                     </a:p>
                   </a:txBody>
-                  <a:tcPr marL="41375" marR="41375" marT="0" marB="0"/>
+                  <a:tcPr marL="40565" marR="40565" marT="0" marB="0"/>
                 </a:tc>
                 <a:tc>
                   <a:txBody>
@@ -4958,12 +12013,12 @@
                         <a:buNone/>
                       </a:pPr>
                       <a:r>
-                        <a:rPr lang="ru-RU" sz="1100" kern="100">
+                        <a:rPr lang="ru-RU" sz="1200" kern="100">
                           <a:effectLst/>
                         </a:rPr>
                         <a:t>Возможны «галлюцинации», риск списывания, платные функции</a:t>
                       </a:r>
-                      <a:endParaRPr lang="ru-RU" sz="1100" kern="100">
+                      <a:endParaRPr lang="ru-RU" sz="1200" kern="100">
                         <a:effectLst/>
                         <a:latin typeface="Aptos" panose="020B0004020202020204" pitchFamily="34" charset="0"/>
                         <a:ea typeface="Aptos" panose="020B0004020202020204" pitchFamily="34" charset="0"/>
@@ -4971,7 +12026,7 @@
                       </a:endParaRPr>
                     </a:p>
                   </a:txBody>
-                  <a:tcPr marL="41375" marR="41375" marT="0" marB="0"/>
+                  <a:tcPr marL="40565" marR="40565" marT="0" marB="0"/>
                 </a:tc>
                 <a:tc>
                   <a:txBody>
@@ -4988,12 +12043,12 @@
                         <a:buNone/>
                       </a:pPr>
                       <a:r>
-                        <a:rPr lang="ru-RU" sz="1100" kern="100">
+                        <a:rPr lang="ru-RU" sz="1200" kern="100">
                           <a:effectLst/>
                         </a:rPr>
                         <a:t>Персонализация обучения, помощь в написании работ, объяснение сложных тем</a:t>
                       </a:r>
-                      <a:endParaRPr lang="ru-RU" sz="1100" kern="100">
+                      <a:endParaRPr lang="ru-RU" sz="1200" kern="100">
                         <a:effectLst/>
                         <a:latin typeface="Aptos" panose="020B0004020202020204" pitchFamily="34" charset="0"/>
                         <a:ea typeface="Aptos" panose="020B0004020202020204" pitchFamily="34" charset="0"/>
@@ -5001,7 +12056,7 @@
                       </a:endParaRPr>
                     </a:p>
                   </a:txBody>
-                  <a:tcPr marL="41375" marR="41375" marT="0" marB="0"/>
+                  <a:tcPr marL="40565" marR="40565" marT="0" marB="0"/>
                 </a:tc>
                 <a:extLst>
                   <a:ext uri="{0D108BD9-81ED-4DB2-BD59-A6C34878D82A}">
@@ -5009,7 +12064,7 @@
                   </a:ext>
                 </a:extLst>
               </a:tr>
-              <a:tr h="785611">
+              <a:tr h="735140">
                 <a:tc>
                   <a:txBody>
                     <a:bodyPr/>
@@ -5025,12 +12080,12 @@
                         <a:buNone/>
                       </a:pPr>
                       <a:r>
-                        <a:rPr lang="en-US" sz="1100" kern="100">
+                        <a:rPr lang="en-US" sz="1200" kern="100">
                           <a:effectLst/>
                         </a:rPr>
                         <a:t>DeepSeek</a:t>
                       </a:r>
-                      <a:endParaRPr lang="ru-RU" sz="1100" kern="100">
+                      <a:endParaRPr lang="ru-RU" sz="1200" kern="100">
                         <a:effectLst/>
                         <a:latin typeface="Aptos" panose="020B0004020202020204" pitchFamily="34" charset="0"/>
                         <a:ea typeface="Aptos" panose="020B0004020202020204" pitchFamily="34" charset="0"/>
@@ -5038,7 +12093,7 @@
                       </a:endParaRPr>
                     </a:p>
                   </a:txBody>
-                  <a:tcPr marL="41375" marR="41375" marT="0" marB="0"/>
+                  <a:tcPr marL="40565" marR="40565" marT="0" marB="0"/>
                 </a:tc>
                 <a:tc>
                   <a:txBody>
@@ -5055,12 +12110,12 @@
                         <a:buNone/>
                       </a:pPr>
                       <a:r>
-                        <a:rPr lang="en-US" sz="1100" kern="100">
+                        <a:rPr lang="en-US" sz="1200" kern="100">
                           <a:effectLst/>
                         </a:rPr>
                         <a:t>DeepSeek AI</a:t>
                       </a:r>
-                      <a:endParaRPr lang="ru-RU" sz="1100" kern="100">
+                      <a:endParaRPr lang="ru-RU" sz="1200" kern="100">
                         <a:effectLst/>
                         <a:latin typeface="Aptos" panose="020B0004020202020204" pitchFamily="34" charset="0"/>
                         <a:ea typeface="Aptos" panose="020B0004020202020204" pitchFamily="34" charset="0"/>
@@ -5068,7 +12123,7 @@
                       </a:endParaRPr>
                     </a:p>
                   </a:txBody>
-                  <a:tcPr marL="41375" marR="41375" marT="0" marB="0"/>
+                  <a:tcPr marL="40565" marR="40565" marT="0" marB="0"/>
                 </a:tc>
                 <a:tc>
                   <a:txBody>
@@ -5085,12 +12140,12 @@
                         <a:buNone/>
                       </a:pPr>
                       <a:r>
-                        <a:rPr lang="ru-RU" sz="1100" kern="100">
+                        <a:rPr lang="ru-RU" sz="1200" kern="100">
                           <a:effectLst/>
                         </a:rPr>
                         <a:t>Сильные математические и логические способности, хорош в программировании</a:t>
                       </a:r>
-                      <a:endParaRPr lang="ru-RU" sz="1100" kern="100">
+                      <a:endParaRPr lang="ru-RU" sz="1200" kern="100">
                         <a:effectLst/>
                         <a:latin typeface="Aptos" panose="020B0004020202020204" pitchFamily="34" charset="0"/>
                         <a:ea typeface="Aptos" panose="020B0004020202020204" pitchFamily="34" charset="0"/>
@@ -5098,7 +12153,7 @@
                       </a:endParaRPr>
                     </a:p>
                   </a:txBody>
-                  <a:tcPr marL="41375" marR="41375" marT="0" marB="0"/>
+                  <a:tcPr marL="40565" marR="40565" marT="0" marB="0"/>
                 </a:tc>
                 <a:tc>
                   <a:txBody>
@@ -5115,12 +12170,12 @@
                         <a:buNone/>
                       </a:pPr>
                       <a:r>
-                        <a:rPr lang="ru-RU" sz="1100" kern="100">
+                        <a:rPr lang="ru-RU" sz="1200" kern="100" dirty="0">
                           <a:effectLst/>
                         </a:rPr>
                         <a:t>Менее развитый диалог, ограниченная адаптация под образование</a:t>
                       </a:r>
-                      <a:endParaRPr lang="ru-RU" sz="1100" kern="100">
+                      <a:endParaRPr lang="ru-RU" sz="1200" kern="100" dirty="0">
                         <a:effectLst/>
                         <a:latin typeface="Aptos" panose="020B0004020202020204" pitchFamily="34" charset="0"/>
                         <a:ea typeface="Aptos" panose="020B0004020202020204" pitchFamily="34" charset="0"/>
@@ -5128,7 +12183,7 @@
                       </a:endParaRPr>
                     </a:p>
                   </a:txBody>
-                  <a:tcPr marL="41375" marR="41375" marT="0" marB="0"/>
+                  <a:tcPr marL="40565" marR="40565" marT="0" marB="0"/>
                 </a:tc>
                 <a:tc>
                   <a:txBody>
@@ -5145,12 +12200,12 @@
                         <a:buNone/>
                       </a:pPr>
                       <a:r>
-                        <a:rPr lang="ru-RU" sz="1100" kern="100">
+                        <a:rPr lang="ru-RU" sz="1200" kern="100">
                           <a:effectLst/>
                         </a:rPr>
                         <a:t>Полезен для технических дисциплин и решения задач</a:t>
                       </a:r>
-                      <a:endParaRPr lang="ru-RU" sz="1100" kern="100">
+                      <a:endParaRPr lang="ru-RU" sz="1200" kern="100">
                         <a:effectLst/>
                         <a:latin typeface="Aptos" panose="020B0004020202020204" pitchFamily="34" charset="0"/>
                         <a:ea typeface="Aptos" panose="020B0004020202020204" pitchFamily="34" charset="0"/>
@@ -5158,7 +12213,7 @@
                       </a:endParaRPr>
                     </a:p>
                   </a:txBody>
-                  <a:tcPr marL="41375" marR="41375" marT="0" marB="0"/>
+                  <a:tcPr marL="40565" marR="40565" marT="0" marB="0"/>
                 </a:tc>
                 <a:extLst>
                   <a:ext uri="{0D108BD9-81ED-4DB2-BD59-A6C34878D82A}">
@@ -5166,7 +12221,7 @@
                   </a:ext>
                 </a:extLst>
               </a:tr>
-              <a:tr h="653755">
+              <a:tr h="735140">
                 <a:tc>
                   <a:txBody>
                     <a:bodyPr/>
@@ -5182,12 +12237,12 @@
                         <a:buNone/>
                       </a:pPr>
                       <a:r>
-                        <a:rPr lang="en-US" sz="1100" kern="100">
+                        <a:rPr lang="en-US" sz="1200" kern="100">
                           <a:effectLst/>
                         </a:rPr>
                         <a:t>Qwen</a:t>
                       </a:r>
-                      <a:endParaRPr lang="ru-RU" sz="1100" kern="100">
+                      <a:endParaRPr lang="ru-RU" sz="1200" kern="100">
                         <a:effectLst/>
                         <a:latin typeface="Aptos" panose="020B0004020202020204" pitchFamily="34" charset="0"/>
                         <a:ea typeface="Aptos" panose="020B0004020202020204" pitchFamily="34" charset="0"/>
@@ -5195,7 +12250,7 @@
                       </a:endParaRPr>
                     </a:p>
                   </a:txBody>
-                  <a:tcPr marL="41375" marR="41375" marT="0" marB="0"/>
+                  <a:tcPr marL="40565" marR="40565" marT="0" marB="0"/>
                 </a:tc>
                 <a:tc>
                   <a:txBody>
@@ -5212,12 +12267,12 @@
                         <a:buNone/>
                       </a:pPr>
                       <a:r>
-                        <a:rPr lang="en-US" sz="1100" kern="100">
+                        <a:rPr lang="en-US" sz="1200" kern="100">
                           <a:effectLst/>
                         </a:rPr>
                         <a:t>Alibaba</a:t>
                       </a:r>
-                      <a:endParaRPr lang="ru-RU" sz="1100" kern="100">
+                      <a:endParaRPr lang="ru-RU" sz="1200" kern="100">
                         <a:effectLst/>
                         <a:latin typeface="Aptos" panose="020B0004020202020204" pitchFamily="34" charset="0"/>
                         <a:ea typeface="Aptos" panose="020B0004020202020204" pitchFamily="34" charset="0"/>
@@ -5225,7 +12280,7 @@
                       </a:endParaRPr>
                     </a:p>
                   </a:txBody>
-                  <a:tcPr marL="41375" marR="41375" marT="0" marB="0"/>
+                  <a:tcPr marL="40565" marR="40565" marT="0" marB="0"/>
                 </a:tc>
                 <a:tc>
                   <a:txBody>
@@ -5242,12 +12297,12 @@
                         <a:buNone/>
                       </a:pPr>
                       <a:r>
-                        <a:rPr lang="ru-RU" sz="1100" kern="100">
+                        <a:rPr lang="ru-RU" sz="1200" kern="100">
                           <a:effectLst/>
                         </a:rPr>
                         <a:t>Хорошая мультимодальность, поддержка разных языков</a:t>
                       </a:r>
-                      <a:endParaRPr lang="ru-RU" sz="1100" kern="100">
+                      <a:endParaRPr lang="ru-RU" sz="1200" kern="100">
                         <a:effectLst/>
                         <a:latin typeface="Aptos" panose="020B0004020202020204" pitchFamily="34" charset="0"/>
                         <a:ea typeface="Aptos" panose="020B0004020202020204" pitchFamily="34" charset="0"/>
@@ -5255,7 +12310,7 @@
                       </a:endParaRPr>
                     </a:p>
                   </a:txBody>
-                  <a:tcPr marL="41375" marR="41375" marT="0" marB="0"/>
+                  <a:tcPr marL="40565" marR="40565" marT="0" marB="0"/>
                 </a:tc>
                 <a:tc>
                   <a:txBody>
@@ -5272,12 +12327,12 @@
                         <a:buNone/>
                       </a:pPr>
                       <a:r>
-                        <a:rPr lang="ru-RU" sz="1100" kern="100">
+                        <a:rPr lang="ru-RU" sz="1200" kern="100">
                           <a:effectLst/>
                         </a:rPr>
                         <a:t>Меньше распространён в образовании, чем ChatGPT</a:t>
                       </a:r>
-                      <a:endParaRPr lang="ru-RU" sz="1100" kern="100">
+                      <a:endParaRPr lang="ru-RU" sz="1200" kern="100">
                         <a:effectLst/>
                         <a:latin typeface="Aptos" panose="020B0004020202020204" pitchFamily="34" charset="0"/>
                         <a:ea typeface="Aptos" panose="020B0004020202020204" pitchFamily="34" charset="0"/>
@@ -5285,7 +12340,7 @@
                       </a:endParaRPr>
                     </a:p>
                   </a:txBody>
-                  <a:tcPr marL="41375" marR="41375" marT="0" marB="0"/>
+                  <a:tcPr marL="40565" marR="40565" marT="0" marB="0"/>
                 </a:tc>
                 <a:tc>
                   <a:txBody>
@@ -5302,12 +12357,12 @@
                         <a:buNone/>
                       </a:pPr>
                       <a:r>
-                        <a:rPr lang="ru-RU" sz="1100" kern="100">
+                        <a:rPr lang="ru-RU" sz="1200" kern="100">
                           <a:effectLst/>
                         </a:rPr>
                         <a:t>Подходит для работы с текстами и мультимедиа в обучении</a:t>
                       </a:r>
-                      <a:endParaRPr lang="ru-RU" sz="1100" kern="100">
+                      <a:endParaRPr lang="ru-RU" sz="1200" kern="100">
                         <a:effectLst/>
                         <a:latin typeface="Aptos" panose="020B0004020202020204" pitchFamily="34" charset="0"/>
                         <a:ea typeface="Aptos" panose="020B0004020202020204" pitchFamily="34" charset="0"/>
@@ -5315,7 +12370,7 @@
                       </a:endParaRPr>
                     </a:p>
                   </a:txBody>
-                  <a:tcPr marL="41375" marR="41375" marT="0" marB="0"/>
+                  <a:tcPr marL="40565" marR="40565" marT="0" marB="0"/>
                 </a:tc>
                 <a:extLst>
                   <a:ext uri="{0D108BD9-81ED-4DB2-BD59-A6C34878D82A}">
@@ -5323,7 +12378,7 @@
                   </a:ext>
                 </a:extLst>
               </a:tr>
-              <a:tr h="785611">
+              <a:tr h="735140">
                 <a:tc>
                   <a:txBody>
                     <a:bodyPr/>
@@ -5339,12 +12394,12 @@
                         <a:buNone/>
                       </a:pPr>
                       <a:r>
-                        <a:rPr lang="en-US" sz="1100" kern="100">
+                        <a:rPr lang="en-US" sz="1200" kern="100">
                           <a:effectLst/>
                         </a:rPr>
                         <a:t>Gemini</a:t>
                       </a:r>
-                      <a:endParaRPr lang="ru-RU" sz="1100" kern="100">
+                      <a:endParaRPr lang="ru-RU" sz="1200" kern="100">
                         <a:effectLst/>
                         <a:latin typeface="Aptos" panose="020B0004020202020204" pitchFamily="34" charset="0"/>
                         <a:ea typeface="Aptos" panose="020B0004020202020204" pitchFamily="34" charset="0"/>
@@ -5352,7 +12407,7 @@
                       </a:endParaRPr>
                     </a:p>
                   </a:txBody>
-                  <a:tcPr marL="41375" marR="41375" marT="0" marB="0"/>
+                  <a:tcPr marL="40565" marR="40565" marT="0" marB="0"/>
                 </a:tc>
                 <a:tc>
                   <a:txBody>
@@ -5369,12 +12424,12 @@
                         <a:buNone/>
                       </a:pPr>
                       <a:r>
-                        <a:rPr lang="en-US" sz="1100" kern="100">
+                        <a:rPr lang="en-US" sz="1200" kern="100">
                           <a:effectLst/>
                         </a:rPr>
                         <a:t>Google</a:t>
                       </a:r>
-                      <a:endParaRPr lang="ru-RU" sz="1100" kern="100">
+                      <a:endParaRPr lang="ru-RU" sz="1200" kern="100">
                         <a:effectLst/>
                         <a:latin typeface="Aptos" panose="020B0004020202020204" pitchFamily="34" charset="0"/>
                         <a:ea typeface="Aptos" panose="020B0004020202020204" pitchFamily="34" charset="0"/>
@@ -5382,7 +12437,7 @@
                       </a:endParaRPr>
                     </a:p>
                   </a:txBody>
-                  <a:tcPr marL="41375" marR="41375" marT="0" marB="0"/>
+                  <a:tcPr marL="40565" marR="40565" marT="0" marB="0"/>
                 </a:tc>
                 <a:tc>
                   <a:txBody>
@@ -5399,12 +12454,12 @@
                         <a:buNone/>
                       </a:pPr>
                       <a:r>
-                        <a:rPr lang="ru-RU" sz="1100" kern="100">
+                        <a:rPr lang="ru-RU" sz="1200" kern="100">
                           <a:effectLst/>
                         </a:rPr>
                         <a:t>Доступ к актуальной информации, мультимодальность</a:t>
                       </a:r>
-                      <a:endParaRPr lang="ru-RU" sz="1100" kern="100">
+                      <a:endParaRPr lang="ru-RU" sz="1200" kern="100">
                         <a:effectLst/>
                         <a:latin typeface="Aptos" panose="020B0004020202020204" pitchFamily="34" charset="0"/>
                         <a:ea typeface="Aptos" panose="020B0004020202020204" pitchFamily="34" charset="0"/>
@@ -5412,7 +12467,7 @@
                       </a:endParaRPr>
                     </a:p>
                   </a:txBody>
-                  <a:tcPr marL="41375" marR="41375" marT="0" marB="0"/>
+                  <a:tcPr marL="40565" marR="40565" marT="0" marB="0"/>
                 </a:tc>
                 <a:tc>
                   <a:txBody>
@@ -5429,12 +12484,12 @@
                         <a:buNone/>
                       </a:pPr>
                       <a:r>
-                        <a:rPr lang="ru-RU" sz="1100" kern="100">
+                        <a:rPr lang="ru-RU" sz="1200" kern="100">
                           <a:effectLst/>
                         </a:rPr>
                         <a:t>Иногда поверхностные ответы, зависит от экосистемы Google</a:t>
                       </a:r>
-                      <a:endParaRPr lang="ru-RU" sz="1100" kern="100">
+                      <a:endParaRPr lang="ru-RU" sz="1200" kern="100">
                         <a:effectLst/>
                         <a:latin typeface="Aptos" panose="020B0004020202020204" pitchFamily="34" charset="0"/>
                         <a:ea typeface="Aptos" panose="020B0004020202020204" pitchFamily="34" charset="0"/>
@@ -5442,7 +12497,7 @@
                       </a:endParaRPr>
                     </a:p>
                   </a:txBody>
-                  <a:tcPr marL="41375" marR="41375" marT="0" marB="0"/>
+                  <a:tcPr marL="40565" marR="40565" marT="0" marB="0"/>
                 </a:tc>
                 <a:tc>
                   <a:txBody>
@@ -5459,12 +12514,12 @@
                         <a:buNone/>
                       </a:pPr>
                       <a:r>
-                        <a:rPr lang="ru-RU" sz="1100" kern="100">
+                        <a:rPr lang="ru-RU" sz="1200" kern="100">
                           <a:effectLst/>
                         </a:rPr>
                         <a:t>Полезен для поиска и анализа информации, обучения через примеры</a:t>
                       </a:r>
-                      <a:endParaRPr lang="ru-RU" sz="1100" kern="100">
+                      <a:endParaRPr lang="ru-RU" sz="1200" kern="100">
                         <a:effectLst/>
                         <a:latin typeface="Aptos" panose="020B0004020202020204" pitchFamily="34" charset="0"/>
                         <a:ea typeface="Aptos" panose="020B0004020202020204" pitchFamily="34" charset="0"/>
@@ -5472,7 +12527,7 @@
                       </a:endParaRPr>
                     </a:p>
                   </a:txBody>
-                  <a:tcPr marL="41375" marR="41375" marT="0" marB="0"/>
+                  <a:tcPr marL="40565" marR="40565" marT="0" marB="0"/>
                 </a:tc>
                 <a:extLst>
                   <a:ext uri="{0D108BD9-81ED-4DB2-BD59-A6C34878D82A}">
@@ -5480,7 +12535,7 @@
                   </a:ext>
                 </a:extLst>
               </a:tr>
-              <a:tr h="653755">
+              <a:tr h="735140">
                 <a:tc>
                   <a:txBody>
                     <a:bodyPr/>
@@ -5496,12 +12551,12 @@
                         <a:buNone/>
                       </a:pPr>
                       <a:r>
-                        <a:rPr lang="ru-RU" sz="1100" kern="100">
+                        <a:rPr lang="ru-RU" sz="1200" kern="100">
                           <a:effectLst/>
                         </a:rPr>
                         <a:t>Алиса</a:t>
                       </a:r>
-                      <a:endParaRPr lang="ru-RU" sz="1100" kern="100">
+                      <a:endParaRPr lang="ru-RU" sz="1200" kern="100">
                         <a:effectLst/>
                         <a:latin typeface="Aptos" panose="020B0004020202020204" pitchFamily="34" charset="0"/>
                         <a:ea typeface="Aptos" panose="020B0004020202020204" pitchFamily="34" charset="0"/>
@@ -5509,7 +12564,7 @@
                       </a:endParaRPr>
                     </a:p>
                   </a:txBody>
-                  <a:tcPr marL="41375" marR="41375" marT="0" marB="0"/>
+                  <a:tcPr marL="40565" marR="40565" marT="0" marB="0"/>
                 </a:tc>
                 <a:tc>
                   <a:txBody>
@@ -5526,12 +12581,12 @@
                         <a:buNone/>
                       </a:pPr>
                       <a:r>
-                        <a:rPr lang="en-US" sz="1100" kern="100">
+                        <a:rPr lang="en-US" sz="1200" kern="100">
                           <a:effectLst/>
                         </a:rPr>
                         <a:t>Яндекс</a:t>
                       </a:r>
-                      <a:endParaRPr lang="ru-RU" sz="1100" kern="100">
+                      <a:endParaRPr lang="ru-RU" sz="1200" kern="100">
                         <a:effectLst/>
                         <a:latin typeface="Aptos" panose="020B0004020202020204" pitchFamily="34" charset="0"/>
                         <a:ea typeface="Aptos" panose="020B0004020202020204" pitchFamily="34" charset="0"/>
@@ -5539,7 +12594,7 @@
                       </a:endParaRPr>
                     </a:p>
                   </a:txBody>
-                  <a:tcPr marL="41375" marR="41375" marT="0" marB="0"/>
+                  <a:tcPr marL="40565" marR="40565" marT="0" marB="0"/>
                 </a:tc>
                 <a:tc>
                   <a:txBody>
@@ -5556,12 +12611,12 @@
                         <a:buNone/>
                       </a:pPr>
                       <a:r>
-                        <a:rPr lang="ru-RU" sz="1100" kern="100">
+                        <a:rPr lang="ru-RU" sz="1200" kern="100">
                           <a:effectLst/>
                         </a:rPr>
                         <a:t>Хорошо понимает русский язык, доступность</a:t>
                       </a:r>
-                      <a:endParaRPr lang="ru-RU" sz="1100" kern="100">
+                      <a:endParaRPr lang="ru-RU" sz="1200" kern="100">
                         <a:effectLst/>
                         <a:latin typeface="Aptos" panose="020B0004020202020204" pitchFamily="34" charset="0"/>
                         <a:ea typeface="Aptos" panose="020B0004020202020204" pitchFamily="34" charset="0"/>
@@ -5569,7 +12624,7 @@
                       </a:endParaRPr>
                     </a:p>
                   </a:txBody>
-                  <a:tcPr marL="41375" marR="41375" marT="0" marB="0"/>
+                  <a:tcPr marL="40565" marR="40565" marT="0" marB="0"/>
                 </a:tc>
                 <a:tc>
                   <a:txBody>
@@ -5586,12 +12641,12 @@
                         <a:buNone/>
                       </a:pPr>
                       <a:r>
-                        <a:rPr lang="ru-RU" sz="1100" kern="100">
+                        <a:rPr lang="ru-RU" sz="1200" kern="100">
                           <a:effectLst/>
                         </a:rPr>
                         <a:t>Ограниченная глубина ответов, не специализирована как LLM</a:t>
                       </a:r>
-                      <a:endParaRPr lang="ru-RU" sz="1100" kern="100">
+                      <a:endParaRPr lang="ru-RU" sz="1200" kern="100">
                         <a:effectLst/>
                         <a:latin typeface="Aptos" panose="020B0004020202020204" pitchFamily="34" charset="0"/>
                         <a:ea typeface="Aptos" panose="020B0004020202020204" pitchFamily="34" charset="0"/>
@@ -5599,7 +12654,7 @@
                       </a:endParaRPr>
                     </a:p>
                   </a:txBody>
-                  <a:tcPr marL="41375" marR="41375" marT="0" marB="0"/>
+                  <a:tcPr marL="40565" marR="40565" marT="0" marB="0"/>
                 </a:tc>
                 <a:tc>
                   <a:txBody>
@@ -5616,12 +12671,12 @@
                         <a:buNone/>
                       </a:pPr>
                       <a:r>
-                        <a:rPr lang="ru-RU" sz="1100" kern="100">
+                        <a:rPr lang="ru-RU" sz="1200" kern="100">
                           <a:effectLst/>
                         </a:rPr>
                         <a:t>Подходит для школьного уровня, быстрые ответы и помощь</a:t>
                       </a:r>
-                      <a:endParaRPr lang="ru-RU" sz="1100" kern="100">
+                      <a:endParaRPr lang="ru-RU" sz="1200" kern="100">
                         <a:effectLst/>
                         <a:latin typeface="Aptos" panose="020B0004020202020204" pitchFamily="34" charset="0"/>
                         <a:ea typeface="Aptos" panose="020B0004020202020204" pitchFamily="34" charset="0"/>
@@ -5629,7 +12684,7 @@
                       </a:endParaRPr>
                     </a:p>
                   </a:txBody>
-                  <a:tcPr marL="41375" marR="41375" marT="0" marB="0"/>
+                  <a:tcPr marL="40565" marR="40565" marT="0" marB="0"/>
                 </a:tc>
                 <a:extLst>
                   <a:ext uri="{0D108BD9-81ED-4DB2-BD59-A6C34878D82A}">
@@ -5637,7 +12692,7 @@
                   </a:ext>
                 </a:extLst>
               </a:tr>
-              <a:tr h="653755">
+              <a:tr h="735140">
                 <a:tc>
                   <a:txBody>
                     <a:bodyPr/>
@@ -5653,12 +12708,12 @@
                         <a:buNone/>
                       </a:pPr>
                       <a:r>
-                        <a:rPr lang="ru-RU" sz="1100" kern="100">
+                        <a:rPr lang="ru-RU" sz="1200" kern="100">
                           <a:effectLst/>
                         </a:rPr>
                         <a:t>Гигачат</a:t>
                       </a:r>
-                      <a:endParaRPr lang="ru-RU" sz="1100" kern="100">
+                      <a:endParaRPr lang="ru-RU" sz="1200" kern="100">
                         <a:effectLst/>
                         <a:latin typeface="Aptos" panose="020B0004020202020204" pitchFamily="34" charset="0"/>
                         <a:ea typeface="Aptos" panose="020B0004020202020204" pitchFamily="34" charset="0"/>
@@ -5666,7 +12721,7 @@
                       </a:endParaRPr>
                     </a:p>
                   </a:txBody>
-                  <a:tcPr marL="41375" marR="41375" marT="0" marB="0"/>
+                  <a:tcPr marL="40565" marR="40565" marT="0" marB="0"/>
                 </a:tc>
                 <a:tc>
                   <a:txBody>
@@ -5683,12 +12738,12 @@
                         <a:buNone/>
                       </a:pPr>
                       <a:r>
-                        <a:rPr lang="en-US" sz="1100" kern="100">
+                        <a:rPr lang="en-US" sz="1200" kern="100">
                           <a:effectLst/>
                         </a:rPr>
                         <a:t>Сбер</a:t>
                       </a:r>
-                      <a:endParaRPr lang="ru-RU" sz="1100" kern="100">
+                      <a:endParaRPr lang="ru-RU" sz="1200" kern="100">
                         <a:effectLst/>
                         <a:latin typeface="Aptos" panose="020B0004020202020204" pitchFamily="34" charset="0"/>
                         <a:ea typeface="Aptos" panose="020B0004020202020204" pitchFamily="34" charset="0"/>
@@ -5696,7 +12751,7 @@
                       </a:endParaRPr>
                     </a:p>
                   </a:txBody>
-                  <a:tcPr marL="41375" marR="41375" marT="0" marB="0"/>
+                  <a:tcPr marL="40565" marR="40565" marT="0" marB="0"/>
                 </a:tc>
                 <a:tc>
                   <a:txBody>
@@ -5713,12 +12768,12 @@
                         <a:buNone/>
                       </a:pPr>
                       <a:r>
-                        <a:rPr lang="ru-RU" sz="1100" kern="100">
+                        <a:rPr lang="ru-RU" sz="1200" kern="100">
                           <a:effectLst/>
                         </a:rPr>
                         <a:t>Адаптация под русский язык и контекст, локальные решения</a:t>
                       </a:r>
-                      <a:endParaRPr lang="ru-RU" sz="1100" kern="100">
+                      <a:endParaRPr lang="ru-RU" sz="1200" kern="100">
                         <a:effectLst/>
                         <a:latin typeface="Aptos" panose="020B0004020202020204" pitchFamily="34" charset="0"/>
                         <a:ea typeface="Aptos" panose="020B0004020202020204" pitchFamily="34" charset="0"/>
@@ -5726,7 +12781,7 @@
                       </a:endParaRPr>
                     </a:p>
                   </a:txBody>
-                  <a:tcPr marL="41375" marR="41375" marT="0" marB="0"/>
+                  <a:tcPr marL="40565" marR="40565" marT="0" marB="0"/>
                 </a:tc>
                 <a:tc>
                   <a:txBody>
@@ -5743,12 +12798,12 @@
                         <a:buNone/>
                       </a:pPr>
                       <a:r>
-                        <a:rPr lang="ru-RU" sz="1100" kern="100">
+                        <a:rPr lang="ru-RU" sz="1200" kern="100">
                           <a:effectLst/>
                         </a:rPr>
                         <a:t>Ограниченность по сравнению с западными моделями</a:t>
                       </a:r>
-                      <a:endParaRPr lang="ru-RU" sz="1100" kern="100">
+                      <a:endParaRPr lang="ru-RU" sz="1200" kern="100">
                         <a:effectLst/>
                         <a:latin typeface="Aptos" panose="020B0004020202020204" pitchFamily="34" charset="0"/>
                         <a:ea typeface="Aptos" panose="020B0004020202020204" pitchFamily="34" charset="0"/>
@@ -5756,7 +12811,7 @@
                       </a:endParaRPr>
                     </a:p>
                   </a:txBody>
-                  <a:tcPr marL="41375" marR="41375" marT="0" marB="0"/>
+                  <a:tcPr marL="40565" marR="40565" marT="0" marB="0"/>
                 </a:tc>
                 <a:tc>
                   <a:txBody>
@@ -5773,12 +12828,12 @@
                         <a:buNone/>
                       </a:pPr>
                       <a:r>
-                        <a:rPr lang="ru-RU" sz="1100" kern="100" dirty="0">
+                        <a:rPr lang="ru-RU" sz="1200" kern="100" dirty="0">
                           <a:effectLst/>
                         </a:rPr>
                         <a:t>Перспективен для внедрения в российские образовательные системы</a:t>
                       </a:r>
-                      <a:endParaRPr lang="ru-RU" sz="1100" kern="100" dirty="0">
+                      <a:endParaRPr lang="ru-RU" sz="1200" kern="100" dirty="0">
                         <a:effectLst/>
                         <a:latin typeface="Aptos" panose="020B0004020202020204" pitchFamily="34" charset="0"/>
                         <a:ea typeface="Aptos" panose="020B0004020202020204" pitchFamily="34" charset="0"/>
@@ -5786,7 +12841,7 @@
                       </a:endParaRPr>
                     </a:p>
                   </a:txBody>
-                  <a:tcPr marL="41375" marR="41375" marT="0" marB="0"/>
+                  <a:tcPr marL="40565" marR="40565" marT="0" marB="0"/>
                 </a:tc>
                 <a:extLst>
                   <a:ext uri="{0D108BD9-81ED-4DB2-BD59-A6C34878D82A}">
